--- a/ai101/slides/week-08.pptx
+++ b/ai101/slides/week-08.pptx
@@ -12,6 +12,11 @@
     <p:sldId id="260" r:id="rId11"/>
     <p:sldId id="261" r:id="rId12"/>
     <p:sldId id="262" r:id="rId13"/>
+    <p:sldId id="263" r:id="rId14"/>
+    <p:sldId id="264" r:id="rId15"/>
+    <p:sldId id="265" r:id="rId16"/>
+    <p:sldId id="266" r:id="rId17"/>
+    <p:sldId id="267" r:id="rId18"/>
   </p:sldIdLst>
   <p:sldSz cx="12191695" cy="6858000" type="screen4x3"/>
   <p:notesSz cx="6858000" cy="9144000"/>
@@ -3166,6 +3171,707 @@
 </p:sld>
 </file>
 
+<file path=ppt/slides/slide10.xml><?xml version="1.0" encoding="utf-8"?>
+<p:sld xmlns:a="http://schemas.openxmlformats.org/drawingml/2006/main" xmlns:p="http://schemas.openxmlformats.org/presentationml/2006/main" xmlns:r="http://schemas.openxmlformats.org/officeDocument/2006/relationships">
+  <p:cSld>
+    <p:bg>
+      <p:bgPr>
+        <a:solidFill>
+          <a:srgbClr val="102127"/>
+        </a:solidFill>
+        <a:effectLst/>
+      </p:bgPr>
+    </p:bg>
+    <p:spTree>
+      <p:nvGrpSpPr>
+        <p:cNvPr id="1" name=""/>
+        <p:cNvGrpSpPr/>
+        <p:nvPr/>
+      </p:nvGrpSpPr>
+      <p:grpSpPr/>
+      <p:sp>
+        <p:nvSpPr>
+          <p:cNvPr id="2" name="TextBox 1"/>
+          <p:cNvSpPr txBox="1"/>
+          <p:nvPr/>
+        </p:nvSpPr>
+        <p:spPr>
+          <a:xfrm>
+            <a:off x="502920" y="274320"/>
+            <a:ext cx="11155680" cy="731520"/>
+          </a:xfrm>
+          <a:prstGeom prst="rect">
+            <a:avLst/>
+          </a:prstGeom>
+          <a:noFill/>
+        </p:spPr>
+        <p:txBody>
+          <a:bodyPr wrap="none">
+            <a:spAutoFit/>
+          </a:bodyPr>
+          <a:lstStyle/>
+          <a:p>
+            <a:r>
+              <a:rPr sz="2600" b="1">
+                <a:solidFill>
+                  <a:srgbClr val="01AEFD"/>
+                </a:solidFill>
+              </a:rPr>
+              <a:t>Type this into script.js  (1 of 2)</a:t>
+            </a:r>
+          </a:p>
+        </p:txBody>
+      </p:sp>
+      <p:sp>
+        <p:nvSpPr>
+          <p:cNvPr id="3" name="TextBox 2"/>
+          <p:cNvSpPr txBox="1"/>
+          <p:nvPr/>
+        </p:nvSpPr>
+        <p:spPr>
+          <a:xfrm>
+            <a:off x="502920" y="1051560"/>
+            <a:ext cx="11155680" cy="5394960"/>
+          </a:xfrm>
+          <a:prstGeom prst="rect">
+            <a:avLst/>
+          </a:prstGeom>
+          <a:noFill/>
+        </p:spPr>
+        <p:txBody>
+          <a:bodyPr wrap="none">
+            <a:spAutoFit/>
+          </a:bodyPr>
+          <a:lstStyle/>
+          <a:p>
+            <a:pPr>
+              <a:spcAft>
+                <a:spcPts val="0"/>
+              </a:spcAft>
+            </a:pPr>
+            <a:r>
+              <a:rPr sz="1400">
+                <a:solidFill>
+                  <a:srgbClr val="6D8C97"/>
+                </a:solidFill>
+                <a:latin typeface="Consolas"/>
+              </a:rPr>
+              <a:t>  48  </a:t>
+            </a:r>
+            <a:r>
+              <a:rPr sz="1400">
+                <a:solidFill>
+                  <a:srgbClr val="DCECEF"/>
+                </a:solidFill>
+                <a:latin typeface="Consolas"/>
+              </a:rPr>
+              <a:t> </a:t>
+            </a:r>
+          </a:p>
+          <a:p>
+            <a:pPr>
+              <a:spcAft>
+                <a:spcPts val="0"/>
+              </a:spcAft>
+            </a:pPr>
+            <a:r>
+              <a:rPr sz="1400">
+                <a:solidFill>
+                  <a:srgbClr val="6D8C97"/>
+                </a:solidFill>
+                <a:latin typeface="Consolas"/>
+              </a:rPr>
+              <a:t>  49  </a:t>
+            </a:r>
+            <a:r>
+              <a:rPr sz="1400">
+                <a:solidFill>
+                  <a:srgbClr val="7FE0A0"/>
+                </a:solidFill>
+                <a:latin typeface="Consolas"/>
+              </a:rPr>
+              <a:t>// Week 8: the server reads at most 4000 characters of conversation at once.</a:t>
+            </a:r>
+          </a:p>
+          <a:p>
+            <a:pPr>
+              <a:spcAft>
+                <a:spcPts val="0"/>
+              </a:spcAft>
+            </a:pPr>
+            <a:r>
+              <a:rPr sz="1400">
+                <a:solidFill>
+                  <a:srgbClr val="6D8C97"/>
+                </a:solidFill>
+                <a:latin typeface="Consolas"/>
+              </a:rPr>
+              <a:t>  50  </a:t>
+            </a:r>
+            <a:r>
+              <a:rPr sz="1400">
+                <a:solidFill>
+                  <a:srgbClr val="7FE0A0"/>
+                </a:solidFill>
+                <a:latin typeface="Consolas"/>
+              </a:rPr>
+              <a:t>// Past that it refuses the whole request, so old messages have to go.</a:t>
+            </a:r>
+          </a:p>
+          <a:p>
+            <a:pPr>
+              <a:spcAft>
+                <a:spcPts val="0"/>
+              </a:spcAft>
+            </a:pPr>
+            <a:r>
+              <a:rPr sz="1400">
+                <a:solidFill>
+                  <a:srgbClr val="6D8C97"/>
+                </a:solidFill>
+                <a:latin typeface="Consolas"/>
+              </a:rPr>
+              <a:t>  51  </a:t>
+            </a:r>
+            <a:r>
+              <a:rPr sz="1400">
+                <a:solidFill>
+                  <a:srgbClr val="7FE0A0"/>
+                </a:solidFill>
+                <a:latin typeface="Consolas"/>
+              </a:rPr>
+              <a:t>const MAX_CHARS = 3500;   // leave room for the personality and your next line</a:t>
+            </a:r>
+          </a:p>
+          <a:p>
+            <a:pPr>
+              <a:spcAft>
+                <a:spcPts val="0"/>
+              </a:spcAft>
+            </a:pPr>
+            <a:r>
+              <a:rPr sz="1400">
+                <a:solidFill>
+                  <a:srgbClr val="6D8C97"/>
+                </a:solidFill>
+                <a:latin typeface="Consolas"/>
+              </a:rPr>
+              <a:t>  52  </a:t>
+            </a:r>
+            <a:r>
+              <a:rPr sz="1400">
+                <a:solidFill>
+                  <a:srgbClr val="7FE0A0"/>
+                </a:solidFill>
+                <a:latin typeface="Consolas"/>
+              </a:rPr>
+              <a:t> </a:t>
+            </a:r>
+          </a:p>
+          <a:p>
+            <a:pPr>
+              <a:spcAft>
+                <a:spcPts val="0"/>
+              </a:spcAft>
+            </a:pPr>
+            <a:r>
+              <a:rPr sz="1400">
+                <a:solidFill>
+                  <a:srgbClr val="6D8C97"/>
+                </a:solidFill>
+                <a:latin typeface="Consolas"/>
+              </a:rPr>
+              <a:t>  53  </a:t>
+            </a:r>
+            <a:r>
+              <a:rPr sz="1400">
+                <a:solidFill>
+                  <a:srgbClr val="7FE0A0"/>
+                </a:solidFill>
+                <a:latin typeface="Consolas"/>
+              </a:rPr>
+              <a:t>function trimHistory() {</a:t>
+            </a:r>
+          </a:p>
+          <a:p>
+            <a:pPr>
+              <a:spcAft>
+                <a:spcPts val="0"/>
+              </a:spcAft>
+            </a:pPr>
+            <a:r>
+              <a:rPr sz="1400">
+                <a:solidFill>
+                  <a:srgbClr val="6D8C97"/>
+                </a:solidFill>
+                <a:latin typeface="Consolas"/>
+              </a:rPr>
+              <a:t>  54  </a:t>
+            </a:r>
+            <a:r>
+              <a:rPr sz="1400">
+                <a:solidFill>
+                  <a:srgbClr val="7FE0A0"/>
+                </a:solidFill>
+                <a:latin typeface="Consolas"/>
+              </a:rPr>
+              <a:t>  let size = personaBox.value.length;</a:t>
+            </a:r>
+          </a:p>
+          <a:p>
+            <a:pPr>
+              <a:spcAft>
+                <a:spcPts val="0"/>
+              </a:spcAft>
+            </a:pPr>
+            <a:r>
+              <a:rPr sz="1400">
+                <a:solidFill>
+                  <a:srgbClr val="6D8C97"/>
+                </a:solidFill>
+                <a:latin typeface="Consolas"/>
+              </a:rPr>
+              <a:t>  55  </a:t>
+            </a:r>
+            <a:r>
+              <a:rPr sz="1400">
+                <a:solidFill>
+                  <a:srgbClr val="7FE0A0"/>
+                </a:solidFill>
+                <a:latin typeface="Consolas"/>
+              </a:rPr>
+              <a:t>  for (const message of history) {</a:t>
+            </a:r>
+          </a:p>
+          <a:p>
+            <a:pPr>
+              <a:spcAft>
+                <a:spcPts val="0"/>
+              </a:spcAft>
+            </a:pPr>
+            <a:r>
+              <a:rPr sz="1400">
+                <a:solidFill>
+                  <a:srgbClr val="6D8C97"/>
+                </a:solidFill>
+                <a:latin typeface="Consolas"/>
+              </a:rPr>
+              <a:t>  56  </a:t>
+            </a:r>
+            <a:r>
+              <a:rPr sz="1400">
+                <a:solidFill>
+                  <a:srgbClr val="7FE0A0"/>
+                </a:solidFill>
+                <a:latin typeface="Consolas"/>
+              </a:rPr>
+              <a:t>    size += message.content.length;</a:t>
+            </a:r>
+          </a:p>
+          <a:p>
+            <a:pPr>
+              <a:spcAft>
+                <a:spcPts val="0"/>
+              </a:spcAft>
+            </a:pPr>
+            <a:r>
+              <a:rPr sz="1400">
+                <a:solidFill>
+                  <a:srgbClr val="6D8C97"/>
+                </a:solidFill>
+                <a:latin typeface="Consolas"/>
+              </a:rPr>
+              <a:t>  57  </a:t>
+            </a:r>
+            <a:r>
+              <a:rPr sz="1400">
+                <a:solidFill>
+                  <a:srgbClr val="7FE0A0"/>
+                </a:solidFill>
+                <a:latin typeface="Consolas"/>
+              </a:rPr>
+              <a:t>  }</a:t>
+            </a:r>
+          </a:p>
+          <a:p>
+            <a:pPr>
+              <a:spcAft>
+                <a:spcPts val="0"/>
+              </a:spcAft>
+            </a:pPr>
+            <a:r>
+              <a:rPr sz="1400">
+                <a:solidFill>
+                  <a:srgbClr val="6D8C97"/>
+                </a:solidFill>
+                <a:latin typeface="Consolas"/>
+              </a:rPr>
+              <a:t>  58  </a:t>
+            </a:r>
+            <a:r>
+              <a:rPr sz="1400">
+                <a:solidFill>
+                  <a:srgbClr val="7FE0A0"/>
+                </a:solidFill>
+                <a:latin typeface="Consolas"/>
+              </a:rPr>
+              <a:t>  // Drop from the FRONT. The oldest messages matter least - usually.</a:t>
+            </a:r>
+          </a:p>
+          <a:p>
+            <a:pPr>
+              <a:spcAft>
+                <a:spcPts val="0"/>
+              </a:spcAft>
+            </a:pPr>
+            <a:r>
+              <a:rPr sz="1400">
+                <a:solidFill>
+                  <a:srgbClr val="6D8C97"/>
+                </a:solidFill>
+                <a:latin typeface="Consolas"/>
+              </a:rPr>
+              <a:t>  59  </a:t>
+            </a:r>
+            <a:r>
+              <a:rPr sz="1400">
+                <a:solidFill>
+                  <a:srgbClr val="7FE0A0"/>
+                </a:solidFill>
+                <a:latin typeface="Consolas"/>
+              </a:rPr>
+              <a:t>  while (size &gt; MAX_CHARS &amp;&amp; history.length &gt; 2) {</a:t>
+            </a:r>
+          </a:p>
+          <a:p>
+            <a:pPr>
+              <a:spcAft>
+                <a:spcPts val="0"/>
+              </a:spcAft>
+            </a:pPr>
+            <a:r>
+              <a:rPr sz="1400">
+                <a:solidFill>
+                  <a:srgbClr val="6D8C97"/>
+                </a:solidFill>
+                <a:latin typeface="Consolas"/>
+              </a:rPr>
+              <a:t>  60  </a:t>
+            </a:r>
+            <a:r>
+              <a:rPr sz="1400">
+                <a:solidFill>
+                  <a:srgbClr val="7FE0A0"/>
+                </a:solidFill>
+                <a:latin typeface="Consolas"/>
+              </a:rPr>
+              <a:t>    const dropped = history.shift();</a:t>
+            </a:r>
+          </a:p>
+          <a:p>
+            <a:pPr>
+              <a:spcAft>
+                <a:spcPts val="0"/>
+              </a:spcAft>
+            </a:pPr>
+            <a:r>
+              <a:rPr sz="1400">
+                <a:solidFill>
+                  <a:srgbClr val="6D8C97"/>
+                </a:solidFill>
+                <a:latin typeface="Consolas"/>
+              </a:rPr>
+              <a:t>  61  </a:t>
+            </a:r>
+            <a:r>
+              <a:rPr sz="1400">
+                <a:solidFill>
+                  <a:srgbClr val="7FE0A0"/>
+                </a:solidFill>
+                <a:latin typeface="Consolas"/>
+              </a:rPr>
+              <a:t>    size -= dropped.content.length;</a:t>
+            </a:r>
+          </a:p>
+          <a:p>
+            <a:pPr>
+              <a:spcAft>
+                <a:spcPts val="0"/>
+              </a:spcAft>
+            </a:pPr>
+            <a:r>
+              <a:rPr sz="1400">
+                <a:solidFill>
+                  <a:srgbClr val="6D8C97"/>
+                </a:solidFill>
+                <a:latin typeface="Consolas"/>
+              </a:rPr>
+              <a:t>  62  </a:t>
+            </a:r>
+            <a:r>
+              <a:rPr sz="1400">
+                <a:solidFill>
+                  <a:srgbClr val="7FE0A0"/>
+                </a:solidFill>
+                <a:latin typeface="Consolas"/>
+              </a:rPr>
+              <a:t>    console.log('Forgot an old message to stay under the limit.');</a:t>
+            </a:r>
+          </a:p>
+        </p:txBody>
+      </p:sp>
+    </p:spTree>
+  </p:cSld>
+  <p:clrMapOvr>
+    <a:masterClrMapping/>
+  </p:clrMapOvr>
+</p:sld>
+</file>
+
+<file path=ppt/slides/slide11.xml><?xml version="1.0" encoding="utf-8"?>
+<p:sld xmlns:a="http://schemas.openxmlformats.org/drawingml/2006/main" xmlns:p="http://schemas.openxmlformats.org/presentationml/2006/main" xmlns:r="http://schemas.openxmlformats.org/officeDocument/2006/relationships">
+  <p:cSld>
+    <p:bg>
+      <p:bgPr>
+        <a:solidFill>
+          <a:srgbClr val="102127"/>
+        </a:solidFill>
+        <a:effectLst/>
+      </p:bgPr>
+    </p:bg>
+    <p:spTree>
+      <p:nvGrpSpPr>
+        <p:cNvPr id="1" name=""/>
+        <p:cNvGrpSpPr/>
+        <p:nvPr/>
+      </p:nvGrpSpPr>
+      <p:grpSpPr/>
+      <p:sp>
+        <p:nvSpPr>
+          <p:cNvPr id="2" name="TextBox 1"/>
+          <p:cNvSpPr txBox="1"/>
+          <p:nvPr/>
+        </p:nvSpPr>
+        <p:spPr>
+          <a:xfrm>
+            <a:off x="502920" y="274320"/>
+            <a:ext cx="11155680" cy="731520"/>
+          </a:xfrm>
+          <a:prstGeom prst="rect">
+            <a:avLst/>
+          </a:prstGeom>
+          <a:noFill/>
+        </p:spPr>
+        <p:txBody>
+          <a:bodyPr wrap="none">
+            <a:spAutoFit/>
+          </a:bodyPr>
+          <a:lstStyle/>
+          <a:p>
+            <a:r>
+              <a:rPr sz="2600" b="1">
+                <a:solidFill>
+                  <a:srgbClr val="01AEFD"/>
+                </a:solidFill>
+              </a:rPr>
+              <a:t>Type this into script.js  (2 of 2)</a:t>
+            </a:r>
+          </a:p>
+        </p:txBody>
+      </p:sp>
+      <p:sp>
+        <p:nvSpPr>
+          <p:cNvPr id="3" name="TextBox 2"/>
+          <p:cNvSpPr txBox="1"/>
+          <p:nvPr/>
+        </p:nvSpPr>
+        <p:spPr>
+          <a:xfrm>
+            <a:off x="502920" y="1051560"/>
+            <a:ext cx="11155680" cy="5394960"/>
+          </a:xfrm>
+          <a:prstGeom prst="rect">
+            <a:avLst/>
+          </a:prstGeom>
+          <a:noFill/>
+        </p:spPr>
+        <p:txBody>
+          <a:bodyPr wrap="none">
+            <a:spAutoFit/>
+          </a:bodyPr>
+          <a:lstStyle/>
+          <a:p>
+            <a:pPr>
+              <a:spcAft>
+                <a:spcPts val="0"/>
+              </a:spcAft>
+            </a:pPr>
+            <a:r>
+              <a:rPr sz="1700">
+                <a:solidFill>
+                  <a:srgbClr val="6D8C97"/>
+                </a:solidFill>
+                <a:latin typeface="Consolas"/>
+              </a:rPr>
+              <a:t>  63  </a:t>
+            </a:r>
+            <a:r>
+              <a:rPr sz="1700">
+                <a:solidFill>
+                  <a:srgbClr val="7FE0A0"/>
+                </a:solidFill>
+                <a:latin typeface="Consolas"/>
+              </a:rPr>
+              <a:t>  }</a:t>
+            </a:r>
+          </a:p>
+          <a:p>
+            <a:pPr>
+              <a:spcAft>
+                <a:spcPts val="0"/>
+              </a:spcAft>
+            </a:pPr>
+            <a:r>
+              <a:rPr sz="1700">
+                <a:solidFill>
+                  <a:srgbClr val="6D8C97"/>
+                </a:solidFill>
+                <a:latin typeface="Consolas"/>
+              </a:rPr>
+              <a:t>  64  </a:t>
+            </a:r>
+            <a:r>
+              <a:rPr sz="1700">
+                <a:solidFill>
+                  <a:srgbClr val="7FE0A0"/>
+                </a:solidFill>
+                <a:latin typeface="Consolas"/>
+              </a:rPr>
+              <a:t>}</a:t>
+            </a:r>
+          </a:p>
+        </p:txBody>
+      </p:sp>
+    </p:spTree>
+  </p:cSld>
+  <p:clrMapOvr>
+    <a:masterClrMapping/>
+  </p:clrMapOvr>
+</p:sld>
+</file>
+
+<file path=ppt/slides/slide12.xml><?xml version="1.0" encoding="utf-8"?>
+<p:sld xmlns:a="http://schemas.openxmlformats.org/drawingml/2006/main" xmlns:p="http://schemas.openxmlformats.org/presentationml/2006/main" xmlns:r="http://schemas.openxmlformats.org/officeDocument/2006/relationships">
+  <p:cSld>
+    <p:spTree>
+      <p:nvGrpSpPr>
+        <p:cNvPr id="1" name=""/>
+        <p:cNvGrpSpPr/>
+        <p:nvPr/>
+      </p:nvGrpSpPr>
+      <p:grpSpPr/>
+      <p:sp>
+        <p:nvSpPr>
+          <p:cNvPr id="2" name="Title 1"/>
+          <p:cNvSpPr>
+            <a:spLocks noGrp="1"/>
+          </p:cNvSpPr>
+          <p:nvPr>
+            <p:ph type="title"/>
+          </p:nvPr>
+        </p:nvSpPr>
+        <p:spPr/>
+        <p:txBody>
+          <a:bodyPr/>
+          <a:lstStyle/>
+          <a:p>
+            <a:r>
+              <a:rPr sz="3800" b="1">
+                <a:solidFill>
+                  <a:srgbClr val="1F2A37"/>
+                </a:solidFill>
+              </a:rPr>
+              <a:t>Watch it forget</a:t>
+            </a:r>
+          </a:p>
+        </p:txBody>
+      </p:sp>
+      <p:sp>
+        <p:nvSpPr>
+          <p:cNvPr id="3" name="TextBox 2"/>
+          <p:cNvSpPr txBox="1"/>
+          <p:nvPr/>
+        </p:nvSpPr>
+        <p:spPr>
+          <a:xfrm>
+            <a:off x="822960" y="1828800"/>
+            <a:ext cx="10515600" cy="4206240"/>
+          </a:xfrm>
+          <a:prstGeom prst="rect">
+            <a:avLst/>
+          </a:prstGeom>
+          <a:noFill/>
+        </p:spPr>
+        <p:txBody>
+          <a:bodyPr wrap="square">
+            <a:spAutoFit/>
+          </a:bodyPr>
+          <a:lstStyle/>
+          <a:p>
+            <a:pPr>
+              <a:spcAft>
+                <a:spcPts val="1400"/>
+              </a:spcAft>
+            </a:pPr>
+            <a:r>
+              <a:rPr sz="2400">
+                <a:solidFill>
+                  <a:srgbClr val="1F2A37"/>
+                </a:solidFill>
+              </a:rPr>
+              <a:t>• Chat until the Console says it forgot</a:t>
+            </a:r>
+          </a:p>
+          <a:p>
+            <a:pPr>
+              <a:spcAft>
+                <a:spcPts val="1400"/>
+              </a:spcAft>
+            </a:pPr>
+            <a:r>
+              <a:rPr sz="2400">
+                <a:solidFill>
+                  <a:srgbClr val="1F2A37"/>
+                </a:solidFill>
+              </a:rPr>
+              <a:t>• Ask about the beginning</a:t>
+            </a:r>
+          </a:p>
+          <a:p>
+            <a:pPr>
+              <a:spcAft>
+                <a:spcPts val="1400"/>
+              </a:spcAft>
+            </a:pPr>
+            <a:r>
+              <a:rPr sz="2400">
+                <a:solidFill>
+                  <a:srgbClr val="1F2A37"/>
+                </a:solidFill>
+              </a:rPr>
+              <a:t>• It genuinely does not know</a:t>
+            </a:r>
+          </a:p>
+        </p:txBody>
+      </p:sp>
+    </p:spTree>
+  </p:cSld>
+  <p:clrMapOvr>
+    <a:masterClrMapping/>
+  </p:clrMapOvr>
+</p:sld>
+</file>
+
 <file path=ppt/slides/slide2.xml><?xml version="1.0" encoding="utf-8"?>
 <p:sld xmlns:a="http://schemas.openxmlformats.org/drawingml/2006/main" xmlns:p="http://schemas.openxmlformats.org/presentationml/2006/main" xmlns:r="http://schemas.openxmlformats.org/officeDocument/2006/relationships">
   <p:cSld>
@@ -3505,6 +4211,14 @@
 <file path=ppt/slides/slide5.xml><?xml version="1.0" encoding="utf-8"?>
 <p:sld xmlns:a="http://schemas.openxmlformats.org/drawingml/2006/main" xmlns:p="http://schemas.openxmlformats.org/presentationml/2006/main" xmlns:r="http://schemas.openxmlformats.org/officeDocument/2006/relationships">
   <p:cSld>
+    <p:bg>
+      <p:bgPr>
+        <a:solidFill>
+          <a:srgbClr val="102127"/>
+        </a:solidFill>
+        <a:effectLst/>
+      </p:bgPr>
+    </p:bg>
     <p:spTree>
       <p:nvGrpSpPr>
         <p:cNvPr id="1" name=""/>
@@ -3514,40 +4228,14 @@
       <p:grpSpPr/>
       <p:sp>
         <p:nvSpPr>
-          <p:cNvPr id="2" name="Title 1"/>
-          <p:cNvSpPr>
-            <a:spLocks noGrp="1"/>
-          </p:cNvSpPr>
-          <p:nvPr>
-            <p:ph type="title"/>
-          </p:nvPr>
-        </p:nvSpPr>
-        <p:spPr/>
-        <p:txBody>
-          <a:bodyPr/>
-          <a:lstStyle/>
-          <a:p>
-            <a:r>
-              <a:rPr sz="3800" b="1">
-                <a:solidFill>
-                  <a:srgbClr val="1F2A37"/>
-                </a:solidFill>
-              </a:rPr>
-              <a:t>What do you throw away?</a:t>
-            </a:r>
-          </a:p>
-        </p:txBody>
-      </p:sp>
-      <p:sp>
-        <p:nvSpPr>
-          <p:cNvPr id="3" name="TextBox 2"/>
+          <p:cNvPr id="2" name="TextBox 1"/>
           <p:cNvSpPr txBox="1"/>
           <p:nvPr/>
         </p:nvSpPr>
         <p:spPr>
           <a:xfrm>
-            <a:off x="822960" y="1828800"/>
-            <a:ext cx="10515600" cy="4206240"/>
+            <a:off x="502920" y="274320"/>
+            <a:ext cx="11155680" cy="731520"/>
           </a:xfrm>
           <a:prstGeom prst="rect">
             <a:avLst/>
@@ -3555,68 +4243,416 @@
           <a:noFill/>
         </p:spPr>
         <p:txBody>
-          <a:bodyPr wrap="square">
+          <a:bodyPr wrap="none">
             <a:spAutoFit/>
           </a:bodyPr>
           <a:lstStyle/>
           <a:p>
-            <a:pPr>
-              <a:spcAft>
-                <a:spcPts val="1400"/>
-              </a:spcAft>
-            </a:pPr>
-            <a:r>
-              <a:rPr sz="2800">
+            <a:r>
+              <a:rPr sz="2600" b="1">
                 <a:solidFill>
                   <a:srgbClr val="01AEFD"/>
                 </a:solidFill>
               </a:rPr>
-              <a:t>There is no right answer</a:t>
-            </a:r>
-          </a:p>
-          <a:p>
-            <a:pPr>
-              <a:spcAft>
-                <a:spcPts val="1400"/>
-              </a:spcAft>
-            </a:pPr>
-            <a:r>
-              <a:rPr sz="2400">
-                <a:solidFill>
-                  <a:srgbClr val="1F2A37"/>
-                </a:solidFill>
-              </a:rPr>
-              <a:t>• Oldest? Shortest? Least interesting?</a:t>
-            </a:r>
-          </a:p>
-          <a:p>
-            <a:pPr>
-              <a:spcAft>
-                <a:spcPts val="1400"/>
-              </a:spcAft>
-            </a:pPr>
-            <a:r>
-              <a:rPr sz="2400">
-                <a:solidFill>
-                  <a:srgbClr val="1F2A37"/>
-                </a:solidFill>
-              </a:rPr>
-              <a:t>• That is what a trade-off means</a:t>
-            </a:r>
-          </a:p>
-          <a:p>
-            <a:pPr>
-              <a:spcAft>
-                <a:spcPts val="1400"/>
-              </a:spcAft>
-            </a:pPr>
-            <a:r>
-              <a:rPr sz="2400">
-                <a:solidFill>
-                  <a:srgbClr val="1F2A37"/>
-                </a:solidFill>
-              </a:rPr>
-              <a:t>• Most apps drop the oldest</a:t>
+              <a:t>Type this into script.js  (1 of 3)</a:t>
+            </a:r>
+          </a:p>
+        </p:txBody>
+      </p:sp>
+      <p:sp>
+        <p:nvSpPr>
+          <p:cNvPr id="3" name="TextBox 2"/>
+          <p:cNvSpPr txBox="1"/>
+          <p:nvPr/>
+        </p:nvSpPr>
+        <p:spPr>
+          <a:xfrm>
+            <a:off x="502920" y="1051560"/>
+            <a:ext cx="11155680" cy="5394960"/>
+          </a:xfrm>
+          <a:prstGeom prst="rect">
+            <a:avLst/>
+          </a:prstGeom>
+          <a:noFill/>
+        </p:spPr>
+        <p:txBody>
+          <a:bodyPr wrap="none">
+            <a:spAutoFit/>
+          </a:bodyPr>
+          <a:lstStyle/>
+          <a:p>
+            <a:pPr>
+              <a:spcAft>
+                <a:spcPts val="0"/>
+              </a:spcAft>
+            </a:pPr>
+            <a:r>
+              <a:rPr sz="1400">
+                <a:solidFill>
+                  <a:srgbClr val="6D8C97"/>
+                </a:solidFill>
+                <a:latin typeface="Consolas"/>
+              </a:rPr>
+              <a:t>  65  </a:t>
+            </a:r>
+            <a:r>
+              <a:rPr sz="1400">
+                <a:solidFill>
+                  <a:srgbClr val="7FE0A0"/>
+                </a:solidFill>
+                <a:latin typeface="Consolas"/>
+              </a:rPr>
+              <a:t> </a:t>
+            </a:r>
+          </a:p>
+          <a:p>
+            <a:pPr>
+              <a:spcAft>
+                <a:spcPts val="0"/>
+              </a:spcAft>
+            </a:pPr>
+            <a:r>
+              <a:rPr sz="1400">
+                <a:solidFill>
+                  <a:srgbClr val="6D8C97"/>
+                </a:solidFill>
+                <a:latin typeface="Consolas"/>
+              </a:rPr>
+              <a:t>  66  </a:t>
+            </a:r>
+            <a:r>
+              <a:rPr sz="1400">
+                <a:solidFill>
+                  <a:srgbClr val="DCECEF"/>
+                </a:solidFill>
+                <a:latin typeface="Consolas"/>
+              </a:rPr>
+              <a:t>// Week 4: ask the AI a real question.</a:t>
+            </a:r>
+          </a:p>
+          <a:p>
+            <a:pPr>
+              <a:spcAft>
+                <a:spcPts val="0"/>
+              </a:spcAft>
+            </a:pPr>
+            <a:r>
+              <a:rPr sz="1400">
+                <a:solidFill>
+                  <a:srgbClr val="6D8C97"/>
+                </a:solidFill>
+                <a:latin typeface="Consolas"/>
+              </a:rPr>
+              <a:t>  67  </a:t>
+            </a:r>
+            <a:r>
+              <a:rPr sz="1400">
+                <a:solidFill>
+                  <a:srgbClr val="DCECEF"/>
+                </a:solidFill>
+                <a:latin typeface="Consolas"/>
+              </a:rPr>
+              <a:t>// A chat request is a LIST of messages. Each one says who said it.</a:t>
+            </a:r>
+          </a:p>
+          <a:p>
+            <a:pPr>
+              <a:spcAft>
+                <a:spcPts val="0"/>
+              </a:spcAft>
+            </a:pPr>
+            <a:r>
+              <a:rPr sz="1400">
+                <a:solidFill>
+                  <a:srgbClr val="6D8C97"/>
+                </a:solidFill>
+                <a:latin typeface="Consolas"/>
+              </a:rPr>
+              <a:t>  68  </a:t>
+            </a:r>
+            <a:r>
+              <a:rPr sz="1400">
+                <a:solidFill>
+                  <a:srgbClr val="DCECEF"/>
+                </a:solidFill>
+                <a:latin typeface="Consolas"/>
+              </a:rPr>
+              <a:t>async function askAI() {</a:t>
+            </a:r>
+          </a:p>
+          <a:p>
+            <a:pPr>
+              <a:spcAft>
+                <a:spcPts val="0"/>
+              </a:spcAft>
+            </a:pPr>
+            <a:r>
+              <a:rPr sz="1400">
+                <a:solidFill>
+                  <a:srgbClr val="6D8C97"/>
+                </a:solidFill>
+                <a:latin typeface="Consolas"/>
+              </a:rPr>
+              <a:t>  69  </a:t>
+            </a:r>
+            <a:r>
+              <a:rPr sz="1400">
+                <a:solidFill>
+                  <a:srgbClr val="7FE0A0"/>
+                </a:solidFill>
+                <a:latin typeface="Consolas"/>
+              </a:rPr>
+              <a:t>  trimHistory();   // week 8: never send more than the server will read</a:t>
+            </a:r>
+          </a:p>
+          <a:p>
+            <a:pPr>
+              <a:spcAft>
+                <a:spcPts val="0"/>
+              </a:spcAft>
+            </a:pPr>
+            <a:r>
+              <a:rPr sz="1400">
+                <a:solidFill>
+                  <a:srgbClr val="6D8C97"/>
+                </a:solidFill>
+                <a:latin typeface="Consolas"/>
+              </a:rPr>
+              <a:t>  70  </a:t>
+            </a:r>
+            <a:r>
+              <a:rPr sz="1400">
+                <a:solidFill>
+                  <a:srgbClr val="DCECEF"/>
+                </a:solidFill>
+                <a:latin typeface="Consolas"/>
+              </a:rPr>
+              <a:t>  const res = await fetch(AI_BASE + '/v1/chat/completions', {</a:t>
+            </a:r>
+          </a:p>
+          <a:p>
+            <a:pPr>
+              <a:spcAft>
+                <a:spcPts val="0"/>
+              </a:spcAft>
+            </a:pPr>
+            <a:r>
+              <a:rPr sz="1400">
+                <a:solidFill>
+                  <a:srgbClr val="6D8C97"/>
+                </a:solidFill>
+                <a:latin typeface="Consolas"/>
+              </a:rPr>
+              <a:t>  71  </a:t>
+            </a:r>
+            <a:r>
+              <a:rPr sz="1400">
+                <a:solidFill>
+                  <a:srgbClr val="DCECEF"/>
+                </a:solidFill>
+                <a:latin typeface="Consolas"/>
+              </a:rPr>
+              <a:t>    method: 'POST',                       // POST = I am sending you something</a:t>
+            </a:r>
+          </a:p>
+          <a:p>
+            <a:pPr>
+              <a:spcAft>
+                <a:spcPts val="0"/>
+              </a:spcAft>
+            </a:pPr>
+            <a:r>
+              <a:rPr sz="1400">
+                <a:solidFill>
+                  <a:srgbClr val="6D8C97"/>
+                </a:solidFill>
+                <a:latin typeface="Consolas"/>
+              </a:rPr>
+              <a:t>  72  </a:t>
+            </a:r>
+            <a:r>
+              <a:rPr sz="1400">
+                <a:solidFill>
+                  <a:srgbClr val="DCECEF"/>
+                </a:solidFill>
+                <a:latin typeface="Consolas"/>
+              </a:rPr>
+              <a:t>    headers: {</a:t>
+            </a:r>
+          </a:p>
+          <a:p>
+            <a:pPr>
+              <a:spcAft>
+                <a:spcPts val="0"/>
+              </a:spcAft>
+            </a:pPr>
+            <a:r>
+              <a:rPr sz="1400">
+                <a:solidFill>
+                  <a:srgbClr val="6D8C97"/>
+                </a:solidFill>
+                <a:latin typeface="Consolas"/>
+              </a:rPr>
+              <a:t>  73  </a:t>
+            </a:r>
+            <a:r>
+              <a:rPr sz="1400">
+                <a:solidFill>
+                  <a:srgbClr val="DCECEF"/>
+                </a:solidFill>
+                <a:latin typeface="Consolas"/>
+              </a:rPr>
+              <a:t>      'Content-Type': 'application/json', // what I am sending is JSON</a:t>
+            </a:r>
+          </a:p>
+          <a:p>
+            <a:pPr>
+              <a:spcAft>
+                <a:spcPts val="0"/>
+              </a:spcAft>
+            </a:pPr>
+            <a:r>
+              <a:rPr sz="1400">
+                <a:solidFill>
+                  <a:srgbClr val="6D8C97"/>
+                </a:solidFill>
+                <a:latin typeface="Consolas"/>
+              </a:rPr>
+              <a:t>  74  </a:t>
+            </a:r>
+            <a:r>
+              <a:rPr sz="1400">
+                <a:solidFill>
+                  <a:srgbClr val="DCECEF"/>
+                </a:solidFill>
+                <a:latin typeface="Consolas"/>
+              </a:rPr>
+              <a:t>      'Authorization': 'Bearer ' + API_KEY</a:t>
+            </a:r>
+          </a:p>
+          <a:p>
+            <a:pPr>
+              <a:spcAft>
+                <a:spcPts val="0"/>
+              </a:spcAft>
+            </a:pPr>
+            <a:r>
+              <a:rPr sz="1400">
+                <a:solidFill>
+                  <a:srgbClr val="6D8C97"/>
+                </a:solidFill>
+                <a:latin typeface="Consolas"/>
+              </a:rPr>
+              <a:t>  75  </a:t>
+            </a:r>
+            <a:r>
+              <a:rPr sz="1400">
+                <a:solidFill>
+                  <a:srgbClr val="DCECEF"/>
+                </a:solidFill>
+                <a:latin typeface="Consolas"/>
+              </a:rPr>
+              <a:t>    },</a:t>
+            </a:r>
+          </a:p>
+          <a:p>
+            <a:pPr>
+              <a:spcAft>
+                <a:spcPts val="0"/>
+              </a:spcAft>
+            </a:pPr>
+            <a:r>
+              <a:rPr sz="1400">
+                <a:solidFill>
+                  <a:srgbClr val="6D8C97"/>
+                </a:solidFill>
+                <a:latin typeface="Consolas"/>
+              </a:rPr>
+              <a:t>  76  </a:t>
+            </a:r>
+            <a:r>
+              <a:rPr sz="1400">
+                <a:solidFill>
+                  <a:srgbClr val="DCECEF"/>
+                </a:solidFill>
+                <a:latin typeface="Consolas"/>
+              </a:rPr>
+              <a:t>    body: JSON.stringify({</a:t>
+            </a:r>
+          </a:p>
+          <a:p>
+            <a:pPr>
+              <a:spcAft>
+                <a:spcPts val="0"/>
+              </a:spcAft>
+            </a:pPr>
+            <a:r>
+              <a:rPr sz="1400">
+                <a:solidFill>
+                  <a:srgbClr val="6D8C97"/>
+                </a:solidFill>
+                <a:latin typeface="Consolas"/>
+              </a:rPr>
+              <a:t>  77  </a:t>
+            </a:r>
+            <a:r>
+              <a:rPr sz="1400">
+                <a:solidFill>
+                  <a:srgbClr val="DCECEF"/>
+                </a:solidFill>
+                <a:latin typeface="Consolas"/>
+              </a:rPr>
+              <a:t>      model: 'fast',</a:t>
+            </a:r>
+          </a:p>
+          <a:p>
+            <a:pPr>
+              <a:spcAft>
+                <a:spcPts val="0"/>
+              </a:spcAft>
+            </a:pPr>
+            <a:r>
+              <a:rPr sz="1400">
+                <a:solidFill>
+                  <a:srgbClr val="6D8C97"/>
+                </a:solidFill>
+                <a:latin typeface="Consolas"/>
+              </a:rPr>
+              <a:t>  78  </a:t>
+            </a:r>
+            <a:r>
+              <a:rPr sz="1400">
+                <a:solidFill>
+                  <a:srgbClr val="DCECEF"/>
+                </a:solidFill>
+                <a:latin typeface="Consolas"/>
+              </a:rPr>
+              <a:t>      messages: [</a:t>
+            </a:r>
+          </a:p>
+          <a:p>
+            <a:pPr>
+              <a:spcAft>
+                <a:spcPts val="0"/>
+              </a:spcAft>
+            </a:pPr>
+            <a:r>
+              <a:rPr sz="1400">
+                <a:solidFill>
+                  <a:srgbClr val="6D8C97"/>
+                </a:solidFill>
+                <a:latin typeface="Consolas"/>
+              </a:rPr>
+              <a:t>  79  </a:t>
+            </a:r>
+            <a:r>
+              <a:rPr sz="1400">
+                <a:solidFill>
+                  <a:srgbClr val="DCECEF"/>
+                </a:solidFill>
+                <a:latin typeface="Consolas"/>
+              </a:rPr>
+              <a:t>        // Week 6: the standing instruction, read before every single reply.</a:t>
             </a:r>
           </a:p>
         </p:txBody>
@@ -3632,6 +4668,14 @@
 <file path=ppt/slides/slide6.xml><?xml version="1.0" encoding="utf-8"?>
 <p:sld xmlns:a="http://schemas.openxmlformats.org/drawingml/2006/main" xmlns:p="http://schemas.openxmlformats.org/presentationml/2006/main" xmlns:r="http://schemas.openxmlformats.org/officeDocument/2006/relationships">
   <p:cSld>
+    <p:bg>
+      <p:bgPr>
+        <a:solidFill>
+          <a:srgbClr val="102127"/>
+        </a:solidFill>
+        <a:effectLst/>
+      </p:bgPr>
+    </p:bg>
     <p:spTree>
       <p:nvGrpSpPr>
         <p:cNvPr id="1" name=""/>
@@ -3641,40 +4685,14 @@
       <p:grpSpPr/>
       <p:sp>
         <p:nvSpPr>
-          <p:cNvPr id="2" name="Title 1"/>
-          <p:cNvSpPr>
-            <a:spLocks noGrp="1"/>
-          </p:cNvSpPr>
-          <p:nvPr>
-            <p:ph type="title"/>
-          </p:nvPr>
-        </p:nvSpPr>
-        <p:spPr/>
-        <p:txBody>
-          <a:bodyPr/>
-          <a:lstStyle/>
-          <a:p>
-            <a:r>
-              <a:rPr sz="3800" b="1">
-                <a:solidFill>
-                  <a:srgbClr val="1F2A37"/>
-                </a:solidFill>
-              </a:rPr>
-              <a:t>shift and push</a:t>
-            </a:r>
-          </a:p>
-        </p:txBody>
-      </p:sp>
-      <p:sp>
-        <p:nvSpPr>
-          <p:cNvPr id="3" name="TextBox 2"/>
+          <p:cNvPr id="2" name="TextBox 1"/>
           <p:cNvSpPr txBox="1"/>
           <p:nvPr/>
         </p:nvSpPr>
         <p:spPr>
           <a:xfrm>
-            <a:off x="822960" y="1828800"/>
-            <a:ext cx="10515600" cy="4206240"/>
+            <a:off x="502920" y="274320"/>
+            <a:ext cx="11155680" cy="731520"/>
           </a:xfrm>
           <a:prstGeom prst="rect">
             <a:avLst/>
@@ -3682,53 +4700,416 @@
           <a:noFill/>
         </p:spPr>
         <p:txBody>
-          <a:bodyPr wrap="square">
+          <a:bodyPr wrap="none">
             <a:spAutoFit/>
           </a:bodyPr>
           <a:lstStyle/>
           <a:p>
-            <a:pPr>
-              <a:spcAft>
-                <a:spcPts val="1400"/>
-              </a:spcAft>
-            </a:pPr>
-            <a:r>
-              <a:rPr sz="2400">
-                <a:solidFill>
-                  <a:srgbClr val="1F2A37"/>
-                </a:solidFill>
-              </a:rPr>
-              <a:t>• push - add to the back</a:t>
-            </a:r>
-          </a:p>
-          <a:p>
-            <a:pPr>
-              <a:spcAft>
-                <a:spcPts val="1400"/>
-              </a:spcAft>
-            </a:pPr>
-            <a:r>
-              <a:rPr sz="2400">
-                <a:solidFill>
-                  <a:srgbClr val="1F2A37"/>
-                </a:solidFill>
-              </a:rPr>
-              <a:t>• shift - take from the front</a:t>
-            </a:r>
-          </a:p>
-          <a:p>
-            <a:pPr>
-              <a:spcAft>
-                <a:spcPts val="1400"/>
-              </a:spcAft>
-            </a:pPr>
-            <a:r>
-              <a:rPr sz="2400">
-                <a:solidFill>
-                  <a:srgbClr val="1F2A37"/>
-                </a:solidFill>
-              </a:rPr>
-              <a:t>• A queue, like the lunch line</a:t>
+            <a:r>
+              <a:rPr sz="2600" b="1">
+                <a:solidFill>
+                  <a:srgbClr val="01AEFD"/>
+                </a:solidFill>
+              </a:rPr>
+              <a:t>Type this into script.js  (2 of 3)</a:t>
+            </a:r>
+          </a:p>
+        </p:txBody>
+      </p:sp>
+      <p:sp>
+        <p:nvSpPr>
+          <p:cNvPr id="3" name="TextBox 2"/>
+          <p:cNvSpPr txBox="1"/>
+          <p:nvPr/>
+        </p:nvSpPr>
+        <p:spPr>
+          <a:xfrm>
+            <a:off x="502920" y="1051560"/>
+            <a:ext cx="11155680" cy="5394960"/>
+          </a:xfrm>
+          <a:prstGeom prst="rect">
+            <a:avLst/>
+          </a:prstGeom>
+          <a:noFill/>
+        </p:spPr>
+        <p:txBody>
+          <a:bodyPr wrap="none">
+            <a:spAutoFit/>
+          </a:bodyPr>
+          <a:lstStyle/>
+          <a:p>
+            <a:pPr>
+              <a:spcAft>
+                <a:spcPts val="0"/>
+              </a:spcAft>
+            </a:pPr>
+            <a:r>
+              <a:rPr sz="1400">
+                <a:solidFill>
+                  <a:srgbClr val="6D8C97"/>
+                </a:solidFill>
+                <a:latin typeface="Consolas"/>
+              </a:rPr>
+              <a:t>  80  </a:t>
+            </a:r>
+            <a:r>
+              <a:rPr sz="1400">
+                <a:solidFill>
+                  <a:srgbClr val="DCECEF"/>
+                </a:solidFill>
+                <a:latin typeface="Consolas"/>
+              </a:rPr>
+              <a:t>        { role: 'system', content: personaBox.value },</a:t>
+            </a:r>
+          </a:p>
+          <a:p>
+            <a:pPr>
+              <a:spcAft>
+                <a:spcPts val="0"/>
+              </a:spcAft>
+            </a:pPr>
+            <a:r>
+              <a:rPr sz="1400">
+                <a:solidFill>
+                  <a:srgbClr val="6D8C97"/>
+                </a:solidFill>
+                <a:latin typeface="Consolas"/>
+              </a:rPr>
+              <a:t>  81  </a:t>
+            </a:r>
+            <a:r>
+              <a:rPr sz="1400">
+                <a:solidFill>
+                  <a:srgbClr val="DCECEF"/>
+                </a:solidFill>
+                <a:latin typeface="Consolas"/>
+              </a:rPr>
+              <a:t>        // Week 7: everything said so far, oldest first.</a:t>
+            </a:r>
+          </a:p>
+          <a:p>
+            <a:pPr>
+              <a:spcAft>
+                <a:spcPts val="0"/>
+              </a:spcAft>
+            </a:pPr>
+            <a:r>
+              <a:rPr sz="1400">
+                <a:solidFill>
+                  <a:srgbClr val="6D8C97"/>
+                </a:solidFill>
+                <a:latin typeface="Consolas"/>
+              </a:rPr>
+              <a:t>  82  </a:t>
+            </a:r>
+            <a:r>
+              <a:rPr sz="1400">
+                <a:solidFill>
+                  <a:srgbClr val="DCECEF"/>
+                </a:solidFill>
+                <a:latin typeface="Consolas"/>
+              </a:rPr>
+              <a:t>        ...history</a:t>
+            </a:r>
+          </a:p>
+          <a:p>
+            <a:pPr>
+              <a:spcAft>
+                <a:spcPts val="0"/>
+              </a:spcAft>
+            </a:pPr>
+            <a:r>
+              <a:rPr sz="1400">
+                <a:solidFill>
+                  <a:srgbClr val="6D8C97"/>
+                </a:solidFill>
+                <a:latin typeface="Consolas"/>
+              </a:rPr>
+              <a:t>  83  </a:t>
+            </a:r>
+            <a:r>
+              <a:rPr sz="1400">
+                <a:solidFill>
+                  <a:srgbClr val="DCECEF"/>
+                </a:solidFill>
+                <a:latin typeface="Consolas"/>
+              </a:rPr>
+              <a:t>      ]</a:t>
+            </a:r>
+          </a:p>
+          <a:p>
+            <a:pPr>
+              <a:spcAft>
+                <a:spcPts val="0"/>
+              </a:spcAft>
+            </a:pPr>
+            <a:r>
+              <a:rPr sz="1400">
+                <a:solidFill>
+                  <a:srgbClr val="6D8C97"/>
+                </a:solidFill>
+                <a:latin typeface="Consolas"/>
+              </a:rPr>
+              <a:t>  84  </a:t>
+            </a:r>
+            <a:r>
+              <a:rPr sz="1400">
+                <a:solidFill>
+                  <a:srgbClr val="DCECEF"/>
+                </a:solidFill>
+                <a:latin typeface="Consolas"/>
+              </a:rPr>
+              <a:t>    })</a:t>
+            </a:r>
+          </a:p>
+          <a:p>
+            <a:pPr>
+              <a:spcAft>
+                <a:spcPts val="0"/>
+              </a:spcAft>
+            </a:pPr>
+            <a:r>
+              <a:rPr sz="1400">
+                <a:solidFill>
+                  <a:srgbClr val="6D8C97"/>
+                </a:solidFill>
+                <a:latin typeface="Consolas"/>
+              </a:rPr>
+              <a:t>  85  </a:t>
+            </a:r>
+            <a:r>
+              <a:rPr sz="1400">
+                <a:solidFill>
+                  <a:srgbClr val="DCECEF"/>
+                </a:solidFill>
+                <a:latin typeface="Consolas"/>
+              </a:rPr>
+              <a:t>  });</a:t>
+            </a:r>
+          </a:p>
+          <a:p>
+            <a:pPr>
+              <a:spcAft>
+                <a:spcPts val="0"/>
+              </a:spcAft>
+            </a:pPr>
+            <a:r>
+              <a:rPr sz="1400">
+                <a:solidFill>
+                  <a:srgbClr val="6D8C97"/>
+                </a:solidFill>
+                <a:latin typeface="Consolas"/>
+              </a:rPr>
+              <a:t>  86  </a:t>
+            </a:r>
+            <a:r>
+              <a:rPr sz="1400">
+                <a:solidFill>
+                  <a:srgbClr val="DCECEF"/>
+                </a:solidFill>
+                <a:latin typeface="Consolas"/>
+              </a:rPr>
+              <a:t> </a:t>
+            </a:r>
+          </a:p>
+          <a:p>
+            <a:pPr>
+              <a:spcAft>
+                <a:spcPts val="0"/>
+              </a:spcAft>
+            </a:pPr>
+            <a:r>
+              <a:rPr sz="1400">
+                <a:solidFill>
+                  <a:srgbClr val="6D8C97"/>
+                </a:solidFill>
+                <a:latin typeface="Consolas"/>
+              </a:rPr>
+              <a:t>  87  </a:t>
+            </a:r>
+            <a:r>
+              <a:rPr sz="1400">
+                <a:solidFill>
+                  <a:srgbClr val="DCECEF"/>
+                </a:solidFill>
+                <a:latin typeface="Consolas"/>
+              </a:rPr>
+              <a:t>  // Week 5: fetch does NOT throw when the server says no. A 429 arrives</a:t>
+            </a:r>
+          </a:p>
+          <a:p>
+            <a:pPr>
+              <a:spcAft>
+                <a:spcPts val="0"/>
+              </a:spcAft>
+            </a:pPr>
+            <a:r>
+              <a:rPr sz="1400">
+                <a:solidFill>
+                  <a:srgbClr val="6D8C97"/>
+                </a:solidFill>
+                <a:latin typeface="Consolas"/>
+              </a:rPr>
+              <a:t>  88  </a:t>
+            </a:r>
+            <a:r>
+              <a:rPr sz="1400">
+                <a:solidFill>
+                  <a:srgbClr val="DCECEF"/>
+                </a:solidFill>
+                <a:latin typeface="Consolas"/>
+              </a:rPr>
+              <a:t>  // looking just like a success until you actually check.</a:t>
+            </a:r>
+          </a:p>
+          <a:p>
+            <a:pPr>
+              <a:spcAft>
+                <a:spcPts val="0"/>
+              </a:spcAft>
+            </a:pPr>
+            <a:r>
+              <a:rPr sz="1400">
+                <a:solidFill>
+                  <a:srgbClr val="6D8C97"/>
+                </a:solidFill>
+                <a:latin typeface="Consolas"/>
+              </a:rPr>
+              <a:t>  89  </a:t>
+            </a:r>
+            <a:r>
+              <a:rPr sz="1400">
+                <a:solidFill>
+                  <a:srgbClr val="DCECEF"/>
+                </a:solidFill>
+                <a:latin typeface="Consolas"/>
+              </a:rPr>
+              <a:t>  if (!res.ok) {</a:t>
+            </a:r>
+          </a:p>
+          <a:p>
+            <a:pPr>
+              <a:spcAft>
+                <a:spcPts val="0"/>
+              </a:spcAft>
+            </a:pPr>
+            <a:r>
+              <a:rPr sz="1400">
+                <a:solidFill>
+                  <a:srgbClr val="6D8C97"/>
+                </a:solidFill>
+                <a:latin typeface="Consolas"/>
+              </a:rPr>
+              <a:t>  90  </a:t>
+            </a:r>
+            <a:r>
+              <a:rPr sz="1400">
+                <a:solidFill>
+                  <a:srgbClr val="DCECEF"/>
+                </a:solidFill>
+                <a:latin typeface="Consolas"/>
+              </a:rPr>
+              <a:t>    const problem = await res.json();</a:t>
+            </a:r>
+          </a:p>
+          <a:p>
+            <a:pPr>
+              <a:spcAft>
+                <a:spcPts val="0"/>
+              </a:spcAft>
+            </a:pPr>
+            <a:r>
+              <a:rPr sz="1400">
+                <a:solidFill>
+                  <a:srgbClr val="6D8C97"/>
+                </a:solidFill>
+                <a:latin typeface="Consolas"/>
+              </a:rPr>
+              <a:t>  91  </a:t>
+            </a:r>
+            <a:r>
+              <a:rPr sz="1400">
+                <a:solidFill>
+                  <a:srgbClr val="DCECEF"/>
+                </a:solidFill>
+                <a:latin typeface="Consolas"/>
+              </a:rPr>
+              <a:t>    throw new Error(explain(res.status, problem));</a:t>
+            </a:r>
+          </a:p>
+          <a:p>
+            <a:pPr>
+              <a:spcAft>
+                <a:spcPts val="0"/>
+              </a:spcAft>
+            </a:pPr>
+            <a:r>
+              <a:rPr sz="1400">
+                <a:solidFill>
+                  <a:srgbClr val="6D8C97"/>
+                </a:solidFill>
+                <a:latin typeface="Consolas"/>
+              </a:rPr>
+              <a:t>  92  </a:t>
+            </a:r>
+            <a:r>
+              <a:rPr sz="1400">
+                <a:solidFill>
+                  <a:srgbClr val="DCECEF"/>
+                </a:solidFill>
+                <a:latin typeface="Consolas"/>
+              </a:rPr>
+              <a:t>  }</a:t>
+            </a:r>
+          </a:p>
+          <a:p>
+            <a:pPr>
+              <a:spcAft>
+                <a:spcPts val="0"/>
+              </a:spcAft>
+            </a:pPr>
+            <a:r>
+              <a:rPr sz="1400">
+                <a:solidFill>
+                  <a:srgbClr val="6D8C97"/>
+                </a:solidFill>
+                <a:latin typeface="Consolas"/>
+              </a:rPr>
+              <a:t>  93  </a:t>
+            </a:r>
+            <a:r>
+              <a:rPr sz="1400">
+                <a:solidFill>
+                  <a:srgbClr val="DCECEF"/>
+                </a:solidFill>
+                <a:latin typeface="Consolas"/>
+              </a:rPr>
+              <a:t> </a:t>
+            </a:r>
+          </a:p>
+          <a:p>
+            <a:pPr>
+              <a:spcAft>
+                <a:spcPts val="0"/>
+              </a:spcAft>
+            </a:pPr>
+            <a:r>
+              <a:rPr sz="1400">
+                <a:solidFill>
+                  <a:srgbClr val="6D8C97"/>
+                </a:solidFill>
+                <a:latin typeface="Consolas"/>
+              </a:rPr>
+              <a:t>  94  </a:t>
+            </a:r>
+            <a:r>
+              <a:rPr sz="1400">
+                <a:solidFill>
+                  <a:srgbClr val="DCECEF"/>
+                </a:solidFill>
+                <a:latin typeface="Consolas"/>
+              </a:rPr>
+              <a:t>  const data = await res.json();</a:t>
             </a:r>
           </a:p>
         </p:txBody>
@@ -3744,6 +5125,14 @@
 <file path=ppt/slides/slide7.xml><?xml version="1.0" encoding="utf-8"?>
 <p:sld xmlns:a="http://schemas.openxmlformats.org/drawingml/2006/main" xmlns:p="http://schemas.openxmlformats.org/presentationml/2006/main" xmlns:r="http://schemas.openxmlformats.org/officeDocument/2006/relationships">
   <p:cSld>
+    <p:bg>
+      <p:bgPr>
+        <a:solidFill>
+          <a:srgbClr val="102127"/>
+        </a:solidFill>
+        <a:effectLst/>
+      </p:bgPr>
+    </p:bg>
     <p:spTree>
       <p:nvGrpSpPr>
         <p:cNvPr id="1" name=""/>
@@ -3753,6 +5142,130 @@
       <p:grpSpPr/>
       <p:sp>
         <p:nvSpPr>
+          <p:cNvPr id="2" name="TextBox 1"/>
+          <p:cNvSpPr txBox="1"/>
+          <p:nvPr/>
+        </p:nvSpPr>
+        <p:spPr>
+          <a:xfrm>
+            <a:off x="502920" y="274320"/>
+            <a:ext cx="11155680" cy="731520"/>
+          </a:xfrm>
+          <a:prstGeom prst="rect">
+            <a:avLst/>
+          </a:prstGeom>
+          <a:noFill/>
+        </p:spPr>
+        <p:txBody>
+          <a:bodyPr wrap="none">
+            <a:spAutoFit/>
+          </a:bodyPr>
+          <a:lstStyle/>
+          <a:p>
+            <a:r>
+              <a:rPr sz="2600" b="1">
+                <a:solidFill>
+                  <a:srgbClr val="01AEFD"/>
+                </a:solidFill>
+              </a:rPr>
+              <a:t>Type this into script.js  (3 of 3)</a:t>
+            </a:r>
+          </a:p>
+        </p:txBody>
+      </p:sp>
+      <p:sp>
+        <p:nvSpPr>
+          <p:cNvPr id="3" name="TextBox 2"/>
+          <p:cNvSpPr txBox="1"/>
+          <p:nvPr/>
+        </p:nvSpPr>
+        <p:spPr>
+          <a:xfrm>
+            <a:off x="502920" y="1051560"/>
+            <a:ext cx="11155680" cy="5394960"/>
+          </a:xfrm>
+          <a:prstGeom prst="rect">
+            <a:avLst/>
+          </a:prstGeom>
+          <a:noFill/>
+        </p:spPr>
+        <p:txBody>
+          <a:bodyPr wrap="none">
+            <a:spAutoFit/>
+          </a:bodyPr>
+          <a:lstStyle/>
+          <a:p>
+            <a:pPr>
+              <a:spcAft>
+                <a:spcPts val="0"/>
+              </a:spcAft>
+            </a:pPr>
+            <a:r>
+              <a:rPr sz="1700">
+                <a:solidFill>
+                  <a:srgbClr val="6D8C97"/>
+                </a:solidFill>
+                <a:latin typeface="Consolas"/>
+              </a:rPr>
+              <a:t>  95  </a:t>
+            </a:r>
+            <a:r>
+              <a:rPr sz="1700">
+                <a:solidFill>
+                  <a:srgbClr val="DCECEF"/>
+                </a:solidFill>
+                <a:latin typeface="Consolas"/>
+              </a:rPr>
+              <a:t>  return data.choices[0].message.content;</a:t>
+            </a:r>
+          </a:p>
+          <a:p>
+            <a:pPr>
+              <a:spcAft>
+                <a:spcPts val="0"/>
+              </a:spcAft>
+            </a:pPr>
+            <a:r>
+              <a:rPr sz="1700">
+                <a:solidFill>
+                  <a:srgbClr val="6D8C97"/>
+                </a:solidFill>
+                <a:latin typeface="Consolas"/>
+              </a:rPr>
+              <a:t>  96  </a:t>
+            </a:r>
+            <a:r>
+              <a:rPr sz="1700">
+                <a:solidFill>
+                  <a:srgbClr val="DCECEF"/>
+                </a:solidFill>
+                <a:latin typeface="Consolas"/>
+              </a:rPr>
+              <a:t>}</a:t>
+            </a:r>
+          </a:p>
+        </p:txBody>
+      </p:sp>
+    </p:spTree>
+  </p:cSld>
+  <p:clrMapOvr>
+    <a:masterClrMapping/>
+  </p:clrMapOvr>
+</p:sld>
+</file>
+
+<file path=ppt/slides/slide8.xml><?xml version="1.0" encoding="utf-8"?>
+<p:sld xmlns:a="http://schemas.openxmlformats.org/drawingml/2006/main" xmlns:p="http://schemas.openxmlformats.org/presentationml/2006/main" xmlns:r="http://schemas.openxmlformats.org/officeDocument/2006/relationships">
+  <p:cSld>
+    <p:spTree>
+      <p:nvGrpSpPr>
+        <p:cNvPr id="1" name=""/>
+        <p:cNvGrpSpPr/>
+        <p:nvPr/>
+      </p:nvGrpSpPr>
+      <p:grpSpPr/>
+      <p:sp>
+        <p:nvSpPr>
           <p:cNvPr id="2" name="Title 1"/>
           <p:cNvSpPr>
             <a:spLocks noGrp="1"/>
@@ -3772,7 +5285,7 @@
                   <a:srgbClr val="1F2A37"/>
                 </a:solidFill>
               </a:rPr>
-              <a:t>Watch it forget</a:t>
+              <a:t>What do you throw away?</a:t>
             </a:r>
           </a:p>
         </p:txBody>
@@ -3805,12 +5318,27 @@
               </a:spcAft>
             </a:pPr>
             <a:r>
+              <a:rPr sz="2800">
+                <a:solidFill>
+                  <a:srgbClr val="01AEFD"/>
+                </a:solidFill>
+              </a:rPr>
+              <a:t>There is no right answer</a:t>
+            </a:r>
+          </a:p>
+          <a:p>
+            <a:pPr>
+              <a:spcAft>
+                <a:spcPts val="1400"/>
+              </a:spcAft>
+            </a:pPr>
+            <a:r>
               <a:rPr sz="2400">
                 <a:solidFill>
                   <a:srgbClr val="1F2A37"/>
                 </a:solidFill>
               </a:rPr>
-              <a:t>• Chat until the Console says it forgot</a:t>
+              <a:t>• Oldest? Shortest? Least interesting?</a:t>
             </a:r>
           </a:p>
           <a:p>
@@ -3825,7 +5353,7 @@
                   <a:srgbClr val="1F2A37"/>
                 </a:solidFill>
               </a:rPr>
-              <a:t>• Ask about the beginning</a:t>
+              <a:t>• That is what a trade-off means</a:t>
             </a:r>
           </a:p>
           <a:p>
@@ -3840,7 +5368,119 @@
                   <a:srgbClr val="1F2A37"/>
                 </a:solidFill>
               </a:rPr>
-              <a:t>• It genuinely does not know</a:t>
+              <a:t>• Most apps drop the oldest</a:t>
+            </a:r>
+          </a:p>
+        </p:txBody>
+      </p:sp>
+    </p:spTree>
+  </p:cSld>
+  <p:clrMapOvr>
+    <a:masterClrMapping/>
+  </p:clrMapOvr>
+</p:sld>
+</file>
+
+<file path=ppt/slides/slide9.xml><?xml version="1.0" encoding="utf-8"?>
+<p:sld xmlns:a="http://schemas.openxmlformats.org/drawingml/2006/main" xmlns:p="http://schemas.openxmlformats.org/presentationml/2006/main" xmlns:r="http://schemas.openxmlformats.org/officeDocument/2006/relationships">
+  <p:cSld>
+    <p:spTree>
+      <p:nvGrpSpPr>
+        <p:cNvPr id="1" name=""/>
+        <p:cNvGrpSpPr/>
+        <p:nvPr/>
+      </p:nvGrpSpPr>
+      <p:grpSpPr/>
+      <p:sp>
+        <p:nvSpPr>
+          <p:cNvPr id="2" name="Title 1"/>
+          <p:cNvSpPr>
+            <a:spLocks noGrp="1"/>
+          </p:cNvSpPr>
+          <p:nvPr>
+            <p:ph type="title"/>
+          </p:nvPr>
+        </p:nvSpPr>
+        <p:spPr/>
+        <p:txBody>
+          <a:bodyPr/>
+          <a:lstStyle/>
+          <a:p>
+            <a:r>
+              <a:rPr sz="3800" b="1">
+                <a:solidFill>
+                  <a:srgbClr val="1F2A37"/>
+                </a:solidFill>
+              </a:rPr>
+              <a:t>shift and push</a:t>
+            </a:r>
+          </a:p>
+        </p:txBody>
+      </p:sp>
+      <p:sp>
+        <p:nvSpPr>
+          <p:cNvPr id="3" name="TextBox 2"/>
+          <p:cNvSpPr txBox="1"/>
+          <p:nvPr/>
+        </p:nvSpPr>
+        <p:spPr>
+          <a:xfrm>
+            <a:off x="822960" y="1828800"/>
+            <a:ext cx="10515600" cy="4206240"/>
+          </a:xfrm>
+          <a:prstGeom prst="rect">
+            <a:avLst/>
+          </a:prstGeom>
+          <a:noFill/>
+        </p:spPr>
+        <p:txBody>
+          <a:bodyPr wrap="square">
+            <a:spAutoFit/>
+          </a:bodyPr>
+          <a:lstStyle/>
+          <a:p>
+            <a:pPr>
+              <a:spcAft>
+                <a:spcPts val="1400"/>
+              </a:spcAft>
+            </a:pPr>
+            <a:r>
+              <a:rPr sz="2400">
+                <a:solidFill>
+                  <a:srgbClr val="1F2A37"/>
+                </a:solidFill>
+              </a:rPr>
+              <a:t>• push - add to the back</a:t>
+            </a:r>
+          </a:p>
+          <a:p>
+            <a:pPr>
+              <a:spcAft>
+                <a:spcPts val="1400"/>
+              </a:spcAft>
+            </a:pPr>
+            <a:r>
+              <a:rPr sz="2400">
+                <a:solidFill>
+                  <a:srgbClr val="1F2A37"/>
+                </a:solidFill>
+              </a:rPr>
+              <a:t>• shift - take from the front</a:t>
+            </a:r>
+          </a:p>
+          <a:p>
+            <a:pPr>
+              <a:spcAft>
+                <a:spcPts val="1400"/>
+              </a:spcAft>
+            </a:pPr>
+            <a:r>
+              <a:rPr sz="2400">
+                <a:solidFill>
+                  <a:srgbClr val="1F2A37"/>
+                </a:solidFill>
+              </a:rPr>
+              <a:t>• A queue, like the lunch line</a:t>
             </a:r>
           </a:p>
         </p:txBody>

--- a/ai101/slides/week-08.pptx
+++ b/ai101/slides/week-08.pptx
@@ -3256,7 +3256,7 @@
                 </a:solidFill>
                 <a:latin typeface="Consolas"/>
               </a:rPr>
-              <a:t>  48  </a:t>
+              <a:t>  51  </a:t>
             </a:r>
             <a:r>
               <a:rPr sz="1400">
@@ -3281,7 +3281,7 @@
                 </a:solidFill>
                 <a:latin typeface="Consolas"/>
               </a:rPr>
-              <a:t>  49  </a:t>
+              <a:t>  52  </a:t>
             </a:r>
             <a:r>
               <a:rPr sz="1400">
@@ -3306,7 +3306,7 @@
                 </a:solidFill>
                 <a:latin typeface="Consolas"/>
               </a:rPr>
-              <a:t>  50  </a:t>
+              <a:t>  53  </a:t>
             </a:r>
             <a:r>
               <a:rPr sz="1400">
@@ -3331,7 +3331,7 @@
                 </a:solidFill>
                 <a:latin typeface="Consolas"/>
               </a:rPr>
-              <a:t>  51  </a:t>
+              <a:t>  54  </a:t>
             </a:r>
             <a:r>
               <a:rPr sz="1400">
@@ -3356,7 +3356,7 @@
                 </a:solidFill>
                 <a:latin typeface="Consolas"/>
               </a:rPr>
-              <a:t>  52  </a:t>
+              <a:t>  55  </a:t>
             </a:r>
             <a:r>
               <a:rPr sz="1400">
@@ -3381,7 +3381,7 @@
                 </a:solidFill>
                 <a:latin typeface="Consolas"/>
               </a:rPr>
-              <a:t>  53  </a:t>
+              <a:t>  56  </a:t>
             </a:r>
             <a:r>
               <a:rPr sz="1400">
@@ -3406,7 +3406,7 @@
                 </a:solidFill>
                 <a:latin typeface="Consolas"/>
               </a:rPr>
-              <a:t>  54  </a:t>
+              <a:t>  57  </a:t>
             </a:r>
             <a:r>
               <a:rPr sz="1400">
@@ -3431,7 +3431,7 @@
                 </a:solidFill>
                 <a:latin typeface="Consolas"/>
               </a:rPr>
-              <a:t>  55  </a:t>
+              <a:t>  58  </a:t>
             </a:r>
             <a:r>
               <a:rPr sz="1400">
@@ -3456,7 +3456,7 @@
                 </a:solidFill>
                 <a:latin typeface="Consolas"/>
               </a:rPr>
-              <a:t>  56  </a:t>
+              <a:t>  59  </a:t>
             </a:r>
             <a:r>
               <a:rPr sz="1400">
@@ -3481,7 +3481,7 @@
                 </a:solidFill>
                 <a:latin typeface="Consolas"/>
               </a:rPr>
-              <a:t>  57  </a:t>
+              <a:t>  60  </a:t>
             </a:r>
             <a:r>
               <a:rPr sz="1400">
@@ -3506,7 +3506,7 @@
                 </a:solidFill>
                 <a:latin typeface="Consolas"/>
               </a:rPr>
-              <a:t>  58  </a:t>
+              <a:t>  61  </a:t>
             </a:r>
             <a:r>
               <a:rPr sz="1400">
@@ -3531,7 +3531,7 @@
                 </a:solidFill>
                 <a:latin typeface="Consolas"/>
               </a:rPr>
-              <a:t>  59  </a:t>
+              <a:t>  62  </a:t>
             </a:r>
             <a:r>
               <a:rPr sz="1400">
@@ -3556,7 +3556,7 @@
                 </a:solidFill>
                 <a:latin typeface="Consolas"/>
               </a:rPr>
-              <a:t>  60  </a:t>
+              <a:t>  63  </a:t>
             </a:r>
             <a:r>
               <a:rPr sz="1400">
@@ -3581,7 +3581,7 @@
                 </a:solidFill>
                 <a:latin typeface="Consolas"/>
               </a:rPr>
-              <a:t>  61  </a:t>
+              <a:t>  64  </a:t>
             </a:r>
             <a:r>
               <a:rPr sz="1400">
@@ -3606,7 +3606,7 @@
                 </a:solidFill>
                 <a:latin typeface="Consolas"/>
               </a:rPr>
-              <a:t>  62  </a:t>
+              <a:t>  65  </a:t>
             </a:r>
             <a:r>
               <a:rPr sz="1400">
@@ -3713,7 +3713,7 @@
                 </a:solidFill>
                 <a:latin typeface="Consolas"/>
               </a:rPr>
-              <a:t>  63  </a:t>
+              <a:t>  66  </a:t>
             </a:r>
             <a:r>
               <a:rPr sz="1700">
@@ -3738,7 +3738,7 @@
                 </a:solidFill>
                 <a:latin typeface="Consolas"/>
               </a:rPr>
-              <a:t>  64  </a:t>
+              <a:t>  67  </a:t>
             </a:r>
             <a:r>
               <a:rPr sz="1700">
@@ -4293,7 +4293,7 @@
                 </a:solidFill>
                 <a:latin typeface="Consolas"/>
               </a:rPr>
-              <a:t>  65  </a:t>
+              <a:t>  68  </a:t>
             </a:r>
             <a:r>
               <a:rPr sz="1400">
@@ -4318,7 +4318,7 @@
                 </a:solidFill>
                 <a:latin typeface="Consolas"/>
               </a:rPr>
-              <a:t>  66  </a:t>
+              <a:t>  69  </a:t>
             </a:r>
             <a:r>
               <a:rPr sz="1400">
@@ -4343,7 +4343,7 @@
                 </a:solidFill>
                 <a:latin typeface="Consolas"/>
               </a:rPr>
-              <a:t>  67  </a:t>
+              <a:t>  70  </a:t>
             </a:r>
             <a:r>
               <a:rPr sz="1400">
@@ -4368,7 +4368,7 @@
                 </a:solidFill>
                 <a:latin typeface="Consolas"/>
               </a:rPr>
-              <a:t>  68  </a:t>
+              <a:t>  71  </a:t>
             </a:r>
             <a:r>
               <a:rPr sz="1400">
@@ -4393,7 +4393,7 @@
                 </a:solidFill>
                 <a:latin typeface="Consolas"/>
               </a:rPr>
-              <a:t>  69  </a:t>
+              <a:t>  72  </a:t>
             </a:r>
             <a:r>
               <a:rPr sz="1400">
@@ -4418,7 +4418,7 @@
                 </a:solidFill>
                 <a:latin typeface="Consolas"/>
               </a:rPr>
-              <a:t>  70  </a:t>
+              <a:t>  73  </a:t>
             </a:r>
             <a:r>
               <a:rPr sz="1400">
@@ -4443,7 +4443,7 @@
                 </a:solidFill>
                 <a:latin typeface="Consolas"/>
               </a:rPr>
-              <a:t>  71  </a:t>
+              <a:t>  74  </a:t>
             </a:r>
             <a:r>
               <a:rPr sz="1400">
@@ -4468,7 +4468,7 @@
                 </a:solidFill>
                 <a:latin typeface="Consolas"/>
               </a:rPr>
-              <a:t>  72  </a:t>
+              <a:t>  75  </a:t>
             </a:r>
             <a:r>
               <a:rPr sz="1400">
@@ -4493,7 +4493,7 @@
                 </a:solidFill>
                 <a:latin typeface="Consolas"/>
               </a:rPr>
-              <a:t>  73  </a:t>
+              <a:t>  76  </a:t>
             </a:r>
             <a:r>
               <a:rPr sz="1400">
@@ -4518,7 +4518,7 @@
                 </a:solidFill>
                 <a:latin typeface="Consolas"/>
               </a:rPr>
-              <a:t>  74  </a:t>
+              <a:t>  77  </a:t>
             </a:r>
             <a:r>
               <a:rPr sz="1400">
@@ -4543,7 +4543,7 @@
                 </a:solidFill>
                 <a:latin typeface="Consolas"/>
               </a:rPr>
-              <a:t>  75  </a:t>
+              <a:t>  78  </a:t>
             </a:r>
             <a:r>
               <a:rPr sz="1400">
@@ -4568,7 +4568,7 @@
                 </a:solidFill>
                 <a:latin typeface="Consolas"/>
               </a:rPr>
-              <a:t>  76  </a:t>
+              <a:t>  79  </a:t>
             </a:r>
             <a:r>
               <a:rPr sz="1400">
@@ -4593,7 +4593,7 @@
                 </a:solidFill>
                 <a:latin typeface="Consolas"/>
               </a:rPr>
-              <a:t>  77  </a:t>
+              <a:t>  80  </a:t>
             </a:r>
             <a:r>
               <a:rPr sz="1400">
@@ -4618,7 +4618,7 @@
                 </a:solidFill>
                 <a:latin typeface="Consolas"/>
               </a:rPr>
-              <a:t>  78  </a:t>
+              <a:t>  81  </a:t>
             </a:r>
             <a:r>
               <a:rPr sz="1400">
@@ -4643,7 +4643,7 @@
                 </a:solidFill>
                 <a:latin typeface="Consolas"/>
               </a:rPr>
-              <a:t>  79  </a:t>
+              <a:t>  82  </a:t>
             </a:r>
             <a:r>
               <a:rPr sz="1400">
@@ -4750,7 +4750,7 @@
                 </a:solidFill>
                 <a:latin typeface="Consolas"/>
               </a:rPr>
-              <a:t>  80  </a:t>
+              <a:t>  83  </a:t>
             </a:r>
             <a:r>
               <a:rPr sz="1400">
@@ -4775,7 +4775,7 @@
                 </a:solidFill>
                 <a:latin typeface="Consolas"/>
               </a:rPr>
-              <a:t>  81  </a:t>
+              <a:t>  84  </a:t>
             </a:r>
             <a:r>
               <a:rPr sz="1400">
@@ -4800,7 +4800,7 @@
                 </a:solidFill>
                 <a:latin typeface="Consolas"/>
               </a:rPr>
-              <a:t>  82  </a:t>
+              <a:t>  85  </a:t>
             </a:r>
             <a:r>
               <a:rPr sz="1400">
@@ -4825,7 +4825,7 @@
                 </a:solidFill>
                 <a:latin typeface="Consolas"/>
               </a:rPr>
-              <a:t>  83  </a:t>
+              <a:t>  86  </a:t>
             </a:r>
             <a:r>
               <a:rPr sz="1400">
@@ -4850,7 +4850,7 @@
                 </a:solidFill>
                 <a:latin typeface="Consolas"/>
               </a:rPr>
-              <a:t>  84  </a:t>
+              <a:t>  87  </a:t>
             </a:r>
             <a:r>
               <a:rPr sz="1400">
@@ -4875,7 +4875,7 @@
                 </a:solidFill>
                 <a:latin typeface="Consolas"/>
               </a:rPr>
-              <a:t>  85  </a:t>
+              <a:t>  88  </a:t>
             </a:r>
             <a:r>
               <a:rPr sz="1400">
@@ -4900,7 +4900,7 @@
                 </a:solidFill>
                 <a:latin typeface="Consolas"/>
               </a:rPr>
-              <a:t>  86  </a:t>
+              <a:t>  89  </a:t>
             </a:r>
             <a:r>
               <a:rPr sz="1400">
@@ -4925,7 +4925,7 @@
                 </a:solidFill>
                 <a:latin typeface="Consolas"/>
               </a:rPr>
-              <a:t>  87  </a:t>
+              <a:t>  90  </a:t>
             </a:r>
             <a:r>
               <a:rPr sz="1400">
@@ -4950,7 +4950,7 @@
                 </a:solidFill>
                 <a:latin typeface="Consolas"/>
               </a:rPr>
-              <a:t>  88  </a:t>
+              <a:t>  91  </a:t>
             </a:r>
             <a:r>
               <a:rPr sz="1400">
@@ -4975,7 +4975,7 @@
                 </a:solidFill>
                 <a:latin typeface="Consolas"/>
               </a:rPr>
-              <a:t>  89  </a:t>
+              <a:t>  92  </a:t>
             </a:r>
             <a:r>
               <a:rPr sz="1400">
@@ -5000,7 +5000,7 @@
                 </a:solidFill>
                 <a:latin typeface="Consolas"/>
               </a:rPr>
-              <a:t>  90  </a:t>
+              <a:t>  93  </a:t>
             </a:r>
             <a:r>
               <a:rPr sz="1400">
@@ -5025,7 +5025,7 @@
                 </a:solidFill>
                 <a:latin typeface="Consolas"/>
               </a:rPr>
-              <a:t>  91  </a:t>
+              <a:t>  94  </a:t>
             </a:r>
             <a:r>
               <a:rPr sz="1400">
@@ -5050,7 +5050,7 @@
                 </a:solidFill>
                 <a:latin typeface="Consolas"/>
               </a:rPr>
-              <a:t>  92  </a:t>
+              <a:t>  95  </a:t>
             </a:r>
             <a:r>
               <a:rPr sz="1400">
@@ -5075,7 +5075,7 @@
                 </a:solidFill>
                 <a:latin typeface="Consolas"/>
               </a:rPr>
-              <a:t>  93  </a:t>
+              <a:t>  96  </a:t>
             </a:r>
             <a:r>
               <a:rPr sz="1400">
@@ -5100,7 +5100,7 @@
                 </a:solidFill>
                 <a:latin typeface="Consolas"/>
               </a:rPr>
-              <a:t>  94  </a:t>
+              <a:t>  97  </a:t>
             </a:r>
             <a:r>
               <a:rPr sz="1400">
@@ -5207,7 +5207,7 @@
                 </a:solidFill>
                 <a:latin typeface="Consolas"/>
               </a:rPr>
-              <a:t>  95  </a:t>
+              <a:t>  98  </a:t>
             </a:r>
             <a:r>
               <a:rPr sz="1700">
@@ -5232,7 +5232,7 @@
                 </a:solidFill>
                 <a:latin typeface="Consolas"/>
               </a:rPr>
-              <a:t>  96  </a:t>
+              <a:t>  99  </a:t>
             </a:r>
             <a:r>
               <a:rPr sz="1700">

--- a/ai101/slides/week-08.pptx
+++ b/ai101/slides/week-08.pptx
@@ -3256,7 +3256,7 @@
                 </a:solidFill>
                 <a:latin typeface="Consolas"/>
               </a:rPr>
-              <a:t>  51  </a:t>
+              <a:t>  59  </a:t>
             </a:r>
             <a:r>
               <a:rPr sz="1400">
@@ -3281,7 +3281,7 @@
                 </a:solidFill>
                 <a:latin typeface="Consolas"/>
               </a:rPr>
-              <a:t>  52  </a:t>
+              <a:t>  60  </a:t>
             </a:r>
             <a:r>
               <a:rPr sz="1400">
@@ -3306,7 +3306,7 @@
                 </a:solidFill>
                 <a:latin typeface="Consolas"/>
               </a:rPr>
-              <a:t>  53  </a:t>
+              <a:t>  61  </a:t>
             </a:r>
             <a:r>
               <a:rPr sz="1400">
@@ -3331,7 +3331,7 @@
                 </a:solidFill>
                 <a:latin typeface="Consolas"/>
               </a:rPr>
-              <a:t>  54  </a:t>
+              <a:t>  62  </a:t>
             </a:r>
             <a:r>
               <a:rPr sz="1400">
@@ -3356,7 +3356,7 @@
                 </a:solidFill>
                 <a:latin typeface="Consolas"/>
               </a:rPr>
-              <a:t>  55  </a:t>
+              <a:t>  63  </a:t>
             </a:r>
             <a:r>
               <a:rPr sz="1400">
@@ -3381,7 +3381,7 @@
                 </a:solidFill>
                 <a:latin typeface="Consolas"/>
               </a:rPr>
-              <a:t>  56  </a:t>
+              <a:t>  64  </a:t>
             </a:r>
             <a:r>
               <a:rPr sz="1400">
@@ -3406,7 +3406,7 @@
                 </a:solidFill>
                 <a:latin typeface="Consolas"/>
               </a:rPr>
-              <a:t>  57  </a:t>
+              <a:t>  65  </a:t>
             </a:r>
             <a:r>
               <a:rPr sz="1400">
@@ -3431,7 +3431,7 @@
                 </a:solidFill>
                 <a:latin typeface="Consolas"/>
               </a:rPr>
-              <a:t>  58  </a:t>
+              <a:t>  66  </a:t>
             </a:r>
             <a:r>
               <a:rPr sz="1400">
@@ -3456,7 +3456,7 @@
                 </a:solidFill>
                 <a:latin typeface="Consolas"/>
               </a:rPr>
-              <a:t>  59  </a:t>
+              <a:t>  67  </a:t>
             </a:r>
             <a:r>
               <a:rPr sz="1400">
@@ -3481,7 +3481,7 @@
                 </a:solidFill>
                 <a:latin typeface="Consolas"/>
               </a:rPr>
-              <a:t>  60  </a:t>
+              <a:t>  68  </a:t>
             </a:r>
             <a:r>
               <a:rPr sz="1400">
@@ -3506,7 +3506,7 @@
                 </a:solidFill>
                 <a:latin typeface="Consolas"/>
               </a:rPr>
-              <a:t>  61  </a:t>
+              <a:t>  69  </a:t>
             </a:r>
             <a:r>
               <a:rPr sz="1400">
@@ -3531,7 +3531,7 @@
                 </a:solidFill>
                 <a:latin typeface="Consolas"/>
               </a:rPr>
-              <a:t>  62  </a:t>
+              <a:t>  70  </a:t>
             </a:r>
             <a:r>
               <a:rPr sz="1400">
@@ -3556,7 +3556,7 @@
                 </a:solidFill>
                 <a:latin typeface="Consolas"/>
               </a:rPr>
-              <a:t>  63  </a:t>
+              <a:t>  71  </a:t>
             </a:r>
             <a:r>
               <a:rPr sz="1400">
@@ -3581,7 +3581,7 @@
                 </a:solidFill>
                 <a:latin typeface="Consolas"/>
               </a:rPr>
-              <a:t>  64  </a:t>
+              <a:t>  72  </a:t>
             </a:r>
             <a:r>
               <a:rPr sz="1400">
@@ -3606,7 +3606,7 @@
                 </a:solidFill>
                 <a:latin typeface="Consolas"/>
               </a:rPr>
-              <a:t>  65  </a:t>
+              <a:t>  73  </a:t>
             </a:r>
             <a:r>
               <a:rPr sz="1400">
@@ -3713,7 +3713,7 @@
                 </a:solidFill>
                 <a:latin typeface="Consolas"/>
               </a:rPr>
-              <a:t>  66  </a:t>
+              <a:t>  74  </a:t>
             </a:r>
             <a:r>
               <a:rPr sz="1700">
@@ -3738,7 +3738,7 @@
                 </a:solidFill>
                 <a:latin typeface="Consolas"/>
               </a:rPr>
-              <a:t>  67  </a:t>
+              <a:t>  75  </a:t>
             </a:r>
             <a:r>
               <a:rPr sz="1700">
@@ -4293,7 +4293,7 @@
                 </a:solidFill>
                 <a:latin typeface="Consolas"/>
               </a:rPr>
-              <a:t>  68  </a:t>
+              <a:t>  76  </a:t>
             </a:r>
             <a:r>
               <a:rPr sz="1400">
@@ -4318,7 +4318,7 @@
                 </a:solidFill>
                 <a:latin typeface="Consolas"/>
               </a:rPr>
-              <a:t>  69  </a:t>
+              <a:t>  77  </a:t>
             </a:r>
             <a:r>
               <a:rPr sz="1400">
@@ -4343,7 +4343,7 @@
                 </a:solidFill>
                 <a:latin typeface="Consolas"/>
               </a:rPr>
-              <a:t>  70  </a:t>
+              <a:t>  78  </a:t>
             </a:r>
             <a:r>
               <a:rPr sz="1400">
@@ -4368,7 +4368,7 @@
                 </a:solidFill>
                 <a:latin typeface="Consolas"/>
               </a:rPr>
-              <a:t>  71  </a:t>
+              <a:t>  79  </a:t>
             </a:r>
             <a:r>
               <a:rPr sz="1400">
@@ -4393,7 +4393,7 @@
                 </a:solidFill>
                 <a:latin typeface="Consolas"/>
               </a:rPr>
-              <a:t>  72  </a:t>
+              <a:t>  80  </a:t>
             </a:r>
             <a:r>
               <a:rPr sz="1400">
@@ -4418,7 +4418,7 @@
                 </a:solidFill>
                 <a:latin typeface="Consolas"/>
               </a:rPr>
-              <a:t>  73  </a:t>
+              <a:t>  81  </a:t>
             </a:r>
             <a:r>
               <a:rPr sz="1400">
@@ -4443,7 +4443,7 @@
                 </a:solidFill>
                 <a:latin typeface="Consolas"/>
               </a:rPr>
-              <a:t>  74  </a:t>
+              <a:t>  82  </a:t>
             </a:r>
             <a:r>
               <a:rPr sz="1400">
@@ -4468,7 +4468,7 @@
                 </a:solidFill>
                 <a:latin typeface="Consolas"/>
               </a:rPr>
-              <a:t>  75  </a:t>
+              <a:t>  83  </a:t>
             </a:r>
             <a:r>
               <a:rPr sz="1400">
@@ -4493,7 +4493,7 @@
                 </a:solidFill>
                 <a:latin typeface="Consolas"/>
               </a:rPr>
-              <a:t>  76  </a:t>
+              <a:t>  84  </a:t>
             </a:r>
             <a:r>
               <a:rPr sz="1400">
@@ -4518,7 +4518,7 @@
                 </a:solidFill>
                 <a:latin typeface="Consolas"/>
               </a:rPr>
-              <a:t>  77  </a:t>
+              <a:t>  85  </a:t>
             </a:r>
             <a:r>
               <a:rPr sz="1400">
@@ -4543,7 +4543,7 @@
                 </a:solidFill>
                 <a:latin typeface="Consolas"/>
               </a:rPr>
-              <a:t>  78  </a:t>
+              <a:t>  86  </a:t>
             </a:r>
             <a:r>
               <a:rPr sz="1400">
@@ -4568,7 +4568,7 @@
                 </a:solidFill>
                 <a:latin typeface="Consolas"/>
               </a:rPr>
-              <a:t>  79  </a:t>
+              <a:t>  87  </a:t>
             </a:r>
             <a:r>
               <a:rPr sz="1400">
@@ -4593,7 +4593,7 @@
                 </a:solidFill>
                 <a:latin typeface="Consolas"/>
               </a:rPr>
-              <a:t>  80  </a:t>
+              <a:t>  88  </a:t>
             </a:r>
             <a:r>
               <a:rPr sz="1400">
@@ -4618,7 +4618,7 @@
                 </a:solidFill>
                 <a:latin typeface="Consolas"/>
               </a:rPr>
-              <a:t>  81  </a:t>
+              <a:t>  89  </a:t>
             </a:r>
             <a:r>
               <a:rPr sz="1400">
@@ -4643,7 +4643,7 @@
                 </a:solidFill>
                 <a:latin typeface="Consolas"/>
               </a:rPr>
-              <a:t>  82  </a:t>
+              <a:t>  90  </a:t>
             </a:r>
             <a:r>
               <a:rPr sz="1400">
@@ -4750,7 +4750,7 @@
                 </a:solidFill>
                 <a:latin typeface="Consolas"/>
               </a:rPr>
-              <a:t>  83  </a:t>
+              <a:t>  91  </a:t>
             </a:r>
             <a:r>
               <a:rPr sz="1400">
@@ -4775,7 +4775,7 @@
                 </a:solidFill>
                 <a:latin typeface="Consolas"/>
               </a:rPr>
-              <a:t>  84  </a:t>
+              <a:t>  92  </a:t>
             </a:r>
             <a:r>
               <a:rPr sz="1400">
@@ -4800,7 +4800,7 @@
                 </a:solidFill>
                 <a:latin typeface="Consolas"/>
               </a:rPr>
-              <a:t>  85  </a:t>
+              <a:t>  93  </a:t>
             </a:r>
             <a:r>
               <a:rPr sz="1400">
@@ -4825,7 +4825,7 @@
                 </a:solidFill>
                 <a:latin typeface="Consolas"/>
               </a:rPr>
-              <a:t>  86  </a:t>
+              <a:t>  94  </a:t>
             </a:r>
             <a:r>
               <a:rPr sz="1400">
@@ -4850,7 +4850,7 @@
                 </a:solidFill>
                 <a:latin typeface="Consolas"/>
               </a:rPr>
-              <a:t>  87  </a:t>
+              <a:t>  95  </a:t>
             </a:r>
             <a:r>
               <a:rPr sz="1400">
@@ -4875,7 +4875,7 @@
                 </a:solidFill>
                 <a:latin typeface="Consolas"/>
               </a:rPr>
-              <a:t>  88  </a:t>
+              <a:t>  96  </a:t>
             </a:r>
             <a:r>
               <a:rPr sz="1400">
@@ -4900,7 +4900,7 @@
                 </a:solidFill>
                 <a:latin typeface="Consolas"/>
               </a:rPr>
-              <a:t>  89  </a:t>
+              <a:t>  97  </a:t>
             </a:r>
             <a:r>
               <a:rPr sz="1400">
@@ -4925,7 +4925,7 @@
                 </a:solidFill>
                 <a:latin typeface="Consolas"/>
               </a:rPr>
-              <a:t>  90  </a:t>
+              <a:t>  98  </a:t>
             </a:r>
             <a:r>
               <a:rPr sz="1400">
@@ -4950,7 +4950,7 @@
                 </a:solidFill>
                 <a:latin typeface="Consolas"/>
               </a:rPr>
-              <a:t>  91  </a:t>
+              <a:t>  99  </a:t>
             </a:r>
             <a:r>
               <a:rPr sz="1400">
@@ -4975,7 +4975,7 @@
                 </a:solidFill>
                 <a:latin typeface="Consolas"/>
               </a:rPr>
-              <a:t>  92  </a:t>
+              <a:t> 100  </a:t>
             </a:r>
             <a:r>
               <a:rPr sz="1400">
@@ -5000,7 +5000,7 @@
                 </a:solidFill>
                 <a:latin typeface="Consolas"/>
               </a:rPr>
-              <a:t>  93  </a:t>
+              <a:t> 101  </a:t>
             </a:r>
             <a:r>
               <a:rPr sz="1400">
@@ -5025,7 +5025,7 @@
                 </a:solidFill>
                 <a:latin typeface="Consolas"/>
               </a:rPr>
-              <a:t>  94  </a:t>
+              <a:t> 102  </a:t>
             </a:r>
             <a:r>
               <a:rPr sz="1400">
@@ -5050,7 +5050,7 @@
                 </a:solidFill>
                 <a:latin typeface="Consolas"/>
               </a:rPr>
-              <a:t>  95  </a:t>
+              <a:t> 103  </a:t>
             </a:r>
             <a:r>
               <a:rPr sz="1400">
@@ -5075,7 +5075,7 @@
                 </a:solidFill>
                 <a:latin typeface="Consolas"/>
               </a:rPr>
-              <a:t>  96  </a:t>
+              <a:t> 104  </a:t>
             </a:r>
             <a:r>
               <a:rPr sz="1400">
@@ -5100,7 +5100,7 @@
                 </a:solidFill>
                 <a:latin typeface="Consolas"/>
               </a:rPr>
-              <a:t>  97  </a:t>
+              <a:t> 105  </a:t>
             </a:r>
             <a:r>
               <a:rPr sz="1400">
@@ -5207,7 +5207,7 @@
                 </a:solidFill>
                 <a:latin typeface="Consolas"/>
               </a:rPr>
-              <a:t>  98  </a:t>
+              <a:t> 106  </a:t>
             </a:r>
             <a:r>
               <a:rPr sz="1700">
@@ -5232,7 +5232,7 @@
                 </a:solidFill>
                 <a:latin typeface="Consolas"/>
               </a:rPr>
-              <a:t>  99  </a:t>
+              <a:t> 107  </a:t>
             </a:r>
             <a:r>
               <a:rPr sz="1700">

--- a/ai101/slides/week-08.pptx
+++ b/ai101/slides/week-08.pptx
@@ -17,6 +17,21 @@
     <p:sldId id="265" r:id="rId16"/>
     <p:sldId id="266" r:id="rId17"/>
     <p:sldId id="267" r:id="rId18"/>
+    <p:sldId id="268" r:id="rId19"/>
+    <p:sldId id="269" r:id="rId20"/>
+    <p:sldId id="270" r:id="rId21"/>
+    <p:sldId id="271" r:id="rId22"/>
+    <p:sldId id="272" r:id="rId23"/>
+    <p:sldId id="273" r:id="rId24"/>
+    <p:sldId id="274" r:id="rId25"/>
+    <p:sldId id="275" r:id="rId26"/>
+    <p:sldId id="276" r:id="rId27"/>
+    <p:sldId id="277" r:id="rId28"/>
+    <p:sldId id="278" r:id="rId29"/>
+    <p:sldId id="279" r:id="rId30"/>
+    <p:sldId id="280" r:id="rId31"/>
+    <p:sldId id="281" r:id="rId32"/>
+    <p:sldId id="282" r:id="rId33"/>
   </p:sldIdLst>
   <p:sldSz cx="12191695" cy="6858000" type="screen4x3"/>
   <p:notesSz cx="6858000" cy="9144000"/>
@@ -3198,7 +3213,7 @@
         <p:spPr>
           <a:xfrm>
             <a:off x="502920" y="274320"/>
-            <a:ext cx="11155680" cy="731520"/>
+            <a:ext cx="11155680" cy="548640"/>
           </a:xfrm>
           <a:prstGeom prst="rect">
             <a:avLst/>
@@ -3212,12 +3227,12 @@
           <a:lstStyle/>
           <a:p>
             <a:r>
-              <a:rPr sz="2600" b="1">
+              <a:rPr sz="2200" b="1">
                 <a:solidFill>
                   <a:srgbClr val="01AEFD"/>
                 </a:solidFill>
               </a:rPr>
-              <a:t>Type this into script.js  (1 of 2)</a:t>
+              <a:t>Type this into script.js   -   line 65</a:t>
             </a:r>
           </a:p>
         </p:txBody>
@@ -3230,8 +3245,8 @@
         </p:nvSpPr>
         <p:spPr>
           <a:xfrm>
-            <a:off x="502920" y="1051560"/>
-            <a:ext cx="11155680" cy="5394960"/>
+            <a:off x="502920" y="960120"/>
+            <a:ext cx="11155680" cy="4297680"/>
           </a:xfrm>
           <a:prstGeom prst="rect">
             <a:avLst/>
@@ -3250,7 +3265,7 @@
               </a:spcAft>
             </a:pPr>
             <a:r>
-              <a:rPr sz="1400">
+              <a:rPr sz="1800">
                 <a:solidFill>
                   <a:srgbClr val="6D8C97"/>
                 </a:solidFill>
@@ -3259,363 +3274,196 @@
               <a:t>  59  </a:t>
             </a:r>
             <a:r>
-              <a:rPr sz="1400">
+              <a:rPr sz="1800">
+                <a:solidFill>
+                  <a:srgbClr val="6D8C97"/>
+                </a:solidFill>
+                <a:latin typeface="Consolas"/>
+              </a:rPr>
+              <a:t> </a:t>
+            </a:r>
+          </a:p>
+          <a:p>
+            <a:pPr>
+              <a:spcAft>
+                <a:spcPts val="0"/>
+              </a:spcAft>
+            </a:pPr>
+            <a:r>
+              <a:rPr sz="1800">
+                <a:solidFill>
+                  <a:srgbClr val="6D8C97"/>
+                </a:solidFill>
+                <a:latin typeface="Consolas"/>
+              </a:rPr>
+              <a:t>  60  </a:t>
+            </a:r>
+            <a:r>
+              <a:rPr sz="1800">
+                <a:solidFill>
+                  <a:srgbClr val="6D8C97"/>
+                </a:solidFill>
+                <a:latin typeface="Consolas"/>
+              </a:rPr>
+              <a:t>// Week 8: the server reads at most 4000 characters of conversation at once.</a:t>
+            </a:r>
+          </a:p>
+          <a:p>
+            <a:pPr>
+              <a:spcAft>
+                <a:spcPts val="0"/>
+              </a:spcAft>
+            </a:pPr>
+            <a:r>
+              <a:rPr sz="1800">
+                <a:solidFill>
+                  <a:srgbClr val="6D8C97"/>
+                </a:solidFill>
+                <a:latin typeface="Consolas"/>
+              </a:rPr>
+              <a:t>  61  </a:t>
+            </a:r>
+            <a:r>
+              <a:rPr sz="1800">
+                <a:solidFill>
+                  <a:srgbClr val="6D8C97"/>
+                </a:solidFill>
+                <a:latin typeface="Consolas"/>
+              </a:rPr>
+              <a:t>// Past that it refuses the whole request, so old messages have to go.</a:t>
+            </a:r>
+          </a:p>
+          <a:p>
+            <a:pPr>
+              <a:spcAft>
+                <a:spcPts val="0"/>
+              </a:spcAft>
+            </a:pPr>
+            <a:r>
+              <a:rPr sz="1800">
+                <a:solidFill>
+                  <a:srgbClr val="6D8C97"/>
+                </a:solidFill>
+                <a:latin typeface="Consolas"/>
+              </a:rPr>
+              <a:t>  62  </a:t>
+            </a:r>
+            <a:r>
+              <a:rPr sz="1800">
+                <a:solidFill>
+                  <a:srgbClr val="6D8C97"/>
+                </a:solidFill>
+                <a:latin typeface="Consolas"/>
+              </a:rPr>
+              <a:t>const MAX_CHARS = 3500;   // leave room for the personality and your next line</a:t>
+            </a:r>
+          </a:p>
+          <a:p>
+            <a:pPr>
+              <a:spcAft>
+                <a:spcPts val="0"/>
+              </a:spcAft>
+            </a:pPr>
+            <a:r>
+              <a:rPr sz="1800">
+                <a:solidFill>
+                  <a:srgbClr val="6D8C97"/>
+                </a:solidFill>
+                <a:latin typeface="Consolas"/>
+              </a:rPr>
+              <a:t>  63  </a:t>
+            </a:r>
+            <a:r>
+              <a:rPr sz="1800">
+                <a:solidFill>
+                  <a:srgbClr val="6D8C97"/>
+                </a:solidFill>
+                <a:latin typeface="Consolas"/>
+              </a:rPr>
+              <a:t> </a:t>
+            </a:r>
+          </a:p>
+          <a:p>
+            <a:pPr>
+              <a:spcAft>
+                <a:spcPts val="0"/>
+              </a:spcAft>
+            </a:pPr>
+            <a:r>
+              <a:rPr sz="1800">
+                <a:solidFill>
+                  <a:srgbClr val="6D8C97"/>
+                </a:solidFill>
+                <a:latin typeface="Consolas"/>
+              </a:rPr>
+              <a:t>  64  </a:t>
+            </a:r>
+            <a:r>
+              <a:rPr sz="1800">
+                <a:solidFill>
+                  <a:srgbClr val="6D8C97"/>
+                </a:solidFill>
+                <a:latin typeface="Consolas"/>
+              </a:rPr>
+              <a:t>function trimHistory() {</a:t>
+            </a:r>
+          </a:p>
+          <a:p>
+            <a:pPr>
+              <a:spcAft>
+                <a:spcPts val="0"/>
+              </a:spcAft>
+            </a:pPr>
+            <a:r>
+              <a:rPr sz="1800">
+                <a:solidFill>
+                  <a:srgbClr val="6D8C97"/>
+                </a:solidFill>
+                <a:latin typeface="Consolas"/>
+              </a:rPr>
+              <a:t>  65  </a:t>
+            </a:r>
+            <a:r>
+              <a:rPr sz="1800">
+                <a:solidFill>
+                  <a:srgbClr val="7FE0A0"/>
+                </a:solidFill>
+                <a:latin typeface="Consolas"/>
+              </a:rPr>
+              <a:t>  let size = personaBox.value.length;</a:t>
+            </a:r>
+          </a:p>
+        </p:txBody>
+      </p:sp>
+      <p:sp>
+        <p:nvSpPr>
+          <p:cNvPr id="4" name="TextBox 3"/>
+          <p:cNvSpPr txBox="1"/>
+          <p:nvPr/>
+        </p:nvSpPr>
+        <p:spPr>
+          <a:xfrm>
+            <a:off x="548640" y="5623560"/>
+            <a:ext cx="11064240" cy="1051560"/>
+          </a:xfrm>
+          <a:prstGeom prst="rect">
+            <a:avLst/>
+          </a:prstGeom>
+          <a:noFill/>
+        </p:spPr>
+        <p:txBody>
+          <a:bodyPr wrap="square">
+            <a:spAutoFit/>
+          </a:bodyPr>
+          <a:lstStyle/>
+          <a:p>
+            <a:r>
+              <a:rPr sz="2000">
                 <a:solidFill>
                   <a:srgbClr val="DCECEF"/>
                 </a:solidFill>
-                <a:latin typeface="Consolas"/>
-              </a:rPr>
-              <a:t> </a:t>
-            </a:r>
-          </a:p>
-          <a:p>
-            <a:pPr>
-              <a:spcAft>
-                <a:spcPts val="0"/>
-              </a:spcAft>
-            </a:pPr>
-            <a:r>
-              <a:rPr sz="1400">
-                <a:solidFill>
-                  <a:srgbClr val="6D8C97"/>
-                </a:solidFill>
-                <a:latin typeface="Consolas"/>
-              </a:rPr>
-              <a:t>  60  </a:t>
-            </a:r>
-            <a:r>
-              <a:rPr sz="1400">
-                <a:solidFill>
-                  <a:srgbClr val="7FE0A0"/>
-                </a:solidFill>
-                <a:latin typeface="Consolas"/>
-              </a:rPr>
-              <a:t>// Week 8: the server reads at most 4000 characters of conversation at once.</a:t>
-            </a:r>
-          </a:p>
-          <a:p>
-            <a:pPr>
-              <a:spcAft>
-                <a:spcPts val="0"/>
-              </a:spcAft>
-            </a:pPr>
-            <a:r>
-              <a:rPr sz="1400">
-                <a:solidFill>
-                  <a:srgbClr val="6D8C97"/>
-                </a:solidFill>
-                <a:latin typeface="Consolas"/>
-              </a:rPr>
-              <a:t>  61  </a:t>
-            </a:r>
-            <a:r>
-              <a:rPr sz="1400">
-                <a:solidFill>
-                  <a:srgbClr val="7FE0A0"/>
-                </a:solidFill>
-                <a:latin typeface="Consolas"/>
-              </a:rPr>
-              <a:t>// Past that it refuses the whole request, so old messages have to go.</a:t>
-            </a:r>
-          </a:p>
-          <a:p>
-            <a:pPr>
-              <a:spcAft>
-                <a:spcPts val="0"/>
-              </a:spcAft>
-            </a:pPr>
-            <a:r>
-              <a:rPr sz="1400">
-                <a:solidFill>
-                  <a:srgbClr val="6D8C97"/>
-                </a:solidFill>
-                <a:latin typeface="Consolas"/>
-              </a:rPr>
-              <a:t>  62  </a:t>
-            </a:r>
-            <a:r>
-              <a:rPr sz="1400">
-                <a:solidFill>
-                  <a:srgbClr val="7FE0A0"/>
-                </a:solidFill>
-                <a:latin typeface="Consolas"/>
-              </a:rPr>
-              <a:t>const MAX_CHARS = 3500;   // leave room for the personality and your next line</a:t>
-            </a:r>
-          </a:p>
-          <a:p>
-            <a:pPr>
-              <a:spcAft>
-                <a:spcPts val="0"/>
-              </a:spcAft>
-            </a:pPr>
-            <a:r>
-              <a:rPr sz="1400">
-                <a:solidFill>
-                  <a:srgbClr val="6D8C97"/>
-                </a:solidFill>
-                <a:latin typeface="Consolas"/>
-              </a:rPr>
-              <a:t>  63  </a:t>
-            </a:r>
-            <a:r>
-              <a:rPr sz="1400">
-                <a:solidFill>
-                  <a:srgbClr val="7FE0A0"/>
-                </a:solidFill>
-                <a:latin typeface="Consolas"/>
-              </a:rPr>
-              <a:t> </a:t>
-            </a:r>
-          </a:p>
-          <a:p>
-            <a:pPr>
-              <a:spcAft>
-                <a:spcPts val="0"/>
-              </a:spcAft>
-            </a:pPr>
-            <a:r>
-              <a:rPr sz="1400">
-                <a:solidFill>
-                  <a:srgbClr val="6D8C97"/>
-                </a:solidFill>
-                <a:latin typeface="Consolas"/>
-              </a:rPr>
-              <a:t>  64  </a:t>
-            </a:r>
-            <a:r>
-              <a:rPr sz="1400">
-                <a:solidFill>
-                  <a:srgbClr val="7FE0A0"/>
-                </a:solidFill>
-                <a:latin typeface="Consolas"/>
-              </a:rPr>
-              <a:t>function trimHistory() {</a:t>
-            </a:r>
-          </a:p>
-          <a:p>
-            <a:pPr>
-              <a:spcAft>
-                <a:spcPts val="0"/>
-              </a:spcAft>
-            </a:pPr>
-            <a:r>
-              <a:rPr sz="1400">
-                <a:solidFill>
-                  <a:srgbClr val="6D8C97"/>
-                </a:solidFill>
-                <a:latin typeface="Consolas"/>
-              </a:rPr>
-              <a:t>  65  </a:t>
-            </a:r>
-            <a:r>
-              <a:rPr sz="1400">
-                <a:solidFill>
-                  <a:srgbClr val="7FE0A0"/>
-                </a:solidFill>
-                <a:latin typeface="Consolas"/>
-              </a:rPr>
-              <a:t>  let size = personaBox.value.length;</a:t>
-            </a:r>
-          </a:p>
-          <a:p>
-            <a:pPr>
-              <a:spcAft>
-                <a:spcPts val="0"/>
-              </a:spcAft>
-            </a:pPr>
-            <a:r>
-              <a:rPr sz="1400">
-                <a:solidFill>
-                  <a:srgbClr val="6D8C97"/>
-                </a:solidFill>
-                <a:latin typeface="Consolas"/>
-              </a:rPr>
-              <a:t>  66  </a:t>
-            </a:r>
-            <a:r>
-              <a:rPr sz="1400">
-                <a:solidFill>
-                  <a:srgbClr val="7FE0A0"/>
-                </a:solidFill>
-                <a:latin typeface="Consolas"/>
-              </a:rPr>
-              <a:t>  for (const message of history) {</a:t>
-            </a:r>
-          </a:p>
-          <a:p>
-            <a:pPr>
-              <a:spcAft>
-                <a:spcPts val="0"/>
-              </a:spcAft>
-            </a:pPr>
-            <a:r>
-              <a:rPr sz="1400">
-                <a:solidFill>
-                  <a:srgbClr val="6D8C97"/>
-                </a:solidFill>
-                <a:latin typeface="Consolas"/>
-              </a:rPr>
-              <a:t>  67  </a:t>
-            </a:r>
-            <a:r>
-              <a:rPr sz="1400">
-                <a:solidFill>
-                  <a:srgbClr val="7FE0A0"/>
-                </a:solidFill>
-                <a:latin typeface="Consolas"/>
-              </a:rPr>
-              <a:t>    size += message.content.length;</a:t>
-            </a:r>
-          </a:p>
-          <a:p>
-            <a:pPr>
-              <a:spcAft>
-                <a:spcPts val="0"/>
-              </a:spcAft>
-            </a:pPr>
-            <a:r>
-              <a:rPr sz="1400">
-                <a:solidFill>
-                  <a:srgbClr val="6D8C97"/>
-                </a:solidFill>
-                <a:latin typeface="Consolas"/>
-              </a:rPr>
-              <a:t>  68  </a:t>
-            </a:r>
-            <a:r>
-              <a:rPr sz="1400">
-                <a:solidFill>
-                  <a:srgbClr val="7FE0A0"/>
-                </a:solidFill>
-                <a:latin typeface="Consolas"/>
-              </a:rPr>
-              <a:t>  }</a:t>
-            </a:r>
-          </a:p>
-          <a:p>
-            <a:pPr>
-              <a:spcAft>
-                <a:spcPts val="0"/>
-              </a:spcAft>
-            </a:pPr>
-            <a:r>
-              <a:rPr sz="1400">
-                <a:solidFill>
-                  <a:srgbClr val="6D8C97"/>
-                </a:solidFill>
-                <a:latin typeface="Consolas"/>
-              </a:rPr>
-              <a:t>  69  </a:t>
-            </a:r>
-            <a:r>
-              <a:rPr sz="1400">
-                <a:solidFill>
-                  <a:srgbClr val="7FE0A0"/>
-                </a:solidFill>
-                <a:latin typeface="Consolas"/>
-              </a:rPr>
-              <a:t>  // Drop from the FRONT. The oldest messages matter least - usually.</a:t>
-            </a:r>
-          </a:p>
-          <a:p>
-            <a:pPr>
-              <a:spcAft>
-                <a:spcPts val="0"/>
-              </a:spcAft>
-            </a:pPr>
-            <a:r>
-              <a:rPr sz="1400">
-                <a:solidFill>
-                  <a:srgbClr val="6D8C97"/>
-                </a:solidFill>
-                <a:latin typeface="Consolas"/>
-              </a:rPr>
-              <a:t>  70  </a:t>
-            </a:r>
-            <a:r>
-              <a:rPr sz="1400">
-                <a:solidFill>
-                  <a:srgbClr val="7FE0A0"/>
-                </a:solidFill>
-                <a:latin typeface="Consolas"/>
-              </a:rPr>
-              <a:t>  while (size &gt; MAX_CHARS &amp;&amp; history.length &gt; 2) {</a:t>
-            </a:r>
-          </a:p>
-          <a:p>
-            <a:pPr>
-              <a:spcAft>
-                <a:spcPts val="0"/>
-              </a:spcAft>
-            </a:pPr>
-            <a:r>
-              <a:rPr sz="1400">
-                <a:solidFill>
-                  <a:srgbClr val="6D8C97"/>
-                </a:solidFill>
-                <a:latin typeface="Consolas"/>
-              </a:rPr>
-              <a:t>  71  </a:t>
-            </a:r>
-            <a:r>
-              <a:rPr sz="1400">
-                <a:solidFill>
-                  <a:srgbClr val="7FE0A0"/>
-                </a:solidFill>
-                <a:latin typeface="Consolas"/>
-              </a:rPr>
-              <a:t>    const dropped = history.shift();</a:t>
-            </a:r>
-          </a:p>
-          <a:p>
-            <a:pPr>
-              <a:spcAft>
-                <a:spcPts val="0"/>
-              </a:spcAft>
-            </a:pPr>
-            <a:r>
-              <a:rPr sz="1400">
-                <a:solidFill>
-                  <a:srgbClr val="6D8C97"/>
-                </a:solidFill>
-                <a:latin typeface="Consolas"/>
-              </a:rPr>
-              <a:t>  72  </a:t>
-            </a:r>
-            <a:r>
-              <a:rPr sz="1400">
-                <a:solidFill>
-                  <a:srgbClr val="7FE0A0"/>
-                </a:solidFill>
-                <a:latin typeface="Consolas"/>
-              </a:rPr>
-              <a:t>    size -= dropped.content.length;</a:t>
-            </a:r>
-          </a:p>
-          <a:p>
-            <a:pPr>
-              <a:spcAft>
-                <a:spcPts val="0"/>
-              </a:spcAft>
-            </a:pPr>
-            <a:r>
-              <a:rPr sz="1400">
-                <a:solidFill>
-                  <a:srgbClr val="6D8C97"/>
-                </a:solidFill>
-                <a:latin typeface="Consolas"/>
-              </a:rPr>
-              <a:t>  73  </a:t>
-            </a:r>
-            <a:r>
-              <a:rPr sz="1400">
-                <a:solidFill>
-                  <a:srgbClr val="7FE0A0"/>
-                </a:solidFill>
-                <a:latin typeface="Consolas"/>
-              </a:rPr>
-              <a:t>    console.log('Forgot an old message to stay under the limit.');</a:t>
+              </a:rPr>
+              <a:t>let (not const) because size will change. Start it at the length of the personality text.</a:t>
             </a:r>
           </a:p>
         </p:txBody>
@@ -3629,6 +3477,136 @@
 </file>
 
 <file path=ppt/slides/slide11.xml><?xml version="1.0" encoding="utf-8"?>
+<p:sld xmlns:a="http://schemas.openxmlformats.org/drawingml/2006/main" xmlns:p="http://schemas.openxmlformats.org/presentationml/2006/main" xmlns:r="http://schemas.openxmlformats.org/officeDocument/2006/relationships">
+  <p:cSld>
+    <p:spTree>
+      <p:nvGrpSpPr>
+        <p:cNvPr id="1" name=""/>
+        <p:cNvGrpSpPr/>
+        <p:nvPr/>
+      </p:nvGrpSpPr>
+      <p:grpSpPr/>
+      <p:sp>
+        <p:nvSpPr>
+          <p:cNvPr id="2" name="Title 1"/>
+          <p:cNvSpPr>
+            <a:spLocks noGrp="1"/>
+          </p:cNvSpPr>
+          <p:nvPr>
+            <p:ph type="title"/>
+          </p:nvPr>
+        </p:nvSpPr>
+        <p:spPr/>
+        <p:txBody>
+          <a:bodyPr/>
+          <a:lstStyle/>
+          <a:p>
+            <a:r>
+              <a:rPr sz="3800" b="1">
+                <a:solidFill>
+                  <a:srgbClr val="1F2A37"/>
+                </a:solidFill>
+              </a:rPr>
+              <a:t>for ... of</a:t>
+            </a:r>
+          </a:p>
+        </p:txBody>
+      </p:sp>
+      <p:sp>
+        <p:nvSpPr>
+          <p:cNvPr id="3" name="TextBox 2"/>
+          <p:cNvSpPr txBox="1"/>
+          <p:nvPr/>
+        </p:nvSpPr>
+        <p:spPr>
+          <a:xfrm>
+            <a:off x="868680" y="502920"/>
+            <a:ext cx="5486400" cy="457200"/>
+          </a:xfrm>
+          <a:prstGeom prst="rect">
+            <a:avLst/>
+          </a:prstGeom>
+          <a:noFill/>
+        </p:spPr>
+        <p:txBody>
+          <a:bodyPr wrap="none">
+            <a:spAutoFit/>
+          </a:bodyPr>
+          <a:lstStyle/>
+          <a:p>
+            <a:r>
+              <a:rPr sz="1500" b="1">
+                <a:solidFill>
+                  <a:srgbClr val="01AEFD"/>
+                </a:solidFill>
+              </a:rPr>
+              <a:t>JAVASCRIPT</a:t>
+            </a:r>
+          </a:p>
+        </p:txBody>
+      </p:sp>
+      <p:sp>
+        <p:nvSpPr>
+          <p:cNvPr id="4" name="TextBox 3"/>
+          <p:cNvSpPr txBox="1"/>
+          <p:nvPr/>
+        </p:nvSpPr>
+        <p:spPr>
+          <a:xfrm>
+            <a:off x="822960" y="1828800"/>
+            <a:ext cx="10515600" cy="4206240"/>
+          </a:xfrm>
+          <a:prstGeom prst="rect">
+            <a:avLst/>
+          </a:prstGeom>
+          <a:noFill/>
+        </p:spPr>
+        <p:txBody>
+          <a:bodyPr wrap="square">
+            <a:spAutoFit/>
+          </a:bodyPr>
+          <a:lstStyle/>
+          <a:p>
+            <a:pPr>
+              <a:spcAft>
+                <a:spcPts val="1400"/>
+              </a:spcAft>
+            </a:pPr>
+            <a:r>
+              <a:rPr sz="2400">
+                <a:solidFill>
+                  <a:srgbClr val="1F2A37"/>
+                </a:solidFill>
+              </a:rPr>
+              <a:t>• Runs the same steps once for EACH item in a list.</a:t>
+            </a:r>
+          </a:p>
+          <a:p>
+            <a:pPr>
+              <a:spcAft>
+                <a:spcPts val="1400"/>
+              </a:spcAft>
+            </a:pPr>
+            <a:r>
+              <a:rPr sz="2400">
+                <a:solidFill>
+                  <a:srgbClr val="1F2A37"/>
+                </a:solidFill>
+              </a:rPr>
+              <a:t>• message becomes each item in turn.</a:t>
+            </a:r>
+          </a:p>
+        </p:txBody>
+      </p:sp>
+    </p:spTree>
+  </p:cSld>
+  <p:clrMapOvr>
+    <a:masterClrMapping/>
+  </p:clrMapOvr>
+</p:sld>
+</file>
+
+<file path=ppt/slides/slide12.xml><?xml version="1.0" encoding="utf-8"?>
 <p:sld xmlns:a="http://schemas.openxmlformats.org/drawingml/2006/main" xmlns:p="http://schemas.openxmlformats.org/presentationml/2006/main" xmlns:r="http://schemas.openxmlformats.org/officeDocument/2006/relationships">
   <p:cSld>
     <p:bg>
@@ -3655,7 +3633,7 @@
         <p:spPr>
           <a:xfrm>
             <a:off x="502920" y="274320"/>
-            <a:ext cx="11155680" cy="731520"/>
+            <a:ext cx="11155680" cy="548640"/>
           </a:xfrm>
           <a:prstGeom prst="rect">
             <a:avLst/>
@@ -3669,12 +3647,12 @@
           <a:lstStyle/>
           <a:p>
             <a:r>
-              <a:rPr sz="2600" b="1">
+              <a:rPr sz="2200" b="1">
                 <a:solidFill>
                   <a:srgbClr val="01AEFD"/>
                 </a:solidFill>
               </a:rPr>
-              <a:t>Type this into script.js  (2 of 2)</a:t>
+              <a:t>Type this into script.js   -   line 66</a:t>
             </a:r>
           </a:p>
         </p:txBody>
@@ -3687,8 +3665,8 @@
         </p:nvSpPr>
         <p:spPr>
           <a:xfrm>
-            <a:off x="502920" y="1051560"/>
-            <a:ext cx="11155680" cy="5394960"/>
+            <a:off x="502920" y="960120"/>
+            <a:ext cx="11155680" cy="4297680"/>
           </a:xfrm>
           <a:prstGeom prst="rect">
             <a:avLst/>
@@ -3707,47 +3685,230 @@
               </a:spcAft>
             </a:pPr>
             <a:r>
-              <a:rPr sz="1700">
-                <a:solidFill>
-                  <a:srgbClr val="6D8C97"/>
-                </a:solidFill>
-                <a:latin typeface="Consolas"/>
-              </a:rPr>
-              <a:t>  74  </a:t>
-            </a:r>
-            <a:r>
-              <a:rPr sz="1700">
+              <a:rPr sz="1800">
+                <a:solidFill>
+                  <a:srgbClr val="6D8C97"/>
+                </a:solidFill>
+                <a:latin typeface="Consolas"/>
+              </a:rPr>
+              <a:t>  59  </a:t>
+            </a:r>
+            <a:r>
+              <a:rPr sz="1800">
+                <a:solidFill>
+                  <a:srgbClr val="6D8C97"/>
+                </a:solidFill>
+                <a:latin typeface="Consolas"/>
+              </a:rPr>
+              <a:t> </a:t>
+            </a:r>
+          </a:p>
+          <a:p>
+            <a:pPr>
+              <a:spcAft>
+                <a:spcPts val="0"/>
+              </a:spcAft>
+            </a:pPr>
+            <a:r>
+              <a:rPr sz="1800">
+                <a:solidFill>
+                  <a:srgbClr val="6D8C97"/>
+                </a:solidFill>
+                <a:latin typeface="Consolas"/>
+              </a:rPr>
+              <a:t>  60  </a:t>
+            </a:r>
+            <a:r>
+              <a:rPr sz="1800">
+                <a:solidFill>
+                  <a:srgbClr val="6D8C97"/>
+                </a:solidFill>
+                <a:latin typeface="Consolas"/>
+              </a:rPr>
+              <a:t>// Week 8: the server reads at most 4000 characters of conversation at once.</a:t>
+            </a:r>
+          </a:p>
+          <a:p>
+            <a:pPr>
+              <a:spcAft>
+                <a:spcPts val="0"/>
+              </a:spcAft>
+            </a:pPr>
+            <a:r>
+              <a:rPr sz="1800">
+                <a:solidFill>
+                  <a:srgbClr val="6D8C97"/>
+                </a:solidFill>
+                <a:latin typeface="Consolas"/>
+              </a:rPr>
+              <a:t>  61  </a:t>
+            </a:r>
+            <a:r>
+              <a:rPr sz="1800">
+                <a:solidFill>
+                  <a:srgbClr val="6D8C97"/>
+                </a:solidFill>
+                <a:latin typeface="Consolas"/>
+              </a:rPr>
+              <a:t>// Past that it refuses the whole request, so old messages have to go.</a:t>
+            </a:r>
+          </a:p>
+          <a:p>
+            <a:pPr>
+              <a:spcAft>
+                <a:spcPts val="0"/>
+              </a:spcAft>
+            </a:pPr>
+            <a:r>
+              <a:rPr sz="1800">
+                <a:solidFill>
+                  <a:srgbClr val="6D8C97"/>
+                </a:solidFill>
+                <a:latin typeface="Consolas"/>
+              </a:rPr>
+              <a:t>  62  </a:t>
+            </a:r>
+            <a:r>
+              <a:rPr sz="1800">
+                <a:solidFill>
+                  <a:srgbClr val="6D8C97"/>
+                </a:solidFill>
+                <a:latin typeface="Consolas"/>
+              </a:rPr>
+              <a:t>const MAX_CHARS = 3500;   // leave room for the personality and your next line</a:t>
+            </a:r>
+          </a:p>
+          <a:p>
+            <a:pPr>
+              <a:spcAft>
+                <a:spcPts val="0"/>
+              </a:spcAft>
+            </a:pPr>
+            <a:r>
+              <a:rPr sz="1800">
+                <a:solidFill>
+                  <a:srgbClr val="6D8C97"/>
+                </a:solidFill>
+                <a:latin typeface="Consolas"/>
+              </a:rPr>
+              <a:t>  63  </a:t>
+            </a:r>
+            <a:r>
+              <a:rPr sz="1800">
+                <a:solidFill>
+                  <a:srgbClr val="6D8C97"/>
+                </a:solidFill>
+                <a:latin typeface="Consolas"/>
+              </a:rPr>
+              <a:t> </a:t>
+            </a:r>
+          </a:p>
+          <a:p>
+            <a:pPr>
+              <a:spcAft>
+                <a:spcPts val="0"/>
+              </a:spcAft>
+            </a:pPr>
+            <a:r>
+              <a:rPr sz="1800">
+                <a:solidFill>
+                  <a:srgbClr val="6D8C97"/>
+                </a:solidFill>
+                <a:latin typeface="Consolas"/>
+              </a:rPr>
+              <a:t>  64  </a:t>
+            </a:r>
+            <a:r>
+              <a:rPr sz="1800">
+                <a:solidFill>
+                  <a:srgbClr val="6D8C97"/>
+                </a:solidFill>
+                <a:latin typeface="Consolas"/>
+              </a:rPr>
+              <a:t>function trimHistory() {</a:t>
+            </a:r>
+          </a:p>
+          <a:p>
+            <a:pPr>
+              <a:spcAft>
+                <a:spcPts val="0"/>
+              </a:spcAft>
+            </a:pPr>
+            <a:r>
+              <a:rPr sz="1800">
+                <a:solidFill>
+                  <a:srgbClr val="6D8C97"/>
+                </a:solidFill>
+                <a:latin typeface="Consolas"/>
+              </a:rPr>
+              <a:t>  65  </a:t>
+            </a:r>
+            <a:r>
+              <a:rPr sz="1800">
+                <a:solidFill>
+                  <a:srgbClr val="6D8C97"/>
+                </a:solidFill>
+                <a:latin typeface="Consolas"/>
+              </a:rPr>
+              <a:t>  let size = personaBox.value.length;</a:t>
+            </a:r>
+          </a:p>
+          <a:p>
+            <a:pPr>
+              <a:spcAft>
+                <a:spcPts val="0"/>
+              </a:spcAft>
+            </a:pPr>
+            <a:r>
+              <a:rPr sz="1800">
+                <a:solidFill>
+                  <a:srgbClr val="6D8C97"/>
+                </a:solidFill>
+                <a:latin typeface="Consolas"/>
+              </a:rPr>
+              <a:t>  66  </a:t>
+            </a:r>
+            <a:r>
+              <a:rPr sz="1800">
                 <a:solidFill>
                   <a:srgbClr val="7FE0A0"/>
                 </a:solidFill>
                 <a:latin typeface="Consolas"/>
               </a:rPr>
-              <a:t>  }</a:t>
-            </a:r>
-          </a:p>
-          <a:p>
-            <a:pPr>
-              <a:spcAft>
-                <a:spcPts val="0"/>
-              </a:spcAft>
-            </a:pPr>
-            <a:r>
-              <a:rPr sz="1700">
-                <a:solidFill>
-                  <a:srgbClr val="6D8C97"/>
-                </a:solidFill>
-                <a:latin typeface="Consolas"/>
-              </a:rPr>
-              <a:t>  75  </a:t>
-            </a:r>
-            <a:r>
-              <a:rPr sz="1700">
-                <a:solidFill>
-                  <a:srgbClr val="7FE0A0"/>
-                </a:solidFill>
-                <a:latin typeface="Consolas"/>
-              </a:rPr>
-              <a:t>}</a:t>
+              <a:t>  for (const message of history) {</a:t>
+            </a:r>
+          </a:p>
+        </p:txBody>
+      </p:sp>
+      <p:sp>
+        <p:nvSpPr>
+          <p:cNvPr id="4" name="TextBox 3"/>
+          <p:cNvSpPr txBox="1"/>
+          <p:nvPr/>
+        </p:nvSpPr>
+        <p:spPr>
+          <a:xfrm>
+            <a:off x="548640" y="5623560"/>
+            <a:ext cx="11064240" cy="1051560"/>
+          </a:xfrm>
+          <a:prstGeom prst="rect">
+            <a:avLst/>
+          </a:prstGeom>
+          <a:noFill/>
+        </p:spPr>
+        <p:txBody>
+          <a:bodyPr wrap="square">
+            <a:spAutoFit/>
+          </a:bodyPr>
+          <a:lstStyle/>
+          <a:p>
+            <a:r>
+              <a:rPr sz="2000">
+                <a:solidFill>
+                  <a:srgbClr val="DCECEF"/>
+                </a:solidFill>
+              </a:rPr>
+              <a:t>for...of runs the next lines once for each message in history.</a:t>
             </a:r>
           </a:p>
         </p:txBody>
@@ -3760,7 +3921,712 @@
 </p:sld>
 </file>
 
-<file path=ppt/slides/slide12.xml><?xml version="1.0" encoding="utf-8"?>
+<file path=ppt/slides/slide13.xml><?xml version="1.0" encoding="utf-8"?>
+<p:sld xmlns:a="http://schemas.openxmlformats.org/drawingml/2006/main" xmlns:p="http://schemas.openxmlformats.org/presentationml/2006/main" xmlns:r="http://schemas.openxmlformats.org/officeDocument/2006/relationships">
+  <p:cSld>
+    <p:bg>
+      <p:bgPr>
+        <a:solidFill>
+          <a:srgbClr val="102127"/>
+        </a:solidFill>
+        <a:effectLst/>
+      </p:bgPr>
+    </p:bg>
+    <p:spTree>
+      <p:nvGrpSpPr>
+        <p:cNvPr id="1" name=""/>
+        <p:cNvGrpSpPr/>
+        <p:nvPr/>
+      </p:nvGrpSpPr>
+      <p:grpSpPr/>
+      <p:sp>
+        <p:nvSpPr>
+          <p:cNvPr id="2" name="TextBox 1"/>
+          <p:cNvSpPr txBox="1"/>
+          <p:nvPr/>
+        </p:nvSpPr>
+        <p:spPr>
+          <a:xfrm>
+            <a:off x="502920" y="274320"/>
+            <a:ext cx="11155680" cy="548640"/>
+          </a:xfrm>
+          <a:prstGeom prst="rect">
+            <a:avLst/>
+          </a:prstGeom>
+          <a:noFill/>
+        </p:spPr>
+        <p:txBody>
+          <a:bodyPr wrap="none">
+            <a:spAutoFit/>
+          </a:bodyPr>
+          <a:lstStyle/>
+          <a:p>
+            <a:r>
+              <a:rPr sz="2200" b="1">
+                <a:solidFill>
+                  <a:srgbClr val="01AEFD"/>
+                </a:solidFill>
+              </a:rPr>
+              <a:t>Type this into script.js   -   line 67</a:t>
+            </a:r>
+          </a:p>
+        </p:txBody>
+      </p:sp>
+      <p:sp>
+        <p:nvSpPr>
+          <p:cNvPr id="3" name="TextBox 2"/>
+          <p:cNvSpPr txBox="1"/>
+          <p:nvPr/>
+        </p:nvSpPr>
+        <p:spPr>
+          <a:xfrm>
+            <a:off x="502920" y="960120"/>
+            <a:ext cx="11155680" cy="4297680"/>
+          </a:xfrm>
+          <a:prstGeom prst="rect">
+            <a:avLst/>
+          </a:prstGeom>
+          <a:noFill/>
+        </p:spPr>
+        <p:txBody>
+          <a:bodyPr wrap="none">
+            <a:spAutoFit/>
+          </a:bodyPr>
+          <a:lstStyle/>
+          <a:p>
+            <a:pPr>
+              <a:spcAft>
+                <a:spcPts val="0"/>
+              </a:spcAft>
+            </a:pPr>
+            <a:r>
+              <a:rPr sz="1800">
+                <a:solidFill>
+                  <a:srgbClr val="6D8C97"/>
+                </a:solidFill>
+                <a:latin typeface="Consolas"/>
+              </a:rPr>
+              <a:t>  59  </a:t>
+            </a:r>
+            <a:r>
+              <a:rPr sz="1800">
+                <a:solidFill>
+                  <a:srgbClr val="6D8C97"/>
+                </a:solidFill>
+                <a:latin typeface="Consolas"/>
+              </a:rPr>
+              <a:t> </a:t>
+            </a:r>
+          </a:p>
+          <a:p>
+            <a:pPr>
+              <a:spcAft>
+                <a:spcPts val="0"/>
+              </a:spcAft>
+            </a:pPr>
+            <a:r>
+              <a:rPr sz="1800">
+                <a:solidFill>
+                  <a:srgbClr val="6D8C97"/>
+                </a:solidFill>
+                <a:latin typeface="Consolas"/>
+              </a:rPr>
+              <a:t>  60  </a:t>
+            </a:r>
+            <a:r>
+              <a:rPr sz="1800">
+                <a:solidFill>
+                  <a:srgbClr val="6D8C97"/>
+                </a:solidFill>
+                <a:latin typeface="Consolas"/>
+              </a:rPr>
+              <a:t>// Week 8: the server reads at most 4000 characters of conversation at once.</a:t>
+            </a:r>
+          </a:p>
+          <a:p>
+            <a:pPr>
+              <a:spcAft>
+                <a:spcPts val="0"/>
+              </a:spcAft>
+            </a:pPr>
+            <a:r>
+              <a:rPr sz="1800">
+                <a:solidFill>
+                  <a:srgbClr val="6D8C97"/>
+                </a:solidFill>
+                <a:latin typeface="Consolas"/>
+              </a:rPr>
+              <a:t>  61  </a:t>
+            </a:r>
+            <a:r>
+              <a:rPr sz="1800">
+                <a:solidFill>
+                  <a:srgbClr val="6D8C97"/>
+                </a:solidFill>
+                <a:latin typeface="Consolas"/>
+              </a:rPr>
+              <a:t>// Past that it refuses the whole request, so old messages have to go.</a:t>
+            </a:r>
+          </a:p>
+          <a:p>
+            <a:pPr>
+              <a:spcAft>
+                <a:spcPts val="0"/>
+              </a:spcAft>
+            </a:pPr>
+            <a:r>
+              <a:rPr sz="1800">
+                <a:solidFill>
+                  <a:srgbClr val="6D8C97"/>
+                </a:solidFill>
+                <a:latin typeface="Consolas"/>
+              </a:rPr>
+              <a:t>  62  </a:t>
+            </a:r>
+            <a:r>
+              <a:rPr sz="1800">
+                <a:solidFill>
+                  <a:srgbClr val="6D8C97"/>
+                </a:solidFill>
+                <a:latin typeface="Consolas"/>
+              </a:rPr>
+              <a:t>const MAX_CHARS = 3500;   // leave room for the personality and your next line</a:t>
+            </a:r>
+          </a:p>
+          <a:p>
+            <a:pPr>
+              <a:spcAft>
+                <a:spcPts val="0"/>
+              </a:spcAft>
+            </a:pPr>
+            <a:r>
+              <a:rPr sz="1800">
+                <a:solidFill>
+                  <a:srgbClr val="6D8C97"/>
+                </a:solidFill>
+                <a:latin typeface="Consolas"/>
+              </a:rPr>
+              <a:t>  63  </a:t>
+            </a:r>
+            <a:r>
+              <a:rPr sz="1800">
+                <a:solidFill>
+                  <a:srgbClr val="6D8C97"/>
+                </a:solidFill>
+                <a:latin typeface="Consolas"/>
+              </a:rPr>
+              <a:t> </a:t>
+            </a:r>
+          </a:p>
+          <a:p>
+            <a:pPr>
+              <a:spcAft>
+                <a:spcPts val="0"/>
+              </a:spcAft>
+            </a:pPr>
+            <a:r>
+              <a:rPr sz="1800">
+                <a:solidFill>
+                  <a:srgbClr val="6D8C97"/>
+                </a:solidFill>
+                <a:latin typeface="Consolas"/>
+              </a:rPr>
+              <a:t>  64  </a:t>
+            </a:r>
+            <a:r>
+              <a:rPr sz="1800">
+                <a:solidFill>
+                  <a:srgbClr val="6D8C97"/>
+                </a:solidFill>
+                <a:latin typeface="Consolas"/>
+              </a:rPr>
+              <a:t>function trimHistory() {</a:t>
+            </a:r>
+          </a:p>
+          <a:p>
+            <a:pPr>
+              <a:spcAft>
+                <a:spcPts val="0"/>
+              </a:spcAft>
+            </a:pPr>
+            <a:r>
+              <a:rPr sz="1800">
+                <a:solidFill>
+                  <a:srgbClr val="6D8C97"/>
+                </a:solidFill>
+                <a:latin typeface="Consolas"/>
+              </a:rPr>
+              <a:t>  65  </a:t>
+            </a:r>
+            <a:r>
+              <a:rPr sz="1800">
+                <a:solidFill>
+                  <a:srgbClr val="6D8C97"/>
+                </a:solidFill>
+                <a:latin typeface="Consolas"/>
+              </a:rPr>
+              <a:t>  let size = personaBox.value.length;</a:t>
+            </a:r>
+          </a:p>
+          <a:p>
+            <a:pPr>
+              <a:spcAft>
+                <a:spcPts val="0"/>
+              </a:spcAft>
+            </a:pPr>
+            <a:r>
+              <a:rPr sz="1800">
+                <a:solidFill>
+                  <a:srgbClr val="6D8C97"/>
+                </a:solidFill>
+                <a:latin typeface="Consolas"/>
+              </a:rPr>
+              <a:t>  66  </a:t>
+            </a:r>
+            <a:r>
+              <a:rPr sz="1800">
+                <a:solidFill>
+                  <a:srgbClr val="6D8C97"/>
+                </a:solidFill>
+                <a:latin typeface="Consolas"/>
+              </a:rPr>
+              <a:t>  for (const message of history) {</a:t>
+            </a:r>
+          </a:p>
+          <a:p>
+            <a:pPr>
+              <a:spcAft>
+                <a:spcPts val="0"/>
+              </a:spcAft>
+            </a:pPr>
+            <a:r>
+              <a:rPr sz="1800">
+                <a:solidFill>
+                  <a:srgbClr val="6D8C97"/>
+                </a:solidFill>
+                <a:latin typeface="Consolas"/>
+              </a:rPr>
+              <a:t>  67  </a:t>
+            </a:r>
+            <a:r>
+              <a:rPr sz="1800">
+                <a:solidFill>
+                  <a:srgbClr val="7FE0A0"/>
+                </a:solidFill>
+                <a:latin typeface="Consolas"/>
+              </a:rPr>
+              <a:t>    size += message.content.length;</a:t>
+            </a:r>
+          </a:p>
+        </p:txBody>
+      </p:sp>
+      <p:sp>
+        <p:nvSpPr>
+          <p:cNvPr id="4" name="TextBox 3"/>
+          <p:cNvSpPr txBox="1"/>
+          <p:nvPr/>
+        </p:nvSpPr>
+        <p:spPr>
+          <a:xfrm>
+            <a:off x="548640" y="5623560"/>
+            <a:ext cx="11064240" cy="1051560"/>
+          </a:xfrm>
+          <a:prstGeom prst="rect">
+            <a:avLst/>
+          </a:prstGeom>
+          <a:noFill/>
+        </p:spPr>
+        <p:txBody>
+          <a:bodyPr wrap="square">
+            <a:spAutoFit/>
+          </a:bodyPr>
+          <a:lstStyle/>
+          <a:p>
+            <a:r>
+              <a:rPr sz="2000">
+                <a:solidFill>
+                  <a:srgbClr val="DCECEF"/>
+                </a:solidFill>
+              </a:rPr>
+              <a:t>Add that message's length to the running total. += means 'add this onto what is already there'.</a:t>
+            </a:r>
+          </a:p>
+        </p:txBody>
+      </p:sp>
+    </p:spTree>
+  </p:cSld>
+  <p:clrMapOvr>
+    <a:masterClrMapping/>
+  </p:clrMapOvr>
+</p:sld>
+</file>
+
+<file path=ppt/slides/slide14.xml><?xml version="1.0" encoding="utf-8"?>
+<p:sld xmlns:a="http://schemas.openxmlformats.org/drawingml/2006/main" xmlns:p="http://schemas.openxmlformats.org/presentationml/2006/main" xmlns:r="http://schemas.openxmlformats.org/officeDocument/2006/relationships">
+  <p:cSld>
+    <p:bg>
+      <p:bgPr>
+        <a:solidFill>
+          <a:srgbClr val="102127"/>
+        </a:solidFill>
+        <a:effectLst/>
+      </p:bgPr>
+    </p:bg>
+    <p:spTree>
+      <p:nvGrpSpPr>
+        <p:cNvPr id="1" name=""/>
+        <p:cNvGrpSpPr/>
+        <p:nvPr/>
+      </p:nvGrpSpPr>
+      <p:grpSpPr/>
+      <p:sp>
+        <p:nvSpPr>
+          <p:cNvPr id="2" name="TextBox 1"/>
+          <p:cNvSpPr txBox="1"/>
+          <p:nvPr/>
+        </p:nvSpPr>
+        <p:spPr>
+          <a:xfrm>
+            <a:off x="502920" y="274320"/>
+            <a:ext cx="11155680" cy="548640"/>
+          </a:xfrm>
+          <a:prstGeom prst="rect">
+            <a:avLst/>
+          </a:prstGeom>
+          <a:noFill/>
+        </p:spPr>
+        <p:txBody>
+          <a:bodyPr wrap="none">
+            <a:spAutoFit/>
+          </a:bodyPr>
+          <a:lstStyle/>
+          <a:p>
+            <a:r>
+              <a:rPr sz="2200" b="1">
+                <a:solidFill>
+                  <a:srgbClr val="01AEFD"/>
+                </a:solidFill>
+              </a:rPr>
+              <a:t>Type this into script.js   -   line 68</a:t>
+            </a:r>
+          </a:p>
+        </p:txBody>
+      </p:sp>
+      <p:sp>
+        <p:nvSpPr>
+          <p:cNvPr id="3" name="TextBox 2"/>
+          <p:cNvSpPr txBox="1"/>
+          <p:nvPr/>
+        </p:nvSpPr>
+        <p:spPr>
+          <a:xfrm>
+            <a:off x="502920" y="960120"/>
+            <a:ext cx="11155680" cy="4297680"/>
+          </a:xfrm>
+          <a:prstGeom prst="rect">
+            <a:avLst/>
+          </a:prstGeom>
+          <a:noFill/>
+        </p:spPr>
+        <p:txBody>
+          <a:bodyPr wrap="none">
+            <a:spAutoFit/>
+          </a:bodyPr>
+          <a:lstStyle/>
+          <a:p>
+            <a:pPr>
+              <a:spcAft>
+                <a:spcPts val="0"/>
+              </a:spcAft>
+            </a:pPr>
+            <a:r>
+              <a:rPr sz="1800">
+                <a:solidFill>
+                  <a:srgbClr val="6D8C97"/>
+                </a:solidFill>
+                <a:latin typeface="Consolas"/>
+              </a:rPr>
+              <a:t>  59  </a:t>
+            </a:r>
+            <a:r>
+              <a:rPr sz="1800">
+                <a:solidFill>
+                  <a:srgbClr val="6D8C97"/>
+                </a:solidFill>
+                <a:latin typeface="Consolas"/>
+              </a:rPr>
+              <a:t> </a:t>
+            </a:r>
+          </a:p>
+          <a:p>
+            <a:pPr>
+              <a:spcAft>
+                <a:spcPts val="0"/>
+              </a:spcAft>
+            </a:pPr>
+            <a:r>
+              <a:rPr sz="1800">
+                <a:solidFill>
+                  <a:srgbClr val="6D8C97"/>
+                </a:solidFill>
+                <a:latin typeface="Consolas"/>
+              </a:rPr>
+              <a:t>  60  </a:t>
+            </a:r>
+            <a:r>
+              <a:rPr sz="1800">
+                <a:solidFill>
+                  <a:srgbClr val="6D8C97"/>
+                </a:solidFill>
+                <a:latin typeface="Consolas"/>
+              </a:rPr>
+              <a:t>// Week 8: the server reads at most 4000 characters of conversation at once.</a:t>
+            </a:r>
+          </a:p>
+          <a:p>
+            <a:pPr>
+              <a:spcAft>
+                <a:spcPts val="0"/>
+              </a:spcAft>
+            </a:pPr>
+            <a:r>
+              <a:rPr sz="1800">
+                <a:solidFill>
+                  <a:srgbClr val="6D8C97"/>
+                </a:solidFill>
+                <a:latin typeface="Consolas"/>
+              </a:rPr>
+              <a:t>  61  </a:t>
+            </a:r>
+            <a:r>
+              <a:rPr sz="1800">
+                <a:solidFill>
+                  <a:srgbClr val="6D8C97"/>
+                </a:solidFill>
+                <a:latin typeface="Consolas"/>
+              </a:rPr>
+              <a:t>// Past that it refuses the whole request, so old messages have to go.</a:t>
+            </a:r>
+          </a:p>
+          <a:p>
+            <a:pPr>
+              <a:spcAft>
+                <a:spcPts val="0"/>
+              </a:spcAft>
+            </a:pPr>
+            <a:r>
+              <a:rPr sz="1800">
+                <a:solidFill>
+                  <a:srgbClr val="6D8C97"/>
+                </a:solidFill>
+                <a:latin typeface="Consolas"/>
+              </a:rPr>
+              <a:t>  62  </a:t>
+            </a:r>
+            <a:r>
+              <a:rPr sz="1800">
+                <a:solidFill>
+                  <a:srgbClr val="6D8C97"/>
+                </a:solidFill>
+                <a:latin typeface="Consolas"/>
+              </a:rPr>
+              <a:t>const MAX_CHARS = 3500;   // leave room for the personality and your next line</a:t>
+            </a:r>
+          </a:p>
+          <a:p>
+            <a:pPr>
+              <a:spcAft>
+                <a:spcPts val="0"/>
+              </a:spcAft>
+            </a:pPr>
+            <a:r>
+              <a:rPr sz="1800">
+                <a:solidFill>
+                  <a:srgbClr val="6D8C97"/>
+                </a:solidFill>
+                <a:latin typeface="Consolas"/>
+              </a:rPr>
+              <a:t>  63  </a:t>
+            </a:r>
+            <a:r>
+              <a:rPr sz="1800">
+                <a:solidFill>
+                  <a:srgbClr val="6D8C97"/>
+                </a:solidFill>
+                <a:latin typeface="Consolas"/>
+              </a:rPr>
+              <a:t> </a:t>
+            </a:r>
+          </a:p>
+          <a:p>
+            <a:pPr>
+              <a:spcAft>
+                <a:spcPts val="0"/>
+              </a:spcAft>
+            </a:pPr>
+            <a:r>
+              <a:rPr sz="1800">
+                <a:solidFill>
+                  <a:srgbClr val="6D8C97"/>
+                </a:solidFill>
+                <a:latin typeface="Consolas"/>
+              </a:rPr>
+              <a:t>  64  </a:t>
+            </a:r>
+            <a:r>
+              <a:rPr sz="1800">
+                <a:solidFill>
+                  <a:srgbClr val="6D8C97"/>
+                </a:solidFill>
+                <a:latin typeface="Consolas"/>
+              </a:rPr>
+              <a:t>function trimHistory() {</a:t>
+            </a:r>
+          </a:p>
+          <a:p>
+            <a:pPr>
+              <a:spcAft>
+                <a:spcPts val="0"/>
+              </a:spcAft>
+            </a:pPr>
+            <a:r>
+              <a:rPr sz="1800">
+                <a:solidFill>
+                  <a:srgbClr val="6D8C97"/>
+                </a:solidFill>
+                <a:latin typeface="Consolas"/>
+              </a:rPr>
+              <a:t>  65  </a:t>
+            </a:r>
+            <a:r>
+              <a:rPr sz="1800">
+                <a:solidFill>
+                  <a:srgbClr val="6D8C97"/>
+                </a:solidFill>
+                <a:latin typeface="Consolas"/>
+              </a:rPr>
+              <a:t>  let size = personaBox.value.length;</a:t>
+            </a:r>
+          </a:p>
+          <a:p>
+            <a:pPr>
+              <a:spcAft>
+                <a:spcPts val="0"/>
+              </a:spcAft>
+            </a:pPr>
+            <a:r>
+              <a:rPr sz="1800">
+                <a:solidFill>
+                  <a:srgbClr val="6D8C97"/>
+                </a:solidFill>
+                <a:latin typeface="Consolas"/>
+              </a:rPr>
+              <a:t>  66  </a:t>
+            </a:r>
+            <a:r>
+              <a:rPr sz="1800">
+                <a:solidFill>
+                  <a:srgbClr val="6D8C97"/>
+                </a:solidFill>
+                <a:latin typeface="Consolas"/>
+              </a:rPr>
+              <a:t>  for (const message of history) {</a:t>
+            </a:r>
+          </a:p>
+          <a:p>
+            <a:pPr>
+              <a:spcAft>
+                <a:spcPts val="0"/>
+              </a:spcAft>
+            </a:pPr>
+            <a:r>
+              <a:rPr sz="1800">
+                <a:solidFill>
+                  <a:srgbClr val="6D8C97"/>
+                </a:solidFill>
+                <a:latin typeface="Consolas"/>
+              </a:rPr>
+              <a:t>  67  </a:t>
+            </a:r>
+            <a:r>
+              <a:rPr sz="1800">
+                <a:solidFill>
+                  <a:srgbClr val="6D8C97"/>
+                </a:solidFill>
+                <a:latin typeface="Consolas"/>
+              </a:rPr>
+              <a:t>    size += message.content.length;</a:t>
+            </a:r>
+          </a:p>
+          <a:p>
+            <a:pPr>
+              <a:spcAft>
+                <a:spcPts val="0"/>
+              </a:spcAft>
+            </a:pPr>
+            <a:r>
+              <a:rPr sz="1800">
+                <a:solidFill>
+                  <a:srgbClr val="6D8C97"/>
+                </a:solidFill>
+                <a:latin typeface="Consolas"/>
+              </a:rPr>
+              <a:t>  68  </a:t>
+            </a:r>
+            <a:r>
+              <a:rPr sz="1800">
+                <a:solidFill>
+                  <a:srgbClr val="7FE0A0"/>
+                </a:solidFill>
+                <a:latin typeface="Consolas"/>
+              </a:rPr>
+              <a:t>  }</a:t>
+            </a:r>
+          </a:p>
+        </p:txBody>
+      </p:sp>
+      <p:sp>
+        <p:nvSpPr>
+          <p:cNvPr id="4" name="TextBox 3"/>
+          <p:cNvSpPr txBox="1"/>
+          <p:nvPr/>
+        </p:nvSpPr>
+        <p:spPr>
+          <a:xfrm>
+            <a:off x="548640" y="5623560"/>
+            <a:ext cx="11064240" cy="1051560"/>
+          </a:xfrm>
+          <a:prstGeom prst="rect">
+            <a:avLst/>
+          </a:prstGeom>
+          <a:noFill/>
+        </p:spPr>
+        <p:txBody>
+          <a:bodyPr wrap="square">
+            <a:spAutoFit/>
+          </a:bodyPr>
+          <a:lstStyle/>
+          <a:p>
+            <a:r>
+              <a:rPr sz="2000">
+                <a:solidFill>
+                  <a:srgbClr val="DCECEF"/>
+                </a:solidFill>
+              </a:rPr>
+              <a:t>Close the loop. Now size holds the whole conversation's length.</a:t>
+            </a:r>
+          </a:p>
+        </p:txBody>
+      </p:sp>
+    </p:spTree>
+  </p:cSld>
+  <p:clrMapOvr>
+    <a:masterClrMapping/>
+  </p:clrMapOvr>
+</p:sld>
+</file>
+
+<file path=ppt/slides/slide15.xml><?xml version="1.0" encoding="utf-8"?>
 <p:sld xmlns:a="http://schemas.openxmlformats.org/drawingml/2006/main" xmlns:p="http://schemas.openxmlformats.org/presentationml/2006/main" xmlns:r="http://schemas.openxmlformats.org/officeDocument/2006/relationships">
   <p:cSld>
     <p:spTree>
@@ -3791,7 +4657,7 @@
                   <a:srgbClr val="1F2A37"/>
                 </a:solidFill>
               </a:rPr>
-              <a:t>Watch it forget</a:t>
+              <a:t>while</a:t>
             </a:r>
           </a:p>
         </p:txBody>
@@ -3799,6 +4665,39 @@
       <p:sp>
         <p:nvSpPr>
           <p:cNvPr id="3" name="TextBox 2"/>
+          <p:cNvSpPr txBox="1"/>
+          <p:nvPr/>
+        </p:nvSpPr>
+        <p:spPr>
+          <a:xfrm>
+            <a:off x="868680" y="502920"/>
+            <a:ext cx="5486400" cy="457200"/>
+          </a:xfrm>
+          <a:prstGeom prst="rect">
+            <a:avLst/>
+          </a:prstGeom>
+          <a:noFill/>
+        </p:spPr>
+        <p:txBody>
+          <a:bodyPr wrap="none">
+            <a:spAutoFit/>
+          </a:bodyPr>
+          <a:lstStyle/>
+          <a:p>
+            <a:r>
+              <a:rPr sz="1500" b="1">
+                <a:solidFill>
+                  <a:srgbClr val="01AEFD"/>
+                </a:solidFill>
+              </a:rPr>
+              <a:t>JAVASCRIPT</a:t>
+            </a:r>
+          </a:p>
+        </p:txBody>
+      </p:sp>
+      <p:sp>
+        <p:nvSpPr>
+          <p:cNvPr id="4" name="TextBox 3"/>
           <p:cNvSpPr txBox="1"/>
           <p:nvPr/>
         </p:nvSpPr>
@@ -3829,7 +4728,7 @@
                   <a:srgbClr val="1F2A37"/>
                 </a:solidFill>
               </a:rPr>
-              <a:t>• Chat until the Console says it forgot</a:t>
+              <a:t>• Keeps repeating as long as its test stays true.</a:t>
             </a:r>
           </a:p>
           <a:p>
@@ -3844,9 +4743,524 @@
                   <a:srgbClr val="1F2A37"/>
                 </a:solidFill>
               </a:rPr>
-              <a:t>• Ask about the beginning</a:t>
-            </a:r>
-          </a:p>
+              <a:t>• Here: keep dropping messages until we are back under the limit.</a:t>
+            </a:r>
+          </a:p>
+        </p:txBody>
+      </p:sp>
+    </p:spTree>
+  </p:cSld>
+  <p:clrMapOvr>
+    <a:masterClrMapping/>
+  </p:clrMapOvr>
+</p:sld>
+</file>
+
+<file path=ppt/slides/slide16.xml><?xml version="1.0" encoding="utf-8"?>
+<p:sld xmlns:a="http://schemas.openxmlformats.org/drawingml/2006/main" xmlns:p="http://schemas.openxmlformats.org/presentationml/2006/main" xmlns:r="http://schemas.openxmlformats.org/officeDocument/2006/relationships">
+  <p:cSld>
+    <p:bg>
+      <p:bgPr>
+        <a:solidFill>
+          <a:srgbClr val="102127"/>
+        </a:solidFill>
+        <a:effectLst/>
+      </p:bgPr>
+    </p:bg>
+    <p:spTree>
+      <p:nvGrpSpPr>
+        <p:cNvPr id="1" name=""/>
+        <p:cNvGrpSpPr/>
+        <p:nvPr/>
+      </p:nvGrpSpPr>
+      <p:grpSpPr/>
+      <p:sp>
+        <p:nvSpPr>
+          <p:cNvPr id="2" name="TextBox 1"/>
+          <p:cNvSpPr txBox="1"/>
+          <p:nvPr/>
+        </p:nvSpPr>
+        <p:spPr>
+          <a:xfrm>
+            <a:off x="502920" y="274320"/>
+            <a:ext cx="11155680" cy="548640"/>
+          </a:xfrm>
+          <a:prstGeom prst="rect">
+            <a:avLst/>
+          </a:prstGeom>
+          <a:noFill/>
+        </p:spPr>
+        <p:txBody>
+          <a:bodyPr wrap="none">
+            <a:spAutoFit/>
+          </a:bodyPr>
+          <a:lstStyle/>
+          <a:p>
+            <a:r>
+              <a:rPr sz="2200" b="1">
+                <a:solidFill>
+                  <a:srgbClr val="01AEFD"/>
+                </a:solidFill>
+              </a:rPr>
+              <a:t>Type this into script.js   -   line 70</a:t>
+            </a:r>
+          </a:p>
+        </p:txBody>
+      </p:sp>
+      <p:sp>
+        <p:nvSpPr>
+          <p:cNvPr id="3" name="TextBox 2"/>
+          <p:cNvSpPr txBox="1"/>
+          <p:nvPr/>
+        </p:nvSpPr>
+        <p:spPr>
+          <a:xfrm>
+            <a:off x="502920" y="960120"/>
+            <a:ext cx="11155680" cy="4297680"/>
+          </a:xfrm>
+          <a:prstGeom prst="rect">
+            <a:avLst/>
+          </a:prstGeom>
+          <a:noFill/>
+        </p:spPr>
+        <p:txBody>
+          <a:bodyPr wrap="none">
+            <a:spAutoFit/>
+          </a:bodyPr>
+          <a:lstStyle/>
+          <a:p>
+            <a:pPr>
+              <a:spcAft>
+                <a:spcPts val="0"/>
+              </a:spcAft>
+            </a:pPr>
+            <a:r>
+              <a:rPr sz="1300">
+                <a:solidFill>
+                  <a:srgbClr val="6D8C97"/>
+                </a:solidFill>
+                <a:latin typeface="Consolas"/>
+              </a:rPr>
+              <a:t>  59  </a:t>
+            </a:r>
+            <a:r>
+              <a:rPr sz="1300">
+                <a:solidFill>
+                  <a:srgbClr val="6D8C97"/>
+                </a:solidFill>
+                <a:latin typeface="Consolas"/>
+              </a:rPr>
+              <a:t> </a:t>
+            </a:r>
+          </a:p>
+          <a:p>
+            <a:pPr>
+              <a:spcAft>
+                <a:spcPts val="0"/>
+              </a:spcAft>
+            </a:pPr>
+            <a:r>
+              <a:rPr sz="1300">
+                <a:solidFill>
+                  <a:srgbClr val="6D8C97"/>
+                </a:solidFill>
+                <a:latin typeface="Consolas"/>
+              </a:rPr>
+              <a:t>  60  </a:t>
+            </a:r>
+            <a:r>
+              <a:rPr sz="1300">
+                <a:solidFill>
+                  <a:srgbClr val="6D8C97"/>
+                </a:solidFill>
+                <a:latin typeface="Consolas"/>
+              </a:rPr>
+              <a:t>// Week 8: the server reads at most 4000 characters of conversation at once.</a:t>
+            </a:r>
+          </a:p>
+          <a:p>
+            <a:pPr>
+              <a:spcAft>
+                <a:spcPts val="0"/>
+              </a:spcAft>
+            </a:pPr>
+            <a:r>
+              <a:rPr sz="1300">
+                <a:solidFill>
+                  <a:srgbClr val="6D8C97"/>
+                </a:solidFill>
+                <a:latin typeface="Consolas"/>
+              </a:rPr>
+              <a:t>  61  </a:t>
+            </a:r>
+            <a:r>
+              <a:rPr sz="1300">
+                <a:solidFill>
+                  <a:srgbClr val="6D8C97"/>
+                </a:solidFill>
+                <a:latin typeface="Consolas"/>
+              </a:rPr>
+              <a:t>// Past that it refuses the whole request, so old messages have to go.</a:t>
+            </a:r>
+          </a:p>
+          <a:p>
+            <a:pPr>
+              <a:spcAft>
+                <a:spcPts val="0"/>
+              </a:spcAft>
+            </a:pPr>
+            <a:r>
+              <a:rPr sz="1300">
+                <a:solidFill>
+                  <a:srgbClr val="6D8C97"/>
+                </a:solidFill>
+                <a:latin typeface="Consolas"/>
+              </a:rPr>
+              <a:t>  62  </a:t>
+            </a:r>
+            <a:r>
+              <a:rPr sz="1300">
+                <a:solidFill>
+                  <a:srgbClr val="6D8C97"/>
+                </a:solidFill>
+                <a:latin typeface="Consolas"/>
+              </a:rPr>
+              <a:t>const MAX_CHARS = 3500;   // leave room for the personality and your next line</a:t>
+            </a:r>
+          </a:p>
+          <a:p>
+            <a:pPr>
+              <a:spcAft>
+                <a:spcPts val="0"/>
+              </a:spcAft>
+            </a:pPr>
+            <a:r>
+              <a:rPr sz="1300">
+                <a:solidFill>
+                  <a:srgbClr val="6D8C97"/>
+                </a:solidFill>
+                <a:latin typeface="Consolas"/>
+              </a:rPr>
+              <a:t>  63  </a:t>
+            </a:r>
+            <a:r>
+              <a:rPr sz="1300">
+                <a:solidFill>
+                  <a:srgbClr val="6D8C97"/>
+                </a:solidFill>
+                <a:latin typeface="Consolas"/>
+              </a:rPr>
+              <a:t> </a:t>
+            </a:r>
+          </a:p>
+          <a:p>
+            <a:pPr>
+              <a:spcAft>
+                <a:spcPts val="0"/>
+              </a:spcAft>
+            </a:pPr>
+            <a:r>
+              <a:rPr sz="1300">
+                <a:solidFill>
+                  <a:srgbClr val="6D8C97"/>
+                </a:solidFill>
+                <a:latin typeface="Consolas"/>
+              </a:rPr>
+              <a:t>  64  </a:t>
+            </a:r>
+            <a:r>
+              <a:rPr sz="1300">
+                <a:solidFill>
+                  <a:srgbClr val="6D8C97"/>
+                </a:solidFill>
+                <a:latin typeface="Consolas"/>
+              </a:rPr>
+              <a:t>function trimHistory() {</a:t>
+            </a:r>
+          </a:p>
+          <a:p>
+            <a:pPr>
+              <a:spcAft>
+                <a:spcPts val="0"/>
+              </a:spcAft>
+            </a:pPr>
+            <a:r>
+              <a:rPr sz="1300">
+                <a:solidFill>
+                  <a:srgbClr val="6D8C97"/>
+                </a:solidFill>
+                <a:latin typeface="Consolas"/>
+              </a:rPr>
+              <a:t>  65  </a:t>
+            </a:r>
+            <a:r>
+              <a:rPr sz="1300">
+                <a:solidFill>
+                  <a:srgbClr val="6D8C97"/>
+                </a:solidFill>
+                <a:latin typeface="Consolas"/>
+              </a:rPr>
+              <a:t>  let size = personaBox.value.length;</a:t>
+            </a:r>
+          </a:p>
+          <a:p>
+            <a:pPr>
+              <a:spcAft>
+                <a:spcPts val="0"/>
+              </a:spcAft>
+            </a:pPr>
+            <a:r>
+              <a:rPr sz="1300">
+                <a:solidFill>
+                  <a:srgbClr val="6D8C97"/>
+                </a:solidFill>
+                <a:latin typeface="Consolas"/>
+              </a:rPr>
+              <a:t>  66  </a:t>
+            </a:r>
+            <a:r>
+              <a:rPr sz="1300">
+                <a:solidFill>
+                  <a:srgbClr val="6D8C97"/>
+                </a:solidFill>
+                <a:latin typeface="Consolas"/>
+              </a:rPr>
+              <a:t>  for (const message of history) {</a:t>
+            </a:r>
+          </a:p>
+          <a:p>
+            <a:pPr>
+              <a:spcAft>
+                <a:spcPts val="0"/>
+              </a:spcAft>
+            </a:pPr>
+            <a:r>
+              <a:rPr sz="1300">
+                <a:solidFill>
+                  <a:srgbClr val="6D8C97"/>
+                </a:solidFill>
+                <a:latin typeface="Consolas"/>
+              </a:rPr>
+              <a:t>  67  </a:t>
+            </a:r>
+            <a:r>
+              <a:rPr sz="1300">
+                <a:solidFill>
+                  <a:srgbClr val="6D8C97"/>
+                </a:solidFill>
+                <a:latin typeface="Consolas"/>
+              </a:rPr>
+              <a:t>    size += message.content.length;</a:t>
+            </a:r>
+          </a:p>
+          <a:p>
+            <a:pPr>
+              <a:spcAft>
+                <a:spcPts val="0"/>
+              </a:spcAft>
+            </a:pPr>
+            <a:r>
+              <a:rPr sz="1300">
+                <a:solidFill>
+                  <a:srgbClr val="6D8C97"/>
+                </a:solidFill>
+                <a:latin typeface="Consolas"/>
+              </a:rPr>
+              <a:t>  68  </a:t>
+            </a:r>
+            <a:r>
+              <a:rPr sz="1300">
+                <a:solidFill>
+                  <a:srgbClr val="6D8C97"/>
+                </a:solidFill>
+                <a:latin typeface="Consolas"/>
+              </a:rPr>
+              <a:t>  }</a:t>
+            </a:r>
+          </a:p>
+          <a:p>
+            <a:pPr>
+              <a:spcAft>
+                <a:spcPts val="0"/>
+              </a:spcAft>
+            </a:pPr>
+            <a:r>
+              <a:rPr sz="1300">
+                <a:solidFill>
+                  <a:srgbClr val="6D8C97"/>
+                </a:solidFill>
+                <a:latin typeface="Consolas"/>
+              </a:rPr>
+              <a:t>  69  </a:t>
+            </a:r>
+            <a:r>
+              <a:rPr sz="1300">
+                <a:solidFill>
+                  <a:srgbClr val="6D8C97"/>
+                </a:solidFill>
+                <a:latin typeface="Consolas"/>
+              </a:rPr>
+              <a:t>  // Drop from the FRONT. The oldest messages matter least - usually.</a:t>
+            </a:r>
+          </a:p>
+          <a:p>
+            <a:pPr>
+              <a:spcAft>
+                <a:spcPts val="0"/>
+              </a:spcAft>
+            </a:pPr>
+            <a:r>
+              <a:rPr sz="1300">
+                <a:solidFill>
+                  <a:srgbClr val="6D8C97"/>
+                </a:solidFill>
+                <a:latin typeface="Consolas"/>
+              </a:rPr>
+              <a:t>  70  </a:t>
+            </a:r>
+            <a:r>
+              <a:rPr sz="1300">
+                <a:solidFill>
+                  <a:srgbClr val="7FE0A0"/>
+                </a:solidFill>
+                <a:latin typeface="Consolas"/>
+              </a:rPr>
+              <a:t>  while (size &gt; MAX_CHARS &amp;&amp; history.length &gt; 2) {</a:t>
+            </a:r>
+          </a:p>
+        </p:txBody>
+      </p:sp>
+      <p:sp>
+        <p:nvSpPr>
+          <p:cNvPr id="4" name="TextBox 3"/>
+          <p:cNvSpPr txBox="1"/>
+          <p:nvPr/>
+        </p:nvSpPr>
+        <p:spPr>
+          <a:xfrm>
+            <a:off x="548640" y="5623560"/>
+            <a:ext cx="11064240" cy="1051560"/>
+          </a:xfrm>
+          <a:prstGeom prst="rect">
+            <a:avLst/>
+          </a:prstGeom>
+          <a:noFill/>
+        </p:spPr>
+        <p:txBody>
+          <a:bodyPr wrap="square">
+            <a:spAutoFit/>
+          </a:bodyPr>
+          <a:lstStyle/>
+          <a:p>
+            <a:r>
+              <a:rPr sz="2000">
+                <a:solidFill>
+                  <a:srgbClr val="DCECEF"/>
+                </a:solidFill>
+              </a:rPr>
+              <a:t>while keeps looping as long as we are over the limit AND there is more than one exchange left to cut.</a:t>
+            </a:r>
+          </a:p>
+        </p:txBody>
+      </p:sp>
+    </p:spTree>
+  </p:cSld>
+  <p:clrMapOvr>
+    <a:masterClrMapping/>
+  </p:clrMapOvr>
+</p:sld>
+</file>
+
+<file path=ppt/slides/slide17.xml><?xml version="1.0" encoding="utf-8"?>
+<p:sld xmlns:a="http://schemas.openxmlformats.org/drawingml/2006/main" xmlns:p="http://schemas.openxmlformats.org/presentationml/2006/main" xmlns:r="http://schemas.openxmlformats.org/officeDocument/2006/relationships">
+  <p:cSld>
+    <p:spTree>
+      <p:nvGrpSpPr>
+        <p:cNvPr id="1" name=""/>
+        <p:cNvGrpSpPr/>
+        <p:nvPr/>
+      </p:nvGrpSpPr>
+      <p:grpSpPr/>
+      <p:sp>
+        <p:nvSpPr>
+          <p:cNvPr id="2" name="Title 1"/>
+          <p:cNvSpPr>
+            <a:spLocks noGrp="1"/>
+          </p:cNvSpPr>
+          <p:nvPr>
+            <p:ph type="title"/>
+          </p:nvPr>
+        </p:nvSpPr>
+        <p:spPr/>
+        <p:txBody>
+          <a:bodyPr/>
+          <a:lstStyle/>
+          <a:p>
+            <a:r>
+              <a:rPr sz="3800" b="1">
+                <a:solidFill>
+                  <a:srgbClr val="1F2A37"/>
+                </a:solidFill>
+              </a:rPr>
+              <a:t>.shift()</a:t>
+            </a:r>
+          </a:p>
+        </p:txBody>
+      </p:sp>
+      <p:sp>
+        <p:nvSpPr>
+          <p:cNvPr id="3" name="TextBox 2"/>
+          <p:cNvSpPr txBox="1"/>
+          <p:nvPr/>
+        </p:nvSpPr>
+        <p:spPr>
+          <a:xfrm>
+            <a:off x="868680" y="502920"/>
+            <a:ext cx="5486400" cy="457200"/>
+          </a:xfrm>
+          <a:prstGeom prst="rect">
+            <a:avLst/>
+          </a:prstGeom>
+          <a:noFill/>
+        </p:spPr>
+        <p:txBody>
+          <a:bodyPr wrap="none">
+            <a:spAutoFit/>
+          </a:bodyPr>
+          <a:lstStyle/>
+          <a:p>
+            <a:r>
+              <a:rPr sz="1500" b="1">
+                <a:solidFill>
+                  <a:srgbClr val="01AEFD"/>
+                </a:solidFill>
+              </a:rPr>
+              <a:t>JAVASCRIPT</a:t>
+            </a:r>
+          </a:p>
+        </p:txBody>
+      </p:sp>
+      <p:sp>
+        <p:nvSpPr>
+          <p:cNvPr id="4" name="TextBox 3"/>
+          <p:cNvSpPr txBox="1"/>
+          <p:nvPr/>
+        </p:nvSpPr>
+        <p:spPr>
+          <a:xfrm>
+            <a:off x="822960" y="1828800"/>
+            <a:ext cx="10515600" cy="4206240"/>
+          </a:xfrm>
+          <a:prstGeom prst="rect">
+            <a:avLst/>
+          </a:prstGeom>
+          <a:noFill/>
+        </p:spPr>
+        <p:txBody>
+          <a:bodyPr wrap="square">
+            <a:spAutoFit/>
+          </a:bodyPr>
+          <a:lstStyle/>
           <a:p>
             <a:pPr>
               <a:spcAft>
@@ -3859,7 +5273,927 @@
                   <a:srgbClr val="1F2A37"/>
                 </a:solidFill>
               </a:rPr>
-              <a:t>• It genuinely does not know</a:t>
+              <a:t>• Removes the FIRST item of an array and hands it back.</a:t>
+            </a:r>
+          </a:p>
+          <a:p>
+            <a:pPr>
+              <a:spcAft>
+                <a:spcPts val="1400"/>
+              </a:spcAft>
+            </a:pPr>
+            <a:r>
+              <a:rPr sz="2400">
+                <a:solidFill>
+                  <a:srgbClr val="1F2A37"/>
+                </a:solidFill>
+              </a:rPr>
+              <a:t>• The oldest message leaves the list.</a:t>
+            </a:r>
+          </a:p>
+        </p:txBody>
+      </p:sp>
+    </p:spTree>
+  </p:cSld>
+  <p:clrMapOvr>
+    <a:masterClrMapping/>
+  </p:clrMapOvr>
+</p:sld>
+</file>
+
+<file path=ppt/slides/slide18.xml><?xml version="1.0" encoding="utf-8"?>
+<p:sld xmlns:a="http://schemas.openxmlformats.org/drawingml/2006/main" xmlns:p="http://schemas.openxmlformats.org/presentationml/2006/main" xmlns:r="http://schemas.openxmlformats.org/officeDocument/2006/relationships">
+  <p:cSld>
+    <p:bg>
+      <p:bgPr>
+        <a:solidFill>
+          <a:srgbClr val="102127"/>
+        </a:solidFill>
+        <a:effectLst/>
+      </p:bgPr>
+    </p:bg>
+    <p:spTree>
+      <p:nvGrpSpPr>
+        <p:cNvPr id="1" name=""/>
+        <p:cNvGrpSpPr/>
+        <p:nvPr/>
+      </p:nvGrpSpPr>
+      <p:grpSpPr/>
+      <p:sp>
+        <p:nvSpPr>
+          <p:cNvPr id="2" name="TextBox 1"/>
+          <p:cNvSpPr txBox="1"/>
+          <p:nvPr/>
+        </p:nvSpPr>
+        <p:spPr>
+          <a:xfrm>
+            <a:off x="502920" y="274320"/>
+            <a:ext cx="11155680" cy="548640"/>
+          </a:xfrm>
+          <a:prstGeom prst="rect">
+            <a:avLst/>
+          </a:prstGeom>
+          <a:noFill/>
+        </p:spPr>
+        <p:txBody>
+          <a:bodyPr wrap="none">
+            <a:spAutoFit/>
+          </a:bodyPr>
+          <a:lstStyle/>
+          <a:p>
+            <a:r>
+              <a:rPr sz="2200" b="1">
+                <a:solidFill>
+                  <a:srgbClr val="01AEFD"/>
+                </a:solidFill>
+              </a:rPr>
+              <a:t>Type this into script.js   -   line 71</a:t>
+            </a:r>
+          </a:p>
+        </p:txBody>
+      </p:sp>
+      <p:sp>
+        <p:nvSpPr>
+          <p:cNvPr id="3" name="TextBox 2"/>
+          <p:cNvSpPr txBox="1"/>
+          <p:nvPr/>
+        </p:nvSpPr>
+        <p:spPr>
+          <a:xfrm>
+            <a:off x="502920" y="960120"/>
+            <a:ext cx="11155680" cy="4297680"/>
+          </a:xfrm>
+          <a:prstGeom prst="rect">
+            <a:avLst/>
+          </a:prstGeom>
+          <a:noFill/>
+        </p:spPr>
+        <p:txBody>
+          <a:bodyPr wrap="none">
+            <a:spAutoFit/>
+          </a:bodyPr>
+          <a:lstStyle/>
+          <a:p>
+            <a:pPr>
+              <a:spcAft>
+                <a:spcPts val="0"/>
+              </a:spcAft>
+            </a:pPr>
+            <a:r>
+              <a:rPr sz="1300">
+                <a:solidFill>
+                  <a:srgbClr val="6D8C97"/>
+                </a:solidFill>
+                <a:latin typeface="Consolas"/>
+              </a:rPr>
+              <a:t>  59  </a:t>
+            </a:r>
+            <a:r>
+              <a:rPr sz="1300">
+                <a:solidFill>
+                  <a:srgbClr val="6D8C97"/>
+                </a:solidFill>
+                <a:latin typeface="Consolas"/>
+              </a:rPr>
+              <a:t> </a:t>
+            </a:r>
+          </a:p>
+          <a:p>
+            <a:pPr>
+              <a:spcAft>
+                <a:spcPts val="0"/>
+              </a:spcAft>
+            </a:pPr>
+            <a:r>
+              <a:rPr sz="1300">
+                <a:solidFill>
+                  <a:srgbClr val="6D8C97"/>
+                </a:solidFill>
+                <a:latin typeface="Consolas"/>
+              </a:rPr>
+              <a:t>  60  </a:t>
+            </a:r>
+            <a:r>
+              <a:rPr sz="1300">
+                <a:solidFill>
+                  <a:srgbClr val="6D8C97"/>
+                </a:solidFill>
+                <a:latin typeface="Consolas"/>
+              </a:rPr>
+              <a:t>// Week 8: the server reads at most 4000 characters of conversation at once.</a:t>
+            </a:r>
+          </a:p>
+          <a:p>
+            <a:pPr>
+              <a:spcAft>
+                <a:spcPts val="0"/>
+              </a:spcAft>
+            </a:pPr>
+            <a:r>
+              <a:rPr sz="1300">
+                <a:solidFill>
+                  <a:srgbClr val="6D8C97"/>
+                </a:solidFill>
+                <a:latin typeface="Consolas"/>
+              </a:rPr>
+              <a:t>  61  </a:t>
+            </a:r>
+            <a:r>
+              <a:rPr sz="1300">
+                <a:solidFill>
+                  <a:srgbClr val="6D8C97"/>
+                </a:solidFill>
+                <a:latin typeface="Consolas"/>
+              </a:rPr>
+              <a:t>// Past that it refuses the whole request, so old messages have to go.</a:t>
+            </a:r>
+          </a:p>
+          <a:p>
+            <a:pPr>
+              <a:spcAft>
+                <a:spcPts val="0"/>
+              </a:spcAft>
+            </a:pPr>
+            <a:r>
+              <a:rPr sz="1300">
+                <a:solidFill>
+                  <a:srgbClr val="6D8C97"/>
+                </a:solidFill>
+                <a:latin typeface="Consolas"/>
+              </a:rPr>
+              <a:t>  62  </a:t>
+            </a:r>
+            <a:r>
+              <a:rPr sz="1300">
+                <a:solidFill>
+                  <a:srgbClr val="6D8C97"/>
+                </a:solidFill>
+                <a:latin typeface="Consolas"/>
+              </a:rPr>
+              <a:t>const MAX_CHARS = 3500;   // leave room for the personality and your next line</a:t>
+            </a:r>
+          </a:p>
+          <a:p>
+            <a:pPr>
+              <a:spcAft>
+                <a:spcPts val="0"/>
+              </a:spcAft>
+            </a:pPr>
+            <a:r>
+              <a:rPr sz="1300">
+                <a:solidFill>
+                  <a:srgbClr val="6D8C97"/>
+                </a:solidFill>
+                <a:latin typeface="Consolas"/>
+              </a:rPr>
+              <a:t>  63  </a:t>
+            </a:r>
+            <a:r>
+              <a:rPr sz="1300">
+                <a:solidFill>
+                  <a:srgbClr val="6D8C97"/>
+                </a:solidFill>
+                <a:latin typeface="Consolas"/>
+              </a:rPr>
+              <a:t> </a:t>
+            </a:r>
+          </a:p>
+          <a:p>
+            <a:pPr>
+              <a:spcAft>
+                <a:spcPts val="0"/>
+              </a:spcAft>
+            </a:pPr>
+            <a:r>
+              <a:rPr sz="1300">
+                <a:solidFill>
+                  <a:srgbClr val="6D8C97"/>
+                </a:solidFill>
+                <a:latin typeface="Consolas"/>
+              </a:rPr>
+              <a:t>  64  </a:t>
+            </a:r>
+            <a:r>
+              <a:rPr sz="1300">
+                <a:solidFill>
+                  <a:srgbClr val="6D8C97"/>
+                </a:solidFill>
+                <a:latin typeface="Consolas"/>
+              </a:rPr>
+              <a:t>function trimHistory() {</a:t>
+            </a:r>
+          </a:p>
+          <a:p>
+            <a:pPr>
+              <a:spcAft>
+                <a:spcPts val="0"/>
+              </a:spcAft>
+            </a:pPr>
+            <a:r>
+              <a:rPr sz="1300">
+                <a:solidFill>
+                  <a:srgbClr val="6D8C97"/>
+                </a:solidFill>
+                <a:latin typeface="Consolas"/>
+              </a:rPr>
+              <a:t>  65  </a:t>
+            </a:r>
+            <a:r>
+              <a:rPr sz="1300">
+                <a:solidFill>
+                  <a:srgbClr val="6D8C97"/>
+                </a:solidFill>
+                <a:latin typeface="Consolas"/>
+              </a:rPr>
+              <a:t>  let size = personaBox.value.length;</a:t>
+            </a:r>
+          </a:p>
+          <a:p>
+            <a:pPr>
+              <a:spcAft>
+                <a:spcPts val="0"/>
+              </a:spcAft>
+            </a:pPr>
+            <a:r>
+              <a:rPr sz="1300">
+                <a:solidFill>
+                  <a:srgbClr val="6D8C97"/>
+                </a:solidFill>
+                <a:latin typeface="Consolas"/>
+              </a:rPr>
+              <a:t>  66  </a:t>
+            </a:r>
+            <a:r>
+              <a:rPr sz="1300">
+                <a:solidFill>
+                  <a:srgbClr val="6D8C97"/>
+                </a:solidFill>
+                <a:latin typeface="Consolas"/>
+              </a:rPr>
+              <a:t>  for (const message of history) {</a:t>
+            </a:r>
+          </a:p>
+          <a:p>
+            <a:pPr>
+              <a:spcAft>
+                <a:spcPts val="0"/>
+              </a:spcAft>
+            </a:pPr>
+            <a:r>
+              <a:rPr sz="1300">
+                <a:solidFill>
+                  <a:srgbClr val="6D8C97"/>
+                </a:solidFill>
+                <a:latin typeface="Consolas"/>
+              </a:rPr>
+              <a:t>  67  </a:t>
+            </a:r>
+            <a:r>
+              <a:rPr sz="1300">
+                <a:solidFill>
+                  <a:srgbClr val="6D8C97"/>
+                </a:solidFill>
+                <a:latin typeface="Consolas"/>
+              </a:rPr>
+              <a:t>    size += message.content.length;</a:t>
+            </a:r>
+          </a:p>
+          <a:p>
+            <a:pPr>
+              <a:spcAft>
+                <a:spcPts val="0"/>
+              </a:spcAft>
+            </a:pPr>
+            <a:r>
+              <a:rPr sz="1300">
+                <a:solidFill>
+                  <a:srgbClr val="6D8C97"/>
+                </a:solidFill>
+                <a:latin typeface="Consolas"/>
+              </a:rPr>
+              <a:t>  68  </a:t>
+            </a:r>
+            <a:r>
+              <a:rPr sz="1300">
+                <a:solidFill>
+                  <a:srgbClr val="6D8C97"/>
+                </a:solidFill>
+                <a:latin typeface="Consolas"/>
+              </a:rPr>
+              <a:t>  }</a:t>
+            </a:r>
+          </a:p>
+          <a:p>
+            <a:pPr>
+              <a:spcAft>
+                <a:spcPts val="0"/>
+              </a:spcAft>
+            </a:pPr>
+            <a:r>
+              <a:rPr sz="1300">
+                <a:solidFill>
+                  <a:srgbClr val="6D8C97"/>
+                </a:solidFill>
+                <a:latin typeface="Consolas"/>
+              </a:rPr>
+              <a:t>  69  </a:t>
+            </a:r>
+            <a:r>
+              <a:rPr sz="1300">
+                <a:solidFill>
+                  <a:srgbClr val="6D8C97"/>
+                </a:solidFill>
+                <a:latin typeface="Consolas"/>
+              </a:rPr>
+              <a:t>  // Drop from the FRONT. The oldest messages matter least - usually.</a:t>
+            </a:r>
+          </a:p>
+          <a:p>
+            <a:pPr>
+              <a:spcAft>
+                <a:spcPts val="0"/>
+              </a:spcAft>
+            </a:pPr>
+            <a:r>
+              <a:rPr sz="1300">
+                <a:solidFill>
+                  <a:srgbClr val="6D8C97"/>
+                </a:solidFill>
+                <a:latin typeface="Consolas"/>
+              </a:rPr>
+              <a:t>  70  </a:t>
+            </a:r>
+            <a:r>
+              <a:rPr sz="1300">
+                <a:solidFill>
+                  <a:srgbClr val="6D8C97"/>
+                </a:solidFill>
+                <a:latin typeface="Consolas"/>
+              </a:rPr>
+              <a:t>  while (size &gt; MAX_CHARS &amp;&amp; history.length &gt; 2) {</a:t>
+            </a:r>
+          </a:p>
+          <a:p>
+            <a:pPr>
+              <a:spcAft>
+                <a:spcPts val="0"/>
+              </a:spcAft>
+            </a:pPr>
+            <a:r>
+              <a:rPr sz="1300">
+                <a:solidFill>
+                  <a:srgbClr val="6D8C97"/>
+                </a:solidFill>
+                <a:latin typeface="Consolas"/>
+              </a:rPr>
+              <a:t>  71  </a:t>
+            </a:r>
+            <a:r>
+              <a:rPr sz="1300">
+                <a:solidFill>
+                  <a:srgbClr val="7FE0A0"/>
+                </a:solidFill>
+                <a:latin typeface="Consolas"/>
+              </a:rPr>
+              <a:t>    const dropped = history.shift();</a:t>
+            </a:r>
+          </a:p>
+        </p:txBody>
+      </p:sp>
+      <p:sp>
+        <p:nvSpPr>
+          <p:cNvPr id="4" name="TextBox 3"/>
+          <p:cNvSpPr txBox="1"/>
+          <p:nvPr/>
+        </p:nvSpPr>
+        <p:spPr>
+          <a:xfrm>
+            <a:off x="548640" y="5623560"/>
+            <a:ext cx="11064240" cy="1051560"/>
+          </a:xfrm>
+          <a:prstGeom prst="rect">
+            <a:avLst/>
+          </a:prstGeom>
+          <a:noFill/>
+        </p:spPr>
+        <p:txBody>
+          <a:bodyPr wrap="square">
+            <a:spAutoFit/>
+          </a:bodyPr>
+          <a:lstStyle/>
+          <a:p>
+            <a:r>
+              <a:rPr sz="2000">
+                <a:solidFill>
+                  <a:srgbClr val="DCECEF"/>
+                </a:solidFill>
+              </a:rPr>
+              <a:t>shift() removes the FIRST (oldest) message and hands it back.</a:t>
+            </a:r>
+          </a:p>
+        </p:txBody>
+      </p:sp>
+    </p:spTree>
+  </p:cSld>
+  <p:clrMapOvr>
+    <a:masterClrMapping/>
+  </p:clrMapOvr>
+</p:sld>
+</file>
+
+<file path=ppt/slides/slide19.xml><?xml version="1.0" encoding="utf-8"?>
+<p:sld xmlns:a="http://schemas.openxmlformats.org/drawingml/2006/main" xmlns:p="http://schemas.openxmlformats.org/presentationml/2006/main" xmlns:r="http://schemas.openxmlformats.org/officeDocument/2006/relationships">
+  <p:cSld>
+    <p:bg>
+      <p:bgPr>
+        <a:solidFill>
+          <a:srgbClr val="102127"/>
+        </a:solidFill>
+        <a:effectLst/>
+      </p:bgPr>
+    </p:bg>
+    <p:spTree>
+      <p:nvGrpSpPr>
+        <p:cNvPr id="1" name=""/>
+        <p:cNvGrpSpPr/>
+        <p:nvPr/>
+      </p:nvGrpSpPr>
+      <p:grpSpPr/>
+      <p:sp>
+        <p:nvSpPr>
+          <p:cNvPr id="2" name="TextBox 1"/>
+          <p:cNvSpPr txBox="1"/>
+          <p:nvPr/>
+        </p:nvSpPr>
+        <p:spPr>
+          <a:xfrm>
+            <a:off x="502920" y="274320"/>
+            <a:ext cx="11155680" cy="548640"/>
+          </a:xfrm>
+          <a:prstGeom prst="rect">
+            <a:avLst/>
+          </a:prstGeom>
+          <a:noFill/>
+        </p:spPr>
+        <p:txBody>
+          <a:bodyPr wrap="none">
+            <a:spAutoFit/>
+          </a:bodyPr>
+          <a:lstStyle/>
+          <a:p>
+            <a:r>
+              <a:rPr sz="2200" b="1">
+                <a:solidFill>
+                  <a:srgbClr val="01AEFD"/>
+                </a:solidFill>
+              </a:rPr>
+              <a:t>Type this into script.js   -   line 72</a:t>
+            </a:r>
+          </a:p>
+        </p:txBody>
+      </p:sp>
+      <p:sp>
+        <p:nvSpPr>
+          <p:cNvPr id="3" name="TextBox 2"/>
+          <p:cNvSpPr txBox="1"/>
+          <p:nvPr/>
+        </p:nvSpPr>
+        <p:spPr>
+          <a:xfrm>
+            <a:off x="502920" y="960120"/>
+            <a:ext cx="11155680" cy="4297680"/>
+          </a:xfrm>
+          <a:prstGeom prst="rect">
+            <a:avLst/>
+          </a:prstGeom>
+          <a:noFill/>
+        </p:spPr>
+        <p:txBody>
+          <a:bodyPr wrap="none">
+            <a:spAutoFit/>
+          </a:bodyPr>
+          <a:lstStyle/>
+          <a:p>
+            <a:pPr>
+              <a:spcAft>
+                <a:spcPts val="0"/>
+              </a:spcAft>
+            </a:pPr>
+            <a:r>
+              <a:rPr sz="1300">
+                <a:solidFill>
+                  <a:srgbClr val="6D8C97"/>
+                </a:solidFill>
+                <a:latin typeface="Consolas"/>
+              </a:rPr>
+              <a:t>  59  </a:t>
+            </a:r>
+            <a:r>
+              <a:rPr sz="1300">
+                <a:solidFill>
+                  <a:srgbClr val="6D8C97"/>
+                </a:solidFill>
+                <a:latin typeface="Consolas"/>
+              </a:rPr>
+              <a:t> </a:t>
+            </a:r>
+          </a:p>
+          <a:p>
+            <a:pPr>
+              <a:spcAft>
+                <a:spcPts val="0"/>
+              </a:spcAft>
+            </a:pPr>
+            <a:r>
+              <a:rPr sz="1300">
+                <a:solidFill>
+                  <a:srgbClr val="6D8C97"/>
+                </a:solidFill>
+                <a:latin typeface="Consolas"/>
+              </a:rPr>
+              <a:t>  60  </a:t>
+            </a:r>
+            <a:r>
+              <a:rPr sz="1300">
+                <a:solidFill>
+                  <a:srgbClr val="6D8C97"/>
+                </a:solidFill>
+                <a:latin typeface="Consolas"/>
+              </a:rPr>
+              <a:t>// Week 8: the server reads at most 4000 characters of conversation at once.</a:t>
+            </a:r>
+          </a:p>
+          <a:p>
+            <a:pPr>
+              <a:spcAft>
+                <a:spcPts val="0"/>
+              </a:spcAft>
+            </a:pPr>
+            <a:r>
+              <a:rPr sz="1300">
+                <a:solidFill>
+                  <a:srgbClr val="6D8C97"/>
+                </a:solidFill>
+                <a:latin typeface="Consolas"/>
+              </a:rPr>
+              <a:t>  61  </a:t>
+            </a:r>
+            <a:r>
+              <a:rPr sz="1300">
+                <a:solidFill>
+                  <a:srgbClr val="6D8C97"/>
+                </a:solidFill>
+                <a:latin typeface="Consolas"/>
+              </a:rPr>
+              <a:t>// Past that it refuses the whole request, so old messages have to go.</a:t>
+            </a:r>
+          </a:p>
+          <a:p>
+            <a:pPr>
+              <a:spcAft>
+                <a:spcPts val="0"/>
+              </a:spcAft>
+            </a:pPr>
+            <a:r>
+              <a:rPr sz="1300">
+                <a:solidFill>
+                  <a:srgbClr val="6D8C97"/>
+                </a:solidFill>
+                <a:latin typeface="Consolas"/>
+              </a:rPr>
+              <a:t>  62  </a:t>
+            </a:r>
+            <a:r>
+              <a:rPr sz="1300">
+                <a:solidFill>
+                  <a:srgbClr val="6D8C97"/>
+                </a:solidFill>
+                <a:latin typeface="Consolas"/>
+              </a:rPr>
+              <a:t>const MAX_CHARS = 3500;   // leave room for the personality and your next line</a:t>
+            </a:r>
+          </a:p>
+          <a:p>
+            <a:pPr>
+              <a:spcAft>
+                <a:spcPts val="0"/>
+              </a:spcAft>
+            </a:pPr>
+            <a:r>
+              <a:rPr sz="1300">
+                <a:solidFill>
+                  <a:srgbClr val="6D8C97"/>
+                </a:solidFill>
+                <a:latin typeface="Consolas"/>
+              </a:rPr>
+              <a:t>  63  </a:t>
+            </a:r>
+            <a:r>
+              <a:rPr sz="1300">
+                <a:solidFill>
+                  <a:srgbClr val="6D8C97"/>
+                </a:solidFill>
+                <a:latin typeface="Consolas"/>
+              </a:rPr>
+              <a:t> </a:t>
+            </a:r>
+          </a:p>
+          <a:p>
+            <a:pPr>
+              <a:spcAft>
+                <a:spcPts val="0"/>
+              </a:spcAft>
+            </a:pPr>
+            <a:r>
+              <a:rPr sz="1300">
+                <a:solidFill>
+                  <a:srgbClr val="6D8C97"/>
+                </a:solidFill>
+                <a:latin typeface="Consolas"/>
+              </a:rPr>
+              <a:t>  64  </a:t>
+            </a:r>
+            <a:r>
+              <a:rPr sz="1300">
+                <a:solidFill>
+                  <a:srgbClr val="6D8C97"/>
+                </a:solidFill>
+                <a:latin typeface="Consolas"/>
+              </a:rPr>
+              <a:t>function trimHistory() {</a:t>
+            </a:r>
+          </a:p>
+          <a:p>
+            <a:pPr>
+              <a:spcAft>
+                <a:spcPts val="0"/>
+              </a:spcAft>
+            </a:pPr>
+            <a:r>
+              <a:rPr sz="1300">
+                <a:solidFill>
+                  <a:srgbClr val="6D8C97"/>
+                </a:solidFill>
+                <a:latin typeface="Consolas"/>
+              </a:rPr>
+              <a:t>  65  </a:t>
+            </a:r>
+            <a:r>
+              <a:rPr sz="1300">
+                <a:solidFill>
+                  <a:srgbClr val="6D8C97"/>
+                </a:solidFill>
+                <a:latin typeface="Consolas"/>
+              </a:rPr>
+              <a:t>  let size = personaBox.value.length;</a:t>
+            </a:r>
+          </a:p>
+          <a:p>
+            <a:pPr>
+              <a:spcAft>
+                <a:spcPts val="0"/>
+              </a:spcAft>
+            </a:pPr>
+            <a:r>
+              <a:rPr sz="1300">
+                <a:solidFill>
+                  <a:srgbClr val="6D8C97"/>
+                </a:solidFill>
+                <a:latin typeface="Consolas"/>
+              </a:rPr>
+              <a:t>  66  </a:t>
+            </a:r>
+            <a:r>
+              <a:rPr sz="1300">
+                <a:solidFill>
+                  <a:srgbClr val="6D8C97"/>
+                </a:solidFill>
+                <a:latin typeface="Consolas"/>
+              </a:rPr>
+              <a:t>  for (const message of history) {</a:t>
+            </a:r>
+          </a:p>
+          <a:p>
+            <a:pPr>
+              <a:spcAft>
+                <a:spcPts val="0"/>
+              </a:spcAft>
+            </a:pPr>
+            <a:r>
+              <a:rPr sz="1300">
+                <a:solidFill>
+                  <a:srgbClr val="6D8C97"/>
+                </a:solidFill>
+                <a:latin typeface="Consolas"/>
+              </a:rPr>
+              <a:t>  67  </a:t>
+            </a:r>
+            <a:r>
+              <a:rPr sz="1300">
+                <a:solidFill>
+                  <a:srgbClr val="6D8C97"/>
+                </a:solidFill>
+                <a:latin typeface="Consolas"/>
+              </a:rPr>
+              <a:t>    size += message.content.length;</a:t>
+            </a:r>
+          </a:p>
+          <a:p>
+            <a:pPr>
+              <a:spcAft>
+                <a:spcPts val="0"/>
+              </a:spcAft>
+            </a:pPr>
+            <a:r>
+              <a:rPr sz="1300">
+                <a:solidFill>
+                  <a:srgbClr val="6D8C97"/>
+                </a:solidFill>
+                <a:latin typeface="Consolas"/>
+              </a:rPr>
+              <a:t>  68  </a:t>
+            </a:r>
+            <a:r>
+              <a:rPr sz="1300">
+                <a:solidFill>
+                  <a:srgbClr val="6D8C97"/>
+                </a:solidFill>
+                <a:latin typeface="Consolas"/>
+              </a:rPr>
+              <a:t>  }</a:t>
+            </a:r>
+          </a:p>
+          <a:p>
+            <a:pPr>
+              <a:spcAft>
+                <a:spcPts val="0"/>
+              </a:spcAft>
+            </a:pPr>
+            <a:r>
+              <a:rPr sz="1300">
+                <a:solidFill>
+                  <a:srgbClr val="6D8C97"/>
+                </a:solidFill>
+                <a:latin typeface="Consolas"/>
+              </a:rPr>
+              <a:t>  69  </a:t>
+            </a:r>
+            <a:r>
+              <a:rPr sz="1300">
+                <a:solidFill>
+                  <a:srgbClr val="6D8C97"/>
+                </a:solidFill>
+                <a:latin typeface="Consolas"/>
+              </a:rPr>
+              <a:t>  // Drop from the FRONT. The oldest messages matter least - usually.</a:t>
+            </a:r>
+          </a:p>
+          <a:p>
+            <a:pPr>
+              <a:spcAft>
+                <a:spcPts val="0"/>
+              </a:spcAft>
+            </a:pPr>
+            <a:r>
+              <a:rPr sz="1300">
+                <a:solidFill>
+                  <a:srgbClr val="6D8C97"/>
+                </a:solidFill>
+                <a:latin typeface="Consolas"/>
+              </a:rPr>
+              <a:t>  70  </a:t>
+            </a:r>
+            <a:r>
+              <a:rPr sz="1300">
+                <a:solidFill>
+                  <a:srgbClr val="6D8C97"/>
+                </a:solidFill>
+                <a:latin typeface="Consolas"/>
+              </a:rPr>
+              <a:t>  while (size &gt; MAX_CHARS &amp;&amp; history.length &gt; 2) {</a:t>
+            </a:r>
+          </a:p>
+          <a:p>
+            <a:pPr>
+              <a:spcAft>
+                <a:spcPts val="0"/>
+              </a:spcAft>
+            </a:pPr>
+            <a:r>
+              <a:rPr sz="1300">
+                <a:solidFill>
+                  <a:srgbClr val="6D8C97"/>
+                </a:solidFill>
+                <a:latin typeface="Consolas"/>
+              </a:rPr>
+              <a:t>  71  </a:t>
+            </a:r>
+            <a:r>
+              <a:rPr sz="1300">
+                <a:solidFill>
+                  <a:srgbClr val="6D8C97"/>
+                </a:solidFill>
+                <a:latin typeface="Consolas"/>
+              </a:rPr>
+              <a:t>    const dropped = history.shift();</a:t>
+            </a:r>
+          </a:p>
+          <a:p>
+            <a:pPr>
+              <a:spcAft>
+                <a:spcPts val="0"/>
+              </a:spcAft>
+            </a:pPr>
+            <a:r>
+              <a:rPr sz="1300">
+                <a:solidFill>
+                  <a:srgbClr val="6D8C97"/>
+                </a:solidFill>
+                <a:latin typeface="Consolas"/>
+              </a:rPr>
+              <a:t>  72  </a:t>
+            </a:r>
+            <a:r>
+              <a:rPr sz="1300">
+                <a:solidFill>
+                  <a:srgbClr val="7FE0A0"/>
+                </a:solidFill>
+                <a:latin typeface="Consolas"/>
+              </a:rPr>
+              <a:t>    size -= dropped.content.length;</a:t>
+            </a:r>
+          </a:p>
+        </p:txBody>
+      </p:sp>
+      <p:sp>
+        <p:nvSpPr>
+          <p:cNvPr id="4" name="TextBox 3"/>
+          <p:cNvSpPr txBox="1"/>
+          <p:nvPr/>
+        </p:nvSpPr>
+        <p:spPr>
+          <a:xfrm>
+            <a:off x="548640" y="5623560"/>
+            <a:ext cx="11064240" cy="1051560"/>
+          </a:xfrm>
+          <a:prstGeom prst="rect">
+            <a:avLst/>
+          </a:prstGeom>
+          <a:noFill/>
+        </p:spPr>
+        <p:txBody>
+          <a:bodyPr wrap="square">
+            <a:spAutoFit/>
+          </a:bodyPr>
+          <a:lstStyle/>
+          <a:p>
+            <a:r>
+              <a:rPr sz="2000">
+                <a:solidFill>
+                  <a:srgbClr val="DCECEF"/>
+                </a:solidFill>
+              </a:rPr>
+              <a:t>Subtract its length from the total. -= means 'take this away from'.</a:t>
             </a:r>
           </a:p>
         </p:txBody>
@@ -3969,6 +6303,2715 @@
 </p:sld>
 </file>
 
+<file path=ppt/slides/slide20.xml><?xml version="1.0" encoding="utf-8"?>
+<p:sld xmlns:a="http://schemas.openxmlformats.org/drawingml/2006/main" xmlns:p="http://schemas.openxmlformats.org/presentationml/2006/main" xmlns:r="http://schemas.openxmlformats.org/officeDocument/2006/relationships">
+  <p:cSld>
+    <p:bg>
+      <p:bgPr>
+        <a:solidFill>
+          <a:srgbClr val="102127"/>
+        </a:solidFill>
+        <a:effectLst/>
+      </p:bgPr>
+    </p:bg>
+    <p:spTree>
+      <p:nvGrpSpPr>
+        <p:cNvPr id="1" name=""/>
+        <p:cNvGrpSpPr/>
+        <p:nvPr/>
+      </p:nvGrpSpPr>
+      <p:grpSpPr/>
+      <p:sp>
+        <p:nvSpPr>
+          <p:cNvPr id="2" name="TextBox 1"/>
+          <p:cNvSpPr txBox="1"/>
+          <p:nvPr/>
+        </p:nvSpPr>
+        <p:spPr>
+          <a:xfrm>
+            <a:off x="502920" y="274320"/>
+            <a:ext cx="11155680" cy="548640"/>
+          </a:xfrm>
+          <a:prstGeom prst="rect">
+            <a:avLst/>
+          </a:prstGeom>
+          <a:noFill/>
+        </p:spPr>
+        <p:txBody>
+          <a:bodyPr wrap="none">
+            <a:spAutoFit/>
+          </a:bodyPr>
+          <a:lstStyle/>
+          <a:p>
+            <a:r>
+              <a:rPr sz="2200" b="1">
+                <a:solidFill>
+                  <a:srgbClr val="01AEFD"/>
+                </a:solidFill>
+              </a:rPr>
+              <a:t>Type this into script.js   -   line 73</a:t>
+            </a:r>
+          </a:p>
+        </p:txBody>
+      </p:sp>
+      <p:sp>
+        <p:nvSpPr>
+          <p:cNvPr id="3" name="TextBox 2"/>
+          <p:cNvSpPr txBox="1"/>
+          <p:nvPr/>
+        </p:nvSpPr>
+        <p:spPr>
+          <a:xfrm>
+            <a:off x="502920" y="960120"/>
+            <a:ext cx="11155680" cy="4297680"/>
+          </a:xfrm>
+          <a:prstGeom prst="rect">
+            <a:avLst/>
+          </a:prstGeom>
+          <a:noFill/>
+        </p:spPr>
+        <p:txBody>
+          <a:bodyPr wrap="none">
+            <a:spAutoFit/>
+          </a:bodyPr>
+          <a:lstStyle/>
+          <a:p>
+            <a:pPr>
+              <a:spcAft>
+                <a:spcPts val="0"/>
+              </a:spcAft>
+            </a:pPr>
+            <a:r>
+              <a:rPr sz="1300">
+                <a:solidFill>
+                  <a:srgbClr val="6D8C97"/>
+                </a:solidFill>
+                <a:latin typeface="Consolas"/>
+              </a:rPr>
+              <a:t>  59  </a:t>
+            </a:r>
+            <a:r>
+              <a:rPr sz="1300">
+                <a:solidFill>
+                  <a:srgbClr val="6D8C97"/>
+                </a:solidFill>
+                <a:latin typeface="Consolas"/>
+              </a:rPr>
+              <a:t> </a:t>
+            </a:r>
+          </a:p>
+          <a:p>
+            <a:pPr>
+              <a:spcAft>
+                <a:spcPts val="0"/>
+              </a:spcAft>
+            </a:pPr>
+            <a:r>
+              <a:rPr sz="1300">
+                <a:solidFill>
+                  <a:srgbClr val="6D8C97"/>
+                </a:solidFill>
+                <a:latin typeface="Consolas"/>
+              </a:rPr>
+              <a:t>  60  </a:t>
+            </a:r>
+            <a:r>
+              <a:rPr sz="1300">
+                <a:solidFill>
+                  <a:srgbClr val="6D8C97"/>
+                </a:solidFill>
+                <a:latin typeface="Consolas"/>
+              </a:rPr>
+              <a:t>// Week 8: the server reads at most 4000 characters of conversation at once.</a:t>
+            </a:r>
+          </a:p>
+          <a:p>
+            <a:pPr>
+              <a:spcAft>
+                <a:spcPts val="0"/>
+              </a:spcAft>
+            </a:pPr>
+            <a:r>
+              <a:rPr sz="1300">
+                <a:solidFill>
+                  <a:srgbClr val="6D8C97"/>
+                </a:solidFill>
+                <a:latin typeface="Consolas"/>
+              </a:rPr>
+              <a:t>  61  </a:t>
+            </a:r>
+            <a:r>
+              <a:rPr sz="1300">
+                <a:solidFill>
+                  <a:srgbClr val="6D8C97"/>
+                </a:solidFill>
+                <a:latin typeface="Consolas"/>
+              </a:rPr>
+              <a:t>// Past that it refuses the whole request, so old messages have to go.</a:t>
+            </a:r>
+          </a:p>
+          <a:p>
+            <a:pPr>
+              <a:spcAft>
+                <a:spcPts val="0"/>
+              </a:spcAft>
+            </a:pPr>
+            <a:r>
+              <a:rPr sz="1300">
+                <a:solidFill>
+                  <a:srgbClr val="6D8C97"/>
+                </a:solidFill>
+                <a:latin typeface="Consolas"/>
+              </a:rPr>
+              <a:t>  62  </a:t>
+            </a:r>
+            <a:r>
+              <a:rPr sz="1300">
+                <a:solidFill>
+                  <a:srgbClr val="6D8C97"/>
+                </a:solidFill>
+                <a:latin typeface="Consolas"/>
+              </a:rPr>
+              <a:t>const MAX_CHARS = 3500;   // leave room for the personality and your next line</a:t>
+            </a:r>
+          </a:p>
+          <a:p>
+            <a:pPr>
+              <a:spcAft>
+                <a:spcPts val="0"/>
+              </a:spcAft>
+            </a:pPr>
+            <a:r>
+              <a:rPr sz="1300">
+                <a:solidFill>
+                  <a:srgbClr val="6D8C97"/>
+                </a:solidFill>
+                <a:latin typeface="Consolas"/>
+              </a:rPr>
+              <a:t>  63  </a:t>
+            </a:r>
+            <a:r>
+              <a:rPr sz="1300">
+                <a:solidFill>
+                  <a:srgbClr val="6D8C97"/>
+                </a:solidFill>
+                <a:latin typeface="Consolas"/>
+              </a:rPr>
+              <a:t> </a:t>
+            </a:r>
+          </a:p>
+          <a:p>
+            <a:pPr>
+              <a:spcAft>
+                <a:spcPts val="0"/>
+              </a:spcAft>
+            </a:pPr>
+            <a:r>
+              <a:rPr sz="1300">
+                <a:solidFill>
+                  <a:srgbClr val="6D8C97"/>
+                </a:solidFill>
+                <a:latin typeface="Consolas"/>
+              </a:rPr>
+              <a:t>  64  </a:t>
+            </a:r>
+            <a:r>
+              <a:rPr sz="1300">
+                <a:solidFill>
+                  <a:srgbClr val="6D8C97"/>
+                </a:solidFill>
+                <a:latin typeface="Consolas"/>
+              </a:rPr>
+              <a:t>function trimHistory() {</a:t>
+            </a:r>
+          </a:p>
+          <a:p>
+            <a:pPr>
+              <a:spcAft>
+                <a:spcPts val="0"/>
+              </a:spcAft>
+            </a:pPr>
+            <a:r>
+              <a:rPr sz="1300">
+                <a:solidFill>
+                  <a:srgbClr val="6D8C97"/>
+                </a:solidFill>
+                <a:latin typeface="Consolas"/>
+              </a:rPr>
+              <a:t>  65  </a:t>
+            </a:r>
+            <a:r>
+              <a:rPr sz="1300">
+                <a:solidFill>
+                  <a:srgbClr val="6D8C97"/>
+                </a:solidFill>
+                <a:latin typeface="Consolas"/>
+              </a:rPr>
+              <a:t>  let size = personaBox.value.length;</a:t>
+            </a:r>
+          </a:p>
+          <a:p>
+            <a:pPr>
+              <a:spcAft>
+                <a:spcPts val="0"/>
+              </a:spcAft>
+            </a:pPr>
+            <a:r>
+              <a:rPr sz="1300">
+                <a:solidFill>
+                  <a:srgbClr val="6D8C97"/>
+                </a:solidFill>
+                <a:latin typeface="Consolas"/>
+              </a:rPr>
+              <a:t>  66  </a:t>
+            </a:r>
+            <a:r>
+              <a:rPr sz="1300">
+                <a:solidFill>
+                  <a:srgbClr val="6D8C97"/>
+                </a:solidFill>
+                <a:latin typeface="Consolas"/>
+              </a:rPr>
+              <a:t>  for (const message of history) {</a:t>
+            </a:r>
+          </a:p>
+          <a:p>
+            <a:pPr>
+              <a:spcAft>
+                <a:spcPts val="0"/>
+              </a:spcAft>
+            </a:pPr>
+            <a:r>
+              <a:rPr sz="1300">
+                <a:solidFill>
+                  <a:srgbClr val="6D8C97"/>
+                </a:solidFill>
+                <a:latin typeface="Consolas"/>
+              </a:rPr>
+              <a:t>  67  </a:t>
+            </a:r>
+            <a:r>
+              <a:rPr sz="1300">
+                <a:solidFill>
+                  <a:srgbClr val="6D8C97"/>
+                </a:solidFill>
+                <a:latin typeface="Consolas"/>
+              </a:rPr>
+              <a:t>    size += message.content.length;</a:t>
+            </a:r>
+          </a:p>
+          <a:p>
+            <a:pPr>
+              <a:spcAft>
+                <a:spcPts val="0"/>
+              </a:spcAft>
+            </a:pPr>
+            <a:r>
+              <a:rPr sz="1300">
+                <a:solidFill>
+                  <a:srgbClr val="6D8C97"/>
+                </a:solidFill>
+                <a:latin typeface="Consolas"/>
+              </a:rPr>
+              <a:t>  68  </a:t>
+            </a:r>
+            <a:r>
+              <a:rPr sz="1300">
+                <a:solidFill>
+                  <a:srgbClr val="6D8C97"/>
+                </a:solidFill>
+                <a:latin typeface="Consolas"/>
+              </a:rPr>
+              <a:t>  }</a:t>
+            </a:r>
+          </a:p>
+          <a:p>
+            <a:pPr>
+              <a:spcAft>
+                <a:spcPts val="0"/>
+              </a:spcAft>
+            </a:pPr>
+            <a:r>
+              <a:rPr sz="1300">
+                <a:solidFill>
+                  <a:srgbClr val="6D8C97"/>
+                </a:solidFill>
+                <a:latin typeface="Consolas"/>
+              </a:rPr>
+              <a:t>  69  </a:t>
+            </a:r>
+            <a:r>
+              <a:rPr sz="1300">
+                <a:solidFill>
+                  <a:srgbClr val="6D8C97"/>
+                </a:solidFill>
+                <a:latin typeface="Consolas"/>
+              </a:rPr>
+              <a:t>  // Drop from the FRONT. The oldest messages matter least - usually.</a:t>
+            </a:r>
+          </a:p>
+          <a:p>
+            <a:pPr>
+              <a:spcAft>
+                <a:spcPts val="0"/>
+              </a:spcAft>
+            </a:pPr>
+            <a:r>
+              <a:rPr sz="1300">
+                <a:solidFill>
+                  <a:srgbClr val="6D8C97"/>
+                </a:solidFill>
+                <a:latin typeface="Consolas"/>
+              </a:rPr>
+              <a:t>  70  </a:t>
+            </a:r>
+            <a:r>
+              <a:rPr sz="1300">
+                <a:solidFill>
+                  <a:srgbClr val="6D8C97"/>
+                </a:solidFill>
+                <a:latin typeface="Consolas"/>
+              </a:rPr>
+              <a:t>  while (size &gt; MAX_CHARS &amp;&amp; history.length &gt; 2) {</a:t>
+            </a:r>
+          </a:p>
+          <a:p>
+            <a:pPr>
+              <a:spcAft>
+                <a:spcPts val="0"/>
+              </a:spcAft>
+            </a:pPr>
+            <a:r>
+              <a:rPr sz="1300">
+                <a:solidFill>
+                  <a:srgbClr val="6D8C97"/>
+                </a:solidFill>
+                <a:latin typeface="Consolas"/>
+              </a:rPr>
+              <a:t>  71  </a:t>
+            </a:r>
+            <a:r>
+              <a:rPr sz="1300">
+                <a:solidFill>
+                  <a:srgbClr val="6D8C97"/>
+                </a:solidFill>
+                <a:latin typeface="Consolas"/>
+              </a:rPr>
+              <a:t>    const dropped = history.shift();</a:t>
+            </a:r>
+          </a:p>
+          <a:p>
+            <a:pPr>
+              <a:spcAft>
+                <a:spcPts val="0"/>
+              </a:spcAft>
+            </a:pPr>
+            <a:r>
+              <a:rPr sz="1300">
+                <a:solidFill>
+                  <a:srgbClr val="6D8C97"/>
+                </a:solidFill>
+                <a:latin typeface="Consolas"/>
+              </a:rPr>
+              <a:t>  72  </a:t>
+            </a:r>
+            <a:r>
+              <a:rPr sz="1300">
+                <a:solidFill>
+                  <a:srgbClr val="6D8C97"/>
+                </a:solidFill>
+                <a:latin typeface="Consolas"/>
+              </a:rPr>
+              <a:t>    size -= dropped.content.length;</a:t>
+            </a:r>
+          </a:p>
+          <a:p>
+            <a:pPr>
+              <a:spcAft>
+                <a:spcPts val="0"/>
+              </a:spcAft>
+            </a:pPr>
+            <a:r>
+              <a:rPr sz="1300">
+                <a:solidFill>
+                  <a:srgbClr val="6D8C97"/>
+                </a:solidFill>
+                <a:latin typeface="Consolas"/>
+              </a:rPr>
+              <a:t>  73  </a:t>
+            </a:r>
+            <a:r>
+              <a:rPr sz="1300">
+                <a:solidFill>
+                  <a:srgbClr val="7FE0A0"/>
+                </a:solidFill>
+                <a:latin typeface="Consolas"/>
+              </a:rPr>
+              <a:t>    console.log('Forgot an old message to stay under the limit.');</a:t>
+            </a:r>
+          </a:p>
+        </p:txBody>
+      </p:sp>
+      <p:sp>
+        <p:nvSpPr>
+          <p:cNvPr id="4" name="TextBox 3"/>
+          <p:cNvSpPr txBox="1"/>
+          <p:nvPr/>
+        </p:nvSpPr>
+        <p:spPr>
+          <a:xfrm>
+            <a:off x="548640" y="5623560"/>
+            <a:ext cx="11064240" cy="1051560"/>
+          </a:xfrm>
+          <a:prstGeom prst="rect">
+            <a:avLst/>
+          </a:prstGeom>
+          <a:noFill/>
+        </p:spPr>
+        <p:txBody>
+          <a:bodyPr wrap="square">
+            <a:spAutoFit/>
+          </a:bodyPr>
+          <a:lstStyle/>
+          <a:p>
+            <a:r>
+              <a:rPr sz="2000">
+                <a:solidFill>
+                  <a:srgbClr val="DCECEF"/>
+                </a:solidFill>
+              </a:rPr>
+              <a:t>Log it, so you can watch the forgetting happen in the console.</a:t>
+            </a:r>
+          </a:p>
+        </p:txBody>
+      </p:sp>
+    </p:spTree>
+  </p:cSld>
+  <p:clrMapOvr>
+    <a:masterClrMapping/>
+  </p:clrMapOvr>
+</p:sld>
+</file>
+
+<file path=ppt/slides/slide21.xml><?xml version="1.0" encoding="utf-8"?>
+<p:sld xmlns:a="http://schemas.openxmlformats.org/drawingml/2006/main" xmlns:p="http://schemas.openxmlformats.org/presentationml/2006/main" xmlns:r="http://schemas.openxmlformats.org/officeDocument/2006/relationships">
+  <p:cSld>
+    <p:bg>
+      <p:bgPr>
+        <a:solidFill>
+          <a:srgbClr val="102127"/>
+        </a:solidFill>
+        <a:effectLst/>
+      </p:bgPr>
+    </p:bg>
+    <p:spTree>
+      <p:nvGrpSpPr>
+        <p:cNvPr id="1" name=""/>
+        <p:cNvGrpSpPr/>
+        <p:nvPr/>
+      </p:nvGrpSpPr>
+      <p:grpSpPr/>
+      <p:sp>
+        <p:nvSpPr>
+          <p:cNvPr id="2" name="TextBox 1"/>
+          <p:cNvSpPr txBox="1"/>
+          <p:nvPr/>
+        </p:nvSpPr>
+        <p:spPr>
+          <a:xfrm>
+            <a:off x="502920" y="274320"/>
+            <a:ext cx="11155680" cy="548640"/>
+          </a:xfrm>
+          <a:prstGeom prst="rect">
+            <a:avLst/>
+          </a:prstGeom>
+          <a:noFill/>
+        </p:spPr>
+        <p:txBody>
+          <a:bodyPr wrap="none">
+            <a:spAutoFit/>
+          </a:bodyPr>
+          <a:lstStyle/>
+          <a:p>
+            <a:r>
+              <a:rPr sz="2200" b="1">
+                <a:solidFill>
+                  <a:srgbClr val="01AEFD"/>
+                </a:solidFill>
+              </a:rPr>
+              <a:t>Type this into script.js   -   line 74</a:t>
+            </a:r>
+          </a:p>
+        </p:txBody>
+      </p:sp>
+      <p:sp>
+        <p:nvSpPr>
+          <p:cNvPr id="3" name="TextBox 2"/>
+          <p:cNvSpPr txBox="1"/>
+          <p:nvPr/>
+        </p:nvSpPr>
+        <p:spPr>
+          <a:xfrm>
+            <a:off x="502920" y="960120"/>
+            <a:ext cx="11155680" cy="4297680"/>
+          </a:xfrm>
+          <a:prstGeom prst="rect">
+            <a:avLst/>
+          </a:prstGeom>
+          <a:noFill/>
+        </p:spPr>
+        <p:txBody>
+          <a:bodyPr wrap="none">
+            <a:spAutoFit/>
+          </a:bodyPr>
+          <a:lstStyle/>
+          <a:p>
+            <a:pPr>
+              <a:spcAft>
+                <a:spcPts val="0"/>
+              </a:spcAft>
+            </a:pPr>
+            <a:r>
+              <a:rPr sz="1300">
+                <a:solidFill>
+                  <a:srgbClr val="6D8C97"/>
+                </a:solidFill>
+                <a:latin typeface="Consolas"/>
+              </a:rPr>
+              <a:t>  59  </a:t>
+            </a:r>
+            <a:r>
+              <a:rPr sz="1300">
+                <a:solidFill>
+                  <a:srgbClr val="6D8C97"/>
+                </a:solidFill>
+                <a:latin typeface="Consolas"/>
+              </a:rPr>
+              <a:t> </a:t>
+            </a:r>
+          </a:p>
+          <a:p>
+            <a:pPr>
+              <a:spcAft>
+                <a:spcPts val="0"/>
+              </a:spcAft>
+            </a:pPr>
+            <a:r>
+              <a:rPr sz="1300">
+                <a:solidFill>
+                  <a:srgbClr val="6D8C97"/>
+                </a:solidFill>
+                <a:latin typeface="Consolas"/>
+              </a:rPr>
+              <a:t>  60  </a:t>
+            </a:r>
+            <a:r>
+              <a:rPr sz="1300">
+                <a:solidFill>
+                  <a:srgbClr val="6D8C97"/>
+                </a:solidFill>
+                <a:latin typeface="Consolas"/>
+              </a:rPr>
+              <a:t>// Week 8: the server reads at most 4000 characters of conversation at once.</a:t>
+            </a:r>
+          </a:p>
+          <a:p>
+            <a:pPr>
+              <a:spcAft>
+                <a:spcPts val="0"/>
+              </a:spcAft>
+            </a:pPr>
+            <a:r>
+              <a:rPr sz="1300">
+                <a:solidFill>
+                  <a:srgbClr val="6D8C97"/>
+                </a:solidFill>
+                <a:latin typeface="Consolas"/>
+              </a:rPr>
+              <a:t>  61  </a:t>
+            </a:r>
+            <a:r>
+              <a:rPr sz="1300">
+                <a:solidFill>
+                  <a:srgbClr val="6D8C97"/>
+                </a:solidFill>
+                <a:latin typeface="Consolas"/>
+              </a:rPr>
+              <a:t>// Past that it refuses the whole request, so old messages have to go.</a:t>
+            </a:r>
+          </a:p>
+          <a:p>
+            <a:pPr>
+              <a:spcAft>
+                <a:spcPts val="0"/>
+              </a:spcAft>
+            </a:pPr>
+            <a:r>
+              <a:rPr sz="1300">
+                <a:solidFill>
+                  <a:srgbClr val="6D8C97"/>
+                </a:solidFill>
+                <a:latin typeface="Consolas"/>
+              </a:rPr>
+              <a:t>  62  </a:t>
+            </a:r>
+            <a:r>
+              <a:rPr sz="1300">
+                <a:solidFill>
+                  <a:srgbClr val="6D8C97"/>
+                </a:solidFill>
+                <a:latin typeface="Consolas"/>
+              </a:rPr>
+              <a:t>const MAX_CHARS = 3500;   // leave room for the personality and your next line</a:t>
+            </a:r>
+          </a:p>
+          <a:p>
+            <a:pPr>
+              <a:spcAft>
+                <a:spcPts val="0"/>
+              </a:spcAft>
+            </a:pPr>
+            <a:r>
+              <a:rPr sz="1300">
+                <a:solidFill>
+                  <a:srgbClr val="6D8C97"/>
+                </a:solidFill>
+                <a:latin typeface="Consolas"/>
+              </a:rPr>
+              <a:t>  63  </a:t>
+            </a:r>
+            <a:r>
+              <a:rPr sz="1300">
+                <a:solidFill>
+                  <a:srgbClr val="6D8C97"/>
+                </a:solidFill>
+                <a:latin typeface="Consolas"/>
+              </a:rPr>
+              <a:t> </a:t>
+            </a:r>
+          </a:p>
+          <a:p>
+            <a:pPr>
+              <a:spcAft>
+                <a:spcPts val="0"/>
+              </a:spcAft>
+            </a:pPr>
+            <a:r>
+              <a:rPr sz="1300">
+                <a:solidFill>
+                  <a:srgbClr val="6D8C97"/>
+                </a:solidFill>
+                <a:latin typeface="Consolas"/>
+              </a:rPr>
+              <a:t>  64  </a:t>
+            </a:r>
+            <a:r>
+              <a:rPr sz="1300">
+                <a:solidFill>
+                  <a:srgbClr val="6D8C97"/>
+                </a:solidFill>
+                <a:latin typeface="Consolas"/>
+              </a:rPr>
+              <a:t>function trimHistory() {</a:t>
+            </a:r>
+          </a:p>
+          <a:p>
+            <a:pPr>
+              <a:spcAft>
+                <a:spcPts val="0"/>
+              </a:spcAft>
+            </a:pPr>
+            <a:r>
+              <a:rPr sz="1300">
+                <a:solidFill>
+                  <a:srgbClr val="6D8C97"/>
+                </a:solidFill>
+                <a:latin typeface="Consolas"/>
+              </a:rPr>
+              <a:t>  65  </a:t>
+            </a:r>
+            <a:r>
+              <a:rPr sz="1300">
+                <a:solidFill>
+                  <a:srgbClr val="6D8C97"/>
+                </a:solidFill>
+                <a:latin typeface="Consolas"/>
+              </a:rPr>
+              <a:t>  let size = personaBox.value.length;</a:t>
+            </a:r>
+          </a:p>
+          <a:p>
+            <a:pPr>
+              <a:spcAft>
+                <a:spcPts val="0"/>
+              </a:spcAft>
+            </a:pPr>
+            <a:r>
+              <a:rPr sz="1300">
+                <a:solidFill>
+                  <a:srgbClr val="6D8C97"/>
+                </a:solidFill>
+                <a:latin typeface="Consolas"/>
+              </a:rPr>
+              <a:t>  66  </a:t>
+            </a:r>
+            <a:r>
+              <a:rPr sz="1300">
+                <a:solidFill>
+                  <a:srgbClr val="6D8C97"/>
+                </a:solidFill>
+                <a:latin typeface="Consolas"/>
+              </a:rPr>
+              <a:t>  for (const message of history) {</a:t>
+            </a:r>
+          </a:p>
+          <a:p>
+            <a:pPr>
+              <a:spcAft>
+                <a:spcPts val="0"/>
+              </a:spcAft>
+            </a:pPr>
+            <a:r>
+              <a:rPr sz="1300">
+                <a:solidFill>
+                  <a:srgbClr val="6D8C97"/>
+                </a:solidFill>
+                <a:latin typeface="Consolas"/>
+              </a:rPr>
+              <a:t>  67  </a:t>
+            </a:r>
+            <a:r>
+              <a:rPr sz="1300">
+                <a:solidFill>
+                  <a:srgbClr val="6D8C97"/>
+                </a:solidFill>
+                <a:latin typeface="Consolas"/>
+              </a:rPr>
+              <a:t>    size += message.content.length;</a:t>
+            </a:r>
+          </a:p>
+          <a:p>
+            <a:pPr>
+              <a:spcAft>
+                <a:spcPts val="0"/>
+              </a:spcAft>
+            </a:pPr>
+            <a:r>
+              <a:rPr sz="1300">
+                <a:solidFill>
+                  <a:srgbClr val="6D8C97"/>
+                </a:solidFill>
+                <a:latin typeface="Consolas"/>
+              </a:rPr>
+              <a:t>  68  </a:t>
+            </a:r>
+            <a:r>
+              <a:rPr sz="1300">
+                <a:solidFill>
+                  <a:srgbClr val="6D8C97"/>
+                </a:solidFill>
+                <a:latin typeface="Consolas"/>
+              </a:rPr>
+              <a:t>  }</a:t>
+            </a:r>
+          </a:p>
+          <a:p>
+            <a:pPr>
+              <a:spcAft>
+                <a:spcPts val="0"/>
+              </a:spcAft>
+            </a:pPr>
+            <a:r>
+              <a:rPr sz="1300">
+                <a:solidFill>
+                  <a:srgbClr val="6D8C97"/>
+                </a:solidFill>
+                <a:latin typeface="Consolas"/>
+              </a:rPr>
+              <a:t>  69  </a:t>
+            </a:r>
+            <a:r>
+              <a:rPr sz="1300">
+                <a:solidFill>
+                  <a:srgbClr val="6D8C97"/>
+                </a:solidFill>
+                <a:latin typeface="Consolas"/>
+              </a:rPr>
+              <a:t>  // Drop from the FRONT. The oldest messages matter least - usually.</a:t>
+            </a:r>
+          </a:p>
+          <a:p>
+            <a:pPr>
+              <a:spcAft>
+                <a:spcPts val="0"/>
+              </a:spcAft>
+            </a:pPr>
+            <a:r>
+              <a:rPr sz="1300">
+                <a:solidFill>
+                  <a:srgbClr val="6D8C97"/>
+                </a:solidFill>
+                <a:latin typeface="Consolas"/>
+              </a:rPr>
+              <a:t>  70  </a:t>
+            </a:r>
+            <a:r>
+              <a:rPr sz="1300">
+                <a:solidFill>
+                  <a:srgbClr val="6D8C97"/>
+                </a:solidFill>
+                <a:latin typeface="Consolas"/>
+              </a:rPr>
+              <a:t>  while (size &gt; MAX_CHARS &amp;&amp; history.length &gt; 2) {</a:t>
+            </a:r>
+          </a:p>
+          <a:p>
+            <a:pPr>
+              <a:spcAft>
+                <a:spcPts val="0"/>
+              </a:spcAft>
+            </a:pPr>
+            <a:r>
+              <a:rPr sz="1300">
+                <a:solidFill>
+                  <a:srgbClr val="6D8C97"/>
+                </a:solidFill>
+                <a:latin typeface="Consolas"/>
+              </a:rPr>
+              <a:t>  71  </a:t>
+            </a:r>
+            <a:r>
+              <a:rPr sz="1300">
+                <a:solidFill>
+                  <a:srgbClr val="6D8C97"/>
+                </a:solidFill>
+                <a:latin typeface="Consolas"/>
+              </a:rPr>
+              <a:t>    const dropped = history.shift();</a:t>
+            </a:r>
+          </a:p>
+          <a:p>
+            <a:pPr>
+              <a:spcAft>
+                <a:spcPts val="0"/>
+              </a:spcAft>
+            </a:pPr>
+            <a:r>
+              <a:rPr sz="1300">
+                <a:solidFill>
+                  <a:srgbClr val="6D8C97"/>
+                </a:solidFill>
+                <a:latin typeface="Consolas"/>
+              </a:rPr>
+              <a:t>  72  </a:t>
+            </a:r>
+            <a:r>
+              <a:rPr sz="1300">
+                <a:solidFill>
+                  <a:srgbClr val="6D8C97"/>
+                </a:solidFill>
+                <a:latin typeface="Consolas"/>
+              </a:rPr>
+              <a:t>    size -= dropped.content.length;</a:t>
+            </a:r>
+          </a:p>
+          <a:p>
+            <a:pPr>
+              <a:spcAft>
+                <a:spcPts val="0"/>
+              </a:spcAft>
+            </a:pPr>
+            <a:r>
+              <a:rPr sz="1300">
+                <a:solidFill>
+                  <a:srgbClr val="6D8C97"/>
+                </a:solidFill>
+                <a:latin typeface="Consolas"/>
+              </a:rPr>
+              <a:t>  73  </a:t>
+            </a:r>
+            <a:r>
+              <a:rPr sz="1300">
+                <a:solidFill>
+                  <a:srgbClr val="6D8C97"/>
+                </a:solidFill>
+                <a:latin typeface="Consolas"/>
+              </a:rPr>
+              <a:t>    console.log('Forgot an old message to stay under the limit.');</a:t>
+            </a:r>
+          </a:p>
+          <a:p>
+            <a:pPr>
+              <a:spcAft>
+                <a:spcPts val="0"/>
+              </a:spcAft>
+            </a:pPr>
+            <a:r>
+              <a:rPr sz="1300">
+                <a:solidFill>
+                  <a:srgbClr val="6D8C97"/>
+                </a:solidFill>
+                <a:latin typeface="Consolas"/>
+              </a:rPr>
+              <a:t>  74  </a:t>
+            </a:r>
+            <a:r>
+              <a:rPr sz="1300">
+                <a:solidFill>
+                  <a:srgbClr val="7FE0A0"/>
+                </a:solidFill>
+                <a:latin typeface="Consolas"/>
+              </a:rPr>
+              <a:t>  }</a:t>
+            </a:r>
+          </a:p>
+        </p:txBody>
+      </p:sp>
+      <p:sp>
+        <p:nvSpPr>
+          <p:cNvPr id="4" name="TextBox 3"/>
+          <p:cNvSpPr txBox="1"/>
+          <p:nvPr/>
+        </p:nvSpPr>
+        <p:spPr>
+          <a:xfrm>
+            <a:off x="548640" y="5623560"/>
+            <a:ext cx="11064240" cy="1051560"/>
+          </a:xfrm>
+          <a:prstGeom prst="rect">
+            <a:avLst/>
+          </a:prstGeom>
+          <a:noFill/>
+        </p:spPr>
+        <p:txBody>
+          <a:bodyPr wrap="square">
+            <a:spAutoFit/>
+          </a:bodyPr>
+          <a:lstStyle/>
+          <a:p>
+            <a:r>
+              <a:rPr sz="2000">
+                <a:solidFill>
+                  <a:srgbClr val="DCECEF"/>
+                </a:solidFill>
+              </a:rPr>
+              <a:t>Close the while - it loops until we are back under the limit.</a:t>
+            </a:r>
+          </a:p>
+        </p:txBody>
+      </p:sp>
+    </p:spTree>
+  </p:cSld>
+  <p:clrMapOvr>
+    <a:masterClrMapping/>
+  </p:clrMapOvr>
+</p:sld>
+</file>
+
+<file path=ppt/slides/slide22.xml><?xml version="1.0" encoding="utf-8"?>
+<p:sld xmlns:a="http://schemas.openxmlformats.org/drawingml/2006/main" xmlns:p="http://schemas.openxmlformats.org/presentationml/2006/main" xmlns:r="http://schemas.openxmlformats.org/officeDocument/2006/relationships">
+  <p:cSld>
+    <p:bg>
+      <p:bgPr>
+        <a:solidFill>
+          <a:srgbClr val="102127"/>
+        </a:solidFill>
+        <a:effectLst/>
+      </p:bgPr>
+    </p:bg>
+    <p:spTree>
+      <p:nvGrpSpPr>
+        <p:cNvPr id="1" name=""/>
+        <p:cNvGrpSpPr/>
+        <p:nvPr/>
+      </p:nvGrpSpPr>
+      <p:grpSpPr/>
+      <p:sp>
+        <p:nvSpPr>
+          <p:cNvPr id="2" name="TextBox 1"/>
+          <p:cNvSpPr txBox="1"/>
+          <p:nvPr/>
+        </p:nvSpPr>
+        <p:spPr>
+          <a:xfrm>
+            <a:off x="502920" y="274320"/>
+            <a:ext cx="11155680" cy="548640"/>
+          </a:xfrm>
+          <a:prstGeom prst="rect">
+            <a:avLst/>
+          </a:prstGeom>
+          <a:noFill/>
+        </p:spPr>
+        <p:txBody>
+          <a:bodyPr wrap="none">
+            <a:spAutoFit/>
+          </a:bodyPr>
+          <a:lstStyle/>
+          <a:p>
+            <a:r>
+              <a:rPr sz="2200" b="1">
+                <a:solidFill>
+                  <a:srgbClr val="01AEFD"/>
+                </a:solidFill>
+              </a:rPr>
+              <a:t>Type this into script.js   -   line 75</a:t>
+            </a:r>
+          </a:p>
+        </p:txBody>
+      </p:sp>
+      <p:sp>
+        <p:nvSpPr>
+          <p:cNvPr id="3" name="TextBox 2"/>
+          <p:cNvSpPr txBox="1"/>
+          <p:nvPr/>
+        </p:nvSpPr>
+        <p:spPr>
+          <a:xfrm>
+            <a:off x="502920" y="960120"/>
+            <a:ext cx="11155680" cy="4297680"/>
+          </a:xfrm>
+          <a:prstGeom prst="rect">
+            <a:avLst/>
+          </a:prstGeom>
+          <a:noFill/>
+        </p:spPr>
+        <p:txBody>
+          <a:bodyPr wrap="none">
+            <a:spAutoFit/>
+          </a:bodyPr>
+          <a:lstStyle/>
+          <a:p>
+            <a:pPr>
+              <a:spcAft>
+                <a:spcPts val="0"/>
+              </a:spcAft>
+            </a:pPr>
+            <a:r>
+              <a:rPr sz="1300">
+                <a:solidFill>
+                  <a:srgbClr val="6D8C97"/>
+                </a:solidFill>
+                <a:latin typeface="Consolas"/>
+              </a:rPr>
+              <a:t>  59  </a:t>
+            </a:r>
+            <a:r>
+              <a:rPr sz="1300">
+                <a:solidFill>
+                  <a:srgbClr val="6D8C97"/>
+                </a:solidFill>
+                <a:latin typeface="Consolas"/>
+              </a:rPr>
+              <a:t> </a:t>
+            </a:r>
+          </a:p>
+          <a:p>
+            <a:pPr>
+              <a:spcAft>
+                <a:spcPts val="0"/>
+              </a:spcAft>
+            </a:pPr>
+            <a:r>
+              <a:rPr sz="1300">
+                <a:solidFill>
+                  <a:srgbClr val="6D8C97"/>
+                </a:solidFill>
+                <a:latin typeface="Consolas"/>
+              </a:rPr>
+              <a:t>  60  </a:t>
+            </a:r>
+            <a:r>
+              <a:rPr sz="1300">
+                <a:solidFill>
+                  <a:srgbClr val="6D8C97"/>
+                </a:solidFill>
+                <a:latin typeface="Consolas"/>
+              </a:rPr>
+              <a:t>// Week 8: the server reads at most 4000 characters of conversation at once.</a:t>
+            </a:r>
+          </a:p>
+          <a:p>
+            <a:pPr>
+              <a:spcAft>
+                <a:spcPts val="0"/>
+              </a:spcAft>
+            </a:pPr>
+            <a:r>
+              <a:rPr sz="1300">
+                <a:solidFill>
+                  <a:srgbClr val="6D8C97"/>
+                </a:solidFill>
+                <a:latin typeface="Consolas"/>
+              </a:rPr>
+              <a:t>  61  </a:t>
+            </a:r>
+            <a:r>
+              <a:rPr sz="1300">
+                <a:solidFill>
+                  <a:srgbClr val="6D8C97"/>
+                </a:solidFill>
+                <a:latin typeface="Consolas"/>
+              </a:rPr>
+              <a:t>// Past that it refuses the whole request, so old messages have to go.</a:t>
+            </a:r>
+          </a:p>
+          <a:p>
+            <a:pPr>
+              <a:spcAft>
+                <a:spcPts val="0"/>
+              </a:spcAft>
+            </a:pPr>
+            <a:r>
+              <a:rPr sz="1300">
+                <a:solidFill>
+                  <a:srgbClr val="6D8C97"/>
+                </a:solidFill>
+                <a:latin typeface="Consolas"/>
+              </a:rPr>
+              <a:t>  62  </a:t>
+            </a:r>
+            <a:r>
+              <a:rPr sz="1300">
+                <a:solidFill>
+                  <a:srgbClr val="6D8C97"/>
+                </a:solidFill>
+                <a:latin typeface="Consolas"/>
+              </a:rPr>
+              <a:t>const MAX_CHARS = 3500;   // leave room for the personality and your next line</a:t>
+            </a:r>
+          </a:p>
+          <a:p>
+            <a:pPr>
+              <a:spcAft>
+                <a:spcPts val="0"/>
+              </a:spcAft>
+            </a:pPr>
+            <a:r>
+              <a:rPr sz="1300">
+                <a:solidFill>
+                  <a:srgbClr val="6D8C97"/>
+                </a:solidFill>
+                <a:latin typeface="Consolas"/>
+              </a:rPr>
+              <a:t>  63  </a:t>
+            </a:r>
+            <a:r>
+              <a:rPr sz="1300">
+                <a:solidFill>
+                  <a:srgbClr val="6D8C97"/>
+                </a:solidFill>
+                <a:latin typeface="Consolas"/>
+              </a:rPr>
+              <a:t> </a:t>
+            </a:r>
+          </a:p>
+          <a:p>
+            <a:pPr>
+              <a:spcAft>
+                <a:spcPts val="0"/>
+              </a:spcAft>
+            </a:pPr>
+            <a:r>
+              <a:rPr sz="1300">
+                <a:solidFill>
+                  <a:srgbClr val="6D8C97"/>
+                </a:solidFill>
+                <a:latin typeface="Consolas"/>
+              </a:rPr>
+              <a:t>  64  </a:t>
+            </a:r>
+            <a:r>
+              <a:rPr sz="1300">
+                <a:solidFill>
+                  <a:srgbClr val="6D8C97"/>
+                </a:solidFill>
+                <a:latin typeface="Consolas"/>
+              </a:rPr>
+              <a:t>function trimHistory() {</a:t>
+            </a:r>
+          </a:p>
+          <a:p>
+            <a:pPr>
+              <a:spcAft>
+                <a:spcPts val="0"/>
+              </a:spcAft>
+            </a:pPr>
+            <a:r>
+              <a:rPr sz="1300">
+                <a:solidFill>
+                  <a:srgbClr val="6D8C97"/>
+                </a:solidFill>
+                <a:latin typeface="Consolas"/>
+              </a:rPr>
+              <a:t>  65  </a:t>
+            </a:r>
+            <a:r>
+              <a:rPr sz="1300">
+                <a:solidFill>
+                  <a:srgbClr val="6D8C97"/>
+                </a:solidFill>
+                <a:latin typeface="Consolas"/>
+              </a:rPr>
+              <a:t>  let size = personaBox.value.length;</a:t>
+            </a:r>
+          </a:p>
+          <a:p>
+            <a:pPr>
+              <a:spcAft>
+                <a:spcPts val="0"/>
+              </a:spcAft>
+            </a:pPr>
+            <a:r>
+              <a:rPr sz="1300">
+                <a:solidFill>
+                  <a:srgbClr val="6D8C97"/>
+                </a:solidFill>
+                <a:latin typeface="Consolas"/>
+              </a:rPr>
+              <a:t>  66  </a:t>
+            </a:r>
+            <a:r>
+              <a:rPr sz="1300">
+                <a:solidFill>
+                  <a:srgbClr val="6D8C97"/>
+                </a:solidFill>
+                <a:latin typeface="Consolas"/>
+              </a:rPr>
+              <a:t>  for (const message of history) {</a:t>
+            </a:r>
+          </a:p>
+          <a:p>
+            <a:pPr>
+              <a:spcAft>
+                <a:spcPts val="0"/>
+              </a:spcAft>
+            </a:pPr>
+            <a:r>
+              <a:rPr sz="1300">
+                <a:solidFill>
+                  <a:srgbClr val="6D8C97"/>
+                </a:solidFill>
+                <a:latin typeface="Consolas"/>
+              </a:rPr>
+              <a:t>  67  </a:t>
+            </a:r>
+            <a:r>
+              <a:rPr sz="1300">
+                <a:solidFill>
+                  <a:srgbClr val="6D8C97"/>
+                </a:solidFill>
+                <a:latin typeface="Consolas"/>
+              </a:rPr>
+              <a:t>    size += message.content.length;</a:t>
+            </a:r>
+          </a:p>
+          <a:p>
+            <a:pPr>
+              <a:spcAft>
+                <a:spcPts val="0"/>
+              </a:spcAft>
+            </a:pPr>
+            <a:r>
+              <a:rPr sz="1300">
+                <a:solidFill>
+                  <a:srgbClr val="6D8C97"/>
+                </a:solidFill>
+                <a:latin typeface="Consolas"/>
+              </a:rPr>
+              <a:t>  68  </a:t>
+            </a:r>
+            <a:r>
+              <a:rPr sz="1300">
+                <a:solidFill>
+                  <a:srgbClr val="6D8C97"/>
+                </a:solidFill>
+                <a:latin typeface="Consolas"/>
+              </a:rPr>
+              <a:t>  }</a:t>
+            </a:r>
+          </a:p>
+          <a:p>
+            <a:pPr>
+              <a:spcAft>
+                <a:spcPts val="0"/>
+              </a:spcAft>
+            </a:pPr>
+            <a:r>
+              <a:rPr sz="1300">
+                <a:solidFill>
+                  <a:srgbClr val="6D8C97"/>
+                </a:solidFill>
+                <a:latin typeface="Consolas"/>
+              </a:rPr>
+              <a:t>  69  </a:t>
+            </a:r>
+            <a:r>
+              <a:rPr sz="1300">
+                <a:solidFill>
+                  <a:srgbClr val="6D8C97"/>
+                </a:solidFill>
+                <a:latin typeface="Consolas"/>
+              </a:rPr>
+              <a:t>  // Drop from the FRONT. The oldest messages matter least - usually.</a:t>
+            </a:r>
+          </a:p>
+          <a:p>
+            <a:pPr>
+              <a:spcAft>
+                <a:spcPts val="0"/>
+              </a:spcAft>
+            </a:pPr>
+            <a:r>
+              <a:rPr sz="1300">
+                <a:solidFill>
+                  <a:srgbClr val="6D8C97"/>
+                </a:solidFill>
+                <a:latin typeface="Consolas"/>
+              </a:rPr>
+              <a:t>  70  </a:t>
+            </a:r>
+            <a:r>
+              <a:rPr sz="1300">
+                <a:solidFill>
+                  <a:srgbClr val="6D8C97"/>
+                </a:solidFill>
+                <a:latin typeface="Consolas"/>
+              </a:rPr>
+              <a:t>  while (size &gt; MAX_CHARS &amp;&amp; history.length &gt; 2) {</a:t>
+            </a:r>
+          </a:p>
+          <a:p>
+            <a:pPr>
+              <a:spcAft>
+                <a:spcPts val="0"/>
+              </a:spcAft>
+            </a:pPr>
+            <a:r>
+              <a:rPr sz="1300">
+                <a:solidFill>
+                  <a:srgbClr val="6D8C97"/>
+                </a:solidFill>
+                <a:latin typeface="Consolas"/>
+              </a:rPr>
+              <a:t>  71  </a:t>
+            </a:r>
+            <a:r>
+              <a:rPr sz="1300">
+                <a:solidFill>
+                  <a:srgbClr val="6D8C97"/>
+                </a:solidFill>
+                <a:latin typeface="Consolas"/>
+              </a:rPr>
+              <a:t>    const dropped = history.shift();</a:t>
+            </a:r>
+          </a:p>
+          <a:p>
+            <a:pPr>
+              <a:spcAft>
+                <a:spcPts val="0"/>
+              </a:spcAft>
+            </a:pPr>
+            <a:r>
+              <a:rPr sz="1300">
+                <a:solidFill>
+                  <a:srgbClr val="6D8C97"/>
+                </a:solidFill>
+                <a:latin typeface="Consolas"/>
+              </a:rPr>
+              <a:t>  72  </a:t>
+            </a:r>
+            <a:r>
+              <a:rPr sz="1300">
+                <a:solidFill>
+                  <a:srgbClr val="6D8C97"/>
+                </a:solidFill>
+                <a:latin typeface="Consolas"/>
+              </a:rPr>
+              <a:t>    size -= dropped.content.length;</a:t>
+            </a:r>
+          </a:p>
+          <a:p>
+            <a:pPr>
+              <a:spcAft>
+                <a:spcPts val="0"/>
+              </a:spcAft>
+            </a:pPr>
+            <a:r>
+              <a:rPr sz="1300">
+                <a:solidFill>
+                  <a:srgbClr val="6D8C97"/>
+                </a:solidFill>
+                <a:latin typeface="Consolas"/>
+              </a:rPr>
+              <a:t>  73  </a:t>
+            </a:r>
+            <a:r>
+              <a:rPr sz="1300">
+                <a:solidFill>
+                  <a:srgbClr val="6D8C97"/>
+                </a:solidFill>
+                <a:latin typeface="Consolas"/>
+              </a:rPr>
+              <a:t>    console.log('Forgot an old message to stay under the limit.');</a:t>
+            </a:r>
+          </a:p>
+          <a:p>
+            <a:pPr>
+              <a:spcAft>
+                <a:spcPts val="0"/>
+              </a:spcAft>
+            </a:pPr>
+            <a:r>
+              <a:rPr sz="1300">
+                <a:solidFill>
+                  <a:srgbClr val="6D8C97"/>
+                </a:solidFill>
+                <a:latin typeface="Consolas"/>
+              </a:rPr>
+              <a:t>  74  </a:t>
+            </a:r>
+            <a:r>
+              <a:rPr sz="1300">
+                <a:solidFill>
+                  <a:srgbClr val="6D8C97"/>
+                </a:solidFill>
+                <a:latin typeface="Consolas"/>
+              </a:rPr>
+              <a:t>  }</a:t>
+            </a:r>
+          </a:p>
+          <a:p>
+            <a:pPr>
+              <a:spcAft>
+                <a:spcPts val="0"/>
+              </a:spcAft>
+            </a:pPr>
+            <a:r>
+              <a:rPr sz="1300">
+                <a:solidFill>
+                  <a:srgbClr val="6D8C97"/>
+                </a:solidFill>
+                <a:latin typeface="Consolas"/>
+              </a:rPr>
+              <a:t>  75  </a:t>
+            </a:r>
+            <a:r>
+              <a:rPr sz="1300">
+                <a:solidFill>
+                  <a:srgbClr val="7FE0A0"/>
+                </a:solidFill>
+                <a:latin typeface="Consolas"/>
+              </a:rPr>
+              <a:t>}</a:t>
+            </a:r>
+          </a:p>
+        </p:txBody>
+      </p:sp>
+      <p:sp>
+        <p:nvSpPr>
+          <p:cNvPr id="4" name="TextBox 3"/>
+          <p:cNvSpPr txBox="1"/>
+          <p:nvPr/>
+        </p:nvSpPr>
+        <p:spPr>
+          <a:xfrm>
+            <a:off x="548640" y="5623560"/>
+            <a:ext cx="11064240" cy="1051560"/>
+          </a:xfrm>
+          <a:prstGeom prst="rect">
+            <a:avLst/>
+          </a:prstGeom>
+          <a:noFill/>
+        </p:spPr>
+        <p:txBody>
+          <a:bodyPr wrap="square">
+            <a:spAutoFit/>
+          </a:bodyPr>
+          <a:lstStyle/>
+          <a:p>
+            <a:r>
+              <a:rPr sz="2000">
+                <a:solidFill>
+                  <a:srgbClr val="DCECEF"/>
+                </a:solidFill>
+              </a:rPr>
+              <a:t>Close trimHistory.</a:t>
+            </a:r>
+          </a:p>
+        </p:txBody>
+      </p:sp>
+    </p:spTree>
+  </p:cSld>
+  <p:clrMapOvr>
+    <a:masterClrMapping/>
+  </p:clrMapOvr>
+</p:sld>
+</file>
+
+<file path=ppt/slides/slide23.xml><?xml version="1.0" encoding="utf-8"?>
+<p:sld xmlns:a="http://schemas.openxmlformats.org/drawingml/2006/main" xmlns:p="http://schemas.openxmlformats.org/presentationml/2006/main" xmlns:r="http://schemas.openxmlformats.org/officeDocument/2006/relationships">
+  <p:cSld>
+    <p:bg>
+      <p:bgPr>
+        <a:solidFill>
+          <a:srgbClr val="102127"/>
+        </a:solidFill>
+        <a:effectLst/>
+      </p:bgPr>
+    </p:bg>
+    <p:spTree>
+      <p:nvGrpSpPr>
+        <p:cNvPr id="1" name=""/>
+        <p:cNvGrpSpPr/>
+        <p:nvPr/>
+      </p:nvGrpSpPr>
+      <p:grpSpPr/>
+      <p:sp>
+        <p:nvSpPr>
+          <p:cNvPr id="2" name="TextBox 1"/>
+          <p:cNvSpPr txBox="1"/>
+          <p:nvPr/>
+        </p:nvSpPr>
+        <p:spPr>
+          <a:xfrm>
+            <a:off x="502920" y="274320"/>
+            <a:ext cx="11155680" cy="548640"/>
+          </a:xfrm>
+          <a:prstGeom prst="rect">
+            <a:avLst/>
+          </a:prstGeom>
+          <a:noFill/>
+        </p:spPr>
+        <p:txBody>
+          <a:bodyPr wrap="none">
+            <a:spAutoFit/>
+          </a:bodyPr>
+          <a:lstStyle/>
+          <a:p>
+            <a:r>
+              <a:rPr sz="2200" b="1">
+                <a:solidFill>
+                  <a:srgbClr val="01AEFD"/>
+                </a:solidFill>
+              </a:rPr>
+              <a:t>All together in script.js</a:t>
+            </a:r>
+          </a:p>
+        </p:txBody>
+      </p:sp>
+      <p:sp>
+        <p:nvSpPr>
+          <p:cNvPr id="3" name="TextBox 2"/>
+          <p:cNvSpPr txBox="1"/>
+          <p:nvPr/>
+        </p:nvSpPr>
+        <p:spPr>
+          <a:xfrm>
+            <a:off x="502920" y="960120"/>
+            <a:ext cx="11155680" cy="4297680"/>
+          </a:xfrm>
+          <a:prstGeom prst="rect">
+            <a:avLst/>
+          </a:prstGeom>
+          <a:noFill/>
+        </p:spPr>
+        <p:txBody>
+          <a:bodyPr wrap="none">
+            <a:spAutoFit/>
+          </a:bodyPr>
+          <a:lstStyle/>
+          <a:p>
+            <a:pPr>
+              <a:spcAft>
+                <a:spcPts val="0"/>
+              </a:spcAft>
+            </a:pPr>
+            <a:r>
+              <a:rPr sz="1300">
+                <a:solidFill>
+                  <a:srgbClr val="6D8C97"/>
+                </a:solidFill>
+                <a:latin typeface="Consolas"/>
+              </a:rPr>
+              <a:t>  59  </a:t>
+            </a:r>
+            <a:r>
+              <a:rPr sz="1300">
+                <a:solidFill>
+                  <a:srgbClr val="7FE0A0"/>
+                </a:solidFill>
+                <a:latin typeface="Consolas"/>
+              </a:rPr>
+              <a:t> </a:t>
+            </a:r>
+          </a:p>
+          <a:p>
+            <a:pPr>
+              <a:spcAft>
+                <a:spcPts val="0"/>
+              </a:spcAft>
+            </a:pPr>
+            <a:r>
+              <a:rPr sz="1300">
+                <a:solidFill>
+                  <a:srgbClr val="6D8C97"/>
+                </a:solidFill>
+                <a:latin typeface="Consolas"/>
+              </a:rPr>
+              <a:t>  60  </a:t>
+            </a:r>
+            <a:r>
+              <a:rPr sz="1300">
+                <a:solidFill>
+                  <a:srgbClr val="7FE0A0"/>
+                </a:solidFill>
+                <a:latin typeface="Consolas"/>
+              </a:rPr>
+              <a:t>// Week 8: the server reads at most 4000 characters of conversation at once.</a:t>
+            </a:r>
+          </a:p>
+          <a:p>
+            <a:pPr>
+              <a:spcAft>
+                <a:spcPts val="0"/>
+              </a:spcAft>
+            </a:pPr>
+            <a:r>
+              <a:rPr sz="1300">
+                <a:solidFill>
+                  <a:srgbClr val="6D8C97"/>
+                </a:solidFill>
+                <a:latin typeface="Consolas"/>
+              </a:rPr>
+              <a:t>  61  </a:t>
+            </a:r>
+            <a:r>
+              <a:rPr sz="1300">
+                <a:solidFill>
+                  <a:srgbClr val="7FE0A0"/>
+                </a:solidFill>
+                <a:latin typeface="Consolas"/>
+              </a:rPr>
+              <a:t>// Past that it refuses the whole request, so old messages have to go.</a:t>
+            </a:r>
+          </a:p>
+          <a:p>
+            <a:pPr>
+              <a:spcAft>
+                <a:spcPts val="0"/>
+              </a:spcAft>
+            </a:pPr>
+            <a:r>
+              <a:rPr sz="1300">
+                <a:solidFill>
+                  <a:srgbClr val="6D8C97"/>
+                </a:solidFill>
+                <a:latin typeface="Consolas"/>
+              </a:rPr>
+              <a:t>  62  </a:t>
+            </a:r>
+            <a:r>
+              <a:rPr sz="1300">
+                <a:solidFill>
+                  <a:srgbClr val="7FE0A0"/>
+                </a:solidFill>
+                <a:latin typeface="Consolas"/>
+              </a:rPr>
+              <a:t>const MAX_CHARS = 3500;   // leave room for the personality and your next line</a:t>
+            </a:r>
+          </a:p>
+          <a:p>
+            <a:pPr>
+              <a:spcAft>
+                <a:spcPts val="0"/>
+              </a:spcAft>
+            </a:pPr>
+            <a:r>
+              <a:rPr sz="1300">
+                <a:solidFill>
+                  <a:srgbClr val="6D8C97"/>
+                </a:solidFill>
+                <a:latin typeface="Consolas"/>
+              </a:rPr>
+              <a:t>  63  </a:t>
+            </a:r>
+            <a:r>
+              <a:rPr sz="1300">
+                <a:solidFill>
+                  <a:srgbClr val="7FE0A0"/>
+                </a:solidFill>
+                <a:latin typeface="Consolas"/>
+              </a:rPr>
+              <a:t> </a:t>
+            </a:r>
+          </a:p>
+          <a:p>
+            <a:pPr>
+              <a:spcAft>
+                <a:spcPts val="0"/>
+              </a:spcAft>
+            </a:pPr>
+            <a:r>
+              <a:rPr sz="1300">
+                <a:solidFill>
+                  <a:srgbClr val="6D8C97"/>
+                </a:solidFill>
+                <a:latin typeface="Consolas"/>
+              </a:rPr>
+              <a:t>  64  </a:t>
+            </a:r>
+            <a:r>
+              <a:rPr sz="1300">
+                <a:solidFill>
+                  <a:srgbClr val="7FE0A0"/>
+                </a:solidFill>
+                <a:latin typeface="Consolas"/>
+              </a:rPr>
+              <a:t>function trimHistory() {</a:t>
+            </a:r>
+          </a:p>
+          <a:p>
+            <a:pPr>
+              <a:spcAft>
+                <a:spcPts val="0"/>
+              </a:spcAft>
+            </a:pPr>
+            <a:r>
+              <a:rPr sz="1300">
+                <a:solidFill>
+                  <a:srgbClr val="6D8C97"/>
+                </a:solidFill>
+                <a:latin typeface="Consolas"/>
+              </a:rPr>
+              <a:t>  65  </a:t>
+            </a:r>
+            <a:r>
+              <a:rPr sz="1300">
+                <a:solidFill>
+                  <a:srgbClr val="7FE0A0"/>
+                </a:solidFill>
+                <a:latin typeface="Consolas"/>
+              </a:rPr>
+              <a:t>  let size = personaBox.value.length;</a:t>
+            </a:r>
+          </a:p>
+          <a:p>
+            <a:pPr>
+              <a:spcAft>
+                <a:spcPts val="0"/>
+              </a:spcAft>
+            </a:pPr>
+            <a:r>
+              <a:rPr sz="1300">
+                <a:solidFill>
+                  <a:srgbClr val="6D8C97"/>
+                </a:solidFill>
+                <a:latin typeface="Consolas"/>
+              </a:rPr>
+              <a:t>  66  </a:t>
+            </a:r>
+            <a:r>
+              <a:rPr sz="1300">
+                <a:solidFill>
+                  <a:srgbClr val="7FE0A0"/>
+                </a:solidFill>
+                <a:latin typeface="Consolas"/>
+              </a:rPr>
+              <a:t>  for (const message of history) {</a:t>
+            </a:r>
+          </a:p>
+          <a:p>
+            <a:pPr>
+              <a:spcAft>
+                <a:spcPts val="0"/>
+              </a:spcAft>
+            </a:pPr>
+            <a:r>
+              <a:rPr sz="1300">
+                <a:solidFill>
+                  <a:srgbClr val="6D8C97"/>
+                </a:solidFill>
+                <a:latin typeface="Consolas"/>
+              </a:rPr>
+              <a:t>  67  </a:t>
+            </a:r>
+            <a:r>
+              <a:rPr sz="1300">
+                <a:solidFill>
+                  <a:srgbClr val="7FE0A0"/>
+                </a:solidFill>
+                <a:latin typeface="Consolas"/>
+              </a:rPr>
+              <a:t>    size += message.content.length;</a:t>
+            </a:r>
+          </a:p>
+          <a:p>
+            <a:pPr>
+              <a:spcAft>
+                <a:spcPts val="0"/>
+              </a:spcAft>
+            </a:pPr>
+            <a:r>
+              <a:rPr sz="1300">
+                <a:solidFill>
+                  <a:srgbClr val="6D8C97"/>
+                </a:solidFill>
+                <a:latin typeface="Consolas"/>
+              </a:rPr>
+              <a:t>  68  </a:t>
+            </a:r>
+            <a:r>
+              <a:rPr sz="1300">
+                <a:solidFill>
+                  <a:srgbClr val="7FE0A0"/>
+                </a:solidFill>
+                <a:latin typeface="Consolas"/>
+              </a:rPr>
+              <a:t>  }</a:t>
+            </a:r>
+          </a:p>
+          <a:p>
+            <a:pPr>
+              <a:spcAft>
+                <a:spcPts val="0"/>
+              </a:spcAft>
+            </a:pPr>
+            <a:r>
+              <a:rPr sz="1300">
+                <a:solidFill>
+                  <a:srgbClr val="6D8C97"/>
+                </a:solidFill>
+                <a:latin typeface="Consolas"/>
+              </a:rPr>
+              <a:t>  69  </a:t>
+            </a:r>
+            <a:r>
+              <a:rPr sz="1300">
+                <a:solidFill>
+                  <a:srgbClr val="7FE0A0"/>
+                </a:solidFill>
+                <a:latin typeface="Consolas"/>
+              </a:rPr>
+              <a:t>  // Drop from the FRONT. The oldest messages matter least - usually.</a:t>
+            </a:r>
+          </a:p>
+          <a:p>
+            <a:pPr>
+              <a:spcAft>
+                <a:spcPts val="0"/>
+              </a:spcAft>
+            </a:pPr>
+            <a:r>
+              <a:rPr sz="1300">
+                <a:solidFill>
+                  <a:srgbClr val="6D8C97"/>
+                </a:solidFill>
+                <a:latin typeface="Consolas"/>
+              </a:rPr>
+              <a:t>  70  </a:t>
+            </a:r>
+            <a:r>
+              <a:rPr sz="1300">
+                <a:solidFill>
+                  <a:srgbClr val="7FE0A0"/>
+                </a:solidFill>
+                <a:latin typeface="Consolas"/>
+              </a:rPr>
+              <a:t>  while (size &gt; MAX_CHARS &amp;&amp; history.length &gt; 2) {</a:t>
+            </a:r>
+          </a:p>
+          <a:p>
+            <a:pPr>
+              <a:spcAft>
+                <a:spcPts val="0"/>
+              </a:spcAft>
+            </a:pPr>
+            <a:r>
+              <a:rPr sz="1300">
+                <a:solidFill>
+                  <a:srgbClr val="6D8C97"/>
+                </a:solidFill>
+                <a:latin typeface="Consolas"/>
+              </a:rPr>
+              <a:t>  71  </a:t>
+            </a:r>
+            <a:r>
+              <a:rPr sz="1300">
+                <a:solidFill>
+                  <a:srgbClr val="7FE0A0"/>
+                </a:solidFill>
+                <a:latin typeface="Consolas"/>
+              </a:rPr>
+              <a:t>    const dropped = history.shift();</a:t>
+            </a:r>
+          </a:p>
+          <a:p>
+            <a:pPr>
+              <a:spcAft>
+                <a:spcPts val="0"/>
+              </a:spcAft>
+            </a:pPr>
+            <a:r>
+              <a:rPr sz="1300">
+                <a:solidFill>
+                  <a:srgbClr val="6D8C97"/>
+                </a:solidFill>
+                <a:latin typeface="Consolas"/>
+              </a:rPr>
+              <a:t>  72  </a:t>
+            </a:r>
+            <a:r>
+              <a:rPr sz="1300">
+                <a:solidFill>
+                  <a:srgbClr val="7FE0A0"/>
+                </a:solidFill>
+                <a:latin typeface="Consolas"/>
+              </a:rPr>
+              <a:t>    size -= dropped.content.length;</a:t>
+            </a:r>
+          </a:p>
+          <a:p>
+            <a:pPr>
+              <a:spcAft>
+                <a:spcPts val="0"/>
+              </a:spcAft>
+            </a:pPr>
+            <a:r>
+              <a:rPr sz="1300">
+                <a:solidFill>
+                  <a:srgbClr val="6D8C97"/>
+                </a:solidFill>
+                <a:latin typeface="Consolas"/>
+              </a:rPr>
+              <a:t>  73  </a:t>
+            </a:r>
+            <a:r>
+              <a:rPr sz="1300">
+                <a:solidFill>
+                  <a:srgbClr val="7FE0A0"/>
+                </a:solidFill>
+                <a:latin typeface="Consolas"/>
+              </a:rPr>
+              <a:t>    console.log('Forgot an old message to stay under the limit.');</a:t>
+            </a:r>
+          </a:p>
+          <a:p>
+            <a:pPr>
+              <a:spcAft>
+                <a:spcPts val="0"/>
+              </a:spcAft>
+            </a:pPr>
+            <a:r>
+              <a:rPr sz="1300">
+                <a:solidFill>
+                  <a:srgbClr val="6D8C97"/>
+                </a:solidFill>
+                <a:latin typeface="Consolas"/>
+              </a:rPr>
+              <a:t>  74  </a:t>
+            </a:r>
+            <a:r>
+              <a:rPr sz="1300">
+                <a:solidFill>
+                  <a:srgbClr val="7FE0A0"/>
+                </a:solidFill>
+                <a:latin typeface="Consolas"/>
+              </a:rPr>
+              <a:t>  }</a:t>
+            </a:r>
+          </a:p>
+          <a:p>
+            <a:pPr>
+              <a:spcAft>
+                <a:spcPts val="0"/>
+              </a:spcAft>
+            </a:pPr>
+            <a:r>
+              <a:rPr sz="1300">
+                <a:solidFill>
+                  <a:srgbClr val="6D8C97"/>
+                </a:solidFill>
+                <a:latin typeface="Consolas"/>
+              </a:rPr>
+              <a:t>  75  </a:t>
+            </a:r>
+            <a:r>
+              <a:rPr sz="1300">
+                <a:solidFill>
+                  <a:srgbClr val="7FE0A0"/>
+                </a:solidFill>
+                <a:latin typeface="Consolas"/>
+              </a:rPr>
+              <a:t>}</a:t>
+            </a:r>
+          </a:p>
+        </p:txBody>
+      </p:sp>
+      <p:sp>
+        <p:nvSpPr>
+          <p:cNvPr id="4" name="TextBox 3"/>
+          <p:cNvSpPr txBox="1"/>
+          <p:nvPr/>
+        </p:nvSpPr>
+        <p:spPr>
+          <a:xfrm>
+            <a:off x="548640" y="5623560"/>
+            <a:ext cx="11064240" cy="1051560"/>
+          </a:xfrm>
+          <a:prstGeom prst="rect">
+            <a:avLst/>
+          </a:prstGeom>
+          <a:noFill/>
+        </p:spPr>
+        <p:txBody>
+          <a:bodyPr wrap="square">
+            <a:spAutoFit/>
+          </a:bodyPr>
+          <a:lstStyle/>
+          <a:p>
+            <a:r>
+              <a:rPr sz="2000">
+                <a:solidFill>
+                  <a:srgbClr val="DCECEF"/>
+                </a:solidFill>
+              </a:rPr>
+              <a:t>That is the whole piece. Check yours looks the same before moving on.</a:t>
+            </a:r>
+          </a:p>
+        </p:txBody>
+      </p:sp>
+    </p:spTree>
+  </p:cSld>
+  <p:clrMapOvr>
+    <a:masterClrMapping/>
+  </p:clrMapOvr>
+</p:sld>
+</file>
+
+<file path=ppt/slides/slide24.xml><?xml version="1.0" encoding="utf-8"?>
+<p:sld xmlns:a="http://schemas.openxmlformats.org/drawingml/2006/main" xmlns:p="http://schemas.openxmlformats.org/presentationml/2006/main" xmlns:r="http://schemas.openxmlformats.org/officeDocument/2006/relationships">
+  <p:cSld>
+    <p:spTree>
+      <p:nvGrpSpPr>
+        <p:cNvPr id="1" name=""/>
+        <p:cNvGrpSpPr/>
+        <p:nvPr/>
+      </p:nvGrpSpPr>
+      <p:grpSpPr/>
+      <p:sp>
+        <p:nvSpPr>
+          <p:cNvPr id="2" name="Title 1"/>
+          <p:cNvSpPr>
+            <a:spLocks noGrp="1"/>
+          </p:cNvSpPr>
+          <p:nvPr>
+            <p:ph type="title"/>
+          </p:nvPr>
+        </p:nvSpPr>
+        <p:spPr/>
+        <p:txBody>
+          <a:bodyPr/>
+          <a:lstStyle/>
+          <a:p>
+            <a:r>
+              <a:rPr sz="3800" b="1">
+                <a:solidFill>
+                  <a:srgbClr val="1F2A37"/>
+                </a:solidFill>
+              </a:rPr>
+              <a:t>Measure first</a:t>
+            </a:r>
+          </a:p>
+        </p:txBody>
+      </p:sp>
+      <p:sp>
+        <p:nvSpPr>
+          <p:cNvPr id="3" name="TextBox 2"/>
+          <p:cNvSpPr txBox="1"/>
+          <p:nvPr/>
+        </p:nvSpPr>
+        <p:spPr>
+          <a:xfrm>
+            <a:off x="822960" y="1828800"/>
+            <a:ext cx="10515600" cy="4206240"/>
+          </a:xfrm>
+          <a:prstGeom prst="rect">
+            <a:avLst/>
+          </a:prstGeom>
+          <a:noFill/>
+        </p:spPr>
+        <p:txBody>
+          <a:bodyPr wrap="square">
+            <a:spAutoFit/>
+          </a:bodyPr>
+          <a:lstStyle/>
+          <a:p>
+            <a:pPr>
+              <a:spcAft>
+                <a:spcPts val="1400"/>
+              </a:spcAft>
+            </a:pPr>
+            <a:r>
+              <a:rPr sz="2800">
+                <a:solidFill>
+                  <a:srgbClr val="01AEFD"/>
+                </a:solidFill>
+              </a:rPr>
+              <a:t>Count before you cut</a:t>
+            </a:r>
+          </a:p>
+          <a:p>
+            <a:pPr>
+              <a:spcAft>
+                <a:spcPts val="1400"/>
+              </a:spcAft>
+            </a:pPr>
+            <a:r>
+              <a:rPr sz="2400">
+                <a:solidFill>
+                  <a:srgbClr val="1F2A37"/>
+                </a:solidFill>
+              </a:rPr>
+              <a:t>• Add up every message's length</a:t>
+            </a:r>
+          </a:p>
+          <a:p>
+            <a:pPr>
+              <a:spcAft>
+                <a:spcPts val="1400"/>
+              </a:spcAft>
+            </a:pPr>
+            <a:r>
+              <a:rPr sz="2400">
+                <a:solidFill>
+                  <a:srgbClr val="1F2A37"/>
+                </a:solidFill>
+              </a:rPr>
+              <a:t>• Watch the number climb</a:t>
+            </a:r>
+          </a:p>
+          <a:p>
+            <a:pPr>
+              <a:spcAft>
+                <a:spcPts val="1400"/>
+              </a:spcAft>
+            </a:pPr>
+            <a:r>
+              <a:rPr sz="2400">
+                <a:solidFill>
+                  <a:srgbClr val="1F2A37"/>
+                </a:solidFill>
+              </a:rPr>
+              <a:t>• Then decide what to do</a:t>
+            </a:r>
+          </a:p>
+        </p:txBody>
+      </p:sp>
+    </p:spTree>
+  </p:cSld>
+  <p:clrMapOvr>
+    <a:masterClrMapping/>
+  </p:clrMapOvr>
+</p:sld>
+</file>
+
+<file path=ppt/slides/slide25.xml><?xml version="1.0" encoding="utf-8"?>
+<p:sld xmlns:a="http://schemas.openxmlformats.org/drawingml/2006/main" xmlns:p="http://schemas.openxmlformats.org/presentationml/2006/main" xmlns:r="http://schemas.openxmlformats.org/officeDocument/2006/relationships">
+  <p:cSld>
+    <p:bg>
+      <p:bgPr>
+        <a:solidFill>
+          <a:srgbClr val="102127"/>
+        </a:solidFill>
+        <a:effectLst/>
+      </p:bgPr>
+    </p:bg>
+    <p:spTree>
+      <p:nvGrpSpPr>
+        <p:cNvPr id="1" name=""/>
+        <p:cNvGrpSpPr/>
+        <p:nvPr/>
+      </p:nvGrpSpPr>
+      <p:grpSpPr/>
+      <p:sp>
+        <p:nvSpPr>
+          <p:cNvPr id="2" name="TextBox 1"/>
+          <p:cNvSpPr txBox="1"/>
+          <p:nvPr/>
+        </p:nvSpPr>
+        <p:spPr>
+          <a:xfrm>
+            <a:off x="502920" y="274320"/>
+            <a:ext cx="11155680" cy="548640"/>
+          </a:xfrm>
+          <a:prstGeom prst="rect">
+            <a:avLst/>
+          </a:prstGeom>
+          <a:noFill/>
+        </p:spPr>
+        <p:txBody>
+          <a:bodyPr wrap="none">
+            <a:spAutoFit/>
+          </a:bodyPr>
+          <a:lstStyle/>
+          <a:p>
+            <a:r>
+              <a:rPr sz="2200" b="1">
+                <a:solidFill>
+                  <a:srgbClr val="01AEFD"/>
+                </a:solidFill>
+              </a:rPr>
+              <a:t>Type this into script.js   -   line 80</a:t>
+            </a:r>
+          </a:p>
+        </p:txBody>
+      </p:sp>
+      <p:sp>
+        <p:nvSpPr>
+          <p:cNvPr id="3" name="TextBox 2"/>
+          <p:cNvSpPr txBox="1"/>
+          <p:nvPr/>
+        </p:nvSpPr>
+        <p:spPr>
+          <a:xfrm>
+            <a:off x="502920" y="960120"/>
+            <a:ext cx="11155680" cy="4297680"/>
+          </a:xfrm>
+          <a:prstGeom prst="rect">
+            <a:avLst/>
+          </a:prstGeom>
+          <a:noFill/>
+        </p:spPr>
+        <p:txBody>
+          <a:bodyPr wrap="none">
+            <a:spAutoFit/>
+          </a:bodyPr>
+          <a:lstStyle/>
+          <a:p>
+            <a:pPr>
+              <a:spcAft>
+                <a:spcPts val="0"/>
+              </a:spcAft>
+            </a:pPr>
+            <a:r>
+              <a:rPr sz="1800">
+                <a:solidFill>
+                  <a:srgbClr val="6D8C97"/>
+                </a:solidFill>
+                <a:latin typeface="Consolas"/>
+              </a:rPr>
+              <a:t>  76  </a:t>
+            </a:r>
+            <a:r>
+              <a:rPr sz="1800">
+                <a:solidFill>
+                  <a:srgbClr val="6D8C97"/>
+                </a:solidFill>
+                <a:latin typeface="Consolas"/>
+              </a:rPr>
+              <a:t> </a:t>
+            </a:r>
+          </a:p>
+          <a:p>
+            <a:pPr>
+              <a:spcAft>
+                <a:spcPts val="0"/>
+              </a:spcAft>
+            </a:pPr>
+            <a:r>
+              <a:rPr sz="1800">
+                <a:solidFill>
+                  <a:srgbClr val="6D8C97"/>
+                </a:solidFill>
+                <a:latin typeface="Consolas"/>
+              </a:rPr>
+              <a:t>  77  </a:t>
+            </a:r>
+            <a:r>
+              <a:rPr sz="1800">
+                <a:solidFill>
+                  <a:srgbClr val="6D8C97"/>
+                </a:solidFill>
+                <a:latin typeface="Consolas"/>
+              </a:rPr>
+              <a:t>// Week 4: ask the AI a real question.</a:t>
+            </a:r>
+          </a:p>
+          <a:p>
+            <a:pPr>
+              <a:spcAft>
+                <a:spcPts val="0"/>
+              </a:spcAft>
+            </a:pPr>
+            <a:r>
+              <a:rPr sz="1800">
+                <a:solidFill>
+                  <a:srgbClr val="6D8C97"/>
+                </a:solidFill>
+                <a:latin typeface="Consolas"/>
+              </a:rPr>
+              <a:t>  78  </a:t>
+            </a:r>
+            <a:r>
+              <a:rPr sz="1800">
+                <a:solidFill>
+                  <a:srgbClr val="6D8C97"/>
+                </a:solidFill>
+                <a:latin typeface="Consolas"/>
+              </a:rPr>
+              <a:t>// A chat request is a LIST of messages. Each one says who said it.</a:t>
+            </a:r>
+          </a:p>
+          <a:p>
+            <a:pPr>
+              <a:spcAft>
+                <a:spcPts val="0"/>
+              </a:spcAft>
+            </a:pPr>
+            <a:r>
+              <a:rPr sz="1800">
+                <a:solidFill>
+                  <a:srgbClr val="6D8C97"/>
+                </a:solidFill>
+                <a:latin typeface="Consolas"/>
+              </a:rPr>
+              <a:t>  79  </a:t>
+            </a:r>
+            <a:r>
+              <a:rPr sz="1800">
+                <a:solidFill>
+                  <a:srgbClr val="6D8C97"/>
+                </a:solidFill>
+                <a:latin typeface="Consolas"/>
+              </a:rPr>
+              <a:t>async function askAI() {</a:t>
+            </a:r>
+          </a:p>
+          <a:p>
+            <a:pPr>
+              <a:spcAft>
+                <a:spcPts val="0"/>
+              </a:spcAft>
+            </a:pPr>
+            <a:r>
+              <a:rPr sz="1800">
+                <a:solidFill>
+                  <a:srgbClr val="6D8C97"/>
+                </a:solidFill>
+                <a:latin typeface="Consolas"/>
+              </a:rPr>
+              <a:t>  80  </a:t>
+            </a:r>
+            <a:r>
+              <a:rPr sz="1800">
+                <a:solidFill>
+                  <a:srgbClr val="7FE0A0"/>
+                </a:solidFill>
+                <a:latin typeface="Consolas"/>
+              </a:rPr>
+              <a:t>  trimHistory();   // week 8: never send more than the server will read</a:t>
+            </a:r>
+          </a:p>
+        </p:txBody>
+      </p:sp>
+      <p:sp>
+        <p:nvSpPr>
+          <p:cNvPr id="4" name="TextBox 3"/>
+          <p:cNvSpPr txBox="1"/>
+          <p:nvPr/>
+        </p:nvSpPr>
+        <p:spPr>
+          <a:xfrm>
+            <a:off x="548640" y="5623560"/>
+            <a:ext cx="11064240" cy="1051560"/>
+          </a:xfrm>
+          <a:prstGeom prst="rect">
+            <a:avLst/>
+          </a:prstGeom>
+          <a:noFill/>
+        </p:spPr>
+        <p:txBody>
+          <a:bodyPr wrap="square">
+            <a:spAutoFit/>
+          </a:bodyPr>
+          <a:lstStyle/>
+          <a:p>
+            <a:r>
+              <a:rPr sz="2000">
+                <a:solidFill>
+                  <a:srgbClr val="DCECEF"/>
+                </a:solidFill>
+              </a:rPr>
+              <a:t>Before sending, call trimHistory() to drop old messages if the conversation has grown too long.</a:t>
+            </a:r>
+          </a:p>
+        </p:txBody>
+      </p:sp>
+    </p:spTree>
+  </p:cSld>
+  <p:clrMapOvr>
+    <a:masterClrMapping/>
+  </p:clrMapOvr>
+</p:sld>
+</file>
+
+<file path=ppt/slides/slide26.xml><?xml version="1.0" encoding="utf-8"?>
+<p:sld xmlns:a="http://schemas.openxmlformats.org/drawingml/2006/main" xmlns:p="http://schemas.openxmlformats.org/presentationml/2006/main" xmlns:r="http://schemas.openxmlformats.org/officeDocument/2006/relationships">
+  <p:cSld>
+    <p:spTree>
+      <p:nvGrpSpPr>
+        <p:cNvPr id="1" name=""/>
+        <p:cNvGrpSpPr/>
+        <p:nvPr/>
+      </p:nvGrpSpPr>
+      <p:grpSpPr/>
+      <p:sp>
+        <p:nvSpPr>
+          <p:cNvPr id="2" name="Title 1"/>
+          <p:cNvSpPr>
+            <a:spLocks noGrp="1"/>
+          </p:cNvSpPr>
+          <p:nvPr>
+            <p:ph type="title"/>
+          </p:nvPr>
+        </p:nvSpPr>
+        <p:spPr/>
+        <p:txBody>
+          <a:bodyPr/>
+          <a:lstStyle/>
+          <a:p>
+            <a:r>
+              <a:rPr sz="3800" b="1">
+                <a:solidFill>
+                  <a:srgbClr val="1F2A37"/>
+                </a:solidFill>
+              </a:rPr>
+              <a:t>Checkpoint: it forgets on purpose</a:t>
+            </a:r>
+          </a:p>
+        </p:txBody>
+      </p:sp>
+      <p:sp>
+        <p:nvSpPr>
+          <p:cNvPr id="3" name="TextBox 2"/>
+          <p:cNvSpPr txBox="1"/>
+          <p:nvPr/>
+        </p:nvSpPr>
+        <p:spPr>
+          <a:xfrm>
+            <a:off x="868680" y="502920"/>
+            <a:ext cx="5486400" cy="457200"/>
+          </a:xfrm>
+          <a:prstGeom prst="rect">
+            <a:avLst/>
+          </a:prstGeom>
+          <a:noFill/>
+        </p:spPr>
+        <p:txBody>
+          <a:bodyPr wrap="none">
+            <a:spAutoFit/>
+          </a:bodyPr>
+          <a:lstStyle/>
+          <a:p>
+            <a:r>
+              <a:rPr sz="1500" b="1">
+                <a:solidFill>
+                  <a:srgbClr val="01AEFD"/>
+                </a:solidFill>
+              </a:rPr>
+              <a:t>CHECKPOINT - RUN IT</a:t>
+            </a:r>
+          </a:p>
+        </p:txBody>
+      </p:sp>
+      <p:sp>
+        <p:nvSpPr>
+          <p:cNvPr id="4" name="TextBox 3"/>
+          <p:cNvSpPr txBox="1"/>
+          <p:nvPr/>
+        </p:nvSpPr>
+        <p:spPr>
+          <a:xfrm>
+            <a:off x="822960" y="1828800"/>
+            <a:ext cx="10515600" cy="4206240"/>
+          </a:xfrm>
+          <a:prstGeom prst="rect">
+            <a:avLst/>
+          </a:prstGeom>
+          <a:noFill/>
+        </p:spPr>
+        <p:txBody>
+          <a:bodyPr wrap="square">
+            <a:spAutoFit/>
+          </a:bodyPr>
+          <a:lstStyle/>
+          <a:p>
+            <a:pPr>
+              <a:spcAft>
+                <a:spcPts val="1400"/>
+              </a:spcAft>
+            </a:pPr>
+            <a:r>
+              <a:rPr sz="2800">
+                <a:solidFill>
+                  <a:srgbClr val="01AEFD"/>
+                </a:solidFill>
+              </a:rPr>
+              <a:t>Press Run and open the console. Send several long messages. Watch 'Forgot an old message...' appear as the oldest lines are dropped to stay under the limit - the chat keeps working instead of failing.</a:t>
+            </a:r>
+          </a:p>
+          <a:p>
+            <a:pPr>
+              <a:spcAft>
+                <a:spcPts val="1400"/>
+              </a:spcAft>
+            </a:pPr>
+            <a:r>
+              <a:rPr sz="2400">
+                <a:solidFill>
+                  <a:srgbClr val="1F2A37"/>
+                </a:solidFill>
+              </a:rPr>
+              <a:t>• Run it in the classroom, or press Show the output in the web deck.</a:t>
+            </a:r>
+          </a:p>
+          <a:p>
+            <a:pPr>
+              <a:spcAft>
+                <a:spcPts val="1400"/>
+              </a:spcAft>
+            </a:pPr>
+            <a:r>
+              <a:rPr sz="2400">
+                <a:solidFill>
+                  <a:srgbClr val="1F2A37"/>
+                </a:solidFill>
+              </a:rPr>
+              <a:t>• Everyone's screen should match this.</a:t>
+            </a:r>
+          </a:p>
+        </p:txBody>
+      </p:sp>
+    </p:spTree>
+  </p:cSld>
+  <p:clrMapOvr>
+    <a:masterClrMapping/>
+  </p:clrMapOvr>
+</p:sld>
+</file>
+
+<file path=ppt/slides/slide27.xml><?xml version="1.0" encoding="utf-8"?>
+<p:sld xmlns:a="http://schemas.openxmlformats.org/drawingml/2006/main" xmlns:p="http://schemas.openxmlformats.org/presentationml/2006/main" xmlns:r="http://schemas.openxmlformats.org/officeDocument/2006/relationships">
+  <p:cSld>
+    <p:spTree>
+      <p:nvGrpSpPr>
+        <p:cNvPr id="1" name=""/>
+        <p:cNvGrpSpPr/>
+        <p:nvPr/>
+      </p:nvGrpSpPr>
+      <p:grpSpPr/>
+      <p:sp>
+        <p:nvSpPr>
+          <p:cNvPr id="2" name="Title 1"/>
+          <p:cNvSpPr>
+            <a:spLocks noGrp="1"/>
+          </p:cNvSpPr>
+          <p:nvPr>
+            <p:ph type="title"/>
+          </p:nvPr>
+        </p:nvSpPr>
+        <p:spPr/>
+        <p:txBody>
+          <a:bodyPr/>
+          <a:lstStyle/>
+          <a:p>
+            <a:r>
+              <a:rPr sz="3800" b="1">
+                <a:solidFill>
+                  <a:srgbClr val="1F2A37"/>
+                </a:solidFill>
+              </a:rPr>
+              <a:t>Watch it forget</a:t>
+            </a:r>
+          </a:p>
+        </p:txBody>
+      </p:sp>
+      <p:sp>
+        <p:nvSpPr>
+          <p:cNvPr id="3" name="TextBox 2"/>
+          <p:cNvSpPr txBox="1"/>
+          <p:nvPr/>
+        </p:nvSpPr>
+        <p:spPr>
+          <a:xfrm>
+            <a:off x="822960" y="1828800"/>
+            <a:ext cx="10515600" cy="4206240"/>
+          </a:xfrm>
+          <a:prstGeom prst="rect">
+            <a:avLst/>
+          </a:prstGeom>
+          <a:noFill/>
+        </p:spPr>
+        <p:txBody>
+          <a:bodyPr wrap="square">
+            <a:spAutoFit/>
+          </a:bodyPr>
+          <a:lstStyle/>
+          <a:p>
+            <a:pPr>
+              <a:spcAft>
+                <a:spcPts val="1400"/>
+              </a:spcAft>
+            </a:pPr>
+            <a:r>
+              <a:rPr sz="2400">
+                <a:solidFill>
+                  <a:srgbClr val="1F2A37"/>
+                </a:solidFill>
+              </a:rPr>
+              <a:t>• Chat until the Console says it forgot</a:t>
+            </a:r>
+          </a:p>
+          <a:p>
+            <a:pPr>
+              <a:spcAft>
+                <a:spcPts val="1400"/>
+              </a:spcAft>
+            </a:pPr>
+            <a:r>
+              <a:rPr sz="2400">
+                <a:solidFill>
+                  <a:srgbClr val="1F2A37"/>
+                </a:solidFill>
+              </a:rPr>
+              <a:t>• Ask about the beginning</a:t>
+            </a:r>
+          </a:p>
+          <a:p>
+            <a:pPr>
+              <a:spcAft>
+                <a:spcPts val="1400"/>
+              </a:spcAft>
+            </a:pPr>
+            <a:r>
+              <a:rPr sz="2400">
+                <a:solidFill>
+                  <a:srgbClr val="1F2A37"/>
+                </a:solidFill>
+              </a:rPr>
+              <a:t>• It genuinely does not know</a:t>
+            </a:r>
+          </a:p>
+        </p:txBody>
+      </p:sp>
+    </p:spTree>
+  </p:cSld>
+  <p:clrMapOvr>
+    <a:masterClrMapping/>
+  </p:clrMapOvr>
+</p:sld>
+</file>
+
 <file path=ppt/slides/slide3.xml><?xml version="1.0" encoding="utf-8"?>
 <p:sld xmlns:a="http://schemas.openxmlformats.org/drawingml/2006/main" xmlns:p="http://schemas.openxmlformats.org/presentationml/2006/main" xmlns:r="http://schemas.openxmlformats.org/officeDocument/2006/relationships">
   <p:cSld>
@@ -4112,7 +9155,7 @@
                   <a:srgbClr val="1F2A37"/>
                 </a:solidFill>
               </a:rPr>
-              <a:t>Measure first</a:t>
+              <a:t>What do you throw away?</a:t>
             </a:r>
           </a:p>
         </p:txBody>
@@ -4150,7 +9193,7 @@
                   <a:srgbClr val="01AEFD"/>
                 </a:solidFill>
               </a:rPr>
-              <a:t>Count before you cut</a:t>
+              <a:t>There is no right answer</a:t>
             </a:r>
           </a:p>
           <a:p>
@@ -4165,7 +9208,7 @@
                   <a:srgbClr val="1F2A37"/>
                 </a:solidFill>
               </a:rPr>
-              <a:t>• Add up every message's length</a:t>
+              <a:t>• Oldest? Shortest? Least interesting?</a:t>
             </a:r>
           </a:p>
           <a:p>
@@ -4180,7 +9223,7 @@
                   <a:srgbClr val="1F2A37"/>
                 </a:solidFill>
               </a:rPr>
-              <a:t>• Watch the number climb</a:t>
+              <a:t>• That is what a trade-off means</a:t>
             </a:r>
           </a:p>
           <a:p>
@@ -4195,7 +9238,7 @@
                   <a:srgbClr val="1F2A37"/>
                 </a:solidFill>
               </a:rPr>
-              <a:t>• Then decide what to do</a:t>
+              <a:t>• Most apps drop the oldest</a:t>
             </a:r>
           </a:p>
         </p:txBody>
@@ -4211,14 +9254,6 @@
 <file path=ppt/slides/slide5.xml><?xml version="1.0" encoding="utf-8"?>
 <p:sld xmlns:a="http://schemas.openxmlformats.org/drawingml/2006/main" xmlns:p="http://schemas.openxmlformats.org/presentationml/2006/main" xmlns:r="http://schemas.openxmlformats.org/officeDocument/2006/relationships">
   <p:cSld>
-    <p:bg>
-      <p:bgPr>
-        <a:solidFill>
-          <a:srgbClr val="102127"/>
-        </a:solidFill>
-        <a:effectLst/>
-      </p:bgPr>
-    </p:bg>
     <p:spTree>
       <p:nvGrpSpPr>
         <p:cNvPr id="1" name=""/>
@@ -4228,14 +9263,40 @@
       <p:grpSpPr/>
       <p:sp>
         <p:nvSpPr>
-          <p:cNvPr id="2" name="TextBox 1"/>
+          <p:cNvPr id="2" name="Title 1"/>
+          <p:cNvSpPr>
+            <a:spLocks noGrp="1"/>
+          </p:cNvSpPr>
+          <p:nvPr>
+            <p:ph type="title"/>
+          </p:nvPr>
+        </p:nvSpPr>
+        <p:spPr/>
+        <p:txBody>
+          <a:bodyPr/>
+          <a:lstStyle/>
+          <a:p>
+            <a:r>
+              <a:rPr sz="3800" b="1">
+                <a:solidFill>
+                  <a:srgbClr val="1F2A37"/>
+                </a:solidFill>
+              </a:rPr>
+              <a:t>shift and push</a:t>
+            </a:r>
+          </a:p>
+        </p:txBody>
+      </p:sp>
+      <p:sp>
+        <p:nvSpPr>
+          <p:cNvPr id="3" name="TextBox 2"/>
           <p:cNvSpPr txBox="1"/>
           <p:nvPr/>
         </p:nvSpPr>
         <p:spPr>
           <a:xfrm>
-            <a:off x="502920" y="274320"/>
-            <a:ext cx="11155680" cy="731520"/>
+            <a:off x="822960" y="1828800"/>
+            <a:ext cx="10515600" cy="4206240"/>
           </a:xfrm>
           <a:prstGeom prst="rect">
             <a:avLst/>
@@ -4243,416 +9304,53 @@
           <a:noFill/>
         </p:spPr>
         <p:txBody>
-          <a:bodyPr wrap="none">
+          <a:bodyPr wrap="square">
             <a:spAutoFit/>
           </a:bodyPr>
           <a:lstStyle/>
           <a:p>
-            <a:r>
-              <a:rPr sz="2600" b="1">
-                <a:solidFill>
-                  <a:srgbClr val="01AEFD"/>
-                </a:solidFill>
-              </a:rPr>
-              <a:t>Type this into script.js  (1 of 3)</a:t>
-            </a:r>
-          </a:p>
-        </p:txBody>
-      </p:sp>
-      <p:sp>
-        <p:nvSpPr>
-          <p:cNvPr id="3" name="TextBox 2"/>
-          <p:cNvSpPr txBox="1"/>
-          <p:nvPr/>
-        </p:nvSpPr>
-        <p:spPr>
-          <a:xfrm>
-            <a:off x="502920" y="1051560"/>
-            <a:ext cx="11155680" cy="5394960"/>
-          </a:xfrm>
-          <a:prstGeom prst="rect">
-            <a:avLst/>
-          </a:prstGeom>
-          <a:noFill/>
-        </p:spPr>
-        <p:txBody>
-          <a:bodyPr wrap="none">
-            <a:spAutoFit/>
-          </a:bodyPr>
-          <a:lstStyle/>
-          <a:p>
-            <a:pPr>
-              <a:spcAft>
-                <a:spcPts val="0"/>
-              </a:spcAft>
-            </a:pPr>
-            <a:r>
-              <a:rPr sz="1400">
-                <a:solidFill>
-                  <a:srgbClr val="6D8C97"/>
-                </a:solidFill>
-                <a:latin typeface="Consolas"/>
-              </a:rPr>
-              <a:t>  76  </a:t>
-            </a:r>
-            <a:r>
-              <a:rPr sz="1400">
-                <a:solidFill>
-                  <a:srgbClr val="7FE0A0"/>
-                </a:solidFill>
-                <a:latin typeface="Consolas"/>
-              </a:rPr>
-              <a:t> </a:t>
-            </a:r>
-          </a:p>
-          <a:p>
-            <a:pPr>
-              <a:spcAft>
-                <a:spcPts val="0"/>
-              </a:spcAft>
-            </a:pPr>
-            <a:r>
-              <a:rPr sz="1400">
-                <a:solidFill>
-                  <a:srgbClr val="6D8C97"/>
-                </a:solidFill>
-                <a:latin typeface="Consolas"/>
-              </a:rPr>
-              <a:t>  77  </a:t>
-            </a:r>
-            <a:r>
-              <a:rPr sz="1400">
-                <a:solidFill>
-                  <a:srgbClr val="DCECEF"/>
-                </a:solidFill>
-                <a:latin typeface="Consolas"/>
-              </a:rPr>
-              <a:t>// Week 4: ask the AI a real question.</a:t>
-            </a:r>
-          </a:p>
-          <a:p>
-            <a:pPr>
-              <a:spcAft>
-                <a:spcPts val="0"/>
-              </a:spcAft>
-            </a:pPr>
-            <a:r>
-              <a:rPr sz="1400">
-                <a:solidFill>
-                  <a:srgbClr val="6D8C97"/>
-                </a:solidFill>
-                <a:latin typeface="Consolas"/>
-              </a:rPr>
-              <a:t>  78  </a:t>
-            </a:r>
-            <a:r>
-              <a:rPr sz="1400">
-                <a:solidFill>
-                  <a:srgbClr val="DCECEF"/>
-                </a:solidFill>
-                <a:latin typeface="Consolas"/>
-              </a:rPr>
-              <a:t>// A chat request is a LIST of messages. Each one says who said it.</a:t>
-            </a:r>
-          </a:p>
-          <a:p>
-            <a:pPr>
-              <a:spcAft>
-                <a:spcPts val="0"/>
-              </a:spcAft>
-            </a:pPr>
-            <a:r>
-              <a:rPr sz="1400">
-                <a:solidFill>
-                  <a:srgbClr val="6D8C97"/>
-                </a:solidFill>
-                <a:latin typeface="Consolas"/>
-              </a:rPr>
-              <a:t>  79  </a:t>
-            </a:r>
-            <a:r>
-              <a:rPr sz="1400">
-                <a:solidFill>
-                  <a:srgbClr val="DCECEF"/>
-                </a:solidFill>
-                <a:latin typeface="Consolas"/>
-              </a:rPr>
-              <a:t>async function askAI() {</a:t>
-            </a:r>
-          </a:p>
-          <a:p>
-            <a:pPr>
-              <a:spcAft>
-                <a:spcPts val="0"/>
-              </a:spcAft>
-            </a:pPr>
-            <a:r>
-              <a:rPr sz="1400">
-                <a:solidFill>
-                  <a:srgbClr val="6D8C97"/>
-                </a:solidFill>
-                <a:latin typeface="Consolas"/>
-              </a:rPr>
-              <a:t>  80  </a:t>
-            </a:r>
-            <a:r>
-              <a:rPr sz="1400">
-                <a:solidFill>
-                  <a:srgbClr val="7FE0A0"/>
-                </a:solidFill>
-                <a:latin typeface="Consolas"/>
-              </a:rPr>
-              <a:t>  trimHistory();   // week 8: never send more than the server will read</a:t>
-            </a:r>
-          </a:p>
-          <a:p>
-            <a:pPr>
-              <a:spcAft>
-                <a:spcPts val="0"/>
-              </a:spcAft>
-            </a:pPr>
-            <a:r>
-              <a:rPr sz="1400">
-                <a:solidFill>
-                  <a:srgbClr val="6D8C97"/>
-                </a:solidFill>
-                <a:latin typeface="Consolas"/>
-              </a:rPr>
-              <a:t>  81  </a:t>
-            </a:r>
-            <a:r>
-              <a:rPr sz="1400">
-                <a:solidFill>
-                  <a:srgbClr val="DCECEF"/>
-                </a:solidFill>
-                <a:latin typeface="Consolas"/>
-              </a:rPr>
-              <a:t>  const res = await fetch(AI_BASE + '/v1/chat/completions', {</a:t>
-            </a:r>
-          </a:p>
-          <a:p>
-            <a:pPr>
-              <a:spcAft>
-                <a:spcPts val="0"/>
-              </a:spcAft>
-            </a:pPr>
-            <a:r>
-              <a:rPr sz="1400">
-                <a:solidFill>
-                  <a:srgbClr val="6D8C97"/>
-                </a:solidFill>
-                <a:latin typeface="Consolas"/>
-              </a:rPr>
-              <a:t>  82  </a:t>
-            </a:r>
-            <a:r>
-              <a:rPr sz="1400">
-                <a:solidFill>
-                  <a:srgbClr val="DCECEF"/>
-                </a:solidFill>
-                <a:latin typeface="Consolas"/>
-              </a:rPr>
-              <a:t>    method: 'POST',                       // POST = I am sending you something</a:t>
-            </a:r>
-          </a:p>
-          <a:p>
-            <a:pPr>
-              <a:spcAft>
-                <a:spcPts val="0"/>
-              </a:spcAft>
-            </a:pPr>
-            <a:r>
-              <a:rPr sz="1400">
-                <a:solidFill>
-                  <a:srgbClr val="6D8C97"/>
-                </a:solidFill>
-                <a:latin typeface="Consolas"/>
-              </a:rPr>
-              <a:t>  83  </a:t>
-            </a:r>
-            <a:r>
-              <a:rPr sz="1400">
-                <a:solidFill>
-                  <a:srgbClr val="DCECEF"/>
-                </a:solidFill>
-                <a:latin typeface="Consolas"/>
-              </a:rPr>
-              <a:t>    headers: {</a:t>
-            </a:r>
-          </a:p>
-          <a:p>
-            <a:pPr>
-              <a:spcAft>
-                <a:spcPts val="0"/>
-              </a:spcAft>
-            </a:pPr>
-            <a:r>
-              <a:rPr sz="1400">
-                <a:solidFill>
-                  <a:srgbClr val="6D8C97"/>
-                </a:solidFill>
-                <a:latin typeface="Consolas"/>
-              </a:rPr>
-              <a:t>  84  </a:t>
-            </a:r>
-            <a:r>
-              <a:rPr sz="1400">
-                <a:solidFill>
-                  <a:srgbClr val="DCECEF"/>
-                </a:solidFill>
-                <a:latin typeface="Consolas"/>
-              </a:rPr>
-              <a:t>      'Content-Type': 'application/json', // what I am sending is JSON</a:t>
-            </a:r>
-          </a:p>
-          <a:p>
-            <a:pPr>
-              <a:spcAft>
-                <a:spcPts val="0"/>
-              </a:spcAft>
-            </a:pPr>
-            <a:r>
-              <a:rPr sz="1400">
-                <a:solidFill>
-                  <a:srgbClr val="6D8C97"/>
-                </a:solidFill>
-                <a:latin typeface="Consolas"/>
-              </a:rPr>
-              <a:t>  85  </a:t>
-            </a:r>
-            <a:r>
-              <a:rPr sz="1400">
-                <a:solidFill>
-                  <a:srgbClr val="DCECEF"/>
-                </a:solidFill>
-                <a:latin typeface="Consolas"/>
-              </a:rPr>
-              <a:t>      'Authorization': 'Bearer ' + API_KEY</a:t>
-            </a:r>
-          </a:p>
-          <a:p>
-            <a:pPr>
-              <a:spcAft>
-                <a:spcPts val="0"/>
-              </a:spcAft>
-            </a:pPr>
-            <a:r>
-              <a:rPr sz="1400">
-                <a:solidFill>
-                  <a:srgbClr val="6D8C97"/>
-                </a:solidFill>
-                <a:latin typeface="Consolas"/>
-              </a:rPr>
-              <a:t>  86  </a:t>
-            </a:r>
-            <a:r>
-              <a:rPr sz="1400">
-                <a:solidFill>
-                  <a:srgbClr val="DCECEF"/>
-                </a:solidFill>
-                <a:latin typeface="Consolas"/>
-              </a:rPr>
-              <a:t>    },</a:t>
-            </a:r>
-          </a:p>
-          <a:p>
-            <a:pPr>
-              <a:spcAft>
-                <a:spcPts val="0"/>
-              </a:spcAft>
-            </a:pPr>
-            <a:r>
-              <a:rPr sz="1400">
-                <a:solidFill>
-                  <a:srgbClr val="6D8C97"/>
-                </a:solidFill>
-                <a:latin typeface="Consolas"/>
-              </a:rPr>
-              <a:t>  87  </a:t>
-            </a:r>
-            <a:r>
-              <a:rPr sz="1400">
-                <a:solidFill>
-                  <a:srgbClr val="DCECEF"/>
-                </a:solidFill>
-                <a:latin typeface="Consolas"/>
-              </a:rPr>
-              <a:t>    body: JSON.stringify({</a:t>
-            </a:r>
-          </a:p>
-          <a:p>
-            <a:pPr>
-              <a:spcAft>
-                <a:spcPts val="0"/>
-              </a:spcAft>
-            </a:pPr>
-            <a:r>
-              <a:rPr sz="1400">
-                <a:solidFill>
-                  <a:srgbClr val="6D8C97"/>
-                </a:solidFill>
-                <a:latin typeface="Consolas"/>
-              </a:rPr>
-              <a:t>  88  </a:t>
-            </a:r>
-            <a:r>
-              <a:rPr sz="1400">
-                <a:solidFill>
-                  <a:srgbClr val="DCECEF"/>
-                </a:solidFill>
-                <a:latin typeface="Consolas"/>
-              </a:rPr>
-              <a:t>      model: 'fast',</a:t>
-            </a:r>
-          </a:p>
-          <a:p>
-            <a:pPr>
-              <a:spcAft>
-                <a:spcPts val="0"/>
-              </a:spcAft>
-            </a:pPr>
-            <a:r>
-              <a:rPr sz="1400">
-                <a:solidFill>
-                  <a:srgbClr val="6D8C97"/>
-                </a:solidFill>
-                <a:latin typeface="Consolas"/>
-              </a:rPr>
-              <a:t>  89  </a:t>
-            </a:r>
-            <a:r>
-              <a:rPr sz="1400">
-                <a:solidFill>
-                  <a:srgbClr val="DCECEF"/>
-                </a:solidFill>
-                <a:latin typeface="Consolas"/>
-              </a:rPr>
-              <a:t>      messages: [</a:t>
-            </a:r>
-          </a:p>
-          <a:p>
-            <a:pPr>
-              <a:spcAft>
-                <a:spcPts val="0"/>
-              </a:spcAft>
-            </a:pPr>
-            <a:r>
-              <a:rPr sz="1400">
-                <a:solidFill>
-                  <a:srgbClr val="6D8C97"/>
-                </a:solidFill>
-                <a:latin typeface="Consolas"/>
-              </a:rPr>
-              <a:t>  90  </a:t>
-            </a:r>
-            <a:r>
-              <a:rPr sz="1400">
-                <a:solidFill>
-                  <a:srgbClr val="DCECEF"/>
-                </a:solidFill>
-                <a:latin typeface="Consolas"/>
-              </a:rPr>
-              <a:t>        // Week 6: the standing instruction, read before every single reply.</a:t>
+            <a:pPr>
+              <a:spcAft>
+                <a:spcPts val="1400"/>
+              </a:spcAft>
+            </a:pPr>
+            <a:r>
+              <a:rPr sz="2400">
+                <a:solidFill>
+                  <a:srgbClr val="1F2A37"/>
+                </a:solidFill>
+              </a:rPr>
+              <a:t>• push - add to the back</a:t>
+            </a:r>
+          </a:p>
+          <a:p>
+            <a:pPr>
+              <a:spcAft>
+                <a:spcPts val="1400"/>
+              </a:spcAft>
+            </a:pPr>
+            <a:r>
+              <a:rPr sz="2400">
+                <a:solidFill>
+                  <a:srgbClr val="1F2A37"/>
+                </a:solidFill>
+              </a:rPr>
+              <a:t>• shift - take from the front</a:t>
+            </a:r>
+          </a:p>
+          <a:p>
+            <a:pPr>
+              <a:spcAft>
+                <a:spcPts val="1400"/>
+              </a:spcAft>
+            </a:pPr>
+            <a:r>
+              <a:rPr sz="2400">
+                <a:solidFill>
+                  <a:srgbClr val="1F2A37"/>
+                </a:solidFill>
+              </a:rPr>
+              <a:t>• A queue, like the lunch line</a:t>
             </a:r>
           </a:p>
         </p:txBody>
@@ -4692,7 +9390,7 @@
         <p:spPr>
           <a:xfrm>
             <a:off x="502920" y="274320"/>
-            <a:ext cx="11155680" cy="731520"/>
+            <a:ext cx="11155680" cy="548640"/>
           </a:xfrm>
           <a:prstGeom prst="rect">
             <a:avLst/>
@@ -4706,12 +9404,12 @@
           <a:lstStyle/>
           <a:p>
             <a:r>
-              <a:rPr sz="2600" b="1">
+              <a:rPr sz="2200" b="1">
                 <a:solidFill>
                   <a:srgbClr val="01AEFD"/>
                 </a:solidFill>
               </a:rPr>
-              <a:t>Type this into script.js  (2 of 3)</a:t>
+              <a:t>Type this into script.js   -   line 62</a:t>
             </a:r>
           </a:p>
         </p:txBody>
@@ -4724,8 +9422,8 @@
         </p:nvSpPr>
         <p:spPr>
           <a:xfrm>
-            <a:off x="502920" y="1051560"/>
-            <a:ext cx="11155680" cy="5394960"/>
+            <a:off x="502920" y="960120"/>
+            <a:ext cx="11155680" cy="4297680"/>
           </a:xfrm>
           <a:prstGeom prst="rect">
             <a:avLst/>
@@ -4744,372 +9442,130 @@
               </a:spcAft>
             </a:pPr>
             <a:r>
-              <a:rPr sz="1400">
-                <a:solidFill>
-                  <a:srgbClr val="6D8C97"/>
-                </a:solidFill>
-                <a:latin typeface="Consolas"/>
-              </a:rPr>
-              <a:t>  91  </a:t>
-            </a:r>
-            <a:r>
-              <a:rPr sz="1400">
+              <a:rPr sz="1800">
+                <a:solidFill>
+                  <a:srgbClr val="6D8C97"/>
+                </a:solidFill>
+                <a:latin typeface="Consolas"/>
+              </a:rPr>
+              <a:t>  59  </a:t>
+            </a:r>
+            <a:r>
+              <a:rPr sz="1800">
+                <a:solidFill>
+                  <a:srgbClr val="6D8C97"/>
+                </a:solidFill>
+                <a:latin typeface="Consolas"/>
+              </a:rPr>
+              <a:t> </a:t>
+            </a:r>
+          </a:p>
+          <a:p>
+            <a:pPr>
+              <a:spcAft>
+                <a:spcPts val="0"/>
+              </a:spcAft>
+            </a:pPr>
+            <a:r>
+              <a:rPr sz="1800">
+                <a:solidFill>
+                  <a:srgbClr val="6D8C97"/>
+                </a:solidFill>
+                <a:latin typeface="Consolas"/>
+              </a:rPr>
+              <a:t>  60  </a:t>
+            </a:r>
+            <a:r>
+              <a:rPr sz="1800">
+                <a:solidFill>
+                  <a:srgbClr val="6D8C97"/>
+                </a:solidFill>
+                <a:latin typeface="Consolas"/>
+              </a:rPr>
+              <a:t>// Week 8: the server reads at most 4000 characters of conversation at once.</a:t>
+            </a:r>
+          </a:p>
+          <a:p>
+            <a:pPr>
+              <a:spcAft>
+                <a:spcPts val="0"/>
+              </a:spcAft>
+            </a:pPr>
+            <a:r>
+              <a:rPr sz="1800">
+                <a:solidFill>
+                  <a:srgbClr val="6D8C97"/>
+                </a:solidFill>
+                <a:latin typeface="Consolas"/>
+              </a:rPr>
+              <a:t>  61  </a:t>
+            </a:r>
+            <a:r>
+              <a:rPr sz="1800">
+                <a:solidFill>
+                  <a:srgbClr val="6D8C97"/>
+                </a:solidFill>
+                <a:latin typeface="Consolas"/>
+              </a:rPr>
+              <a:t>// Past that it refuses the whole request, so old messages have to go.</a:t>
+            </a:r>
+          </a:p>
+          <a:p>
+            <a:pPr>
+              <a:spcAft>
+                <a:spcPts val="0"/>
+              </a:spcAft>
+            </a:pPr>
+            <a:r>
+              <a:rPr sz="1800">
+                <a:solidFill>
+                  <a:srgbClr val="6D8C97"/>
+                </a:solidFill>
+                <a:latin typeface="Consolas"/>
+              </a:rPr>
+              <a:t>  62  </a:t>
+            </a:r>
+            <a:r>
+              <a:rPr sz="1800">
+                <a:solidFill>
+                  <a:srgbClr val="7FE0A0"/>
+                </a:solidFill>
+                <a:latin typeface="Consolas"/>
+              </a:rPr>
+              <a:t>const MAX_CHARS = 3500;   // leave room for the personality and your next line</a:t>
+            </a:r>
+          </a:p>
+        </p:txBody>
+      </p:sp>
+      <p:sp>
+        <p:nvSpPr>
+          <p:cNvPr id="4" name="TextBox 3"/>
+          <p:cNvSpPr txBox="1"/>
+          <p:nvPr/>
+        </p:nvSpPr>
+        <p:spPr>
+          <a:xfrm>
+            <a:off x="548640" y="5623560"/>
+            <a:ext cx="11064240" cy="1051560"/>
+          </a:xfrm>
+          <a:prstGeom prst="rect">
+            <a:avLst/>
+          </a:prstGeom>
+          <a:noFill/>
+        </p:spPr>
+        <p:txBody>
+          <a:bodyPr wrap="square">
+            <a:spAutoFit/>
+          </a:bodyPr>
+          <a:lstStyle/>
+          <a:p>
+            <a:r>
+              <a:rPr sz="2000">
                 <a:solidFill>
                   <a:srgbClr val="DCECEF"/>
                 </a:solidFill>
-                <a:latin typeface="Consolas"/>
-              </a:rPr>
-              <a:t>        { role: 'system', content: personaBox.value },</a:t>
-            </a:r>
-          </a:p>
-          <a:p>
-            <a:pPr>
-              <a:spcAft>
-                <a:spcPts val="0"/>
-              </a:spcAft>
-            </a:pPr>
-            <a:r>
-              <a:rPr sz="1400">
-                <a:solidFill>
-                  <a:srgbClr val="6D8C97"/>
-                </a:solidFill>
-                <a:latin typeface="Consolas"/>
-              </a:rPr>
-              <a:t>  92  </a:t>
-            </a:r>
-            <a:r>
-              <a:rPr sz="1400">
-                <a:solidFill>
-                  <a:srgbClr val="DCECEF"/>
-                </a:solidFill>
-                <a:latin typeface="Consolas"/>
-              </a:rPr>
-              <a:t>        // Week 7: everything said so far, oldest first.</a:t>
-            </a:r>
-          </a:p>
-          <a:p>
-            <a:pPr>
-              <a:spcAft>
-                <a:spcPts val="0"/>
-              </a:spcAft>
-            </a:pPr>
-            <a:r>
-              <a:rPr sz="1400">
-                <a:solidFill>
-                  <a:srgbClr val="6D8C97"/>
-                </a:solidFill>
-                <a:latin typeface="Consolas"/>
-              </a:rPr>
-              <a:t>  93  </a:t>
-            </a:r>
-            <a:r>
-              <a:rPr sz="1400">
-                <a:solidFill>
-                  <a:srgbClr val="DCECEF"/>
-                </a:solidFill>
-                <a:latin typeface="Consolas"/>
-              </a:rPr>
-              <a:t>        ...history</a:t>
-            </a:r>
-          </a:p>
-          <a:p>
-            <a:pPr>
-              <a:spcAft>
-                <a:spcPts val="0"/>
-              </a:spcAft>
-            </a:pPr>
-            <a:r>
-              <a:rPr sz="1400">
-                <a:solidFill>
-                  <a:srgbClr val="6D8C97"/>
-                </a:solidFill>
-                <a:latin typeface="Consolas"/>
-              </a:rPr>
-              <a:t>  94  </a:t>
-            </a:r>
-            <a:r>
-              <a:rPr sz="1400">
-                <a:solidFill>
-                  <a:srgbClr val="DCECEF"/>
-                </a:solidFill>
-                <a:latin typeface="Consolas"/>
-              </a:rPr>
-              <a:t>      ]</a:t>
-            </a:r>
-          </a:p>
-          <a:p>
-            <a:pPr>
-              <a:spcAft>
-                <a:spcPts val="0"/>
-              </a:spcAft>
-            </a:pPr>
-            <a:r>
-              <a:rPr sz="1400">
-                <a:solidFill>
-                  <a:srgbClr val="6D8C97"/>
-                </a:solidFill>
-                <a:latin typeface="Consolas"/>
-              </a:rPr>
-              <a:t>  95  </a:t>
-            </a:r>
-            <a:r>
-              <a:rPr sz="1400">
-                <a:solidFill>
-                  <a:srgbClr val="DCECEF"/>
-                </a:solidFill>
-                <a:latin typeface="Consolas"/>
-              </a:rPr>
-              <a:t>    })</a:t>
-            </a:r>
-          </a:p>
-          <a:p>
-            <a:pPr>
-              <a:spcAft>
-                <a:spcPts val="0"/>
-              </a:spcAft>
-            </a:pPr>
-            <a:r>
-              <a:rPr sz="1400">
-                <a:solidFill>
-                  <a:srgbClr val="6D8C97"/>
-                </a:solidFill>
-                <a:latin typeface="Consolas"/>
-              </a:rPr>
-              <a:t>  96  </a:t>
-            </a:r>
-            <a:r>
-              <a:rPr sz="1400">
-                <a:solidFill>
-                  <a:srgbClr val="DCECEF"/>
-                </a:solidFill>
-                <a:latin typeface="Consolas"/>
-              </a:rPr>
-              <a:t>  });</a:t>
-            </a:r>
-          </a:p>
-          <a:p>
-            <a:pPr>
-              <a:spcAft>
-                <a:spcPts val="0"/>
-              </a:spcAft>
-            </a:pPr>
-            <a:r>
-              <a:rPr sz="1400">
-                <a:solidFill>
-                  <a:srgbClr val="6D8C97"/>
-                </a:solidFill>
-                <a:latin typeface="Consolas"/>
-              </a:rPr>
-              <a:t>  97  </a:t>
-            </a:r>
-            <a:r>
-              <a:rPr sz="1400">
-                <a:solidFill>
-                  <a:srgbClr val="DCECEF"/>
-                </a:solidFill>
-                <a:latin typeface="Consolas"/>
-              </a:rPr>
-              <a:t> </a:t>
-            </a:r>
-          </a:p>
-          <a:p>
-            <a:pPr>
-              <a:spcAft>
-                <a:spcPts val="0"/>
-              </a:spcAft>
-            </a:pPr>
-            <a:r>
-              <a:rPr sz="1400">
-                <a:solidFill>
-                  <a:srgbClr val="6D8C97"/>
-                </a:solidFill>
-                <a:latin typeface="Consolas"/>
-              </a:rPr>
-              <a:t>  98  </a:t>
-            </a:r>
-            <a:r>
-              <a:rPr sz="1400">
-                <a:solidFill>
-                  <a:srgbClr val="DCECEF"/>
-                </a:solidFill>
-                <a:latin typeface="Consolas"/>
-              </a:rPr>
-              <a:t>  // Week 5: fetch does NOT throw when the server says no. A 429 arrives</a:t>
-            </a:r>
-          </a:p>
-          <a:p>
-            <a:pPr>
-              <a:spcAft>
-                <a:spcPts val="0"/>
-              </a:spcAft>
-            </a:pPr>
-            <a:r>
-              <a:rPr sz="1400">
-                <a:solidFill>
-                  <a:srgbClr val="6D8C97"/>
-                </a:solidFill>
-                <a:latin typeface="Consolas"/>
-              </a:rPr>
-              <a:t>  99  </a:t>
-            </a:r>
-            <a:r>
-              <a:rPr sz="1400">
-                <a:solidFill>
-                  <a:srgbClr val="DCECEF"/>
-                </a:solidFill>
-                <a:latin typeface="Consolas"/>
-              </a:rPr>
-              <a:t>  // looking just like a success until you actually check.</a:t>
-            </a:r>
-          </a:p>
-          <a:p>
-            <a:pPr>
-              <a:spcAft>
-                <a:spcPts val="0"/>
-              </a:spcAft>
-            </a:pPr>
-            <a:r>
-              <a:rPr sz="1400">
-                <a:solidFill>
-                  <a:srgbClr val="6D8C97"/>
-                </a:solidFill>
-                <a:latin typeface="Consolas"/>
-              </a:rPr>
-              <a:t> 100  </a:t>
-            </a:r>
-            <a:r>
-              <a:rPr sz="1400">
-                <a:solidFill>
-                  <a:srgbClr val="DCECEF"/>
-                </a:solidFill>
-                <a:latin typeface="Consolas"/>
-              </a:rPr>
-              <a:t>  if (!res.ok) {</a:t>
-            </a:r>
-          </a:p>
-          <a:p>
-            <a:pPr>
-              <a:spcAft>
-                <a:spcPts val="0"/>
-              </a:spcAft>
-            </a:pPr>
-            <a:r>
-              <a:rPr sz="1400">
-                <a:solidFill>
-                  <a:srgbClr val="6D8C97"/>
-                </a:solidFill>
-                <a:latin typeface="Consolas"/>
-              </a:rPr>
-              <a:t> 101  </a:t>
-            </a:r>
-            <a:r>
-              <a:rPr sz="1400">
-                <a:solidFill>
-                  <a:srgbClr val="DCECEF"/>
-                </a:solidFill>
-                <a:latin typeface="Consolas"/>
-              </a:rPr>
-              <a:t>    const problem = await res.json();</a:t>
-            </a:r>
-          </a:p>
-          <a:p>
-            <a:pPr>
-              <a:spcAft>
-                <a:spcPts val="0"/>
-              </a:spcAft>
-            </a:pPr>
-            <a:r>
-              <a:rPr sz="1400">
-                <a:solidFill>
-                  <a:srgbClr val="6D8C97"/>
-                </a:solidFill>
-                <a:latin typeface="Consolas"/>
-              </a:rPr>
-              <a:t> 102  </a:t>
-            </a:r>
-            <a:r>
-              <a:rPr sz="1400">
-                <a:solidFill>
-                  <a:srgbClr val="DCECEF"/>
-                </a:solidFill>
-                <a:latin typeface="Consolas"/>
-              </a:rPr>
-              <a:t>    throw new Error(explain(res.status, problem));</a:t>
-            </a:r>
-          </a:p>
-          <a:p>
-            <a:pPr>
-              <a:spcAft>
-                <a:spcPts val="0"/>
-              </a:spcAft>
-            </a:pPr>
-            <a:r>
-              <a:rPr sz="1400">
-                <a:solidFill>
-                  <a:srgbClr val="6D8C97"/>
-                </a:solidFill>
-                <a:latin typeface="Consolas"/>
-              </a:rPr>
-              <a:t> 103  </a:t>
-            </a:r>
-            <a:r>
-              <a:rPr sz="1400">
-                <a:solidFill>
-                  <a:srgbClr val="DCECEF"/>
-                </a:solidFill>
-                <a:latin typeface="Consolas"/>
-              </a:rPr>
-              <a:t>  }</a:t>
-            </a:r>
-          </a:p>
-          <a:p>
-            <a:pPr>
-              <a:spcAft>
-                <a:spcPts val="0"/>
-              </a:spcAft>
-            </a:pPr>
-            <a:r>
-              <a:rPr sz="1400">
-                <a:solidFill>
-                  <a:srgbClr val="6D8C97"/>
-                </a:solidFill>
-                <a:latin typeface="Consolas"/>
-              </a:rPr>
-              <a:t> 104  </a:t>
-            </a:r>
-            <a:r>
-              <a:rPr sz="1400">
-                <a:solidFill>
-                  <a:srgbClr val="DCECEF"/>
-                </a:solidFill>
-                <a:latin typeface="Consolas"/>
-              </a:rPr>
-              <a:t> </a:t>
-            </a:r>
-          </a:p>
-          <a:p>
-            <a:pPr>
-              <a:spcAft>
-                <a:spcPts val="0"/>
-              </a:spcAft>
-            </a:pPr>
-            <a:r>
-              <a:rPr sz="1400">
-                <a:solidFill>
-                  <a:srgbClr val="6D8C97"/>
-                </a:solidFill>
-                <a:latin typeface="Consolas"/>
-              </a:rPr>
-              <a:t> 105  </a:t>
-            </a:r>
-            <a:r>
-              <a:rPr sz="1400">
-                <a:solidFill>
-                  <a:srgbClr val="DCECEF"/>
-                </a:solidFill>
-                <a:latin typeface="Consolas"/>
-              </a:rPr>
-              <a:t>  const data = await res.json();</a:t>
+              </a:rPr>
+              <a:t>Set a limit: 3500 characters. Leave room under the server's 4000 for the personality and your next line.</a:t>
             </a:r>
           </a:p>
         </p:txBody>
@@ -5149,7 +9605,7 @@
         <p:spPr>
           <a:xfrm>
             <a:off x="502920" y="274320"/>
-            <a:ext cx="11155680" cy="731520"/>
+            <a:ext cx="11155680" cy="548640"/>
           </a:xfrm>
           <a:prstGeom prst="rect">
             <a:avLst/>
@@ -5163,12 +9619,12 @@
           <a:lstStyle/>
           <a:p>
             <a:r>
-              <a:rPr sz="2600" b="1">
+              <a:rPr sz="2200" b="1">
                 <a:solidFill>
                   <a:srgbClr val="01AEFD"/>
                 </a:solidFill>
               </a:rPr>
-              <a:t>Type this into script.js  (3 of 3)</a:t>
+              <a:t>Type this into script.js   -   line 64</a:t>
             </a:r>
           </a:p>
         </p:txBody>
@@ -5181,8 +9637,8 @@
         </p:nvSpPr>
         <p:spPr>
           <a:xfrm>
-            <a:off x="502920" y="1051560"/>
-            <a:ext cx="11155680" cy="5394960"/>
+            <a:off x="502920" y="960120"/>
+            <a:ext cx="11155680" cy="4297680"/>
           </a:xfrm>
           <a:prstGeom prst="rect">
             <a:avLst/>
@@ -5201,47 +9657,180 @@
               </a:spcAft>
             </a:pPr>
             <a:r>
-              <a:rPr sz="1700">
-                <a:solidFill>
-                  <a:srgbClr val="6D8C97"/>
-                </a:solidFill>
-                <a:latin typeface="Consolas"/>
-              </a:rPr>
-              <a:t> 106  </a:t>
-            </a:r>
-            <a:r>
-              <a:rPr sz="1700">
+              <a:rPr sz="1800">
+                <a:solidFill>
+                  <a:srgbClr val="6D8C97"/>
+                </a:solidFill>
+                <a:latin typeface="Consolas"/>
+              </a:rPr>
+              <a:t>  59  </a:t>
+            </a:r>
+            <a:r>
+              <a:rPr sz="1800">
+                <a:solidFill>
+                  <a:srgbClr val="6D8C97"/>
+                </a:solidFill>
+                <a:latin typeface="Consolas"/>
+              </a:rPr>
+              <a:t> </a:t>
+            </a:r>
+          </a:p>
+          <a:p>
+            <a:pPr>
+              <a:spcAft>
+                <a:spcPts val="0"/>
+              </a:spcAft>
+            </a:pPr>
+            <a:r>
+              <a:rPr sz="1800">
+                <a:solidFill>
+                  <a:srgbClr val="6D8C97"/>
+                </a:solidFill>
+                <a:latin typeface="Consolas"/>
+              </a:rPr>
+              <a:t>  60  </a:t>
+            </a:r>
+            <a:r>
+              <a:rPr sz="1800">
+                <a:solidFill>
+                  <a:srgbClr val="6D8C97"/>
+                </a:solidFill>
+                <a:latin typeface="Consolas"/>
+              </a:rPr>
+              <a:t>// Week 8: the server reads at most 4000 characters of conversation at once.</a:t>
+            </a:r>
+          </a:p>
+          <a:p>
+            <a:pPr>
+              <a:spcAft>
+                <a:spcPts val="0"/>
+              </a:spcAft>
+            </a:pPr>
+            <a:r>
+              <a:rPr sz="1800">
+                <a:solidFill>
+                  <a:srgbClr val="6D8C97"/>
+                </a:solidFill>
+                <a:latin typeface="Consolas"/>
+              </a:rPr>
+              <a:t>  61  </a:t>
+            </a:r>
+            <a:r>
+              <a:rPr sz="1800">
+                <a:solidFill>
+                  <a:srgbClr val="6D8C97"/>
+                </a:solidFill>
+                <a:latin typeface="Consolas"/>
+              </a:rPr>
+              <a:t>// Past that it refuses the whole request, so old messages have to go.</a:t>
+            </a:r>
+          </a:p>
+          <a:p>
+            <a:pPr>
+              <a:spcAft>
+                <a:spcPts val="0"/>
+              </a:spcAft>
+            </a:pPr>
+            <a:r>
+              <a:rPr sz="1800">
+                <a:solidFill>
+                  <a:srgbClr val="6D8C97"/>
+                </a:solidFill>
+                <a:latin typeface="Consolas"/>
+              </a:rPr>
+              <a:t>  62  </a:t>
+            </a:r>
+            <a:r>
+              <a:rPr sz="1800">
+                <a:solidFill>
+                  <a:srgbClr val="6D8C97"/>
+                </a:solidFill>
+                <a:latin typeface="Consolas"/>
+              </a:rPr>
+              <a:t>const MAX_CHARS = 3500;   // leave room for the personality and your next line</a:t>
+            </a:r>
+          </a:p>
+          <a:p>
+            <a:pPr>
+              <a:spcAft>
+                <a:spcPts val="0"/>
+              </a:spcAft>
+            </a:pPr>
+            <a:r>
+              <a:rPr sz="1800">
+                <a:solidFill>
+                  <a:srgbClr val="6D8C97"/>
+                </a:solidFill>
+                <a:latin typeface="Consolas"/>
+              </a:rPr>
+              <a:t>  63  </a:t>
+            </a:r>
+            <a:r>
+              <a:rPr sz="1800">
+                <a:solidFill>
+                  <a:srgbClr val="6D8C97"/>
+                </a:solidFill>
+                <a:latin typeface="Consolas"/>
+              </a:rPr>
+              <a:t> </a:t>
+            </a:r>
+          </a:p>
+          <a:p>
+            <a:pPr>
+              <a:spcAft>
+                <a:spcPts val="0"/>
+              </a:spcAft>
+            </a:pPr>
+            <a:r>
+              <a:rPr sz="1800">
+                <a:solidFill>
+                  <a:srgbClr val="6D8C97"/>
+                </a:solidFill>
+                <a:latin typeface="Consolas"/>
+              </a:rPr>
+              <a:t>  64  </a:t>
+            </a:r>
+            <a:r>
+              <a:rPr sz="1800">
+                <a:solidFill>
+                  <a:srgbClr val="7FE0A0"/>
+                </a:solidFill>
+                <a:latin typeface="Consolas"/>
+              </a:rPr>
+              <a:t>function trimHistory() {</a:t>
+            </a:r>
+          </a:p>
+        </p:txBody>
+      </p:sp>
+      <p:sp>
+        <p:nvSpPr>
+          <p:cNvPr id="4" name="TextBox 3"/>
+          <p:cNvSpPr txBox="1"/>
+          <p:nvPr/>
+        </p:nvSpPr>
+        <p:spPr>
+          <a:xfrm>
+            <a:off x="548640" y="5623560"/>
+            <a:ext cx="11064240" cy="1051560"/>
+          </a:xfrm>
+          <a:prstGeom prst="rect">
+            <a:avLst/>
+          </a:prstGeom>
+          <a:noFill/>
+        </p:spPr>
+        <p:txBody>
+          <a:bodyPr wrap="square">
+            <a:spAutoFit/>
+          </a:bodyPr>
+          <a:lstStyle/>
+          <a:p>
+            <a:r>
+              <a:rPr sz="2000">
                 <a:solidFill>
                   <a:srgbClr val="DCECEF"/>
                 </a:solidFill>
-                <a:latin typeface="Consolas"/>
-              </a:rPr>
-              <a:t>  return data.choices[0].message.content;</a:t>
-            </a:r>
-          </a:p>
-          <a:p>
-            <a:pPr>
-              <a:spcAft>
-                <a:spcPts val="0"/>
-              </a:spcAft>
-            </a:pPr>
-            <a:r>
-              <a:rPr sz="1700">
-                <a:solidFill>
-                  <a:srgbClr val="6D8C97"/>
-                </a:solidFill>
-                <a:latin typeface="Consolas"/>
-              </a:rPr>
-              <a:t> 107  </a:t>
-            </a:r>
-            <a:r>
-              <a:rPr sz="1700">
-                <a:solidFill>
-                  <a:srgbClr val="DCECEF"/>
-                </a:solidFill>
-                <a:latin typeface="Consolas"/>
-              </a:rPr>
-              <a:t>}</a:t>
+              </a:rPr>
+              <a:t>Start trimHistory - the job that keeps the conversation short enough to send.</a:t>
             </a:r>
           </a:p>
         </p:txBody>
@@ -5285,7 +9874,7 @@
                   <a:srgbClr val="1F2A37"/>
                 </a:solidFill>
               </a:rPr>
-              <a:t>What do you throw away?</a:t>
+              <a:t>let</a:t>
             </a:r>
           </a:p>
         </p:txBody>
@@ -5293,6 +9882,39 @@
       <p:sp>
         <p:nvSpPr>
           <p:cNvPr id="3" name="TextBox 2"/>
+          <p:cNvSpPr txBox="1"/>
+          <p:nvPr/>
+        </p:nvSpPr>
+        <p:spPr>
+          <a:xfrm>
+            <a:off x="868680" y="502920"/>
+            <a:ext cx="5486400" cy="457200"/>
+          </a:xfrm>
+          <a:prstGeom prst="rect">
+            <a:avLst/>
+          </a:prstGeom>
+          <a:noFill/>
+        </p:spPr>
+        <p:txBody>
+          <a:bodyPr wrap="none">
+            <a:spAutoFit/>
+          </a:bodyPr>
+          <a:lstStyle/>
+          <a:p>
+            <a:r>
+              <a:rPr sz="1500" b="1">
+                <a:solidFill>
+                  <a:srgbClr val="01AEFD"/>
+                </a:solidFill>
+              </a:rPr>
+              <a:t>JAVASCRIPT</a:t>
+            </a:r>
+          </a:p>
+        </p:txBody>
+      </p:sp>
+      <p:sp>
+        <p:nvSpPr>
+          <p:cNvPr id="4" name="TextBox 3"/>
           <p:cNvSpPr txBox="1"/>
           <p:nvPr/>
         </p:nvSpPr>
@@ -5318,12 +9940,12 @@
               </a:spcAft>
             </a:pPr>
             <a:r>
-              <a:rPr sz="2800">
-                <a:solidFill>
-                  <a:srgbClr val="01AEFD"/>
-                </a:solidFill>
-              </a:rPr>
-              <a:t>There is no right answer</a:t>
+              <a:rPr sz="2400">
+                <a:solidFill>
+                  <a:srgbClr val="1F2A37"/>
+                </a:solidFill>
+              </a:rPr>
+              <a:t>• Names a value like const does, but let can be CHANGED later.</a:t>
             </a:r>
           </a:p>
           <a:p>
@@ -5338,37 +9960,7 @@
                   <a:srgbClr val="1F2A37"/>
                 </a:solidFill>
               </a:rPr>
-              <a:t>• Oldest? Shortest? Least interesting?</a:t>
-            </a:r>
-          </a:p>
-          <a:p>
-            <a:pPr>
-              <a:spcAft>
-                <a:spcPts val="1400"/>
-              </a:spcAft>
-            </a:pPr>
-            <a:r>
-              <a:rPr sz="2400">
-                <a:solidFill>
-                  <a:srgbClr val="1F2A37"/>
-                </a:solidFill>
-              </a:rPr>
-              <a:t>• That is what a trade-off means</a:t>
-            </a:r>
-          </a:p>
-          <a:p>
-            <a:pPr>
-              <a:spcAft>
-                <a:spcPts val="1400"/>
-              </a:spcAft>
-            </a:pPr>
-            <a:r>
-              <a:rPr sz="2400">
-                <a:solidFill>
-                  <a:srgbClr val="1F2A37"/>
-                </a:solidFill>
-              </a:rPr>
-              <a:t>• Most apps drop the oldest</a:t>
+              <a:t>• Use it for a running total you keep adding to.</a:t>
             </a:r>
           </a:p>
         </p:txBody>
@@ -5412,7 +10004,7 @@
                   <a:srgbClr val="1F2A37"/>
                 </a:solidFill>
               </a:rPr>
-              <a:t>shift and push</a:t>
+              <a:t>.length</a:t>
             </a:r>
           </a:p>
         </p:txBody>
@@ -5420,6 +10012,39 @@
       <p:sp>
         <p:nvSpPr>
           <p:cNvPr id="3" name="TextBox 2"/>
+          <p:cNvSpPr txBox="1"/>
+          <p:nvPr/>
+        </p:nvSpPr>
+        <p:spPr>
+          <a:xfrm>
+            <a:off x="868680" y="502920"/>
+            <a:ext cx="5486400" cy="457200"/>
+          </a:xfrm>
+          <a:prstGeom prst="rect">
+            <a:avLst/>
+          </a:prstGeom>
+          <a:noFill/>
+        </p:spPr>
+        <p:txBody>
+          <a:bodyPr wrap="none">
+            <a:spAutoFit/>
+          </a:bodyPr>
+          <a:lstStyle/>
+          <a:p>
+            <a:r>
+              <a:rPr sz="1500" b="1">
+                <a:solidFill>
+                  <a:srgbClr val="01AEFD"/>
+                </a:solidFill>
+              </a:rPr>
+              <a:t>JAVASCRIPT</a:t>
+            </a:r>
+          </a:p>
+        </p:txBody>
+      </p:sp>
+      <p:sp>
+        <p:nvSpPr>
+          <p:cNvPr id="4" name="TextBox 3"/>
           <p:cNvSpPr txBox="1"/>
           <p:nvPr/>
         </p:nvSpPr>
@@ -5450,37 +10075,7 @@
                   <a:srgbClr val="1F2A37"/>
                 </a:solidFill>
               </a:rPr>
-              <a:t>• push - add to the back</a:t>
-            </a:r>
-          </a:p>
-          <a:p>
-            <a:pPr>
-              <a:spcAft>
-                <a:spcPts val="1400"/>
-              </a:spcAft>
-            </a:pPr>
-            <a:r>
-              <a:rPr sz="2400">
-                <a:solidFill>
-                  <a:srgbClr val="1F2A37"/>
-                </a:solidFill>
-              </a:rPr>
-              <a:t>• shift - take from the front</a:t>
-            </a:r>
-          </a:p>
-          <a:p>
-            <a:pPr>
-              <a:spcAft>
-                <a:spcPts val="1400"/>
-              </a:spcAft>
-            </a:pPr>
-            <a:r>
-              <a:rPr sz="2400">
-                <a:solidFill>
-                  <a:srgbClr val="1F2A37"/>
-                </a:solidFill>
-              </a:rPr>
-              <a:t>• A queue, like the lunch line</a:t>
+              <a:t>• How many items are in a list, or how many characters in a string.</a:t>
             </a:r>
           </a:p>
         </p:txBody>

--- a/ai101/slides/week-08.pptx
+++ b/ai101/slides/week-08.pptx
@@ -3573,12 +3573,27 @@
               </a:spcAft>
             </a:pPr>
             <a:r>
+              <a:rPr sz="2800">
+                <a:solidFill>
+                  <a:srgbClr val="01AEFD"/>
+                </a:solidFill>
+              </a:rPr>
+              <a:t>for (const message of history) { ... }</a:t>
+            </a:r>
+          </a:p>
+          <a:p>
+            <a:pPr>
+              <a:spcAft>
+                <a:spcPts val="1400"/>
+              </a:spcAft>
+            </a:pPr>
+            <a:r>
               <a:rPr sz="2400">
                 <a:solidFill>
                   <a:srgbClr val="1F2A37"/>
                 </a:solidFill>
               </a:rPr>
-              <a:t>• Runs the same steps once for EACH item in a list.</a:t>
+              <a:t>• Runs the same steps once for EACH item in a list (week 4).</a:t>
             </a:r>
           </a:p>
           <a:p>
@@ -3594,6 +3609,21 @@
                 </a:solidFill>
               </a:rPr>
               <a:t>• message becomes each item in turn.</a:t>
+            </a:r>
+          </a:p>
+          <a:p>
+            <a:pPr>
+              <a:spcAft>
+                <a:spcPts val="1400"/>
+              </a:spcAft>
+            </a:pPr>
+            <a:r>
+              <a:rPr sz="2400">
+                <a:solidFill>
+                  <a:srgbClr val="1F2A37"/>
+                </a:solidFill>
+              </a:rPr>
+              <a:t>• It replaces writing the same line out by hand for every item.</a:t>
             </a:r>
           </a:p>
         </p:txBody>
@@ -4723,6 +4753,21 @@
               </a:spcAft>
             </a:pPr>
             <a:r>
+              <a:rPr sz="2800">
+                <a:solidFill>
+                  <a:srgbClr val="01AEFD"/>
+                </a:solidFill>
+              </a:rPr>
+              <a:t>while (size &gt; MAX_CHARS) { ... }</a:t>
+            </a:r>
+          </a:p>
+          <a:p>
+            <a:pPr>
+              <a:spcAft>
+                <a:spcPts val="1400"/>
+              </a:spcAft>
+            </a:pPr>
+            <a:r>
               <a:rPr sz="2400">
                 <a:solidFill>
                   <a:srgbClr val="1F2A37"/>
@@ -4743,7 +4788,22 @@
                   <a:srgbClr val="1F2A37"/>
                 </a:solidFill>
               </a:rPr>
-              <a:t>• Here: keep dropping messages until we are back under the limit.</a:t>
+              <a:t>• if (week 2) runs its block once; while runs it again and again.</a:t>
+            </a:r>
+          </a:p>
+          <a:p>
+            <a:pPr>
+              <a:spcAft>
+                <a:spcPts val="1400"/>
+              </a:spcAft>
+            </a:pPr>
+            <a:r>
+              <a:rPr sz="2400">
+                <a:solidFill>
+                  <a:srgbClr val="1F2A37"/>
+                </a:solidFill>
+              </a:rPr>
+              <a:t>• Here: keep dropping messages UNTIL we are back under the limit.</a:t>
             </a:r>
           </a:p>
         </p:txBody>
@@ -5268,12 +5328,27 @@
               </a:spcAft>
             </a:pPr>
             <a:r>
+              <a:rPr sz="2800">
+                <a:solidFill>
+                  <a:srgbClr val="01AEFD"/>
+                </a:solidFill>
+              </a:rPr>
+              <a:t>const dropped = history.shift();</a:t>
+            </a:r>
+          </a:p>
+          <a:p>
+            <a:pPr>
+              <a:spcAft>
+                <a:spcPts val="1400"/>
+              </a:spcAft>
+            </a:pPr>
+            <a:r>
               <a:rPr sz="2400">
                 <a:solidFill>
                   <a:srgbClr val="1F2A37"/>
                 </a:solidFill>
               </a:rPr>
-              <a:t>• Removes the FIRST item of an array and hands it back.</a:t>
+              <a:t>• Removes the FIRST item of a list and hands it back.</a:t>
             </a:r>
           </a:p>
           <a:p>
@@ -5288,7 +5363,22 @@
                   <a:srgbClr val="1F2A37"/>
                 </a:solidFill>
               </a:rPr>
-              <a:t>• The oldest message leaves the list.</a:t>
+              <a:t>• The opposite end from .push (week 7), which adds to the LAST.</a:t>
+            </a:r>
+          </a:p>
+          <a:p>
+            <a:pPr>
+              <a:spcAft>
+                <a:spcPts val="1400"/>
+              </a:spcAft>
+            </a:pPr>
+            <a:r>
+              <a:rPr sz="2400">
+                <a:solidFill>
+                  <a:srgbClr val="1F2A37"/>
+                </a:solidFill>
+              </a:rPr>
+              <a:t>• Dropping the oldest message keeps the chat short enough to send.</a:t>
             </a:r>
           </a:p>
         </p:txBody>
@@ -9940,12 +10030,27 @@
               </a:spcAft>
             </a:pPr>
             <a:r>
+              <a:rPr sz="2800">
+                <a:solidFill>
+                  <a:srgbClr val="01AEFD"/>
+                </a:solidFill>
+              </a:rPr>
+              <a:t>let size = personaBox.value.length;</a:t>
+            </a:r>
+          </a:p>
+          <a:p>
+            <a:pPr>
+              <a:spcAft>
+                <a:spcPts val="1400"/>
+              </a:spcAft>
+            </a:pPr>
+            <a:r>
               <a:rPr sz="2400">
                 <a:solidFill>
                   <a:srgbClr val="1F2A37"/>
                 </a:solidFill>
               </a:rPr>
-              <a:t>• Names a value like const does, but let can be CHANGED later.</a:t>
+              <a:t>• Names a value like const (week 2) - but let can be CHANGED later.</a:t>
             </a:r>
           </a:p>
           <a:p>
@@ -9960,7 +10065,22 @@
                   <a:srgbClr val="1F2A37"/>
                 </a:solidFill>
               </a:rPr>
-              <a:t>• Use it for a running total you keep adding to.</a:t>
+              <a:t>• const is a lock; let is a dial you can keep turning.</a:t>
+            </a:r>
+          </a:p>
+          <a:p>
+            <a:pPr>
+              <a:spcAft>
+                <a:spcPts val="1400"/>
+              </a:spcAft>
+            </a:pPr>
+            <a:r>
+              <a:rPr sz="2400">
+                <a:solidFill>
+                  <a:srgbClr val="1F2A37"/>
+                </a:solidFill>
+              </a:rPr>
+              <a:t>• Use it for a running total you add to as you go.</a:t>
             </a:r>
           </a:p>
         </p:txBody>
@@ -10070,12 +10190,57 @@
               </a:spcAft>
             </a:pPr>
             <a:r>
+              <a:rPr sz="2800">
+                <a:solidFill>
+                  <a:srgbClr val="01AEFD"/>
+                </a:solidFill>
+              </a:rPr>
+              <a:t>history.length &gt; 2</a:t>
+            </a:r>
+          </a:p>
+          <a:p>
+            <a:pPr>
+              <a:spcAft>
+                <a:spcPts val="1400"/>
+              </a:spcAft>
+            </a:pPr>
+            <a:r>
               <a:rPr sz="2400">
                 <a:solidFill>
                   <a:srgbClr val="1F2A37"/>
                 </a:solidFill>
               </a:rPr>
-              <a:t>• How many items are in a list, or how many characters in a string.</a:t>
+              <a:t>• How many items are in a list, or how many characters in a string (week 1).</a:t>
+            </a:r>
+          </a:p>
+          <a:p>
+            <a:pPr>
+              <a:spcAft>
+                <a:spcPts val="1400"/>
+              </a:spcAft>
+            </a:pPr>
+            <a:r>
+              <a:rPr sz="2400">
+                <a:solidFill>
+                  <a:srgbClr val="1F2A37"/>
+                </a:solidFill>
+              </a:rPr>
+              <a:t>• history.length counts messages; text.length counts letters.</a:t>
+            </a:r>
+          </a:p>
+          <a:p>
+            <a:pPr>
+              <a:spcAft>
+                <a:spcPts val="1400"/>
+              </a:spcAft>
+            </a:pPr>
+            <a:r>
+              <a:rPr sz="2400">
+                <a:solidFill>
+                  <a:srgbClr val="1F2A37"/>
+                </a:solidFill>
+              </a:rPr>
+              <a:t>• You compare it with &lt; or === (weeks 2, 5) to make a decision.</a:t>
             </a:r>
           </a:p>
         </p:txBody>

--- a/ai101/slides/week-08.pptx
+++ b/ai101/slides/week-08.pptx
@@ -32,6 +32,14 @@
     <p:sldId id="280" r:id="rId31"/>
     <p:sldId id="281" r:id="rId32"/>
     <p:sldId id="282" r:id="rId33"/>
+    <p:sldId id="283" r:id="rId34"/>
+    <p:sldId id="284" r:id="rId35"/>
+    <p:sldId id="285" r:id="rId36"/>
+    <p:sldId id="286" r:id="rId37"/>
+    <p:sldId id="287" r:id="rId38"/>
+    <p:sldId id="288" r:id="rId39"/>
+    <p:sldId id="289" r:id="rId40"/>
+    <p:sldId id="290" r:id="rId41"/>
   </p:sldIdLst>
   <p:sldSz cx="12191695" cy="6858000" type="screen4x3"/>
   <p:notesSz cx="6858000" cy="9144000"/>
@@ -8509,7 +8517,7 @@
                   <a:srgbClr val="1F2A37"/>
                 </a:solidFill>
               </a:rPr>
-              <a:t>Measure first</a:t>
+              <a:t>arr.length  tells you...?</a:t>
             </a:r>
           </a:p>
         </p:txBody>
@@ -8517,6 +8525,39 @@
       <p:sp>
         <p:nvSpPr>
           <p:cNvPr id="3" name="TextBox 2"/>
+          <p:cNvSpPr txBox="1"/>
+          <p:nvPr/>
+        </p:nvSpPr>
+        <p:spPr>
+          <a:xfrm>
+            <a:off x="868680" y="502920"/>
+            <a:ext cx="5486400" cy="457200"/>
+          </a:xfrm>
+          <a:prstGeom prst="rect">
+            <a:avLst/>
+          </a:prstGeom>
+          <a:noFill/>
+        </p:spPr>
+        <p:txBody>
+          <a:bodyPr wrap="none">
+            <a:spAutoFit/>
+          </a:bodyPr>
+          <a:lstStyle/>
+          <a:p>
+            <a:r>
+              <a:rPr sz="1500" b="1">
+                <a:solidFill>
+                  <a:srgbClr val="01AEFD"/>
+                </a:solidFill>
+              </a:rPr>
+              <a:t>QUICK CHECK</a:t>
+            </a:r>
+          </a:p>
+        </p:txBody>
+      </p:sp>
+      <p:sp>
+        <p:nvSpPr>
+          <p:cNvPr id="4" name="TextBox 3"/>
           <p:cNvSpPr txBox="1"/>
           <p:nvPr/>
         </p:nvSpPr>
@@ -8542,12 +8583,12 @@
               </a:spcAft>
             </a:pPr>
             <a:r>
-              <a:rPr sz="2800">
-                <a:solidFill>
-                  <a:srgbClr val="01AEFD"/>
-                </a:solidFill>
-              </a:rPr>
-              <a:t>Count before you cut</a:t>
+              <a:rPr sz="2400">
+                <a:solidFill>
+                  <a:srgbClr val="1F2A37"/>
+                </a:solidFill>
+              </a:rPr>
+              <a:t>• A. the first item</a:t>
             </a:r>
           </a:p>
           <a:p>
@@ -8562,7 +8603,7 @@
                   <a:srgbClr val="1F2A37"/>
                 </a:solidFill>
               </a:rPr>
-              <a:t>• Add up every message's length</a:t>
+              <a:t>• B. the last item</a:t>
             </a:r>
           </a:p>
           <a:p>
@@ -8577,7 +8618,7 @@
                   <a:srgbClr val="1F2A37"/>
                 </a:solidFill>
               </a:rPr>
-              <a:t>• Watch the number climb</a:t>
+              <a:t>• C. the total colour</a:t>
             </a:r>
           </a:p>
           <a:p>
@@ -8592,7 +8633,22 @@
                   <a:srgbClr val="1F2A37"/>
                 </a:solidFill>
               </a:rPr>
-              <a:t>• Then decide what to do</a:t>
+              <a:t>• D. how many items are in the list</a:t>
+            </a:r>
+          </a:p>
+          <a:p>
+            <a:pPr>
+              <a:spcAft>
+                <a:spcPts val="1400"/>
+              </a:spcAft>
+            </a:pPr>
+            <a:r>
+              <a:rPr sz="2400">
+                <a:solidFill>
+                  <a:srgbClr val="1F2A37"/>
+                </a:solidFill>
+              </a:rPr>
+              <a:t>• Pick one - the answer is on the next slide.</a:t>
             </a:r>
           </a:p>
         </p:txBody>
@@ -8608,14 +8664,6 @@
 <file path=ppt/slides/slide25.xml><?xml version="1.0" encoding="utf-8"?>
 <p:sld xmlns:a="http://schemas.openxmlformats.org/drawingml/2006/main" xmlns:p="http://schemas.openxmlformats.org/presentationml/2006/main" xmlns:r="http://schemas.openxmlformats.org/officeDocument/2006/relationships">
   <p:cSld>
-    <p:bg>
-      <p:bgPr>
-        <a:solidFill>
-          <a:srgbClr val="102127"/>
-        </a:solidFill>
-        <a:effectLst/>
-      </p:bgPr>
-    </p:bg>
     <p:spTree>
       <p:nvGrpSpPr>
         <p:cNvPr id="1" name=""/>
@@ -8625,14 +8673,40 @@
       <p:grpSpPr/>
       <p:sp>
         <p:nvSpPr>
-          <p:cNvPr id="2" name="TextBox 1"/>
+          <p:cNvPr id="2" name="Title 1"/>
+          <p:cNvSpPr>
+            <a:spLocks noGrp="1"/>
+          </p:cNvSpPr>
+          <p:nvPr>
+            <p:ph type="title"/>
+          </p:nvPr>
+        </p:nvSpPr>
+        <p:spPr/>
+        <p:txBody>
+          <a:bodyPr/>
+          <a:lstStyle/>
+          <a:p>
+            <a:r>
+              <a:rPr sz="3800" b="1">
+                <a:solidFill>
+                  <a:srgbClr val="1F2A37"/>
+                </a:solidFill>
+              </a:rPr>
+              <a:t>arr.length  tells you...?</a:t>
+            </a:r>
+          </a:p>
+        </p:txBody>
+      </p:sp>
+      <p:sp>
+        <p:nvSpPr>
+          <p:cNvPr id="3" name="TextBox 2"/>
           <p:cNvSpPr txBox="1"/>
           <p:nvPr/>
         </p:nvSpPr>
         <p:spPr>
           <a:xfrm>
-            <a:off x="502920" y="274320"/>
-            <a:ext cx="11155680" cy="548640"/>
+            <a:off x="868680" y="502920"/>
+            <a:ext cx="5486400" cy="457200"/>
           </a:xfrm>
           <a:prstGeom prst="rect">
             <a:avLst/>
@@ -8646,26 +8720,26 @@
           <a:lstStyle/>
           <a:p>
             <a:r>
-              <a:rPr sz="2200" b="1">
+              <a:rPr sz="1500" b="1">
                 <a:solidFill>
                   <a:srgbClr val="01AEFD"/>
                 </a:solidFill>
               </a:rPr>
-              <a:t>Type this into script.js   -   line 80</a:t>
-            </a:r>
-          </a:p>
-        </p:txBody>
-      </p:sp>
-      <p:sp>
-        <p:nvSpPr>
-          <p:cNvPr id="3" name="TextBox 2"/>
+              <a:t>ANSWER</a:t>
+            </a:r>
+          </a:p>
+        </p:txBody>
+      </p:sp>
+      <p:sp>
+        <p:nvSpPr>
+          <p:cNvPr id="4" name="TextBox 3"/>
           <p:cNvSpPr txBox="1"/>
           <p:nvPr/>
         </p:nvSpPr>
         <p:spPr>
           <a:xfrm>
-            <a:off x="502920" y="960120"/>
-            <a:ext cx="11155680" cy="4297680"/>
+            <a:off x="822960" y="1828800"/>
+            <a:ext cx="10515600" cy="4206240"/>
           </a:xfrm>
           <a:prstGeom prst="rect">
             <a:avLst/>
@@ -8673,166 +8747,83 @@
           <a:noFill/>
         </p:spPr>
         <p:txBody>
-          <a:bodyPr wrap="none">
-            <a:spAutoFit/>
-          </a:bodyPr>
-          <a:lstStyle/>
-          <a:p>
-            <a:pPr>
-              <a:spcAft>
-                <a:spcPts val="0"/>
-              </a:spcAft>
-            </a:pPr>
-            <a:r>
-              <a:rPr sz="1800">
-                <a:solidFill>
-                  <a:srgbClr val="6D8C97"/>
-                </a:solidFill>
-                <a:latin typeface="Consolas"/>
-              </a:rPr>
-              <a:t>  76  </a:t>
-            </a:r>
-            <a:r>
-              <a:rPr sz="1800">
-                <a:solidFill>
-                  <a:srgbClr val="6D8C97"/>
-                </a:solidFill>
-                <a:latin typeface="Consolas"/>
-              </a:rPr>
-              <a:t> </a:t>
-            </a:r>
-          </a:p>
-          <a:p>
-            <a:pPr>
-              <a:spcAft>
-                <a:spcPts val="0"/>
-              </a:spcAft>
-            </a:pPr>
-            <a:r>
-              <a:rPr sz="1800">
-                <a:solidFill>
-                  <a:srgbClr val="6D8C97"/>
-                </a:solidFill>
-                <a:latin typeface="Consolas"/>
-              </a:rPr>
-              <a:t>  77  </a:t>
-            </a:r>
-            <a:r>
-              <a:rPr sz="1800">
-                <a:solidFill>
-                  <a:srgbClr val="6D8C97"/>
-                </a:solidFill>
-                <a:latin typeface="Consolas"/>
-              </a:rPr>
-              <a:t>// Week 4: ask the AI a real question.</a:t>
-            </a:r>
-          </a:p>
-          <a:p>
-            <a:pPr>
-              <a:spcAft>
-                <a:spcPts val="0"/>
-              </a:spcAft>
-            </a:pPr>
-            <a:r>
-              <a:rPr sz="1800">
-                <a:solidFill>
-                  <a:srgbClr val="6D8C97"/>
-                </a:solidFill>
-                <a:latin typeface="Consolas"/>
-              </a:rPr>
-              <a:t>  78  </a:t>
-            </a:r>
-            <a:r>
-              <a:rPr sz="1800">
-                <a:solidFill>
-                  <a:srgbClr val="6D8C97"/>
-                </a:solidFill>
-                <a:latin typeface="Consolas"/>
-              </a:rPr>
-              <a:t>// A chat request is a LIST of messages. Each one says who said it.</a:t>
-            </a:r>
-          </a:p>
-          <a:p>
-            <a:pPr>
-              <a:spcAft>
-                <a:spcPts val="0"/>
-              </a:spcAft>
-            </a:pPr>
-            <a:r>
-              <a:rPr sz="1800">
-                <a:solidFill>
-                  <a:srgbClr val="6D8C97"/>
-                </a:solidFill>
-                <a:latin typeface="Consolas"/>
-              </a:rPr>
-              <a:t>  79  </a:t>
-            </a:r>
-            <a:r>
-              <a:rPr sz="1800">
-                <a:solidFill>
-                  <a:srgbClr val="6D8C97"/>
-                </a:solidFill>
-                <a:latin typeface="Consolas"/>
-              </a:rPr>
-              <a:t>async function askAI() {</a:t>
-            </a:r>
-          </a:p>
-          <a:p>
-            <a:pPr>
-              <a:spcAft>
-                <a:spcPts val="0"/>
-              </a:spcAft>
-            </a:pPr>
-            <a:r>
-              <a:rPr sz="1800">
-                <a:solidFill>
-                  <a:srgbClr val="6D8C97"/>
-                </a:solidFill>
-                <a:latin typeface="Consolas"/>
-              </a:rPr>
-              <a:t>  80  </a:t>
-            </a:r>
-            <a:r>
-              <a:rPr sz="1800">
-                <a:solidFill>
-                  <a:srgbClr val="7FE0A0"/>
-                </a:solidFill>
-                <a:latin typeface="Consolas"/>
-              </a:rPr>
-              <a:t>  trimHistory();   // week 8: never send more than the server will read</a:t>
-            </a:r>
-          </a:p>
-        </p:txBody>
-      </p:sp>
-      <p:sp>
-        <p:nvSpPr>
-          <p:cNvPr id="4" name="TextBox 3"/>
-          <p:cNvSpPr txBox="1"/>
-          <p:nvPr/>
-        </p:nvSpPr>
-        <p:spPr>
-          <a:xfrm>
-            <a:off x="548640" y="5623560"/>
-            <a:ext cx="11064240" cy="1051560"/>
-          </a:xfrm>
-          <a:prstGeom prst="rect">
-            <a:avLst/>
-          </a:prstGeom>
-          <a:noFill/>
-        </p:spPr>
-        <p:txBody>
           <a:bodyPr wrap="square">
             <a:spAutoFit/>
           </a:bodyPr>
           <a:lstStyle/>
           <a:p>
-            <a:r>
-              <a:rPr sz="2000">
-                <a:solidFill>
-                  <a:srgbClr val="DCECEF"/>
-                </a:solidFill>
-              </a:rPr>
-              <a:t>Before sending, call trimHistory() to drop old messages if the conversation has grown too long.</a:t>
+            <a:pPr>
+              <a:spcAft>
+                <a:spcPts val="1400"/>
+              </a:spcAft>
+            </a:pPr>
+            <a:r>
+              <a:rPr sz="2400">
+                <a:solidFill>
+                  <a:srgbClr val="1F2A37"/>
+                </a:solidFill>
+              </a:rPr>
+              <a:t>• A. the first item</a:t>
+            </a:r>
+          </a:p>
+          <a:p>
+            <a:pPr>
+              <a:spcAft>
+                <a:spcPts val="1400"/>
+              </a:spcAft>
+            </a:pPr>
+            <a:r>
+              <a:rPr sz="2400">
+                <a:solidFill>
+                  <a:srgbClr val="1F2A37"/>
+                </a:solidFill>
+              </a:rPr>
+              <a:t>• B. the last item</a:t>
+            </a:r>
+          </a:p>
+          <a:p>
+            <a:pPr>
+              <a:spcAft>
+                <a:spcPts val="1400"/>
+              </a:spcAft>
+            </a:pPr>
+            <a:r>
+              <a:rPr sz="2400">
+                <a:solidFill>
+                  <a:srgbClr val="1F2A37"/>
+                </a:solidFill>
+              </a:rPr>
+              <a:t>• C. the total colour</a:t>
+            </a:r>
+          </a:p>
+          <a:p>
+            <a:pPr>
+              <a:spcAft>
+                <a:spcPts val="1400"/>
+              </a:spcAft>
+            </a:pPr>
+            <a:r>
+              <a:rPr sz="2400">
+                <a:solidFill>
+                  <a:srgbClr val="1F2A37"/>
+                </a:solidFill>
+              </a:rPr>
+              <a:t>• D. how many items are in the list (correct)</a:t>
+            </a:r>
+          </a:p>
+          <a:p>
+            <a:pPr>
+              <a:spcAft>
+                <a:spcPts val="1400"/>
+              </a:spcAft>
+            </a:pPr>
+            <a:r>
+              <a:rPr sz="2400">
+                <a:solidFill>
+                  <a:srgbClr val="1F2A37"/>
+                </a:solidFill>
+              </a:rPr>
+              <a:t>• .length is the count of items in the array.</a:t>
             </a:r>
           </a:p>
         </p:txBody>
@@ -8876,7 +8867,7 @@
                   <a:srgbClr val="1F2A37"/>
                 </a:solidFill>
               </a:rPr>
-              <a:t>Checkpoint: it forgets on purpose</a:t>
+              <a:t>for (const m of history)  visits...?</a:t>
             </a:r>
           </a:p>
         </p:txBody>
@@ -8909,7 +8900,7 @@
                   <a:srgbClr val="01AEFD"/>
                 </a:solidFill>
               </a:rPr>
-              <a:t>CHECKPOINT - RUN IT</a:t>
+              <a:t>QUICK CHECK</a:t>
             </a:r>
           </a:p>
         </p:txBody>
@@ -8942,12 +8933,12 @@
               </a:spcAft>
             </a:pPr>
             <a:r>
-              <a:rPr sz="2800">
-                <a:solidFill>
-                  <a:srgbClr val="01AEFD"/>
-                </a:solidFill>
-              </a:rPr>
-              <a:t>Press Run and open the console. Send several long messages. Watch 'Forgot an old message...' appear as the oldest lines are dropped to stay under the limit - the chat keeps working instead of failing.</a:t>
+              <a:rPr sz="2400">
+                <a:solidFill>
+                  <a:srgbClr val="1F2A37"/>
+                </a:solidFill>
+              </a:rPr>
+              <a:t>• A. each item in history, one by one</a:t>
             </a:r>
           </a:p>
           <a:p>
@@ -8962,7 +8953,7 @@
                   <a:srgbClr val="1F2A37"/>
                 </a:solidFill>
               </a:rPr>
-              <a:t>• Run it in the classroom, or press Show the output in the web deck.</a:t>
+              <a:t>• B. only the first item</a:t>
             </a:r>
           </a:p>
           <a:p>
@@ -8977,7 +8968,37 @@
                   <a:srgbClr val="1F2A37"/>
                 </a:solidFill>
               </a:rPr>
-              <a:t>• Everyone's screen should match this.</a:t>
+              <a:t>• C. just the length</a:t>
+            </a:r>
+          </a:p>
+          <a:p>
+            <a:pPr>
+              <a:spcAft>
+                <a:spcPts val="1400"/>
+              </a:spcAft>
+            </a:pPr>
+            <a:r>
+              <a:rPr sz="2400">
+                <a:solidFill>
+                  <a:srgbClr val="1F2A37"/>
+                </a:solidFill>
+              </a:rPr>
+              <a:t>• D. nothing</a:t>
+            </a:r>
+          </a:p>
+          <a:p>
+            <a:pPr>
+              <a:spcAft>
+                <a:spcPts val="1400"/>
+              </a:spcAft>
+            </a:pPr>
+            <a:r>
+              <a:rPr sz="2400">
+                <a:solidFill>
+                  <a:srgbClr val="1F2A37"/>
+                </a:solidFill>
+              </a:rPr>
+              <a:t>• Pick one - the answer is on the next slide.</a:t>
             </a:r>
           </a:p>
         </p:txBody>
@@ -9021,7 +9042,7 @@
                   <a:srgbClr val="1F2A37"/>
                 </a:solidFill>
               </a:rPr>
-              <a:t>Watch it forget</a:t>
+              <a:t>for (const m of history)  visits...?</a:t>
             </a:r>
           </a:p>
         </p:txBody>
@@ -9029,6 +9050,39 @@
       <p:sp>
         <p:nvSpPr>
           <p:cNvPr id="3" name="TextBox 2"/>
+          <p:cNvSpPr txBox="1"/>
+          <p:nvPr/>
+        </p:nvSpPr>
+        <p:spPr>
+          <a:xfrm>
+            <a:off x="868680" y="502920"/>
+            <a:ext cx="5486400" cy="457200"/>
+          </a:xfrm>
+          <a:prstGeom prst="rect">
+            <a:avLst/>
+          </a:prstGeom>
+          <a:noFill/>
+        </p:spPr>
+        <p:txBody>
+          <a:bodyPr wrap="none">
+            <a:spAutoFit/>
+          </a:bodyPr>
+          <a:lstStyle/>
+          <a:p>
+            <a:r>
+              <a:rPr sz="1500" b="1">
+                <a:solidFill>
+                  <a:srgbClr val="01AEFD"/>
+                </a:solidFill>
+              </a:rPr>
+              <a:t>ANSWER</a:t>
+            </a:r>
+          </a:p>
+        </p:txBody>
+      </p:sp>
+      <p:sp>
+        <p:nvSpPr>
+          <p:cNvPr id="4" name="TextBox 3"/>
           <p:cNvSpPr txBox="1"/>
           <p:nvPr/>
         </p:nvSpPr>
@@ -9059,7 +9113,7 @@
                   <a:srgbClr val="1F2A37"/>
                 </a:solidFill>
               </a:rPr>
-              <a:t>• Chat until the Console says it forgot</a:t>
+              <a:t>• A. each item in history, one by one (correct)</a:t>
             </a:r>
           </a:p>
           <a:p>
@@ -9074,7 +9128,7 @@
                   <a:srgbClr val="1F2A37"/>
                 </a:solidFill>
               </a:rPr>
-              <a:t>• Ask about the beginning</a:t>
+              <a:t>• B. only the first item</a:t>
             </a:r>
           </a:p>
           <a:p>
@@ -9089,7 +9143,387 @@
                   <a:srgbClr val="1F2A37"/>
                 </a:solidFill>
               </a:rPr>
-              <a:t>• It genuinely does not know</a:t>
+              <a:t>• C. just the length</a:t>
+            </a:r>
+          </a:p>
+          <a:p>
+            <a:pPr>
+              <a:spcAft>
+                <a:spcPts val="1400"/>
+              </a:spcAft>
+            </a:pPr>
+            <a:r>
+              <a:rPr sz="2400">
+                <a:solidFill>
+                  <a:srgbClr val="1F2A37"/>
+                </a:solidFill>
+              </a:rPr>
+              <a:t>• D. nothing</a:t>
+            </a:r>
+          </a:p>
+          <a:p>
+            <a:pPr>
+              <a:spcAft>
+                <a:spcPts val="1400"/>
+              </a:spcAft>
+            </a:pPr>
+            <a:r>
+              <a:rPr sz="2400">
+                <a:solidFill>
+                  <a:srgbClr val="1F2A37"/>
+                </a:solidFill>
+              </a:rPr>
+              <a:t>• for...of walks through every item in the list in turn.</a:t>
+            </a:r>
+          </a:p>
+        </p:txBody>
+      </p:sp>
+    </p:spTree>
+  </p:cSld>
+  <p:clrMapOvr>
+    <a:masterClrMapping/>
+  </p:clrMapOvr>
+</p:sld>
+</file>
+
+<file path=ppt/slides/slide28.xml><?xml version="1.0" encoding="utf-8"?>
+<p:sld xmlns:a="http://schemas.openxmlformats.org/drawingml/2006/main" xmlns:p="http://schemas.openxmlformats.org/presentationml/2006/main" xmlns:r="http://schemas.openxmlformats.org/officeDocument/2006/relationships">
+  <p:cSld>
+    <p:spTree>
+      <p:nvGrpSpPr>
+        <p:cNvPr id="1" name=""/>
+        <p:cNvGrpSpPr/>
+        <p:nvPr/>
+      </p:nvGrpSpPr>
+      <p:grpSpPr/>
+      <p:sp>
+        <p:nvSpPr>
+          <p:cNvPr id="2" name="Title 1"/>
+          <p:cNvSpPr>
+            <a:spLocks noGrp="1"/>
+          </p:cNvSpPr>
+          <p:nvPr>
+            <p:ph type="title"/>
+          </p:nvPr>
+        </p:nvSpPr>
+        <p:spPr/>
+        <p:txBody>
+          <a:bodyPr/>
+          <a:lstStyle/>
+          <a:p>
+            <a:r>
+              <a:rPr sz="3800" b="1">
+                <a:solidFill>
+                  <a:srgbClr val="1F2A37"/>
+                </a:solidFill>
+              </a:rPr>
+              <a:t>history.shift()  removes which item?</a:t>
+            </a:r>
+          </a:p>
+        </p:txBody>
+      </p:sp>
+      <p:sp>
+        <p:nvSpPr>
+          <p:cNvPr id="3" name="TextBox 2"/>
+          <p:cNvSpPr txBox="1"/>
+          <p:nvPr/>
+        </p:nvSpPr>
+        <p:spPr>
+          <a:xfrm>
+            <a:off x="868680" y="502920"/>
+            <a:ext cx="5486400" cy="457200"/>
+          </a:xfrm>
+          <a:prstGeom prst="rect">
+            <a:avLst/>
+          </a:prstGeom>
+          <a:noFill/>
+        </p:spPr>
+        <p:txBody>
+          <a:bodyPr wrap="none">
+            <a:spAutoFit/>
+          </a:bodyPr>
+          <a:lstStyle/>
+          <a:p>
+            <a:r>
+              <a:rPr sz="1500" b="1">
+                <a:solidFill>
+                  <a:srgbClr val="01AEFD"/>
+                </a:solidFill>
+              </a:rPr>
+              <a:t>QUICK CHECK</a:t>
+            </a:r>
+          </a:p>
+        </p:txBody>
+      </p:sp>
+      <p:sp>
+        <p:nvSpPr>
+          <p:cNvPr id="4" name="TextBox 3"/>
+          <p:cNvSpPr txBox="1"/>
+          <p:nvPr/>
+        </p:nvSpPr>
+        <p:spPr>
+          <a:xfrm>
+            <a:off x="822960" y="1828800"/>
+            <a:ext cx="10515600" cy="4206240"/>
+          </a:xfrm>
+          <a:prstGeom prst="rect">
+            <a:avLst/>
+          </a:prstGeom>
+          <a:noFill/>
+        </p:spPr>
+        <p:txBody>
+          <a:bodyPr wrap="square">
+            <a:spAutoFit/>
+          </a:bodyPr>
+          <a:lstStyle/>
+          <a:p>
+            <a:pPr>
+              <a:spcAft>
+                <a:spcPts val="1400"/>
+              </a:spcAft>
+            </a:pPr>
+            <a:r>
+              <a:rPr sz="2400">
+                <a:solidFill>
+                  <a:srgbClr val="1F2A37"/>
+                </a:solidFill>
+              </a:rPr>
+              <a:t>• A. the last one</a:t>
+            </a:r>
+          </a:p>
+          <a:p>
+            <a:pPr>
+              <a:spcAft>
+                <a:spcPts val="1400"/>
+              </a:spcAft>
+            </a:pPr>
+            <a:r>
+              <a:rPr sz="2400">
+                <a:solidFill>
+                  <a:srgbClr val="1F2A37"/>
+                </a:solidFill>
+              </a:rPr>
+              <a:t>• B. the first one</a:t>
+            </a:r>
+          </a:p>
+          <a:p>
+            <a:pPr>
+              <a:spcAft>
+                <a:spcPts val="1400"/>
+              </a:spcAft>
+            </a:pPr>
+            <a:r>
+              <a:rPr sz="2400">
+                <a:solidFill>
+                  <a:srgbClr val="1F2A37"/>
+                </a:solidFill>
+              </a:rPr>
+              <a:t>• C. a random one</a:t>
+            </a:r>
+          </a:p>
+          <a:p>
+            <a:pPr>
+              <a:spcAft>
+                <a:spcPts val="1400"/>
+              </a:spcAft>
+            </a:pPr>
+            <a:r>
+              <a:rPr sz="2400">
+                <a:solidFill>
+                  <a:srgbClr val="1F2A37"/>
+                </a:solidFill>
+              </a:rPr>
+              <a:t>• D. all of them</a:t>
+            </a:r>
+          </a:p>
+          <a:p>
+            <a:pPr>
+              <a:spcAft>
+                <a:spcPts val="1400"/>
+              </a:spcAft>
+            </a:pPr>
+            <a:r>
+              <a:rPr sz="2400">
+                <a:solidFill>
+                  <a:srgbClr val="1F2A37"/>
+                </a:solidFill>
+              </a:rPr>
+              <a:t>• Pick one - the answer is on the next slide.</a:t>
+            </a:r>
+          </a:p>
+        </p:txBody>
+      </p:sp>
+    </p:spTree>
+  </p:cSld>
+  <p:clrMapOvr>
+    <a:masterClrMapping/>
+  </p:clrMapOvr>
+</p:sld>
+</file>
+
+<file path=ppt/slides/slide29.xml><?xml version="1.0" encoding="utf-8"?>
+<p:sld xmlns:a="http://schemas.openxmlformats.org/drawingml/2006/main" xmlns:p="http://schemas.openxmlformats.org/presentationml/2006/main" xmlns:r="http://schemas.openxmlformats.org/officeDocument/2006/relationships">
+  <p:cSld>
+    <p:spTree>
+      <p:nvGrpSpPr>
+        <p:cNvPr id="1" name=""/>
+        <p:cNvGrpSpPr/>
+        <p:nvPr/>
+      </p:nvGrpSpPr>
+      <p:grpSpPr/>
+      <p:sp>
+        <p:nvSpPr>
+          <p:cNvPr id="2" name="Title 1"/>
+          <p:cNvSpPr>
+            <a:spLocks noGrp="1"/>
+          </p:cNvSpPr>
+          <p:nvPr>
+            <p:ph type="title"/>
+          </p:nvPr>
+        </p:nvSpPr>
+        <p:spPr/>
+        <p:txBody>
+          <a:bodyPr/>
+          <a:lstStyle/>
+          <a:p>
+            <a:r>
+              <a:rPr sz="3800" b="1">
+                <a:solidFill>
+                  <a:srgbClr val="1F2A37"/>
+                </a:solidFill>
+              </a:rPr>
+              <a:t>history.shift()  removes which item?</a:t>
+            </a:r>
+          </a:p>
+        </p:txBody>
+      </p:sp>
+      <p:sp>
+        <p:nvSpPr>
+          <p:cNvPr id="3" name="TextBox 2"/>
+          <p:cNvSpPr txBox="1"/>
+          <p:nvPr/>
+        </p:nvSpPr>
+        <p:spPr>
+          <a:xfrm>
+            <a:off x="868680" y="502920"/>
+            <a:ext cx="5486400" cy="457200"/>
+          </a:xfrm>
+          <a:prstGeom prst="rect">
+            <a:avLst/>
+          </a:prstGeom>
+          <a:noFill/>
+        </p:spPr>
+        <p:txBody>
+          <a:bodyPr wrap="none">
+            <a:spAutoFit/>
+          </a:bodyPr>
+          <a:lstStyle/>
+          <a:p>
+            <a:r>
+              <a:rPr sz="1500" b="1">
+                <a:solidFill>
+                  <a:srgbClr val="01AEFD"/>
+                </a:solidFill>
+              </a:rPr>
+              <a:t>ANSWER</a:t>
+            </a:r>
+          </a:p>
+        </p:txBody>
+      </p:sp>
+      <p:sp>
+        <p:nvSpPr>
+          <p:cNvPr id="4" name="TextBox 3"/>
+          <p:cNvSpPr txBox="1"/>
+          <p:nvPr/>
+        </p:nvSpPr>
+        <p:spPr>
+          <a:xfrm>
+            <a:off x="822960" y="1828800"/>
+            <a:ext cx="10515600" cy="4206240"/>
+          </a:xfrm>
+          <a:prstGeom prst="rect">
+            <a:avLst/>
+          </a:prstGeom>
+          <a:noFill/>
+        </p:spPr>
+        <p:txBody>
+          <a:bodyPr wrap="square">
+            <a:spAutoFit/>
+          </a:bodyPr>
+          <a:lstStyle/>
+          <a:p>
+            <a:pPr>
+              <a:spcAft>
+                <a:spcPts val="1400"/>
+              </a:spcAft>
+            </a:pPr>
+            <a:r>
+              <a:rPr sz="2400">
+                <a:solidFill>
+                  <a:srgbClr val="1F2A37"/>
+                </a:solidFill>
+              </a:rPr>
+              <a:t>• A. the last one</a:t>
+            </a:r>
+          </a:p>
+          <a:p>
+            <a:pPr>
+              <a:spcAft>
+                <a:spcPts val="1400"/>
+              </a:spcAft>
+            </a:pPr>
+            <a:r>
+              <a:rPr sz="2400">
+                <a:solidFill>
+                  <a:srgbClr val="1F2A37"/>
+                </a:solidFill>
+              </a:rPr>
+              <a:t>• B. the first one (correct)</a:t>
+            </a:r>
+          </a:p>
+          <a:p>
+            <a:pPr>
+              <a:spcAft>
+                <a:spcPts val="1400"/>
+              </a:spcAft>
+            </a:pPr>
+            <a:r>
+              <a:rPr sz="2400">
+                <a:solidFill>
+                  <a:srgbClr val="1F2A37"/>
+                </a:solidFill>
+              </a:rPr>
+              <a:t>• C. a random one</a:t>
+            </a:r>
+          </a:p>
+          <a:p>
+            <a:pPr>
+              <a:spcAft>
+                <a:spcPts val="1400"/>
+              </a:spcAft>
+            </a:pPr>
+            <a:r>
+              <a:rPr sz="2400">
+                <a:solidFill>
+                  <a:srgbClr val="1F2A37"/>
+                </a:solidFill>
+              </a:rPr>
+              <a:t>• D. all of them</a:t>
+            </a:r>
+          </a:p>
+          <a:p>
+            <a:pPr>
+              <a:spcAft>
+                <a:spcPts val="1400"/>
+              </a:spcAft>
+            </a:pPr>
+            <a:r>
+              <a:rPr sz="2400">
+                <a:solidFill>
+                  <a:srgbClr val="1F2A37"/>
+                </a:solidFill>
+              </a:rPr>
+              <a:t>• .shift drops the item at the FRONT of the list.</a:t>
             </a:r>
           </a:p>
         </p:txBody>
@@ -9202,6 +9636,980 @@
                 </a:solidFill>
               </a:rPr>
               <a:t>• 4000 characters, whole conversation</a:t>
+            </a:r>
+          </a:p>
+        </p:txBody>
+      </p:sp>
+    </p:spTree>
+  </p:cSld>
+  <p:clrMapOvr>
+    <a:masterClrMapping/>
+  </p:clrMapOvr>
+</p:sld>
+</file>
+
+<file path=ppt/slides/slide30.xml><?xml version="1.0" encoding="utf-8"?>
+<p:sld xmlns:a="http://schemas.openxmlformats.org/drawingml/2006/main" xmlns:p="http://schemas.openxmlformats.org/presentationml/2006/main" xmlns:r="http://schemas.openxmlformats.org/officeDocument/2006/relationships">
+  <p:cSld>
+    <p:spTree>
+      <p:nvGrpSpPr>
+        <p:cNvPr id="1" name=""/>
+        <p:cNvGrpSpPr/>
+        <p:nvPr/>
+      </p:nvGrpSpPr>
+      <p:grpSpPr/>
+      <p:sp>
+        <p:nvSpPr>
+          <p:cNvPr id="2" name="Title 1"/>
+          <p:cNvSpPr>
+            <a:spLocks noGrp="1"/>
+          </p:cNvSpPr>
+          <p:nvPr>
+            <p:ph type="title"/>
+          </p:nvPr>
+        </p:nvSpPr>
+        <p:spPr/>
+        <p:txBody>
+          <a:bodyPr/>
+          <a:lstStyle/>
+          <a:p>
+            <a:r>
+              <a:rPr sz="3800" b="1">
+                <a:solidFill>
+                  <a:srgbClr val="1F2A37"/>
+                </a:solidFill>
+              </a:rPr>
+              <a:t>history.push(x)  adds x...? (from week 7)</a:t>
+            </a:r>
+          </a:p>
+        </p:txBody>
+      </p:sp>
+      <p:sp>
+        <p:nvSpPr>
+          <p:cNvPr id="3" name="TextBox 2"/>
+          <p:cNvSpPr txBox="1"/>
+          <p:nvPr/>
+        </p:nvSpPr>
+        <p:spPr>
+          <a:xfrm>
+            <a:off x="868680" y="502920"/>
+            <a:ext cx="5486400" cy="457200"/>
+          </a:xfrm>
+          <a:prstGeom prst="rect">
+            <a:avLst/>
+          </a:prstGeom>
+          <a:noFill/>
+        </p:spPr>
+        <p:txBody>
+          <a:bodyPr wrap="none">
+            <a:spAutoFit/>
+          </a:bodyPr>
+          <a:lstStyle/>
+          <a:p>
+            <a:r>
+              <a:rPr sz="1500" b="1">
+                <a:solidFill>
+                  <a:srgbClr val="01AEFD"/>
+                </a:solidFill>
+              </a:rPr>
+              <a:t>QUICK CHECK</a:t>
+            </a:r>
+          </a:p>
+        </p:txBody>
+      </p:sp>
+      <p:sp>
+        <p:nvSpPr>
+          <p:cNvPr id="4" name="TextBox 3"/>
+          <p:cNvSpPr txBox="1"/>
+          <p:nvPr/>
+        </p:nvSpPr>
+        <p:spPr>
+          <a:xfrm>
+            <a:off x="822960" y="1828800"/>
+            <a:ext cx="10515600" cy="4206240"/>
+          </a:xfrm>
+          <a:prstGeom prst="rect">
+            <a:avLst/>
+          </a:prstGeom>
+          <a:noFill/>
+        </p:spPr>
+        <p:txBody>
+          <a:bodyPr wrap="square">
+            <a:spAutoFit/>
+          </a:bodyPr>
+          <a:lstStyle/>
+          <a:p>
+            <a:pPr>
+              <a:spcAft>
+                <a:spcPts val="1400"/>
+              </a:spcAft>
+            </a:pPr>
+            <a:r>
+              <a:rPr sz="2400">
+                <a:solidFill>
+                  <a:srgbClr val="1F2A37"/>
+                </a:solidFill>
+              </a:rPr>
+              <a:t>• A. to the start</a:t>
+            </a:r>
+          </a:p>
+          <a:p>
+            <a:pPr>
+              <a:spcAft>
+                <a:spcPts val="1400"/>
+              </a:spcAft>
+            </a:pPr>
+            <a:r>
+              <a:rPr sz="2400">
+                <a:solidFill>
+                  <a:srgbClr val="1F2A37"/>
+                </a:solidFill>
+              </a:rPr>
+              <a:t>• B. nowhere</a:t>
+            </a:r>
+          </a:p>
+          <a:p>
+            <a:pPr>
+              <a:spcAft>
+                <a:spcPts val="1400"/>
+              </a:spcAft>
+            </a:pPr>
+            <a:r>
+              <a:rPr sz="2400">
+                <a:solidFill>
+                  <a:srgbClr val="1F2A37"/>
+                </a:solidFill>
+              </a:rPr>
+              <a:t>• C. to the end of the list</a:t>
+            </a:r>
+          </a:p>
+          <a:p>
+            <a:pPr>
+              <a:spcAft>
+                <a:spcPts val="1400"/>
+              </a:spcAft>
+            </a:pPr>
+            <a:r>
+              <a:rPr sz="2400">
+                <a:solidFill>
+                  <a:srgbClr val="1F2A37"/>
+                </a:solidFill>
+              </a:rPr>
+              <a:t>• D. as a CSS class</a:t>
+            </a:r>
+          </a:p>
+          <a:p>
+            <a:pPr>
+              <a:spcAft>
+                <a:spcPts val="1400"/>
+              </a:spcAft>
+            </a:pPr>
+            <a:r>
+              <a:rPr sz="2400">
+                <a:solidFill>
+                  <a:srgbClr val="1F2A37"/>
+                </a:solidFill>
+              </a:rPr>
+              <a:t>• Pick one - the answer is on the next slide.</a:t>
+            </a:r>
+          </a:p>
+        </p:txBody>
+      </p:sp>
+    </p:spTree>
+  </p:cSld>
+  <p:clrMapOvr>
+    <a:masterClrMapping/>
+  </p:clrMapOvr>
+</p:sld>
+</file>
+
+<file path=ppt/slides/slide31.xml><?xml version="1.0" encoding="utf-8"?>
+<p:sld xmlns:a="http://schemas.openxmlformats.org/drawingml/2006/main" xmlns:p="http://schemas.openxmlformats.org/presentationml/2006/main" xmlns:r="http://schemas.openxmlformats.org/officeDocument/2006/relationships">
+  <p:cSld>
+    <p:spTree>
+      <p:nvGrpSpPr>
+        <p:cNvPr id="1" name=""/>
+        <p:cNvGrpSpPr/>
+        <p:nvPr/>
+      </p:nvGrpSpPr>
+      <p:grpSpPr/>
+      <p:sp>
+        <p:nvSpPr>
+          <p:cNvPr id="2" name="Title 1"/>
+          <p:cNvSpPr>
+            <a:spLocks noGrp="1"/>
+          </p:cNvSpPr>
+          <p:nvPr>
+            <p:ph type="title"/>
+          </p:nvPr>
+        </p:nvSpPr>
+        <p:spPr/>
+        <p:txBody>
+          <a:bodyPr/>
+          <a:lstStyle/>
+          <a:p>
+            <a:r>
+              <a:rPr sz="3800" b="1">
+                <a:solidFill>
+                  <a:srgbClr val="1F2A37"/>
+                </a:solidFill>
+              </a:rPr>
+              <a:t>history.push(x)  adds x...? (from week 7)</a:t>
+            </a:r>
+          </a:p>
+        </p:txBody>
+      </p:sp>
+      <p:sp>
+        <p:nvSpPr>
+          <p:cNvPr id="3" name="TextBox 2"/>
+          <p:cNvSpPr txBox="1"/>
+          <p:nvPr/>
+        </p:nvSpPr>
+        <p:spPr>
+          <a:xfrm>
+            <a:off x="868680" y="502920"/>
+            <a:ext cx="5486400" cy="457200"/>
+          </a:xfrm>
+          <a:prstGeom prst="rect">
+            <a:avLst/>
+          </a:prstGeom>
+          <a:noFill/>
+        </p:spPr>
+        <p:txBody>
+          <a:bodyPr wrap="none">
+            <a:spAutoFit/>
+          </a:bodyPr>
+          <a:lstStyle/>
+          <a:p>
+            <a:r>
+              <a:rPr sz="1500" b="1">
+                <a:solidFill>
+                  <a:srgbClr val="01AEFD"/>
+                </a:solidFill>
+              </a:rPr>
+              <a:t>ANSWER</a:t>
+            </a:r>
+          </a:p>
+        </p:txBody>
+      </p:sp>
+      <p:sp>
+        <p:nvSpPr>
+          <p:cNvPr id="4" name="TextBox 3"/>
+          <p:cNvSpPr txBox="1"/>
+          <p:nvPr/>
+        </p:nvSpPr>
+        <p:spPr>
+          <a:xfrm>
+            <a:off x="822960" y="1828800"/>
+            <a:ext cx="10515600" cy="4206240"/>
+          </a:xfrm>
+          <a:prstGeom prst="rect">
+            <a:avLst/>
+          </a:prstGeom>
+          <a:noFill/>
+        </p:spPr>
+        <p:txBody>
+          <a:bodyPr wrap="square">
+            <a:spAutoFit/>
+          </a:bodyPr>
+          <a:lstStyle/>
+          <a:p>
+            <a:pPr>
+              <a:spcAft>
+                <a:spcPts val="1400"/>
+              </a:spcAft>
+            </a:pPr>
+            <a:r>
+              <a:rPr sz="2400">
+                <a:solidFill>
+                  <a:srgbClr val="1F2A37"/>
+                </a:solidFill>
+              </a:rPr>
+              <a:t>• A. to the start</a:t>
+            </a:r>
+          </a:p>
+          <a:p>
+            <a:pPr>
+              <a:spcAft>
+                <a:spcPts val="1400"/>
+              </a:spcAft>
+            </a:pPr>
+            <a:r>
+              <a:rPr sz="2400">
+                <a:solidFill>
+                  <a:srgbClr val="1F2A37"/>
+                </a:solidFill>
+              </a:rPr>
+              <a:t>• B. nowhere</a:t>
+            </a:r>
+          </a:p>
+          <a:p>
+            <a:pPr>
+              <a:spcAft>
+                <a:spcPts val="1400"/>
+              </a:spcAft>
+            </a:pPr>
+            <a:r>
+              <a:rPr sz="2400">
+                <a:solidFill>
+                  <a:srgbClr val="1F2A37"/>
+                </a:solidFill>
+              </a:rPr>
+              <a:t>• C. to the end of the list (correct)</a:t>
+            </a:r>
+          </a:p>
+          <a:p>
+            <a:pPr>
+              <a:spcAft>
+                <a:spcPts val="1400"/>
+              </a:spcAft>
+            </a:pPr>
+            <a:r>
+              <a:rPr sz="2400">
+                <a:solidFill>
+                  <a:srgbClr val="1F2A37"/>
+                </a:solidFill>
+              </a:rPr>
+              <a:t>• D. as a CSS class</a:t>
+            </a:r>
+          </a:p>
+          <a:p>
+            <a:pPr>
+              <a:spcAft>
+                <a:spcPts val="1400"/>
+              </a:spcAft>
+            </a:pPr>
+            <a:r>
+              <a:rPr sz="2400">
+                <a:solidFill>
+                  <a:srgbClr val="1F2A37"/>
+                </a:solidFill>
+              </a:rPr>
+              <a:t>• .push always adds onto the end - the opposite end from .shift.</a:t>
+            </a:r>
+          </a:p>
+        </p:txBody>
+      </p:sp>
+    </p:spTree>
+  </p:cSld>
+  <p:clrMapOvr>
+    <a:masterClrMapping/>
+  </p:clrMapOvr>
+</p:sld>
+</file>
+
+<file path=ppt/slides/slide32.xml><?xml version="1.0" encoding="utf-8"?>
+<p:sld xmlns:a="http://schemas.openxmlformats.org/drawingml/2006/main" xmlns:p="http://schemas.openxmlformats.org/presentationml/2006/main" xmlns:r="http://schemas.openxmlformats.org/officeDocument/2006/relationships">
+  <p:cSld>
+    <p:spTree>
+      <p:nvGrpSpPr>
+        <p:cNvPr id="1" name=""/>
+        <p:cNvGrpSpPr/>
+        <p:nvPr/>
+      </p:nvGrpSpPr>
+      <p:grpSpPr/>
+      <p:sp>
+        <p:nvSpPr>
+          <p:cNvPr id="2" name="Title 1"/>
+          <p:cNvSpPr>
+            <a:spLocks noGrp="1"/>
+          </p:cNvSpPr>
+          <p:nvPr>
+            <p:ph type="title"/>
+          </p:nvPr>
+        </p:nvSpPr>
+        <p:spPr/>
+        <p:txBody>
+          <a:bodyPr/>
+          <a:lstStyle/>
+          <a:p>
+            <a:r>
+              <a:rPr sz="3800" b="1">
+                <a:solidFill>
+                  <a:srgbClr val="1F2A37"/>
+                </a:solidFill>
+              </a:rPr>
+              <a:t>Measure first</a:t>
+            </a:r>
+          </a:p>
+        </p:txBody>
+      </p:sp>
+      <p:sp>
+        <p:nvSpPr>
+          <p:cNvPr id="3" name="TextBox 2"/>
+          <p:cNvSpPr txBox="1"/>
+          <p:nvPr/>
+        </p:nvSpPr>
+        <p:spPr>
+          <a:xfrm>
+            <a:off x="822960" y="1828800"/>
+            <a:ext cx="10515600" cy="4206240"/>
+          </a:xfrm>
+          <a:prstGeom prst="rect">
+            <a:avLst/>
+          </a:prstGeom>
+          <a:noFill/>
+        </p:spPr>
+        <p:txBody>
+          <a:bodyPr wrap="square">
+            <a:spAutoFit/>
+          </a:bodyPr>
+          <a:lstStyle/>
+          <a:p>
+            <a:pPr>
+              <a:spcAft>
+                <a:spcPts val="1400"/>
+              </a:spcAft>
+            </a:pPr>
+            <a:r>
+              <a:rPr sz="2800">
+                <a:solidFill>
+                  <a:srgbClr val="01AEFD"/>
+                </a:solidFill>
+              </a:rPr>
+              <a:t>Count before you cut</a:t>
+            </a:r>
+          </a:p>
+          <a:p>
+            <a:pPr>
+              <a:spcAft>
+                <a:spcPts val="1400"/>
+              </a:spcAft>
+            </a:pPr>
+            <a:r>
+              <a:rPr sz="2400">
+                <a:solidFill>
+                  <a:srgbClr val="1F2A37"/>
+                </a:solidFill>
+              </a:rPr>
+              <a:t>• Add up every message's length</a:t>
+            </a:r>
+          </a:p>
+          <a:p>
+            <a:pPr>
+              <a:spcAft>
+                <a:spcPts val="1400"/>
+              </a:spcAft>
+            </a:pPr>
+            <a:r>
+              <a:rPr sz="2400">
+                <a:solidFill>
+                  <a:srgbClr val="1F2A37"/>
+                </a:solidFill>
+              </a:rPr>
+              <a:t>• Watch the number climb</a:t>
+            </a:r>
+          </a:p>
+          <a:p>
+            <a:pPr>
+              <a:spcAft>
+                <a:spcPts val="1400"/>
+              </a:spcAft>
+            </a:pPr>
+            <a:r>
+              <a:rPr sz="2400">
+                <a:solidFill>
+                  <a:srgbClr val="1F2A37"/>
+                </a:solidFill>
+              </a:rPr>
+              <a:t>• Then decide what to do</a:t>
+            </a:r>
+          </a:p>
+        </p:txBody>
+      </p:sp>
+    </p:spTree>
+  </p:cSld>
+  <p:clrMapOvr>
+    <a:masterClrMapping/>
+  </p:clrMapOvr>
+</p:sld>
+</file>
+
+<file path=ppt/slides/slide33.xml><?xml version="1.0" encoding="utf-8"?>
+<p:sld xmlns:a="http://schemas.openxmlformats.org/drawingml/2006/main" xmlns:p="http://schemas.openxmlformats.org/presentationml/2006/main" xmlns:r="http://schemas.openxmlformats.org/officeDocument/2006/relationships">
+  <p:cSld>
+    <p:bg>
+      <p:bgPr>
+        <a:solidFill>
+          <a:srgbClr val="102127"/>
+        </a:solidFill>
+        <a:effectLst/>
+      </p:bgPr>
+    </p:bg>
+    <p:spTree>
+      <p:nvGrpSpPr>
+        <p:cNvPr id="1" name=""/>
+        <p:cNvGrpSpPr/>
+        <p:nvPr/>
+      </p:nvGrpSpPr>
+      <p:grpSpPr/>
+      <p:sp>
+        <p:nvSpPr>
+          <p:cNvPr id="2" name="TextBox 1"/>
+          <p:cNvSpPr txBox="1"/>
+          <p:nvPr/>
+        </p:nvSpPr>
+        <p:spPr>
+          <a:xfrm>
+            <a:off x="502920" y="274320"/>
+            <a:ext cx="11155680" cy="548640"/>
+          </a:xfrm>
+          <a:prstGeom prst="rect">
+            <a:avLst/>
+          </a:prstGeom>
+          <a:noFill/>
+        </p:spPr>
+        <p:txBody>
+          <a:bodyPr wrap="none">
+            <a:spAutoFit/>
+          </a:bodyPr>
+          <a:lstStyle/>
+          <a:p>
+            <a:r>
+              <a:rPr sz="2200" b="1">
+                <a:solidFill>
+                  <a:srgbClr val="01AEFD"/>
+                </a:solidFill>
+              </a:rPr>
+              <a:t>Type this into script.js   -   line 80</a:t>
+            </a:r>
+          </a:p>
+        </p:txBody>
+      </p:sp>
+      <p:sp>
+        <p:nvSpPr>
+          <p:cNvPr id="3" name="TextBox 2"/>
+          <p:cNvSpPr txBox="1"/>
+          <p:nvPr/>
+        </p:nvSpPr>
+        <p:spPr>
+          <a:xfrm>
+            <a:off x="502920" y="960120"/>
+            <a:ext cx="11155680" cy="4297680"/>
+          </a:xfrm>
+          <a:prstGeom prst="rect">
+            <a:avLst/>
+          </a:prstGeom>
+          <a:noFill/>
+        </p:spPr>
+        <p:txBody>
+          <a:bodyPr wrap="none">
+            <a:spAutoFit/>
+          </a:bodyPr>
+          <a:lstStyle/>
+          <a:p>
+            <a:pPr>
+              <a:spcAft>
+                <a:spcPts val="0"/>
+              </a:spcAft>
+            </a:pPr>
+            <a:r>
+              <a:rPr sz="1800">
+                <a:solidFill>
+                  <a:srgbClr val="6D8C97"/>
+                </a:solidFill>
+                <a:latin typeface="Consolas"/>
+              </a:rPr>
+              <a:t>  76  </a:t>
+            </a:r>
+            <a:r>
+              <a:rPr sz="1800">
+                <a:solidFill>
+                  <a:srgbClr val="6D8C97"/>
+                </a:solidFill>
+                <a:latin typeface="Consolas"/>
+              </a:rPr>
+              <a:t> </a:t>
+            </a:r>
+          </a:p>
+          <a:p>
+            <a:pPr>
+              <a:spcAft>
+                <a:spcPts val="0"/>
+              </a:spcAft>
+            </a:pPr>
+            <a:r>
+              <a:rPr sz="1800">
+                <a:solidFill>
+                  <a:srgbClr val="6D8C97"/>
+                </a:solidFill>
+                <a:latin typeface="Consolas"/>
+              </a:rPr>
+              <a:t>  77  </a:t>
+            </a:r>
+            <a:r>
+              <a:rPr sz="1800">
+                <a:solidFill>
+                  <a:srgbClr val="6D8C97"/>
+                </a:solidFill>
+                <a:latin typeface="Consolas"/>
+              </a:rPr>
+              <a:t>// Week 4: ask the AI a real question.</a:t>
+            </a:r>
+          </a:p>
+          <a:p>
+            <a:pPr>
+              <a:spcAft>
+                <a:spcPts val="0"/>
+              </a:spcAft>
+            </a:pPr>
+            <a:r>
+              <a:rPr sz="1800">
+                <a:solidFill>
+                  <a:srgbClr val="6D8C97"/>
+                </a:solidFill>
+                <a:latin typeface="Consolas"/>
+              </a:rPr>
+              <a:t>  78  </a:t>
+            </a:r>
+            <a:r>
+              <a:rPr sz="1800">
+                <a:solidFill>
+                  <a:srgbClr val="6D8C97"/>
+                </a:solidFill>
+                <a:latin typeface="Consolas"/>
+              </a:rPr>
+              <a:t>// A chat request is a LIST of messages. Each one says who said it.</a:t>
+            </a:r>
+          </a:p>
+          <a:p>
+            <a:pPr>
+              <a:spcAft>
+                <a:spcPts val="0"/>
+              </a:spcAft>
+            </a:pPr>
+            <a:r>
+              <a:rPr sz="1800">
+                <a:solidFill>
+                  <a:srgbClr val="6D8C97"/>
+                </a:solidFill>
+                <a:latin typeface="Consolas"/>
+              </a:rPr>
+              <a:t>  79  </a:t>
+            </a:r>
+            <a:r>
+              <a:rPr sz="1800">
+                <a:solidFill>
+                  <a:srgbClr val="6D8C97"/>
+                </a:solidFill>
+                <a:latin typeface="Consolas"/>
+              </a:rPr>
+              <a:t>async function askAI() {</a:t>
+            </a:r>
+          </a:p>
+          <a:p>
+            <a:pPr>
+              <a:spcAft>
+                <a:spcPts val="0"/>
+              </a:spcAft>
+            </a:pPr>
+            <a:r>
+              <a:rPr sz="1800">
+                <a:solidFill>
+                  <a:srgbClr val="6D8C97"/>
+                </a:solidFill>
+                <a:latin typeface="Consolas"/>
+              </a:rPr>
+              <a:t>  80  </a:t>
+            </a:r>
+            <a:r>
+              <a:rPr sz="1800">
+                <a:solidFill>
+                  <a:srgbClr val="7FE0A0"/>
+                </a:solidFill>
+                <a:latin typeface="Consolas"/>
+              </a:rPr>
+              <a:t>  trimHistory();   // week 8: never send more than the server will read</a:t>
+            </a:r>
+          </a:p>
+        </p:txBody>
+      </p:sp>
+      <p:sp>
+        <p:nvSpPr>
+          <p:cNvPr id="4" name="TextBox 3"/>
+          <p:cNvSpPr txBox="1"/>
+          <p:nvPr/>
+        </p:nvSpPr>
+        <p:spPr>
+          <a:xfrm>
+            <a:off x="548640" y="5623560"/>
+            <a:ext cx="11064240" cy="1051560"/>
+          </a:xfrm>
+          <a:prstGeom prst="rect">
+            <a:avLst/>
+          </a:prstGeom>
+          <a:noFill/>
+        </p:spPr>
+        <p:txBody>
+          <a:bodyPr wrap="square">
+            <a:spAutoFit/>
+          </a:bodyPr>
+          <a:lstStyle/>
+          <a:p>
+            <a:r>
+              <a:rPr sz="2000">
+                <a:solidFill>
+                  <a:srgbClr val="DCECEF"/>
+                </a:solidFill>
+              </a:rPr>
+              <a:t>Before sending, call trimHistory() to drop old messages if the conversation has grown too long.</a:t>
+            </a:r>
+          </a:p>
+        </p:txBody>
+      </p:sp>
+    </p:spTree>
+  </p:cSld>
+  <p:clrMapOvr>
+    <a:masterClrMapping/>
+  </p:clrMapOvr>
+</p:sld>
+</file>
+
+<file path=ppt/slides/slide34.xml><?xml version="1.0" encoding="utf-8"?>
+<p:sld xmlns:a="http://schemas.openxmlformats.org/drawingml/2006/main" xmlns:p="http://schemas.openxmlformats.org/presentationml/2006/main" xmlns:r="http://schemas.openxmlformats.org/officeDocument/2006/relationships">
+  <p:cSld>
+    <p:spTree>
+      <p:nvGrpSpPr>
+        <p:cNvPr id="1" name=""/>
+        <p:cNvGrpSpPr/>
+        <p:nvPr/>
+      </p:nvGrpSpPr>
+      <p:grpSpPr/>
+      <p:sp>
+        <p:nvSpPr>
+          <p:cNvPr id="2" name="Title 1"/>
+          <p:cNvSpPr>
+            <a:spLocks noGrp="1"/>
+          </p:cNvSpPr>
+          <p:nvPr>
+            <p:ph type="title"/>
+          </p:nvPr>
+        </p:nvSpPr>
+        <p:spPr/>
+        <p:txBody>
+          <a:bodyPr/>
+          <a:lstStyle/>
+          <a:p>
+            <a:r>
+              <a:rPr sz="3800" b="1">
+                <a:solidFill>
+                  <a:srgbClr val="1F2A37"/>
+                </a:solidFill>
+              </a:rPr>
+              <a:t>Checkpoint: it forgets on purpose</a:t>
+            </a:r>
+          </a:p>
+        </p:txBody>
+      </p:sp>
+      <p:sp>
+        <p:nvSpPr>
+          <p:cNvPr id="3" name="TextBox 2"/>
+          <p:cNvSpPr txBox="1"/>
+          <p:nvPr/>
+        </p:nvSpPr>
+        <p:spPr>
+          <a:xfrm>
+            <a:off x="868680" y="502920"/>
+            <a:ext cx="5486400" cy="457200"/>
+          </a:xfrm>
+          <a:prstGeom prst="rect">
+            <a:avLst/>
+          </a:prstGeom>
+          <a:noFill/>
+        </p:spPr>
+        <p:txBody>
+          <a:bodyPr wrap="none">
+            <a:spAutoFit/>
+          </a:bodyPr>
+          <a:lstStyle/>
+          <a:p>
+            <a:r>
+              <a:rPr sz="1500" b="1">
+                <a:solidFill>
+                  <a:srgbClr val="01AEFD"/>
+                </a:solidFill>
+              </a:rPr>
+              <a:t>CHECKPOINT - RUN IT</a:t>
+            </a:r>
+          </a:p>
+        </p:txBody>
+      </p:sp>
+      <p:sp>
+        <p:nvSpPr>
+          <p:cNvPr id="4" name="TextBox 3"/>
+          <p:cNvSpPr txBox="1"/>
+          <p:nvPr/>
+        </p:nvSpPr>
+        <p:spPr>
+          <a:xfrm>
+            <a:off x="822960" y="1828800"/>
+            <a:ext cx="10515600" cy="4206240"/>
+          </a:xfrm>
+          <a:prstGeom prst="rect">
+            <a:avLst/>
+          </a:prstGeom>
+          <a:noFill/>
+        </p:spPr>
+        <p:txBody>
+          <a:bodyPr wrap="square">
+            <a:spAutoFit/>
+          </a:bodyPr>
+          <a:lstStyle/>
+          <a:p>
+            <a:pPr>
+              <a:spcAft>
+                <a:spcPts val="1400"/>
+              </a:spcAft>
+            </a:pPr>
+            <a:r>
+              <a:rPr sz="2800">
+                <a:solidFill>
+                  <a:srgbClr val="01AEFD"/>
+                </a:solidFill>
+              </a:rPr>
+              <a:t>Press Run and open the console. Send several long messages. Watch 'Forgot an old message...' appear as the oldest lines are dropped to stay under the limit - the chat keeps working instead of failing.</a:t>
+            </a:r>
+          </a:p>
+          <a:p>
+            <a:pPr>
+              <a:spcAft>
+                <a:spcPts val="1400"/>
+              </a:spcAft>
+            </a:pPr>
+            <a:r>
+              <a:rPr sz="2400">
+                <a:solidFill>
+                  <a:srgbClr val="1F2A37"/>
+                </a:solidFill>
+              </a:rPr>
+              <a:t>• Run it in the classroom, or press Show the output in the web deck.</a:t>
+            </a:r>
+          </a:p>
+          <a:p>
+            <a:pPr>
+              <a:spcAft>
+                <a:spcPts val="1400"/>
+              </a:spcAft>
+            </a:pPr>
+            <a:r>
+              <a:rPr sz="2400">
+                <a:solidFill>
+                  <a:srgbClr val="1F2A37"/>
+                </a:solidFill>
+              </a:rPr>
+              <a:t>• Everyone's screen should match this.</a:t>
+            </a:r>
+          </a:p>
+        </p:txBody>
+      </p:sp>
+    </p:spTree>
+  </p:cSld>
+  <p:clrMapOvr>
+    <a:masterClrMapping/>
+  </p:clrMapOvr>
+</p:sld>
+</file>
+
+<file path=ppt/slides/slide35.xml><?xml version="1.0" encoding="utf-8"?>
+<p:sld xmlns:a="http://schemas.openxmlformats.org/drawingml/2006/main" xmlns:p="http://schemas.openxmlformats.org/presentationml/2006/main" xmlns:r="http://schemas.openxmlformats.org/officeDocument/2006/relationships">
+  <p:cSld>
+    <p:spTree>
+      <p:nvGrpSpPr>
+        <p:cNvPr id="1" name=""/>
+        <p:cNvGrpSpPr/>
+        <p:nvPr/>
+      </p:nvGrpSpPr>
+      <p:grpSpPr/>
+      <p:sp>
+        <p:nvSpPr>
+          <p:cNvPr id="2" name="Title 1"/>
+          <p:cNvSpPr>
+            <a:spLocks noGrp="1"/>
+          </p:cNvSpPr>
+          <p:nvPr>
+            <p:ph type="title"/>
+          </p:nvPr>
+        </p:nvSpPr>
+        <p:spPr/>
+        <p:txBody>
+          <a:bodyPr/>
+          <a:lstStyle/>
+          <a:p>
+            <a:r>
+              <a:rPr sz="3800" b="1">
+                <a:solidFill>
+                  <a:srgbClr val="1F2A37"/>
+                </a:solidFill>
+              </a:rPr>
+              <a:t>Watch it forget</a:t>
+            </a:r>
+          </a:p>
+        </p:txBody>
+      </p:sp>
+      <p:sp>
+        <p:nvSpPr>
+          <p:cNvPr id="3" name="TextBox 2"/>
+          <p:cNvSpPr txBox="1"/>
+          <p:nvPr/>
+        </p:nvSpPr>
+        <p:spPr>
+          <a:xfrm>
+            <a:off x="822960" y="1828800"/>
+            <a:ext cx="10515600" cy="4206240"/>
+          </a:xfrm>
+          <a:prstGeom prst="rect">
+            <a:avLst/>
+          </a:prstGeom>
+          <a:noFill/>
+        </p:spPr>
+        <p:txBody>
+          <a:bodyPr wrap="square">
+            <a:spAutoFit/>
+          </a:bodyPr>
+          <a:lstStyle/>
+          <a:p>
+            <a:pPr>
+              <a:spcAft>
+                <a:spcPts val="1400"/>
+              </a:spcAft>
+            </a:pPr>
+            <a:r>
+              <a:rPr sz="2400">
+                <a:solidFill>
+                  <a:srgbClr val="1F2A37"/>
+                </a:solidFill>
+              </a:rPr>
+              <a:t>• Chat until the Console says it forgot</a:t>
+            </a:r>
+          </a:p>
+          <a:p>
+            <a:pPr>
+              <a:spcAft>
+                <a:spcPts val="1400"/>
+              </a:spcAft>
+            </a:pPr>
+            <a:r>
+              <a:rPr sz="2400">
+                <a:solidFill>
+                  <a:srgbClr val="1F2A37"/>
+                </a:solidFill>
+              </a:rPr>
+              <a:t>• Ask about the beginning</a:t>
+            </a:r>
+          </a:p>
+          <a:p>
+            <a:pPr>
+              <a:spcAft>
+                <a:spcPts val="1400"/>
+              </a:spcAft>
+            </a:pPr>
+            <a:r>
+              <a:rPr sz="2400">
+                <a:solidFill>
+                  <a:srgbClr val="1F2A37"/>
+                </a:solidFill>
+              </a:rPr>
+              <a:t>• It genuinely does not know</a:t>
             </a:r>
           </a:p>
         </p:txBody>
